--- a/decks/agent-fidelity-spectrum.pptx
+++ b/decks/agent-fidelity-spectrum.pptx
@@ -4168,7 +4168,7 @@
               </a:defRPr>
             </a:pPr>
             <a:r>
-              <a:t>Findings from 380 Test Runs Across 19 Agent Configurations</a:t>
+              <a:t>Findings from 462 Test Runs Across 21 Agent Configurations</a:t>
             </a:r>
           </a:p>
         </p:txBody>
@@ -4505,7 +4505,7 @@
               </a:defRPr>
             </a:pPr>
             <a:r>
-              <a:t>380 test runs  |  19 agents  |  21 slides  |  2 use cases</a:t>
+              <a:t>462 test runs  |  21 agents  |  25 slides  |  2 use cases</a:t>
             </a:r>
           </a:p>
         </p:txBody>
@@ -5307,7 +5307,7 @@
               </a:defRPr>
             </a:pPr>
             <a:r>
-              <a:t>These are not hypothetical. We documented each one across 380 test runs.</a:t>
+              <a:t>These are not hypothetical. We documented each one across 462 test runs.</a:t>
             </a:r>
           </a:p>
         </p:txBody>

--- a/decks/agent-fidelity-spectrum.pptx
+++ b/decks/agent-fidelity-spectrum.pptx
@@ -16848,7 +16848,7 @@
         </p:nvSpPr>
         <p:spPr>
           <a:xfrm>
-            <a:off x="1371600" y="914400"/>
+            <a:off x="1371600" y="548640"/>
             <a:ext cx="9418320" cy="914400"/>
           </a:xfrm>
           <a:prstGeom prst="rect">
@@ -16884,8 +16884,8 @@
         </p:nvSpPr>
         <p:spPr>
           <a:xfrm>
-            <a:off x="1371600" y="2011680"/>
-            <a:ext cx="9418320" cy="731520"/>
+            <a:off x="1371600" y="1463040"/>
+            <a:ext cx="9418320" cy="548640"/>
           </a:xfrm>
           <a:prstGeom prst="rect">
             <a:avLst/>
@@ -16899,7 +16899,7 @@
           <a:lstStyle/>
           <a:p>
             <a:pPr algn="ctr">
-              <a:defRPr sz="2400" b="0">
+              <a:defRPr sz="2200" b="0">
                 <a:solidFill>
                   <a:srgbClr val="A0C4E8"/>
                 </a:solidFill>
@@ -16907,11 +16907,7 @@
               </a:defRPr>
             </a:pPr>
             <a:r>
-              <a:t>"Let me show you the difference</a:t>
-            </a:r>
-            <a:br/>
-            <a:r>
-              <a:t>between Level 2 and Level 4."</a:t>
+              <a:t>"Same agent. Change one variable. Watch the result change."</a:t>
             </a:r>
           </a:p>
         </p:txBody>
@@ -16924,8 +16920,8 @@
         </p:nvSpPr>
         <p:spPr>
           <a:xfrm>
-            <a:off x="2286000" y="3200400"/>
-            <a:ext cx="1371600" cy="457200"/>
+            <a:off x="914400" y="2286000"/>
+            <a:ext cx="5029200" cy="457200"/>
           </a:xfrm>
           <a:prstGeom prst="rect">
             <a:avLst/>
@@ -16938,30 +16934,73 @@
           </a:bodyPr>
           <a:lstStyle/>
           <a:p>
-            <a:pPr algn="r">
-              <a:defRPr sz="1600" b="1">
-                <a:solidFill>
-                  <a:srgbClr val="8BC34A"/>
-                </a:solidFill>
-                <a:latin typeface="Calibri"/>
-              </a:defRPr>
-            </a:pPr>
-            <a:r>
-              <a:t>Level 2:</a:t>
-            </a:r>
-          </a:p>
-        </p:txBody>
-      </p:sp>
-      <p:sp>
-        <p:nvSpPr>
-          <p:cNvPr id="5" name="TextBox 4"/>
+            <a:pPr algn="l">
+              <a:defRPr sz="1800" b="1">
+                <a:solidFill>
+                  <a:srgbClr val="FFFFFF"/>
+                </a:solidFill>
+                <a:latin typeface="Calibri"/>
+              </a:defRPr>
+            </a:pPr>
+            <a:r>
+              <a:t>Part 1: Document Quality  (~10 min)</a:t>
+            </a:r>
+          </a:p>
+        </p:txBody>
+      </p:sp>
+      <p:sp>
+        <p:nvSpPr>
+          <p:cNvPr id="5" name="Rectangle 4"/>
+          <p:cNvSpPr/>
+          <p:nvPr/>
+        </p:nvSpPr>
+        <p:spPr>
+          <a:xfrm>
+            <a:off x="914400" y="2743200"/>
+            <a:ext cx="5029200" cy="36576"/>
+          </a:xfrm>
+          <a:prstGeom prst="rect">
+            <a:avLst/>
+          </a:prstGeom>
+          <a:solidFill>
+            <a:srgbClr val="357ABD"/>
+          </a:solidFill>
+          <a:ln>
+            <a:noFill/>
+          </a:ln>
+        </p:spPr>
+        <p:style>
+          <a:lnRef idx="1">
+            <a:schemeClr val="accent1"/>
+          </a:lnRef>
+          <a:fillRef idx="3">
+            <a:schemeClr val="accent1"/>
+          </a:fillRef>
+          <a:effectRef idx="2">
+            <a:schemeClr val="accent1"/>
+          </a:effectRef>
+          <a:fontRef idx="minor">
+            <a:schemeClr val="lt1"/>
+          </a:fontRef>
+        </p:style>
+        <p:txBody>
+          <a:bodyPr rtlCol="0" anchor="ctr"/>
+          <a:lstStyle/>
+          <a:p>
+            <a:pPr algn="ctr"/>
+          </a:p>
+        </p:txBody>
+      </p:sp>
+      <p:sp>
+        <p:nvSpPr>
+          <p:cNvPr id="6" name="TextBox 5"/>
           <p:cNvSpPr txBox="1"/>
           <p:nvPr/>
         </p:nvSpPr>
         <p:spPr>
           <a:xfrm>
-            <a:off x="3840480" y="3200400"/>
-            <a:ext cx="5029200" cy="457200"/>
+            <a:off x="1188720" y="2926080"/>
+            <a:ext cx="4754880" cy="457200"/>
           </a:xfrm>
           <a:prstGeom prst="rect">
             <a:avLst/>
@@ -16975,29 +17014,29 @@
           <a:lstStyle/>
           <a:p>
             <a:pPr algn="l">
-              <a:defRPr sz="1600" b="0">
-                <a:solidFill>
-                  <a:srgbClr val="FFFFFF"/>
-                </a:solidFill>
-                <a:latin typeface="Calibri"/>
-              </a:defRPr>
-            </a:pPr>
-            <a:r>
-              <a:t>SharePoint document summarization</a:t>
-            </a:r>
-          </a:p>
-        </p:txBody>
-      </p:sp>
-      <p:sp>
-        <p:nvSpPr>
-          <p:cNvPr id="6" name="TextBox 5"/>
+              <a:defRPr sz="1400" b="0">
+                <a:solidFill>
+                  <a:srgbClr val="CCDDEE"/>
+                </a:solidFill>
+                <a:latin typeface="Calibri"/>
+              </a:defRPr>
+            </a:pPr>
+            <a:r>
+              <a:t>3 agents, same model, 3 SharePoint libraries</a:t>
+            </a:r>
+          </a:p>
+        </p:txBody>
+      </p:sp>
+      <p:sp>
+        <p:nvSpPr>
+          <p:cNvPr id="7" name="TextBox 6"/>
           <p:cNvSpPr txBox="1"/>
           <p:nvPr/>
         </p:nvSpPr>
         <p:spPr>
           <a:xfrm>
-            <a:off x="9144000" y="3200400"/>
-            <a:ext cx="1371600" cy="457200"/>
+            <a:off x="1188720" y="3429000"/>
+            <a:ext cx="4754880" cy="457200"/>
           </a:xfrm>
           <a:prstGeom prst="rect">
             <a:avLst/>
@@ -17010,30 +17049,30 @@
           </a:bodyPr>
           <a:lstStyle/>
           <a:p>
-            <a:pPr algn="r">
+            <a:pPr algn="l">
               <a:defRPr sz="1400" b="0">
                 <a:solidFill>
-                  <a:srgbClr val="88AACC"/>
-                </a:solidFill>
-                <a:latin typeface="Calibri"/>
-              </a:defRPr>
-            </a:pPr>
-            <a:r>
-              <a:t>2 min</a:t>
-            </a:r>
-          </a:p>
-        </p:txBody>
-      </p:sp>
-      <p:sp>
-        <p:nvSpPr>
-          <p:cNvPr id="7" name="TextBox 6"/>
+                  <a:srgbClr val="CCDDEE"/>
+                </a:solidFill>
+                <a:latin typeface="Calibri"/>
+              </a:defRPr>
+            </a:pPr>
+            <a:r>
+              <a:t>Raw  -&gt;  Cross-Referenced  -&gt;  Enriched</a:t>
+            </a:r>
+          </a:p>
+        </p:txBody>
+      </p:sp>
+      <p:sp>
+        <p:nvSpPr>
+          <p:cNvPr id="8" name="TextBox 7"/>
           <p:cNvSpPr txBox="1"/>
           <p:nvPr/>
         </p:nvSpPr>
         <p:spPr>
           <a:xfrm>
-            <a:off x="2286000" y="3840480"/>
-            <a:ext cx="1371600" cy="457200"/>
+            <a:off x="1188720" y="3931920"/>
+            <a:ext cx="4754880" cy="457200"/>
           </a:xfrm>
           <a:prstGeom prst="rect">
             <a:avLst/>
@@ -17046,30 +17085,30 @@
           </a:bodyPr>
           <a:lstStyle/>
           <a:p>
-            <a:pPr algn="r">
-              <a:defRPr sz="1600" b="1">
-                <a:solidFill>
-                  <a:srgbClr val="FF9800"/>
-                </a:solidFill>
-                <a:latin typeface="Calibri"/>
-              </a:defRPr>
-            </a:pPr>
-            <a:r>
-              <a:t>Level 3:</a:t>
-            </a:r>
-          </a:p>
-        </p:txBody>
-      </p:sp>
-      <p:sp>
-        <p:nvSpPr>
-          <p:cNvPr id="8" name="TextBox 7"/>
+            <a:pPr algn="l">
+              <a:defRPr sz="1400" b="0">
+                <a:solidFill>
+                  <a:srgbClr val="CCDDEE"/>
+                </a:solidFill>
+                <a:latin typeface="Calibri"/>
+              </a:defRPr>
+            </a:pPr>
+            <a:r>
+              <a:t>Skeletal survey: FAIL -&gt; PASS -&gt; PASS</a:t>
+            </a:r>
+          </a:p>
+        </p:txBody>
+      </p:sp>
+      <p:sp>
+        <p:nvSpPr>
+          <p:cNvPr id="9" name="TextBox 8"/>
           <p:cNvSpPr txBox="1"/>
           <p:nvPr/>
         </p:nvSpPr>
         <p:spPr>
           <a:xfrm>
-            <a:off x="3840480" y="3840480"/>
-            <a:ext cx="5029200" cy="457200"/>
+            <a:off x="1188720" y="4434840"/>
+            <a:ext cx="4754880" cy="457200"/>
           </a:xfrm>
           <a:prstGeom prst="rect">
             <a:avLst/>
@@ -17083,29 +17122,29 @@
           <a:lstStyle/>
           <a:p>
             <a:pPr algn="l">
-              <a:defRPr sz="1600" b="0">
-                <a:solidFill>
-                  <a:srgbClr val="FFFFFF"/>
-                </a:solidFill>
-                <a:latin typeface="Calibri"/>
-              </a:defRPr>
-            </a:pPr>
-            <a:r>
-              <a:t>"How many cases by type?" aggregate query</a:t>
-            </a:r>
-          </a:p>
-        </p:txBody>
-      </p:sp>
-      <p:sp>
-        <p:nvSpPr>
-          <p:cNvPr id="9" name="TextBox 8"/>
+              <a:defRPr sz="1400" b="0">
+                <a:solidFill>
+                  <a:srgbClr val="CCDDEE"/>
+                </a:solidFill>
+                <a:latin typeface="Calibri"/>
+              </a:defRPr>
+            </a:pPr>
+            <a:r>
+              <a:t>Marcus Webb: FAIL -&gt; PARTIAL -&gt; PASS</a:t>
+            </a:r>
+          </a:p>
+        </p:txBody>
+      </p:sp>
+      <p:sp>
+        <p:nvSpPr>
+          <p:cNvPr id="10" name="TextBox 9"/>
           <p:cNvSpPr txBox="1"/>
           <p:nvPr/>
         </p:nvSpPr>
         <p:spPr>
           <a:xfrm>
-            <a:off x="9144000" y="3840480"/>
-            <a:ext cx="1371600" cy="457200"/>
+            <a:off x="1188720" y="4937760"/>
+            <a:ext cx="4754880" cy="457200"/>
           </a:xfrm>
           <a:prstGeom prst="rect">
             <a:avLst/>
@@ -17118,30 +17157,30 @@
           </a:bodyPr>
           <a:lstStyle/>
           <a:p>
-            <a:pPr algn="r">
+            <a:pPr algn="l">
               <a:defRPr sz="1400" b="0">
                 <a:solidFill>
-                  <a:srgbClr val="88AACC"/>
-                </a:solidFill>
-                <a:latin typeface="Calibri"/>
-              </a:defRPr>
-            </a:pPr>
-            <a:r>
-              <a:t>2 min</a:t>
-            </a:r>
-          </a:p>
-        </p:txBody>
-      </p:sp>
-      <p:sp>
-        <p:nvSpPr>
-          <p:cNvPr id="10" name="TextBox 9"/>
+                  <a:srgbClr val="CCDDEE"/>
+                </a:solidFill>
+                <a:latin typeface="Calibri"/>
+              </a:defRPr>
+            </a:pPr>
+            <a:r>
+              <a:t>Score arc: 3/10 -&gt; 7/10 -&gt; 8/10</a:t>
+            </a:r>
+          </a:p>
+        </p:txBody>
+      </p:sp>
+      <p:sp>
+        <p:nvSpPr>
+          <p:cNvPr id="11" name="TextBox 10"/>
           <p:cNvSpPr txBox="1"/>
           <p:nvPr/>
         </p:nvSpPr>
         <p:spPr>
           <a:xfrm>
-            <a:off x="2286000" y="4480560"/>
-            <a:ext cx="1371600" cy="457200"/>
+            <a:off x="1188720" y="5440680"/>
+            <a:ext cx="4754880" cy="457200"/>
           </a:xfrm>
           <a:prstGeom prst="rect">
             <a:avLst/>
@@ -17154,29 +17193,29 @@
           </a:bodyPr>
           <a:lstStyle/>
           <a:p>
-            <a:pPr algn="r">
-              <a:defRPr sz="1600" b="1">
-                <a:solidFill>
-                  <a:srgbClr val="F4511E"/>
-                </a:solidFill>
-                <a:latin typeface="Calibri"/>
-              </a:defRPr>
-            </a:pPr>
-            <a:r>
-              <a:t>Level 4:</a:t>
-            </a:r>
-          </a:p>
-        </p:txBody>
-      </p:sp>
-      <p:sp>
-        <p:nvSpPr>
-          <p:cNvPr id="11" name="TextBox 10"/>
+            <a:pPr algn="l">
+              <a:defRPr sz="1400" b="0">
+                <a:solidFill>
+                  <a:srgbClr val="CCDDEE"/>
+                </a:solidFill>
+                <a:latin typeface="Calibri"/>
+              </a:defRPr>
+            </a:pPr>
+            <a:r>
+              <a:t>Cost: $0, 45 minutes of document hygiene</a:t>
+            </a:r>
+          </a:p>
+        </p:txBody>
+      </p:sp>
+      <p:sp>
+        <p:nvSpPr>
+          <p:cNvPr id="12" name="TextBox 11"/>
           <p:cNvSpPr txBox="1"/>
           <p:nvPr/>
         </p:nvSpPr>
         <p:spPr>
           <a:xfrm>
-            <a:off x="3840480" y="4480560"/>
+            <a:off x="6400800" y="2286000"/>
             <a:ext cx="5029200" cy="457200"/>
           </a:xfrm>
           <a:prstGeom prst="rect">
@@ -17191,7 +17230,7 @@
           <a:lstStyle/>
           <a:p>
             <a:pPr algn="l">
-              <a:defRPr sz="1600" b="0">
+              <a:defRPr sz="1800" b="1">
                 <a:solidFill>
                   <a:srgbClr val="FFFFFF"/>
                 </a:solidFill>
@@ -17199,21 +17238,64 @@
               </a:defRPr>
             </a:pPr>
             <a:r>
-              <a:t>The money prompt -- timeline, discrepancies, statements</a:t>
-            </a:r>
-          </a:p>
-        </p:txBody>
-      </p:sp>
-      <p:sp>
-        <p:nvSpPr>
-          <p:cNvPr id="12" name="TextBox 11"/>
+              <a:t>Part 2: Model Selection  (~8 min)</a:t>
+            </a:r>
+          </a:p>
+        </p:txBody>
+      </p:sp>
+      <p:sp>
+        <p:nvSpPr>
+          <p:cNvPr id="13" name="Rectangle 12"/>
+          <p:cNvSpPr/>
+          <p:nvPr/>
+        </p:nvSpPr>
+        <p:spPr>
+          <a:xfrm>
+            <a:off x="6400800" y="2743200"/>
+            <a:ext cx="5029200" cy="36576"/>
+          </a:xfrm>
+          <a:prstGeom prst="rect">
+            <a:avLst/>
+          </a:prstGeom>
+          <a:solidFill>
+            <a:srgbClr val="357ABD"/>
+          </a:solidFill>
+          <a:ln>
+            <a:noFill/>
+          </a:ln>
+        </p:spPr>
+        <p:style>
+          <a:lnRef idx="1">
+            <a:schemeClr val="accent1"/>
+          </a:lnRef>
+          <a:fillRef idx="3">
+            <a:schemeClr val="accent1"/>
+          </a:fillRef>
+          <a:effectRef idx="2">
+            <a:schemeClr val="accent1"/>
+          </a:effectRef>
+          <a:fontRef idx="minor">
+            <a:schemeClr val="lt1"/>
+          </a:fontRef>
+        </p:style>
+        <p:txBody>
+          <a:bodyPr rtlCol="0" anchor="ctr"/>
+          <a:lstStyle/>
+          <a:p>
+            <a:pPr algn="ctr"/>
+          </a:p>
+        </p:txBody>
+      </p:sp>
+      <p:sp>
+        <p:nvSpPr>
+          <p:cNvPr id="14" name="TextBox 13"/>
           <p:cNvSpPr txBox="1"/>
           <p:nvPr/>
         </p:nvSpPr>
         <p:spPr>
           <a:xfrm>
-            <a:off x="9144000" y="4480560"/>
-            <a:ext cx="1371600" cy="457200"/>
+            <a:off x="6675120" y="2926080"/>
+            <a:ext cx="4754880" cy="457200"/>
           </a:xfrm>
           <a:prstGeom prst="rect">
             <a:avLst/>
@@ -17226,30 +17308,30 @@
           </a:bodyPr>
           <a:lstStyle/>
           <a:p>
-            <a:pPr algn="r">
+            <a:pPr algn="l">
               <a:defRPr sz="1400" b="0">
                 <a:solidFill>
-                  <a:srgbClr val="88AACC"/>
-                </a:solidFill>
-                <a:latin typeface="Calibri"/>
-              </a:defRPr>
-            </a:pPr>
-            <a:r>
-              <a:t>5 min</a:t>
-            </a:r>
-          </a:p>
-        </p:txBody>
-      </p:sp>
-      <p:sp>
-        <p:nvSpPr>
-          <p:cNvPr id="13" name="TextBox 12"/>
+                  <a:srgbClr val="CCDDEE"/>
+                </a:solidFill>
+                <a:latin typeface="Calibri"/>
+              </a:defRPr>
+            </a:pPr>
+            <a:r>
+              <a:t>1 Dataverse MCP agent, swap model live</a:t>
+            </a:r>
+          </a:p>
+        </p:txBody>
+      </p:sp>
+      <p:sp>
+        <p:nvSpPr>
+          <p:cNvPr id="15" name="TextBox 14"/>
           <p:cNvSpPr txBox="1"/>
           <p:nvPr/>
         </p:nvSpPr>
         <p:spPr>
           <a:xfrm>
-            <a:off x="2286000" y="5120640"/>
-            <a:ext cx="1371600" cy="457200"/>
+            <a:off x="6675120" y="3429000"/>
+            <a:ext cx="4754880" cy="457200"/>
           </a:xfrm>
           <a:prstGeom prst="rect">
             <a:avLst/>
@@ -17262,30 +17344,30 @@
           </a:bodyPr>
           <a:lstStyle/>
           <a:p>
-            <a:pPr algn="r">
-              <a:defRPr sz="1600" b="1">
-                <a:solidFill>
-                  <a:srgbClr val="E53935"/>
-                </a:solidFill>
-                <a:latin typeface="Calibri"/>
-              </a:defRPr>
-            </a:pPr>
-            <a:r>
-              <a:t>Level 5:</a:t>
-            </a:r>
-          </a:p>
-        </p:txBody>
-      </p:sp>
-      <p:sp>
-        <p:nvSpPr>
-          <p:cNvPr id="14" name="TextBox 13"/>
+            <a:pPr algn="l">
+              <a:defRPr sz="1400" b="0">
+                <a:solidFill>
+                  <a:srgbClr val="CCDDEE"/>
+                </a:solidFill>
+                <a:latin typeface="Calibri"/>
+              </a:defRPr>
+            </a:pPr>
+            <a:r>
+              <a:t>GPT-4o  -&gt;  Sonnet 4.6</a:t>
+            </a:r>
+          </a:p>
+        </p:txBody>
+      </p:sp>
+      <p:sp>
+        <p:nvSpPr>
+          <p:cNvPr id="16" name="TextBox 15"/>
           <p:cNvSpPr txBox="1"/>
           <p:nvPr/>
         </p:nvSpPr>
         <p:spPr>
           <a:xfrm>
-            <a:off x="3840480" y="5120640"/>
-            <a:ext cx="5029200" cy="457200"/>
+            <a:off x="6675120" y="3931920"/>
+            <a:ext cx="4754880" cy="457200"/>
           </a:xfrm>
           <a:prstGeom prst="rect">
             <a:avLst/>
@@ -17299,29 +17381,29 @@
           <a:lstStyle/>
           <a:p>
             <a:pPr algn="l">
-              <a:defRPr sz="1600" b="0">
-                <a:solidFill>
-                  <a:srgbClr val="FFFFFF"/>
-                </a:solidFill>
-                <a:latin typeface="Calibri"/>
-              </a:defRPr>
-            </a:pPr>
-            <a:r>
-              <a:t>The skeletal survey question</a:t>
-            </a:r>
-          </a:p>
-        </p:txBody>
-      </p:sp>
-      <p:sp>
-        <p:nvSpPr>
-          <p:cNvPr id="15" name="TextBox 14"/>
+              <a:defRPr sz="1400" b="0">
+                <a:solidFill>
+                  <a:srgbClr val="CCDDEE"/>
+                </a:solidFill>
+                <a:latin typeface="Calibri"/>
+              </a:defRPr>
+            </a:pPr>
+            <a:r>
+              <a:t>TPR case filter: 0 -&gt; 10</a:t>
+            </a:r>
+          </a:p>
+        </p:txBody>
+      </p:sp>
+      <p:sp>
+        <p:nvSpPr>
+          <p:cNvPr id="17" name="TextBox 16"/>
           <p:cNvSpPr txBox="1"/>
           <p:nvPr/>
         </p:nvSpPr>
         <p:spPr>
           <a:xfrm>
-            <a:off x="9144000" y="5120640"/>
-            <a:ext cx="1371600" cy="457200"/>
+            <a:off x="6675120" y="4434840"/>
+            <a:ext cx="4754880" cy="457200"/>
           </a:xfrm>
           <a:prstGeom prst="rect">
             <a:avLst/>
@@ -17334,16 +17416,124 @@
           </a:bodyPr>
           <a:lstStyle/>
           <a:p>
-            <a:pPr algn="r">
+            <a:pPr algn="l">
               <a:defRPr sz="1400" b="0">
                 <a:solidFill>
+                  <a:srgbClr val="CCDDEE"/>
+                </a:solidFill>
+                <a:latin typeface="Calibri"/>
+              </a:defRPr>
+            </a:pPr>
+            <a:r>
+              <a:t>Cross-doc reasoning: 0 -&gt; 10</a:t>
+            </a:r>
+          </a:p>
+        </p:txBody>
+      </p:sp>
+      <p:sp>
+        <p:nvSpPr>
+          <p:cNvPr id="18" name="TextBox 17"/>
+          <p:cNvSpPr txBox="1"/>
+          <p:nvPr/>
+        </p:nvSpPr>
+        <p:spPr>
+          <a:xfrm>
+            <a:off x="6675120" y="4937760"/>
+            <a:ext cx="4754880" cy="457200"/>
+          </a:xfrm>
+          <a:prstGeom prst="rect">
+            <a:avLst/>
+          </a:prstGeom>
+          <a:noFill/>
+        </p:spPr>
+        <p:txBody>
+          <a:bodyPr wrap="square">
+            <a:spAutoFit/>
+          </a:bodyPr>
+          <a:lstStyle/>
+          <a:p>
+            <a:pPr algn="l">
+              <a:defRPr sz="1400" b="0">
+                <a:solidFill>
+                  <a:srgbClr val="CCDDEE"/>
+                </a:solidFill>
+                <a:latin typeface="Calibri"/>
+              </a:defRPr>
+            </a:pPr>
+            <a:r>
+              <a:t>Time gap calculation: 0 -&gt; 10</a:t>
+            </a:r>
+          </a:p>
+        </p:txBody>
+      </p:sp>
+      <p:sp>
+        <p:nvSpPr>
+          <p:cNvPr id="19" name="TextBox 18"/>
+          <p:cNvSpPr txBox="1"/>
+          <p:nvPr/>
+        </p:nvSpPr>
+        <p:spPr>
+          <a:xfrm>
+            <a:off x="6675120" y="5440680"/>
+            <a:ext cx="4754880" cy="457200"/>
+          </a:xfrm>
+          <a:prstGeom prst="rect">
+            <a:avLst/>
+          </a:prstGeom>
+          <a:noFill/>
+        </p:spPr>
+        <p:txBody>
+          <a:bodyPr wrap="square">
+            <a:spAutoFit/>
+          </a:bodyPr>
+          <a:lstStyle/>
+          <a:p>
+            <a:pPr algn="l">
+              <a:defRPr sz="1400" b="0">
+                <a:solidFill>
+                  <a:srgbClr val="CCDDEE"/>
+                </a:solidFill>
+                <a:latin typeface="Calibri"/>
+              </a:defRPr>
+            </a:pPr>
+            <a:r>
+              <a:t>Full battery: 1/11 -&gt; 6/11 -&gt; 11/11</a:t>
+            </a:r>
+          </a:p>
+        </p:txBody>
+      </p:sp>
+      <p:sp>
+        <p:nvSpPr>
+          <p:cNvPr id="20" name="TextBox 19"/>
+          <p:cNvSpPr txBox="1"/>
+          <p:nvPr/>
+        </p:nvSpPr>
+        <p:spPr>
+          <a:xfrm>
+            <a:off x="1371600" y="5943600"/>
+            <a:ext cx="9418320" cy="457200"/>
+          </a:xfrm>
+          <a:prstGeom prst="rect">
+            <a:avLst/>
+          </a:prstGeom>
+          <a:noFill/>
+        </p:spPr>
+        <p:txBody>
+          <a:bodyPr wrap="square">
+            <a:spAutoFit/>
+          </a:bodyPr>
+          <a:lstStyle/>
+          <a:p>
+            <a:pPr algn="ctr">
+              <a:defRPr sz="1400" b="1">
+                <a:solidFill>
                   <a:srgbClr val="88AACC"/>
                 </a:solidFill>
                 <a:latin typeface="Calibri"/>
               </a:defRPr>
             </a:pPr>
             <a:r>
-              <a:t>3 min</a:t>
+              <a:t>All demos run in Copilot Studio -- no custom code UI</a:t>
             </a:r>
           </a:p>
         </p:txBody>

--- a/decks/agent-fidelity-spectrum.pptx
+++ b/decks/agent-fidelity-spectrum.pptx
@@ -31,6 +31,7 @@
     <p:sldId id="279" r:id="rId31"/>
     <p:sldId id="280" r:id="rId32"/>
     <p:sldId id="281" r:id="rId33"/>
+    <p:sldId id="282" r:id="rId34"/>
   </p:sldIdLst>
   <p:sldSz cx="12191695" cy="6858000" type="screen4x3"/>
   <p:notesSz cx="6858000" cy="9144000"/>
@@ -597,7 +598,7 @@
           <a:lstStyle/>
           <a:p>
             <a:r>
-              <a:t>So what do we do? Do we just give up on agents? No -- you continue to test them and make them better, and you always adhere to trust but verify. I have agents building apps for me right now. If I were building production enterprise apps, I'd have a team of human developers checking the work, helping test, reviewing agentic results. The AI accelerates the team. The team validates the AI.</a:t>
+              <a:t>This is the most relatable prompt in the deck. Everyone understands 'did the parent tell the same story to the nurse and the police?' Raw docs: agent only found the Sheriff Report. Cross-refs: found both sources but couldn't retrieve the nursing notes detail. Metadata: the keywords 'nursing interview' and 'parent statements' on Medical Records told the agent exactly where to look. $0, 45 minutes, no code.</a:t>
             </a:r>
           </a:p>
         </p:txBody>
@@ -623,6 +624,76 @@
 </file>
 
 <file path=ppt/notesSlides/notesSlide11.xml><?xml version="1.0" encoding="utf-8"?>
+<p:notes xmlns:a="http://schemas.openxmlformats.org/drawingml/2006/main" xmlns:p="http://schemas.openxmlformats.org/presentationml/2006/main" xmlns:r="http://schemas.openxmlformats.org/officeDocument/2006/relationships">
+  <p:cSld>
+    <p:spTree>
+      <p:nvGrpSpPr>
+        <p:cNvPr id="1" name=""/>
+        <p:cNvGrpSpPr/>
+        <p:nvPr/>
+      </p:nvGrpSpPr>
+      <p:grpSpPr>
+        <a:xfrm>
+          <a:off x="0" y="0"/>
+          <a:ext cx="0" cy="0"/>
+          <a:chOff x="0" y="0"/>
+          <a:chExt cx="0" cy="0"/>
+        </a:xfrm>
+      </p:grpSpPr>
+      <p:sp>
+        <p:nvSpPr>
+          <p:cNvPr id="2" name="Slide Image Placeholder 1"/>
+          <p:cNvSpPr>
+            <a:spLocks noGrp="1"/>
+          </p:cNvSpPr>
+          <p:nvPr>
+            <p:ph type="sldImg" idx="2"/>
+          </p:nvPr>
+        </p:nvSpPr>
+        <p:spPr/>
+      </p:sp>
+      <p:sp>
+        <p:nvSpPr>
+          <p:cNvPr id="3" name="Notes Placeholder 2"/>
+          <p:cNvSpPr>
+            <a:spLocks noGrp="1"/>
+          </p:cNvSpPr>
+          <p:nvPr>
+            <p:ph type="body" idx="3" sz="quarter"/>
+          </p:nvPr>
+        </p:nvSpPr>
+        <p:spPr/>
+        <p:txBody>
+          <a:bodyPr/>
+          <a:lstStyle/>
+          <a:p>
+            <a:r>
+              <a:t>So what do we do? Do we just give up on agents? No -- you continue to test them and make them better, and you always adhere to trust but verify. I have agents building apps for me right now. If I were building production enterprise apps, I'd have a team of human developers checking the work, helping test, reviewing agentic results. The AI accelerates the team. The team validates the AI.</a:t>
+            </a:r>
+          </a:p>
+        </p:txBody>
+      </p:sp>
+      <p:sp>
+        <p:nvSpPr>
+          <p:cNvPr id="4" name="Slide Number Placeholder 3"/>
+          <p:cNvSpPr>
+            <a:spLocks noGrp="1"/>
+          </p:cNvSpPr>
+          <p:nvPr>
+            <p:ph type="sldNum" idx="5" sz="quarter"/>
+          </p:nvPr>
+        </p:nvSpPr>
+        <p:spPr/>
+      </p:sp>
+    </p:spTree>
+  </p:cSld>
+  <p:clrMapOvr>
+    <a:masterClrMapping/>
+  </p:clrMapOvr>
+</p:notes>
+</file>
+
+<file path=ppt/notesSlides/notesSlide12.xml><?xml version="1.0" encoding="utf-8"?>
 <p:notes xmlns:a="http://schemas.openxmlformats.org/drawingml/2006/main" xmlns:p="http://schemas.openxmlformats.org/presentationml/2006/main" xmlns:r="http://schemas.openxmlformats.org/officeDocument/2006/relationships">
   <p:cSld>
     <p:spTree>
@@ -4419,7 +4490,7 @@
               </a:defRPr>
             </a:pPr>
             <a:r>
-              <a:t>26 Slides  |  March 2026</a:t>
+              <a:t>27 Slides  |  March 2026</a:t>
             </a:r>
           </a:p>
         </p:txBody>
@@ -4720,7 +4791,7 @@
               </a:defRPr>
             </a:pPr>
             <a:r>
-              <a:t>462 test runs  |  21 agents  |  26 slides  |  2 use cases</a:t>
+              <a:t>462 test runs  |  21 agents  |  27 slides  |  2 use cases</a:t>
             </a:r>
           </a:p>
         </p:txBody>
@@ -17587,7 +17658,7 @@
           <a:lstStyle/>
           <a:p>
             <a:pPr algn="l">
-              <a:defRPr sz="2800" b="1">
+              <a:defRPr sz="3200" b="1">
                 <a:solidFill>
                   <a:srgbClr val="1B2A4A"/>
                 </a:solidFill>
@@ -17595,7 +17666,7 @@
               </a:defRPr>
             </a:pPr>
             <a:r>
-              <a:t>Surprising Finding: Agent Challenged Its Own Premise</a:t>
+              <a:t>One Prompt, Three Interventions</a:t>
             </a:r>
           </a:p>
         </p:txBody>
@@ -17645,14 +17716,57 @@
       </p:sp>
       <p:sp>
         <p:nvSpPr>
-          <p:cNvPr id="4" name="TextBox 3"/>
+          <p:cNvPr id="4" name="Rounded Rectangle 3"/>
+          <p:cNvSpPr/>
+          <p:nvPr/>
+        </p:nvSpPr>
+        <p:spPr>
+          <a:xfrm>
+            <a:off x="1097280" y="1234440"/>
+            <a:ext cx="9966960" cy="640080"/>
+          </a:xfrm>
+          <a:prstGeom prst="roundRect">
+            <a:avLst/>
+          </a:prstGeom>
+          <a:solidFill>
+            <a:srgbClr val="F5F5F5"/>
+          </a:solidFill>
+          <a:ln>
+            <a:noFill/>
+          </a:ln>
+        </p:spPr>
+        <p:style>
+          <a:lnRef idx="1">
+            <a:schemeClr val="accent1"/>
+          </a:lnRef>
+          <a:fillRef idx="3">
+            <a:schemeClr val="accent1"/>
+          </a:fillRef>
+          <a:effectRef idx="2">
+            <a:schemeClr val="accent1"/>
+          </a:effectRef>
+          <a:fontRef idx="minor">
+            <a:schemeClr val="lt1"/>
+          </a:fontRef>
+        </p:style>
+        <p:txBody>
+          <a:bodyPr rtlCol="0" anchor="ctr"/>
+          <a:lstStyle/>
+          <a:p>
+            <a:pPr algn="ctr"/>
+          </a:p>
+        </p:txBody>
+      </p:sp>
+      <p:sp>
+        <p:nvSpPr>
+          <p:cNvPr id="5" name="TextBox 4"/>
           <p:cNvSpPr txBox="1"/>
           <p:nvPr/>
         </p:nvSpPr>
         <p:spPr>
           <a:xfrm>
-            <a:off x="1097280" y="1371600"/>
-            <a:ext cx="9966960" cy="457200"/>
+            <a:off x="1371600" y="1280160"/>
+            <a:ext cx="9418320" cy="548640"/>
           </a:xfrm>
           <a:prstGeom prst="rect">
             <a:avLst/>
@@ -17665,30 +17779,116 @@
           </a:bodyPr>
           <a:lstStyle/>
           <a:p>
-            <a:pPr algn="l">
-              <a:defRPr sz="2000" b="1">
-                <a:solidFill>
-                  <a:srgbClr val="2D2D2D"/>
-                </a:solidFill>
-                <a:latin typeface="Calibri"/>
-              </a:defRPr>
-            </a:pPr>
-            <a:r>
-              <a:t>A pro-code agent questioned the question -- and was right</a:t>
-            </a:r>
-          </a:p>
-        </p:txBody>
-      </p:sp>
-      <p:sp>
-        <p:nvSpPr>
-          <p:cNvPr id="5" name="TextBox 4"/>
+            <a:pPr algn="ctr">
+              <a:defRPr sz="1500" b="1">
+                <a:solidFill>
+                  <a:srgbClr val="555555"/>
+                </a:solidFill>
+                <a:latin typeface="Calibri"/>
+              </a:defRPr>
+            </a:pPr>
+            <a:r>
+              <a:t>"What did Marcus Webb tell hospital staff about when he put Jaylen to bed, and did he give the same answer to law enforcement?"</a:t>
+            </a:r>
+          </a:p>
+        </p:txBody>
+      </p:sp>
+      <p:sp>
+        <p:nvSpPr>
+          <p:cNvPr id="6" name="Rounded Rectangle 5"/>
+          <p:cNvSpPr/>
+          <p:nvPr/>
+        </p:nvSpPr>
+        <p:spPr>
+          <a:xfrm>
+            <a:off x="822960" y="2057400"/>
+            <a:ext cx="3383280" cy="3383280"/>
+          </a:xfrm>
+          <a:prstGeom prst="roundRect">
+            <a:avLst/>
+          </a:prstGeom>
+          <a:solidFill>
+            <a:srgbClr val="FFEBEE"/>
+          </a:solidFill>
+          <a:ln>
+            <a:noFill/>
+          </a:ln>
+        </p:spPr>
+        <p:style>
+          <a:lnRef idx="1">
+            <a:schemeClr val="accent1"/>
+          </a:lnRef>
+          <a:fillRef idx="3">
+            <a:schemeClr val="accent1"/>
+          </a:fillRef>
+          <a:effectRef idx="2">
+            <a:schemeClr val="accent1"/>
+          </a:effectRef>
+          <a:fontRef idx="minor">
+            <a:schemeClr val="lt1"/>
+          </a:fontRef>
+        </p:style>
+        <p:txBody>
+          <a:bodyPr rtlCol="0" anchor="ctr"/>
+          <a:lstStyle/>
+          <a:p>
+            <a:pPr algn="ctr"/>
+          </a:p>
+        </p:txBody>
+      </p:sp>
+      <p:sp>
+        <p:nvSpPr>
+          <p:cNvPr id="7" name="Rectangle 6"/>
+          <p:cNvSpPr/>
+          <p:nvPr/>
+        </p:nvSpPr>
+        <p:spPr>
+          <a:xfrm>
+            <a:off x="822960" y="2057400"/>
+            <a:ext cx="3383280" cy="109728"/>
+          </a:xfrm>
+          <a:prstGeom prst="rect">
+            <a:avLst/>
+          </a:prstGeom>
+          <a:solidFill>
+            <a:srgbClr val="C62828"/>
+          </a:solidFill>
+          <a:ln>
+            <a:noFill/>
+          </a:ln>
+        </p:spPr>
+        <p:style>
+          <a:lnRef idx="1">
+            <a:schemeClr val="accent1"/>
+          </a:lnRef>
+          <a:fillRef idx="3">
+            <a:schemeClr val="accent1"/>
+          </a:fillRef>
+          <a:effectRef idx="2">
+            <a:schemeClr val="accent1"/>
+          </a:effectRef>
+          <a:fontRef idx="minor">
+            <a:schemeClr val="lt1"/>
+          </a:fontRef>
+        </p:style>
+        <p:txBody>
+          <a:bodyPr rtlCol="0" anchor="ctr"/>
+          <a:lstStyle/>
+          <a:p>
+            <a:pPr algn="ctr"/>
+          </a:p>
+        </p:txBody>
+      </p:sp>
+      <p:sp>
+        <p:nvSpPr>
+          <p:cNvPr id="8" name="TextBox 7"/>
           <p:cNvSpPr txBox="1"/>
           <p:nvPr/>
         </p:nvSpPr>
         <p:spPr>
           <a:xfrm>
-            <a:off x="1097280" y="2103120"/>
-            <a:ext cx="9966960" cy="2286000"/>
+            <a:off x="960120" y="2240280"/>
+            <a:ext cx="3108960" cy="320040"/>
           </a:xfrm>
           <a:prstGeom prst="rect">
             <a:avLst/>
@@ -17701,81 +17901,867 @@
           </a:bodyPr>
           <a:lstStyle/>
           <a:p>
-            <a:pPr>
-              <a:spcAft>
-                <a:spcPts val="600"/>
-              </a:spcAft>
-            </a:pPr>
-            <a:r>
-              <a:rPr sz="1800">
+            <a:pPr algn="ctr">
+              <a:defRPr sz="1600" b="1">
                 <a:solidFill>
                   <a:srgbClr val="2D2D2D"/>
                 </a:solidFill>
                 <a:latin typeface="Calibri"/>
-              </a:rPr>
-              <a:t>Asked about a $146,000 purchase vs a $357,100 assessment</a:t>
-            </a:r>
-          </a:p>
-          <a:p>
-            <a:pPr>
-              <a:spcAft>
-                <a:spcPts val="600"/>
-              </a:spcAft>
-            </a:pPr>
-            <a:r>
-              <a:rPr sz="1800">
+              </a:defRPr>
+            </a:pPr>
+            <a:r>
+              <a:t>Raw Documents</a:t>
+            </a:r>
+          </a:p>
+        </p:txBody>
+      </p:sp>
+      <p:sp>
+        <p:nvSpPr>
+          <p:cNvPr id="9" name="Rounded Rectangle 8"/>
+          <p:cNvSpPr/>
+          <p:nvPr/>
+        </p:nvSpPr>
+        <p:spPr>
+          <a:xfrm>
+            <a:off x="1874519" y="2606040"/>
+            <a:ext cx="1280160" cy="365760"/>
+          </a:xfrm>
+          <a:prstGeom prst="roundRect">
+            <a:avLst/>
+          </a:prstGeom>
+          <a:solidFill>
+            <a:srgbClr val="C62828"/>
+          </a:solidFill>
+          <a:ln>
+            <a:noFill/>
+          </a:ln>
+        </p:spPr>
+        <p:style>
+          <a:lnRef idx="1">
+            <a:schemeClr val="accent1"/>
+          </a:lnRef>
+          <a:fillRef idx="3">
+            <a:schemeClr val="accent1"/>
+          </a:fillRef>
+          <a:effectRef idx="2">
+            <a:schemeClr val="accent1"/>
+          </a:effectRef>
+          <a:fontRef idx="minor">
+            <a:schemeClr val="lt1"/>
+          </a:fontRef>
+        </p:style>
+        <p:txBody>
+          <a:bodyPr rtlCol="0" anchor="ctr"/>
+          <a:lstStyle/>
+          <a:p>
+            <a:pPr algn="ctr">
+              <a:defRPr sz="1400" b="1">
+                <a:solidFill>
+                  <a:srgbClr val="FFFFFF"/>
+                </a:solidFill>
+                <a:latin typeface="Calibri"/>
+              </a:defRPr>
+            </a:pPr>
+            <a:r>
+              <a:t>FAIL</a:t>
+            </a:r>
+          </a:p>
+        </p:txBody>
+      </p:sp>
+      <p:sp>
+        <p:nvSpPr>
+          <p:cNvPr id="10" name="TextBox 9"/>
+          <p:cNvSpPr txBox="1"/>
+          <p:nvPr/>
+        </p:nvSpPr>
+        <p:spPr>
+          <a:xfrm>
+            <a:off x="1005840" y="3108960"/>
+            <a:ext cx="3017520" cy="411480"/>
+          </a:xfrm>
+          <a:prstGeom prst="rect">
+            <a:avLst/>
+          </a:prstGeom>
+          <a:noFill/>
+        </p:spPr>
+        <p:txBody>
+          <a:bodyPr wrap="square">
+            <a:spAutoFit/>
+          </a:bodyPr>
+          <a:lstStyle/>
+          <a:p>
+            <a:pPr algn="l">
+              <a:defRPr sz="1200" b="0">
                 <a:solidFill>
                   <a:srgbClr val="2D2D2D"/>
                 </a:solidFill>
                 <a:latin typeface="Calibri"/>
-              </a:rPr>
-              <a:t>Agent checked the source data: actual assessment was $53,155</a:t>
-            </a:r>
-          </a:p>
-          <a:p>
-            <a:pPr>
-              <a:spcAft>
-                <a:spcPts val="600"/>
-              </a:spcAft>
-            </a:pPr>
-            <a:r>
-              <a:rPr sz="1800">
+              </a:defRPr>
+            </a:pPr>
+            <a:r>
+              <a:t>Found: Sheriff Report interview</a:t>
+            </a:r>
+          </a:p>
+        </p:txBody>
+      </p:sp>
+      <p:sp>
+        <p:nvSpPr>
+          <p:cNvPr id="11" name="TextBox 10"/>
+          <p:cNvSpPr txBox="1"/>
+          <p:nvPr/>
+        </p:nvSpPr>
+        <p:spPr>
+          <a:xfrm>
+            <a:off x="1005840" y="3520440"/>
+            <a:ext cx="3017520" cy="411480"/>
+          </a:xfrm>
+          <a:prstGeom prst="rect">
+            <a:avLst/>
+          </a:prstGeom>
+          <a:noFill/>
+        </p:spPr>
+        <p:txBody>
+          <a:bodyPr wrap="square">
+            <a:spAutoFit/>
+          </a:bodyPr>
+          <a:lstStyle/>
+          <a:p>
+            <a:pPr algn="l">
+              <a:defRPr sz="1200" b="1">
+                <a:solidFill>
+                  <a:srgbClr val="C62828"/>
+                </a:solidFill>
+                <a:latin typeface="Calibri"/>
+              </a:defRPr>
+            </a:pPr>
+            <a:r>
+              <a:t>Missed: Nursing notes in Medical Records</a:t>
+            </a:r>
+          </a:p>
+        </p:txBody>
+      </p:sp>
+      <p:sp>
+        <p:nvSpPr>
+          <p:cNvPr id="12" name="TextBox 11"/>
+          <p:cNvSpPr txBox="1"/>
+          <p:nvPr/>
+        </p:nvSpPr>
+        <p:spPr>
+          <a:xfrm>
+            <a:off x="1005840" y="4023360"/>
+            <a:ext cx="3017520" cy="1097280"/>
+          </a:xfrm>
+          <a:prstGeom prst="rect">
+            <a:avLst/>
+          </a:prstGeom>
+          <a:noFill/>
+        </p:spPr>
+        <p:txBody>
+          <a:bodyPr wrap="square">
+            <a:spAutoFit/>
+          </a:bodyPr>
+          <a:lstStyle/>
+          <a:p>
+            <a:pPr algn="l">
+              <a:defRPr sz="1100" b="0">
+                <a:solidFill>
+                  <a:srgbClr val="555555"/>
+                </a:solidFill>
+                <a:latin typeface="Calibri"/>
+              </a:defRPr>
+            </a:pPr>
+            <a:r>
+              <a:t>The agent has no reason to look</a:t>
+            </a:r>
+            <a:br/>
+            <a:r>
+              <a:t>in a medical record for</a:t>
+            </a:r>
+            <a:br/>
+            <a:r>
+              <a:t>parent statements.</a:t>
+            </a:r>
+          </a:p>
+        </p:txBody>
+      </p:sp>
+      <p:sp>
+        <p:nvSpPr>
+          <p:cNvPr id="13" name="Rounded Rectangle 12"/>
+          <p:cNvSpPr/>
+          <p:nvPr/>
+        </p:nvSpPr>
+        <p:spPr>
+          <a:xfrm>
+            <a:off x="4572000" y="2057400"/>
+            <a:ext cx="3383280" cy="3383280"/>
+          </a:xfrm>
+          <a:prstGeom prst="roundRect">
+            <a:avLst/>
+          </a:prstGeom>
+          <a:solidFill>
+            <a:srgbClr val="FFF8E1"/>
+          </a:solidFill>
+          <a:ln>
+            <a:noFill/>
+          </a:ln>
+        </p:spPr>
+        <p:style>
+          <a:lnRef idx="1">
+            <a:schemeClr val="accent1"/>
+          </a:lnRef>
+          <a:fillRef idx="3">
+            <a:schemeClr val="accent1"/>
+          </a:fillRef>
+          <a:effectRef idx="2">
+            <a:schemeClr val="accent1"/>
+          </a:effectRef>
+          <a:fontRef idx="minor">
+            <a:schemeClr val="lt1"/>
+          </a:fontRef>
+        </p:style>
+        <p:txBody>
+          <a:bodyPr rtlCol="0" anchor="ctr"/>
+          <a:lstStyle/>
+          <a:p>
+            <a:pPr algn="ctr"/>
+          </a:p>
+        </p:txBody>
+      </p:sp>
+      <p:sp>
+        <p:nvSpPr>
+          <p:cNvPr id="14" name="Rectangle 13"/>
+          <p:cNvSpPr/>
+          <p:nvPr/>
+        </p:nvSpPr>
+        <p:spPr>
+          <a:xfrm>
+            <a:off x="4572000" y="2057400"/>
+            <a:ext cx="3383280" cy="109728"/>
+          </a:xfrm>
+          <a:prstGeom prst="rect">
+            <a:avLst/>
+          </a:prstGeom>
+          <a:solidFill>
+            <a:srgbClr val="F9A825"/>
+          </a:solidFill>
+          <a:ln>
+            <a:noFill/>
+          </a:ln>
+        </p:spPr>
+        <p:style>
+          <a:lnRef idx="1">
+            <a:schemeClr val="accent1"/>
+          </a:lnRef>
+          <a:fillRef idx="3">
+            <a:schemeClr val="accent1"/>
+          </a:fillRef>
+          <a:effectRef idx="2">
+            <a:schemeClr val="accent1"/>
+          </a:effectRef>
+          <a:fontRef idx="minor">
+            <a:schemeClr val="lt1"/>
+          </a:fontRef>
+        </p:style>
+        <p:txBody>
+          <a:bodyPr rtlCol="0" anchor="ctr"/>
+          <a:lstStyle/>
+          <a:p>
+            <a:pPr algn="ctr"/>
+          </a:p>
+        </p:txBody>
+      </p:sp>
+      <p:sp>
+        <p:nvSpPr>
+          <p:cNvPr id="15" name="TextBox 14"/>
+          <p:cNvSpPr txBox="1"/>
+          <p:nvPr/>
+        </p:nvSpPr>
+        <p:spPr>
+          <a:xfrm>
+            <a:off x="4709160" y="2240280"/>
+            <a:ext cx="3108960" cy="320040"/>
+          </a:xfrm>
+          <a:prstGeom prst="rect">
+            <a:avLst/>
+          </a:prstGeom>
+          <a:noFill/>
+        </p:spPr>
+        <p:txBody>
+          <a:bodyPr wrap="square">
+            <a:spAutoFit/>
+          </a:bodyPr>
+          <a:lstStyle/>
+          <a:p>
+            <a:pPr algn="ctr">
+              <a:defRPr sz="1600" b="1">
                 <a:solidFill>
                   <a:srgbClr val="2D2D2D"/>
                 </a:solidFill>
                 <a:latin typeface="Calibri"/>
-              </a:rPr>
-              <a:t>Recalculated using verified numbers instead of the prompt's numbers</a:t>
-            </a:r>
-          </a:p>
-          <a:p>
-            <a:pPr>
-              <a:spcAft>
-                <a:spcPts val="600"/>
-              </a:spcAft>
-            </a:pPr>
-            <a:r>
-              <a:rPr sz="1800">
+              </a:defRPr>
+            </a:pPr>
+            <a:r>
+              <a:t>Cross-Referenced</a:t>
+            </a:r>
+          </a:p>
+        </p:txBody>
+      </p:sp>
+      <p:sp>
+        <p:nvSpPr>
+          <p:cNvPr id="16" name="Rounded Rectangle 15"/>
+          <p:cNvSpPr/>
+          <p:nvPr/>
+        </p:nvSpPr>
+        <p:spPr>
+          <a:xfrm>
+            <a:off x="5623560" y="2606040"/>
+            <a:ext cx="1280160" cy="365760"/>
+          </a:xfrm>
+          <a:prstGeom prst="roundRect">
+            <a:avLst/>
+          </a:prstGeom>
+          <a:solidFill>
+            <a:srgbClr val="F9A825"/>
+          </a:solidFill>
+          <a:ln>
+            <a:noFill/>
+          </a:ln>
+        </p:spPr>
+        <p:style>
+          <a:lnRef idx="1">
+            <a:schemeClr val="accent1"/>
+          </a:lnRef>
+          <a:fillRef idx="3">
+            <a:schemeClr val="accent1"/>
+          </a:fillRef>
+          <a:effectRef idx="2">
+            <a:schemeClr val="accent1"/>
+          </a:effectRef>
+          <a:fontRef idx="minor">
+            <a:schemeClr val="lt1"/>
+          </a:fontRef>
+        </p:style>
+        <p:txBody>
+          <a:bodyPr rtlCol="0" anchor="ctr"/>
+          <a:lstStyle/>
+          <a:p>
+            <a:pPr algn="ctr">
+              <a:defRPr sz="1400" b="1">
+                <a:solidFill>
+                  <a:srgbClr val="FFFFFF"/>
+                </a:solidFill>
+                <a:latin typeface="Calibri"/>
+              </a:defRPr>
+            </a:pPr>
+            <a:r>
+              <a:t>PARTIAL</a:t>
+            </a:r>
+          </a:p>
+        </p:txBody>
+      </p:sp>
+      <p:sp>
+        <p:nvSpPr>
+          <p:cNvPr id="17" name="TextBox 16"/>
+          <p:cNvSpPr txBox="1"/>
+          <p:nvPr/>
+        </p:nvSpPr>
+        <p:spPr>
+          <a:xfrm>
+            <a:off x="4754880" y="3108960"/>
+            <a:ext cx="3017520" cy="411480"/>
+          </a:xfrm>
+          <a:prstGeom prst="rect">
+            <a:avLst/>
+          </a:prstGeom>
+          <a:noFill/>
+        </p:spPr>
+        <p:txBody>
+          <a:bodyPr wrap="square">
+            <a:spAutoFit/>
+          </a:bodyPr>
+          <a:lstStyle/>
+          <a:p>
+            <a:pPr algn="l">
+              <a:defRPr sz="1200" b="0">
                 <a:solidFill>
                   <a:srgbClr val="2D2D2D"/>
                 </a:solidFill>
                 <a:latin typeface="Calibri"/>
-              </a:rPr>
-              <a:t>No other agent questioned the input</a:t>
-            </a:r>
-          </a:p>
-        </p:txBody>
-      </p:sp>
-      <p:sp>
-        <p:nvSpPr>
-          <p:cNvPr id="6" name="Rounded Rectangle 5"/>
+              </a:defRPr>
+            </a:pPr>
+            <a:r>
+              <a:t>Found: Both sources identified</a:t>
+            </a:r>
+          </a:p>
+        </p:txBody>
+      </p:sp>
+      <p:sp>
+        <p:nvSpPr>
+          <p:cNvPr id="18" name="TextBox 17"/>
+          <p:cNvSpPr txBox="1"/>
+          <p:nvPr/>
+        </p:nvSpPr>
+        <p:spPr>
+          <a:xfrm>
+            <a:off x="4754880" y="3520440"/>
+            <a:ext cx="3017520" cy="411480"/>
+          </a:xfrm>
+          <a:prstGeom prst="rect">
+            <a:avLst/>
+          </a:prstGeom>
+          <a:noFill/>
+        </p:spPr>
+        <p:txBody>
+          <a:bodyPr wrap="square">
+            <a:spAutoFit/>
+          </a:bodyPr>
+          <a:lstStyle/>
+          <a:p>
+            <a:pPr algn="l">
+              <a:defRPr sz="1200" b="1">
+                <a:solidFill>
+                  <a:srgbClr val="F9A825"/>
+                </a:solidFill>
+                <a:latin typeface="Calibri"/>
+              </a:defRPr>
+            </a:pPr>
+            <a:r>
+              <a:t>Missed: Specific nursing note detail</a:t>
+            </a:r>
+          </a:p>
+        </p:txBody>
+      </p:sp>
+      <p:sp>
+        <p:nvSpPr>
+          <p:cNvPr id="19" name="TextBox 18"/>
+          <p:cNvSpPr txBox="1"/>
+          <p:nvPr/>
+        </p:nvSpPr>
+        <p:spPr>
+          <a:xfrm>
+            <a:off x="4754880" y="4023360"/>
+            <a:ext cx="3017520" cy="1097280"/>
+          </a:xfrm>
+          <a:prstGeom prst="rect">
+            <a:avLst/>
+          </a:prstGeom>
+          <a:noFill/>
+        </p:spPr>
+        <p:txBody>
+          <a:bodyPr wrap="square">
+            <a:spAutoFit/>
+          </a:bodyPr>
+          <a:lstStyle/>
+          <a:p>
+            <a:pPr algn="l">
+              <a:defRPr sz="1100" b="0">
+                <a:solidFill>
+                  <a:srgbClr val="555555"/>
+                </a:solidFill>
+                <a:latin typeface="Calibri"/>
+              </a:defRPr>
+            </a:pPr>
+            <a:r>
+              <a:t>Cross-reference header points to</a:t>
+            </a:r>
+            <a:br/>
+            <a:r>
+              <a:t>Medical Records, but the agent</a:t>
+            </a:r>
+            <a:br/>
+            <a:r>
+              <a:t>still can't find nursing notes.</a:t>
+            </a:r>
+          </a:p>
+        </p:txBody>
+      </p:sp>
+      <p:sp>
+        <p:nvSpPr>
+          <p:cNvPr id="20" name="Rounded Rectangle 19"/>
           <p:cNvSpPr/>
           <p:nvPr/>
         </p:nvSpPr>
         <p:spPr>
           <a:xfrm>
-            <a:off x="1828800" y="4206240"/>
-            <a:ext cx="8503920" cy="1097280"/>
+            <a:off x="8321040" y="2057400"/>
+            <a:ext cx="3383280" cy="3383280"/>
+          </a:xfrm>
+          <a:prstGeom prst="roundRect">
+            <a:avLst/>
+          </a:prstGeom>
+          <a:solidFill>
+            <a:srgbClr val="E8F5E9"/>
+          </a:solidFill>
+          <a:ln>
+            <a:noFill/>
+          </a:ln>
+        </p:spPr>
+        <p:style>
+          <a:lnRef idx="1">
+            <a:schemeClr val="accent1"/>
+          </a:lnRef>
+          <a:fillRef idx="3">
+            <a:schemeClr val="accent1"/>
+          </a:fillRef>
+          <a:effectRef idx="2">
+            <a:schemeClr val="accent1"/>
+          </a:effectRef>
+          <a:fontRef idx="minor">
+            <a:schemeClr val="lt1"/>
+          </a:fontRef>
+        </p:style>
+        <p:txBody>
+          <a:bodyPr rtlCol="0" anchor="ctr"/>
+          <a:lstStyle/>
+          <a:p>
+            <a:pPr algn="ctr"/>
+          </a:p>
+        </p:txBody>
+      </p:sp>
+      <p:sp>
+        <p:nvSpPr>
+          <p:cNvPr id="21" name="Rectangle 20"/>
+          <p:cNvSpPr/>
+          <p:nvPr/>
+        </p:nvSpPr>
+        <p:spPr>
+          <a:xfrm>
+            <a:off x="8321040" y="2057400"/>
+            <a:ext cx="3383280" cy="109728"/>
+          </a:xfrm>
+          <a:prstGeom prst="rect">
+            <a:avLst/>
+          </a:prstGeom>
+          <a:solidFill>
+            <a:srgbClr val="4CAF50"/>
+          </a:solidFill>
+          <a:ln>
+            <a:noFill/>
+          </a:ln>
+        </p:spPr>
+        <p:style>
+          <a:lnRef idx="1">
+            <a:schemeClr val="accent1"/>
+          </a:lnRef>
+          <a:fillRef idx="3">
+            <a:schemeClr val="accent1"/>
+          </a:fillRef>
+          <a:effectRef idx="2">
+            <a:schemeClr val="accent1"/>
+          </a:effectRef>
+          <a:fontRef idx="minor">
+            <a:schemeClr val="lt1"/>
+          </a:fontRef>
+        </p:style>
+        <p:txBody>
+          <a:bodyPr rtlCol="0" anchor="ctr"/>
+          <a:lstStyle/>
+          <a:p>
+            <a:pPr algn="ctr"/>
+          </a:p>
+        </p:txBody>
+      </p:sp>
+      <p:sp>
+        <p:nvSpPr>
+          <p:cNvPr id="22" name="TextBox 21"/>
+          <p:cNvSpPr txBox="1"/>
+          <p:nvPr/>
+        </p:nvSpPr>
+        <p:spPr>
+          <a:xfrm>
+            <a:off x="8458200" y="2240280"/>
+            <a:ext cx="3108960" cy="320040"/>
+          </a:xfrm>
+          <a:prstGeom prst="rect">
+            <a:avLst/>
+          </a:prstGeom>
+          <a:noFill/>
+        </p:spPr>
+        <p:txBody>
+          <a:bodyPr wrap="square">
+            <a:spAutoFit/>
+          </a:bodyPr>
+          <a:lstStyle/>
+          <a:p>
+            <a:pPr algn="ctr">
+              <a:defRPr sz="1600" b="1">
+                <a:solidFill>
+                  <a:srgbClr val="2D2D2D"/>
+                </a:solidFill>
+                <a:latin typeface="Calibri"/>
+              </a:defRPr>
+            </a:pPr>
+            <a:r>
+              <a:t>Enriched + Metadata</a:t>
+            </a:r>
+          </a:p>
+        </p:txBody>
+      </p:sp>
+      <p:sp>
+        <p:nvSpPr>
+          <p:cNvPr id="23" name="Rounded Rectangle 22"/>
+          <p:cNvSpPr/>
+          <p:nvPr/>
+        </p:nvSpPr>
+        <p:spPr>
+          <a:xfrm>
+            <a:off x="9372600" y="2606040"/>
+            <a:ext cx="1280160" cy="365760"/>
+          </a:xfrm>
+          <a:prstGeom prst="roundRect">
+            <a:avLst/>
+          </a:prstGeom>
+          <a:solidFill>
+            <a:srgbClr val="4CAF50"/>
+          </a:solidFill>
+          <a:ln>
+            <a:noFill/>
+          </a:ln>
+        </p:spPr>
+        <p:style>
+          <a:lnRef idx="1">
+            <a:schemeClr val="accent1"/>
+          </a:lnRef>
+          <a:fillRef idx="3">
+            <a:schemeClr val="accent1"/>
+          </a:fillRef>
+          <a:effectRef idx="2">
+            <a:schemeClr val="accent1"/>
+          </a:effectRef>
+          <a:fontRef idx="minor">
+            <a:schemeClr val="lt1"/>
+          </a:fontRef>
+        </p:style>
+        <p:txBody>
+          <a:bodyPr rtlCol="0" anchor="ctr"/>
+          <a:lstStyle/>
+          <a:p>
+            <a:pPr algn="ctr">
+              <a:defRPr sz="1400" b="1">
+                <a:solidFill>
+                  <a:srgbClr val="FFFFFF"/>
+                </a:solidFill>
+                <a:latin typeface="Calibri"/>
+              </a:defRPr>
+            </a:pPr>
+            <a:r>
+              <a:t>PASS</a:t>
+            </a:r>
+          </a:p>
+        </p:txBody>
+      </p:sp>
+      <p:sp>
+        <p:nvSpPr>
+          <p:cNvPr id="24" name="TextBox 23"/>
+          <p:cNvSpPr txBox="1"/>
+          <p:nvPr/>
+        </p:nvSpPr>
+        <p:spPr>
+          <a:xfrm>
+            <a:off x="8503919" y="3108960"/>
+            <a:ext cx="3017520" cy="411480"/>
+          </a:xfrm>
+          <a:prstGeom prst="rect">
+            <a:avLst/>
+          </a:prstGeom>
+          <a:noFill/>
+        </p:spPr>
+        <p:txBody>
+          <a:bodyPr wrap="square">
+            <a:spAutoFit/>
+          </a:bodyPr>
+          <a:lstStyle/>
+          <a:p>
+            <a:pPr algn="l">
+              <a:defRPr sz="1200" b="0">
+                <a:solidFill>
+                  <a:srgbClr val="2D2D2D"/>
+                </a:solidFill>
+                <a:latin typeface="Calibri"/>
+              </a:defRPr>
+            </a:pPr>
+            <a:r>
+              <a:t>Found: Both statements, correct times</a:t>
+            </a:r>
+          </a:p>
+        </p:txBody>
+      </p:sp>
+      <p:sp>
+        <p:nvSpPr>
+          <p:cNvPr id="25" name="TextBox 24"/>
+          <p:cNvSpPr txBox="1"/>
+          <p:nvPr/>
+        </p:nvSpPr>
+        <p:spPr>
+          <a:xfrm>
+            <a:off x="8503919" y="3520440"/>
+            <a:ext cx="3017520" cy="411480"/>
+          </a:xfrm>
+          <a:prstGeom prst="rect">
+            <a:avLst/>
+          </a:prstGeom>
+          <a:noFill/>
+        </p:spPr>
+        <p:txBody>
+          <a:bodyPr wrap="square">
+            <a:spAutoFit/>
+          </a:bodyPr>
+          <a:lstStyle/>
+          <a:p>
+            <a:pPr algn="l">
+              <a:defRPr sz="1200" b="1">
+                <a:solidFill>
+                  <a:srgbClr val="4CAF50"/>
+                </a:solidFill>
+                <a:latin typeface="Calibri"/>
+              </a:defRPr>
+            </a:pPr>
+            <a:r>
+              <a:t>Missed: Nothing</a:t>
+            </a:r>
+          </a:p>
+        </p:txBody>
+      </p:sp>
+      <p:sp>
+        <p:nvSpPr>
+          <p:cNvPr id="26" name="TextBox 25"/>
+          <p:cNvSpPr txBox="1"/>
+          <p:nvPr/>
+        </p:nvSpPr>
+        <p:spPr>
+          <a:xfrm>
+            <a:off x="8503919" y="4023360"/>
+            <a:ext cx="3017520" cy="1097280"/>
+          </a:xfrm>
+          <a:prstGeom prst="rect">
+            <a:avLst/>
+          </a:prstGeom>
+          <a:noFill/>
+        </p:spPr>
+        <p:txBody>
+          <a:bodyPr wrap="square">
+            <a:spAutoFit/>
+          </a:bodyPr>
+          <a:lstStyle/>
+          <a:p>
+            <a:pPr algn="l">
+              <a:defRPr sz="1100" b="0">
+                <a:solidFill>
+                  <a:srgbClr val="555555"/>
+                </a:solidFill>
+                <a:latin typeface="Calibri"/>
+              </a:defRPr>
+            </a:pPr>
+            <a:r>
+              <a:t>SP metadata: "nursing interview,</a:t>
+            </a:r>
+            <a:br/>
+            <a:r>
+              <a:t>parent statements" on Medical</a:t>
+            </a:r>
+            <a:br/>
+            <a:r>
+              <a:t>Records enables retrieval.</a:t>
+            </a:r>
+          </a:p>
+        </p:txBody>
+      </p:sp>
+      <p:sp>
+        <p:nvSpPr>
+          <p:cNvPr id="27" name="Right Arrow 26"/>
+          <p:cNvSpPr/>
+          <p:nvPr/>
+        </p:nvSpPr>
+        <p:spPr>
+          <a:xfrm>
+            <a:off x="4160520" y="3383280"/>
+            <a:ext cx="457200" cy="320040"/>
+          </a:xfrm>
+          <a:prstGeom prst="rightArrow">
+            <a:avLst/>
+          </a:prstGeom>
+          <a:solidFill>
+            <a:srgbClr val="357ABD"/>
+          </a:solidFill>
+          <a:ln>
+            <a:noFill/>
+          </a:ln>
+        </p:spPr>
+        <p:style>
+          <a:lnRef idx="1">
+            <a:schemeClr val="accent1"/>
+          </a:lnRef>
+          <a:fillRef idx="3">
+            <a:schemeClr val="accent1"/>
+          </a:fillRef>
+          <a:effectRef idx="2">
+            <a:schemeClr val="accent1"/>
+          </a:effectRef>
+          <a:fontRef idx="minor">
+            <a:schemeClr val="lt1"/>
+          </a:fontRef>
+        </p:style>
+        <p:txBody>
+          <a:bodyPr rtlCol="0" anchor="ctr"/>
+          <a:lstStyle/>
+          <a:p>
+            <a:pPr algn="ctr"/>
+          </a:p>
+        </p:txBody>
+      </p:sp>
+      <p:sp>
+        <p:nvSpPr>
+          <p:cNvPr id="28" name="Right Arrow 27"/>
+          <p:cNvSpPr/>
+          <p:nvPr/>
+        </p:nvSpPr>
+        <p:spPr>
+          <a:xfrm>
+            <a:off x="7909559" y="3383280"/>
+            <a:ext cx="457200" cy="320040"/>
+          </a:xfrm>
+          <a:prstGeom prst="rightArrow">
+            <a:avLst/>
+          </a:prstGeom>
+          <a:solidFill>
+            <a:srgbClr val="357ABD"/>
+          </a:solidFill>
+          <a:ln>
+            <a:noFill/>
+          </a:ln>
+        </p:spPr>
+        <p:style>
+          <a:lnRef idx="1">
+            <a:schemeClr val="accent1"/>
+          </a:lnRef>
+          <a:fillRef idx="3">
+            <a:schemeClr val="accent1"/>
+          </a:fillRef>
+          <a:effectRef idx="2">
+            <a:schemeClr val="accent1"/>
+          </a:effectRef>
+          <a:fontRef idx="minor">
+            <a:schemeClr val="lt1"/>
+          </a:fontRef>
+        </p:style>
+        <p:txBody>
+          <a:bodyPr rtlCol="0" anchor="ctr"/>
+          <a:lstStyle/>
+          <a:p>
+            <a:pPr algn="ctr"/>
+          </a:p>
+        </p:txBody>
+      </p:sp>
+      <p:sp>
+        <p:nvSpPr>
+          <p:cNvPr id="29" name="Rounded Rectangle 28"/>
+          <p:cNvSpPr/>
+          <p:nvPr/>
+        </p:nvSpPr>
+        <p:spPr>
+          <a:xfrm>
+            <a:off x="1371600" y="5623560"/>
+            <a:ext cx="9418320" cy="502920"/>
           </a:xfrm>
           <a:prstGeom prst="roundRect">
             <a:avLst/>
@@ -17811,14 +18797,57 @@
       </p:sp>
       <p:sp>
         <p:nvSpPr>
-          <p:cNvPr id="7" name="TextBox 6"/>
+          <p:cNvPr id="30" name="Rectangle 29"/>
+          <p:cNvSpPr/>
+          <p:nvPr/>
+        </p:nvSpPr>
+        <p:spPr>
+          <a:xfrm>
+            <a:off x="1371600" y="5623560"/>
+            <a:ext cx="109728" cy="502920"/>
+          </a:xfrm>
+          <a:prstGeom prst="rect">
+            <a:avLst/>
+          </a:prstGeom>
+          <a:solidFill>
+            <a:srgbClr val="357ABD"/>
+          </a:solidFill>
+          <a:ln>
+            <a:noFill/>
+          </a:ln>
+        </p:spPr>
+        <p:style>
+          <a:lnRef idx="1">
+            <a:schemeClr val="accent1"/>
+          </a:lnRef>
+          <a:fillRef idx="3">
+            <a:schemeClr val="accent1"/>
+          </a:fillRef>
+          <a:effectRef idx="2">
+            <a:schemeClr val="accent1"/>
+          </a:effectRef>
+          <a:fontRef idx="minor">
+            <a:schemeClr val="lt1"/>
+          </a:fontRef>
+        </p:style>
+        <p:txBody>
+          <a:bodyPr rtlCol="0" anchor="ctr"/>
+          <a:lstStyle/>
+          <a:p>
+            <a:pPr algn="ctr"/>
+          </a:p>
+        </p:txBody>
+      </p:sp>
+      <p:sp>
+        <p:nvSpPr>
+          <p:cNvPr id="31" name="TextBox 30"/>
           <p:cNvSpPr txBox="1"/>
           <p:nvPr/>
         </p:nvSpPr>
         <p:spPr>
           <a:xfrm>
-            <a:off x="2011680" y="4251960"/>
-            <a:ext cx="8138160" cy="1005840"/>
+            <a:off x="1645920" y="5669280"/>
+            <a:ext cx="8961120" cy="411480"/>
           </a:xfrm>
           <a:prstGeom prst="rect">
             <a:avLst/>
@@ -17832,58 +18861,22 @@
           <a:lstStyle/>
           <a:p>
             <a:pPr algn="ctr">
-              <a:defRPr sz="1500" b="0">
-                <a:solidFill>
-                  <a:srgbClr val="2C5F8A"/>
-                </a:solidFill>
-                <a:latin typeface="Calibri"/>
-              </a:defRPr>
-            </a:pPr>
-            <a:r>
-              <a:t>"The assessment value in our records is $53,155, not $357,100 as stated in the question. Using the verified assessment value..."</a:t>
-            </a:r>
-          </a:p>
-        </p:txBody>
-      </p:sp>
-      <p:sp>
-        <p:nvSpPr>
-          <p:cNvPr id="8" name="TextBox 7"/>
-          <p:cNvSpPr txBox="1"/>
-          <p:nvPr/>
-        </p:nvSpPr>
-        <p:spPr>
-          <a:xfrm>
-            <a:off x="1097280" y="5486400"/>
-            <a:ext cx="9966960" cy="365760"/>
-          </a:xfrm>
-          <a:prstGeom prst="rect">
-            <a:avLst/>
-          </a:prstGeom>
-          <a:noFill/>
-        </p:spPr>
-        <p:txBody>
-          <a:bodyPr wrap="square">
-            <a:spAutoFit/>
-          </a:bodyPr>
-          <a:lstStyle/>
-          <a:p>
-            <a:pPr algn="ctr">
               <a:defRPr sz="1600" b="1">
                 <a:solidFill>
-                  <a:srgbClr val="555555"/>
-                </a:solidFill>
-                <a:latin typeface="Calibri"/>
-              </a:defRPr>
-            </a:pPr>
-            <a:r>
-              <a:t>This is what custom orchestration enables -- but only with iterative testing.</a:t>
-            </a:r>
-          </a:p>
-        </p:txBody>
-      </p:sp>
-      <p:sp>
-        <p:nvSpPr>
-          <p:cNvPr id="9" name="Rounded Rectangle 8"/>
+                  <a:srgbClr val="1B2A4A"/>
+                </a:solidFill>
+                <a:latin typeface="Calibri"/>
+              </a:defRPr>
+            </a:pPr>
+            <a:r>
+              <a:t>Cross-references fix reasoning errors. Metadata fixes retrieval errors. You need both.</a:t>
+            </a:r>
+          </a:p>
+        </p:txBody>
+      </p:sp>
+      <p:sp>
+        <p:nvSpPr>
+          <p:cNvPr id="32" name="Rounded Rectangle 31"/>
           <p:cNvSpPr/>
           <p:nvPr/>
         </p:nvSpPr>
@@ -17936,7 +18929,7 @@
       </p:sp>
       <p:sp>
         <p:nvSpPr>
-          <p:cNvPr id="10" name="Rounded Rectangle 9"/>
+          <p:cNvPr id="33" name="Rounded Rectangle 32"/>
           <p:cNvSpPr/>
           <p:nvPr/>
         </p:nvSpPr>
@@ -17989,7 +18982,7 @@
       </p:sp>
       <p:sp>
         <p:nvSpPr>
-          <p:cNvPr id="11" name="Rounded Rectangle 10"/>
+          <p:cNvPr id="34" name="Rounded Rectangle 33"/>
           <p:cNvSpPr/>
           <p:nvPr/>
         </p:nvSpPr>
@@ -18042,7 +19035,7 @@
       </p:sp>
       <p:sp>
         <p:nvSpPr>
-          <p:cNvPr id="12" name="Rounded Rectangle 11"/>
+          <p:cNvPr id="35" name="Rounded Rectangle 34"/>
           <p:cNvSpPr/>
           <p:nvPr/>
         </p:nvSpPr>
@@ -18095,7 +19088,7 @@
       </p:sp>
       <p:sp>
         <p:nvSpPr>
-          <p:cNvPr id="13" name="Rounded Rectangle 12"/>
+          <p:cNvPr id="36" name="Rounded Rectangle 35"/>
           <p:cNvSpPr/>
           <p:nvPr/>
         </p:nvSpPr>
@@ -18148,7 +19141,7 @@
       </p:sp>
       <p:sp>
         <p:nvSpPr>
-          <p:cNvPr id="14" name="TextBox 13"/>
+          <p:cNvPr id="37" name="TextBox 36"/>
           <p:cNvSpPr txBox="1"/>
           <p:nvPr/>
         </p:nvSpPr>
@@ -18239,7 +19232,7 @@
               </a:defRPr>
             </a:pPr>
             <a:r>
-              <a:t>Surprising Finding: False Negative</a:t>
+              <a:t>Surprising Finding: Agent Challenged Its Own Premise</a:t>
             </a:r>
           </a:p>
         </p:txBody>
@@ -18318,7 +19311,7 @@
               </a:defRPr>
             </a:pPr>
             <a:r>
-              <a:t>The model retrieved the answer and didn't recognize it</a:t>
+              <a:t>A pro-code agent questioned the question -- and was right</a:t>
             </a:r>
           </a:p>
         </p:txBody>
@@ -18332,7 +19325,7 @@
         <p:spPr>
           <a:xfrm>
             <a:off x="1097280" y="2103120"/>
-            <a:ext cx="9966960" cy="1828800"/>
+            <a:ext cx="9966960" cy="2286000"/>
           </a:xfrm>
           <a:prstGeom prst="rect">
             <a:avLst/>
@@ -18357,7 +19350,7 @@
                 </a:solidFill>
                 <a:latin typeface="Calibri"/>
               </a:rPr>
-              <a:t>Agent called the right tools</a:t>
+              <a:t>Asked about a $146,000 purchase vs a $357,100 assessment</a:t>
             </a:r>
           </a:p>
           <a:p>
@@ -18373,7 +19366,7 @@
                 </a:solidFill>
                 <a:latin typeface="Calibri"/>
               </a:rPr>
-              <a:t>Received data containing "two positive drug screens (fentanyl)"</a:t>
+              <a:t>Agent checked the source data: actual assessment was $53,155</a:t>
             </a:r>
           </a:p>
           <a:p>
@@ -18389,7 +19382,7 @@
                 </a:solidFill>
                 <a:latin typeface="Calibri"/>
               </a:rPr>
-              <a:t>Concluded: "no drug test results exist in the available data"</a:t>
+              <a:t>Recalculated using verified numbers instead of the prompt's numbers</a:t>
             </a:r>
           </a:p>
           <a:p>
@@ -18405,7 +19398,7 @@
                 </a:solidFill>
                 <a:latin typeface="Calibri"/>
               </a:rPr>
-              <a:t>Invisible to users: tool calls look correct, answer sounds confident</a:t>
+              <a:t>No other agent questioned the input</a:t>
             </a:r>
           </a:p>
         </p:txBody>
@@ -18418,14 +19411,14 @@
         </p:nvSpPr>
         <p:spPr>
           <a:xfrm>
-            <a:off x="1371600" y="4114800"/>
-            <a:ext cx="4572000" cy="1371600"/>
+            <a:off x="1828800" y="4206240"/>
+            <a:ext cx="8503920" cy="1097280"/>
           </a:xfrm>
           <a:prstGeom prst="roundRect">
             <a:avLst/>
           </a:prstGeom>
           <a:solidFill>
-            <a:srgbClr val="E8F5E9"/>
+            <a:srgbClr val="E3F2FD"/>
           </a:solidFill>
           <a:ln>
             <a:noFill/>
@@ -18461,8 +19454,8 @@
         </p:nvSpPr>
         <p:spPr>
           <a:xfrm>
-            <a:off x="1554480" y="4160520"/>
-            <a:ext cx="4206240" cy="320040"/>
+            <a:off x="2011680" y="4251960"/>
+            <a:ext cx="8138160" cy="1005840"/>
           </a:xfrm>
           <a:prstGeom prst="rect">
             <a:avLst/>
@@ -18476,15 +19469,15 @@
           <a:lstStyle/>
           <a:p>
             <a:pPr algn="ctr">
-              <a:defRPr sz="1300" b="1">
-                <a:solidFill>
-                  <a:srgbClr val="4CAF50"/>
-                </a:solidFill>
-                <a:latin typeface="Calibri"/>
-              </a:defRPr>
-            </a:pPr>
-            <a:r>
-              <a:t>Tool Output (correct)</a:t>
+              <a:defRPr sz="1500" b="0">
+                <a:solidFill>
+                  <a:srgbClr val="2C5F8A"/>
+                </a:solidFill>
+                <a:latin typeface="Calibri"/>
+              </a:defRPr>
+            </a:pPr>
+            <a:r>
+              <a:t>"The assessment value in our records is $53,155, not $357,100 as stated in the question. Using the verified assessment value..."</a:t>
             </a:r>
           </a:p>
         </p:txBody>
@@ -18497,8 +19490,8 @@
         </p:nvSpPr>
         <p:spPr>
           <a:xfrm>
-            <a:off x="1554480" y="4572000"/>
-            <a:ext cx="4206240" cy="731520"/>
+            <a:off x="1097280" y="5486400"/>
+            <a:ext cx="9966960" cy="365760"/>
           </a:xfrm>
           <a:prstGeom prst="rect">
             <a:avLst/>
@@ -18512,19 +19505,15 @@
           <a:lstStyle/>
           <a:p>
             <a:pPr algn="ctr">
-              <a:defRPr sz="1600" b="0">
-                <a:solidFill>
-                  <a:srgbClr val="2D2D2D"/>
-                </a:solidFill>
-                <a:latin typeface="Calibri"/>
-              </a:defRPr>
-            </a:pPr>
-            <a:r>
-              <a:t>"two positive drug screens</a:t>
-            </a:r>
-            <a:br/>
-            <a:r>
-              <a:t>(fentanyl)"</a:t>
+              <a:defRPr sz="1600" b="1">
+                <a:solidFill>
+                  <a:srgbClr val="555555"/>
+                </a:solidFill>
+                <a:latin typeface="Calibri"/>
+              </a:defRPr>
+            </a:pPr>
+            <a:r>
+              <a:t>This is what custom orchestration enables -- but only with iterative testing.</a:t>
             </a:r>
           </a:p>
         </p:txBody>
@@ -18532,161 +19521,6 @@
       <p:sp>
         <p:nvSpPr>
           <p:cNvPr id="9" name="Rounded Rectangle 8"/>
-          <p:cNvSpPr/>
-          <p:nvPr/>
-        </p:nvSpPr>
-        <p:spPr>
-          <a:xfrm>
-            <a:off x="6217920" y="4114800"/>
-            <a:ext cx="4572000" cy="1371600"/>
-          </a:xfrm>
-          <a:prstGeom prst="roundRect">
-            <a:avLst/>
-          </a:prstGeom>
-          <a:solidFill>
-            <a:srgbClr val="FFEBEE"/>
-          </a:solidFill>
-          <a:ln>
-            <a:noFill/>
-          </a:ln>
-        </p:spPr>
-        <p:style>
-          <a:lnRef idx="1">
-            <a:schemeClr val="accent1"/>
-          </a:lnRef>
-          <a:fillRef idx="3">
-            <a:schemeClr val="accent1"/>
-          </a:fillRef>
-          <a:effectRef idx="2">
-            <a:schemeClr val="accent1"/>
-          </a:effectRef>
-          <a:fontRef idx="minor">
-            <a:schemeClr val="lt1"/>
-          </a:fontRef>
-        </p:style>
-        <p:txBody>
-          <a:bodyPr rtlCol="0" anchor="ctr"/>
-          <a:lstStyle/>
-          <a:p>
-            <a:pPr algn="ctr"/>
-          </a:p>
-        </p:txBody>
-      </p:sp>
-      <p:sp>
-        <p:nvSpPr>
-          <p:cNvPr id="10" name="TextBox 9"/>
-          <p:cNvSpPr txBox="1"/>
-          <p:nvPr/>
-        </p:nvSpPr>
-        <p:spPr>
-          <a:xfrm>
-            <a:off x="6400800" y="4160520"/>
-            <a:ext cx="4206240" cy="320040"/>
-          </a:xfrm>
-          <a:prstGeom prst="rect">
-            <a:avLst/>
-          </a:prstGeom>
-          <a:noFill/>
-        </p:spPr>
-        <p:txBody>
-          <a:bodyPr wrap="square">
-            <a:spAutoFit/>
-          </a:bodyPr>
-          <a:lstStyle/>
-          <a:p>
-            <a:pPr algn="ctr">
-              <a:defRPr sz="1300" b="1">
-                <a:solidFill>
-                  <a:srgbClr val="E53935"/>
-                </a:solidFill>
-                <a:latin typeface="Calibri"/>
-              </a:defRPr>
-            </a:pPr>
-            <a:r>
-              <a:t>Agent Conclusion (wrong)</a:t>
-            </a:r>
-          </a:p>
-        </p:txBody>
-      </p:sp>
-      <p:sp>
-        <p:nvSpPr>
-          <p:cNvPr id="11" name="TextBox 10"/>
-          <p:cNvSpPr txBox="1"/>
-          <p:nvPr/>
-        </p:nvSpPr>
-        <p:spPr>
-          <a:xfrm>
-            <a:off x="6400800" y="4572000"/>
-            <a:ext cx="4206240" cy="731520"/>
-          </a:xfrm>
-          <a:prstGeom prst="rect">
-            <a:avLst/>
-          </a:prstGeom>
-          <a:noFill/>
-        </p:spPr>
-        <p:txBody>
-          <a:bodyPr wrap="square">
-            <a:spAutoFit/>
-          </a:bodyPr>
-          <a:lstStyle/>
-          <a:p>
-            <a:pPr algn="ctr">
-              <a:defRPr sz="1600" b="0">
-                <a:solidFill>
-                  <a:srgbClr val="2D2D2D"/>
-                </a:solidFill>
-                <a:latin typeface="Calibri"/>
-              </a:defRPr>
-            </a:pPr>
-            <a:r>
-              <a:t>"no drug test results exist</a:t>
-            </a:r>
-            <a:br/>
-            <a:r>
-              <a:t>in the available data"</a:t>
-            </a:r>
-          </a:p>
-        </p:txBody>
-      </p:sp>
-      <p:sp>
-        <p:nvSpPr>
-          <p:cNvPr id="12" name="TextBox 11"/>
-          <p:cNvSpPr txBox="1"/>
-          <p:nvPr/>
-        </p:nvSpPr>
-        <p:spPr>
-          <a:xfrm>
-            <a:off x="1097280" y="5669280"/>
-            <a:ext cx="9966960" cy="365760"/>
-          </a:xfrm>
-          <a:prstGeom prst="rect">
-            <a:avLst/>
-          </a:prstGeom>
-          <a:noFill/>
-        </p:spPr>
-        <p:txBody>
-          <a:bodyPr wrap="square">
-            <a:spAutoFit/>
-          </a:bodyPr>
-          <a:lstStyle/>
-          <a:p>
-            <a:pPr algn="ctr">
-              <a:defRPr sz="1600" b="1">
-                <a:solidFill>
-                  <a:srgbClr val="C62828"/>
-                </a:solidFill>
-                <a:latin typeface="Calibri"/>
-              </a:defRPr>
-            </a:pPr>
-            <a:r>
-              <a:t>This is why you need ground truth testing. You cannot catch this in production.</a:t>
-            </a:r>
-          </a:p>
-        </p:txBody>
-      </p:sp>
-      <p:sp>
-        <p:nvSpPr>
-          <p:cNvPr id="13" name="Rounded Rectangle 12"/>
           <p:cNvSpPr/>
           <p:nvPr/>
         </p:nvSpPr>
@@ -18739,7 +19573,7 @@
       </p:sp>
       <p:sp>
         <p:nvSpPr>
-          <p:cNvPr id="14" name="Rounded Rectangle 13"/>
+          <p:cNvPr id="10" name="Rounded Rectangle 9"/>
           <p:cNvSpPr/>
           <p:nvPr/>
         </p:nvSpPr>
@@ -18792,7 +19626,7 @@
       </p:sp>
       <p:sp>
         <p:nvSpPr>
-          <p:cNvPr id="15" name="Rounded Rectangle 14"/>
+          <p:cNvPr id="11" name="Rounded Rectangle 10"/>
           <p:cNvSpPr/>
           <p:nvPr/>
         </p:nvSpPr>
@@ -18845,7 +19679,7 @@
       </p:sp>
       <p:sp>
         <p:nvSpPr>
-          <p:cNvPr id="16" name="Rounded Rectangle 15"/>
+          <p:cNvPr id="12" name="Rounded Rectangle 11"/>
           <p:cNvSpPr/>
           <p:nvPr/>
         </p:nvSpPr>
@@ -18898,7 +19732,7 @@
       </p:sp>
       <p:sp>
         <p:nvSpPr>
-          <p:cNvPr id="17" name="Rounded Rectangle 16"/>
+          <p:cNvPr id="13" name="Rounded Rectangle 12"/>
           <p:cNvSpPr/>
           <p:nvPr/>
         </p:nvSpPr>
@@ -18951,7 +19785,7 @@
       </p:sp>
       <p:sp>
         <p:nvSpPr>
-          <p:cNvPr id="18" name="TextBox 17"/>
+          <p:cNvPr id="14" name="TextBox 13"/>
           <p:cNvSpPr txBox="1"/>
           <p:nvPr/>
         </p:nvSpPr>
@@ -19034,7 +19868,7 @@
           <a:lstStyle/>
           <a:p>
             <a:pPr algn="l">
-              <a:defRPr sz="3200" b="1">
+              <a:defRPr sz="2800" b="1">
                 <a:solidFill>
                   <a:srgbClr val="1B2A4A"/>
                 </a:solidFill>
@@ -19042,7 +19876,7 @@
               </a:defRPr>
             </a:pPr>
             <a:r>
-              <a:t>The Bottom Line</a:t>
+              <a:t>Surprising Finding: False Negative</a:t>
             </a:r>
           </a:p>
         </p:txBody>
@@ -19113,7 +19947,7 @@
           <a:lstStyle/>
           <a:p>
             <a:pPr algn="l">
-              <a:defRPr sz="2200" b="1">
+              <a:defRPr sz="2000" b="1">
                 <a:solidFill>
                   <a:srgbClr val="2D2D2D"/>
                 </a:solidFill>
@@ -19121,21 +19955,382 @@
               </a:defRPr>
             </a:pPr>
             <a:r>
-              <a:t>Three numbers to remember</a:t>
-            </a:r>
-          </a:p>
-        </p:txBody>
-      </p:sp>
-      <p:sp>
-        <p:nvSpPr>
-          <p:cNvPr id="5" name="Rounded Rectangle 4"/>
+              <a:t>The model retrieved the answer and didn't recognize it</a:t>
+            </a:r>
+          </a:p>
+        </p:txBody>
+      </p:sp>
+      <p:sp>
+        <p:nvSpPr>
+          <p:cNvPr id="5" name="TextBox 4"/>
+          <p:cNvSpPr txBox="1"/>
+          <p:nvPr/>
+        </p:nvSpPr>
+        <p:spPr>
+          <a:xfrm>
+            <a:off x="1097280" y="2103120"/>
+            <a:ext cx="9966960" cy="1828800"/>
+          </a:xfrm>
+          <a:prstGeom prst="rect">
+            <a:avLst/>
+          </a:prstGeom>
+          <a:noFill/>
+        </p:spPr>
+        <p:txBody>
+          <a:bodyPr wrap="square">
+            <a:spAutoFit/>
+          </a:bodyPr>
+          <a:lstStyle/>
+          <a:p>
+            <a:pPr>
+              <a:spcAft>
+                <a:spcPts val="600"/>
+              </a:spcAft>
+            </a:pPr>
+            <a:r>
+              <a:rPr sz="1800">
+                <a:solidFill>
+                  <a:srgbClr val="2D2D2D"/>
+                </a:solidFill>
+                <a:latin typeface="Calibri"/>
+              </a:rPr>
+              <a:t>Agent called the right tools</a:t>
+            </a:r>
+          </a:p>
+          <a:p>
+            <a:pPr>
+              <a:spcAft>
+                <a:spcPts val="600"/>
+              </a:spcAft>
+            </a:pPr>
+            <a:r>
+              <a:rPr sz="1800">
+                <a:solidFill>
+                  <a:srgbClr val="2D2D2D"/>
+                </a:solidFill>
+                <a:latin typeface="Calibri"/>
+              </a:rPr>
+              <a:t>Received data containing "two positive drug screens (fentanyl)"</a:t>
+            </a:r>
+          </a:p>
+          <a:p>
+            <a:pPr>
+              <a:spcAft>
+                <a:spcPts val="600"/>
+              </a:spcAft>
+            </a:pPr>
+            <a:r>
+              <a:rPr sz="1800">
+                <a:solidFill>
+                  <a:srgbClr val="2D2D2D"/>
+                </a:solidFill>
+                <a:latin typeface="Calibri"/>
+              </a:rPr>
+              <a:t>Concluded: "no drug test results exist in the available data"</a:t>
+            </a:r>
+          </a:p>
+          <a:p>
+            <a:pPr>
+              <a:spcAft>
+                <a:spcPts val="600"/>
+              </a:spcAft>
+            </a:pPr>
+            <a:r>
+              <a:rPr sz="1800">
+                <a:solidFill>
+                  <a:srgbClr val="2D2D2D"/>
+                </a:solidFill>
+                <a:latin typeface="Calibri"/>
+              </a:rPr>
+              <a:t>Invisible to users: tool calls look correct, answer sounds confident</a:t>
+            </a:r>
+          </a:p>
+        </p:txBody>
+      </p:sp>
+      <p:sp>
+        <p:nvSpPr>
+          <p:cNvPr id="6" name="Rounded Rectangle 5"/>
           <p:cNvSpPr/>
           <p:nvPr/>
         </p:nvSpPr>
         <p:spPr>
           <a:xfrm>
-            <a:off x="1097280" y="2103120"/>
-            <a:ext cx="3200400" cy="3200400"/>
+            <a:off x="1371600" y="4114800"/>
+            <a:ext cx="4572000" cy="1371600"/>
+          </a:xfrm>
+          <a:prstGeom prst="roundRect">
+            <a:avLst/>
+          </a:prstGeom>
+          <a:solidFill>
+            <a:srgbClr val="E8F5E9"/>
+          </a:solidFill>
+          <a:ln>
+            <a:noFill/>
+          </a:ln>
+        </p:spPr>
+        <p:style>
+          <a:lnRef idx="1">
+            <a:schemeClr val="accent1"/>
+          </a:lnRef>
+          <a:fillRef idx="3">
+            <a:schemeClr val="accent1"/>
+          </a:fillRef>
+          <a:effectRef idx="2">
+            <a:schemeClr val="accent1"/>
+          </a:effectRef>
+          <a:fontRef idx="minor">
+            <a:schemeClr val="lt1"/>
+          </a:fontRef>
+        </p:style>
+        <p:txBody>
+          <a:bodyPr rtlCol="0" anchor="ctr"/>
+          <a:lstStyle/>
+          <a:p>
+            <a:pPr algn="ctr"/>
+          </a:p>
+        </p:txBody>
+      </p:sp>
+      <p:sp>
+        <p:nvSpPr>
+          <p:cNvPr id="7" name="TextBox 6"/>
+          <p:cNvSpPr txBox="1"/>
+          <p:nvPr/>
+        </p:nvSpPr>
+        <p:spPr>
+          <a:xfrm>
+            <a:off x="1554480" y="4160520"/>
+            <a:ext cx="4206240" cy="320040"/>
+          </a:xfrm>
+          <a:prstGeom prst="rect">
+            <a:avLst/>
+          </a:prstGeom>
+          <a:noFill/>
+        </p:spPr>
+        <p:txBody>
+          <a:bodyPr wrap="square">
+            <a:spAutoFit/>
+          </a:bodyPr>
+          <a:lstStyle/>
+          <a:p>
+            <a:pPr algn="ctr">
+              <a:defRPr sz="1300" b="1">
+                <a:solidFill>
+                  <a:srgbClr val="4CAF50"/>
+                </a:solidFill>
+                <a:latin typeface="Calibri"/>
+              </a:defRPr>
+            </a:pPr>
+            <a:r>
+              <a:t>Tool Output (correct)</a:t>
+            </a:r>
+          </a:p>
+        </p:txBody>
+      </p:sp>
+      <p:sp>
+        <p:nvSpPr>
+          <p:cNvPr id="8" name="TextBox 7"/>
+          <p:cNvSpPr txBox="1"/>
+          <p:nvPr/>
+        </p:nvSpPr>
+        <p:spPr>
+          <a:xfrm>
+            <a:off x="1554480" y="4572000"/>
+            <a:ext cx="4206240" cy="731520"/>
+          </a:xfrm>
+          <a:prstGeom prst="rect">
+            <a:avLst/>
+          </a:prstGeom>
+          <a:noFill/>
+        </p:spPr>
+        <p:txBody>
+          <a:bodyPr wrap="square">
+            <a:spAutoFit/>
+          </a:bodyPr>
+          <a:lstStyle/>
+          <a:p>
+            <a:pPr algn="ctr">
+              <a:defRPr sz="1600" b="0">
+                <a:solidFill>
+                  <a:srgbClr val="2D2D2D"/>
+                </a:solidFill>
+                <a:latin typeface="Calibri"/>
+              </a:defRPr>
+            </a:pPr>
+            <a:r>
+              <a:t>"two positive drug screens</a:t>
+            </a:r>
+            <a:br/>
+            <a:r>
+              <a:t>(fentanyl)"</a:t>
+            </a:r>
+          </a:p>
+        </p:txBody>
+      </p:sp>
+      <p:sp>
+        <p:nvSpPr>
+          <p:cNvPr id="9" name="Rounded Rectangle 8"/>
+          <p:cNvSpPr/>
+          <p:nvPr/>
+        </p:nvSpPr>
+        <p:spPr>
+          <a:xfrm>
+            <a:off x="6217920" y="4114800"/>
+            <a:ext cx="4572000" cy="1371600"/>
+          </a:xfrm>
+          <a:prstGeom prst="roundRect">
+            <a:avLst/>
+          </a:prstGeom>
+          <a:solidFill>
+            <a:srgbClr val="FFEBEE"/>
+          </a:solidFill>
+          <a:ln>
+            <a:noFill/>
+          </a:ln>
+        </p:spPr>
+        <p:style>
+          <a:lnRef idx="1">
+            <a:schemeClr val="accent1"/>
+          </a:lnRef>
+          <a:fillRef idx="3">
+            <a:schemeClr val="accent1"/>
+          </a:fillRef>
+          <a:effectRef idx="2">
+            <a:schemeClr val="accent1"/>
+          </a:effectRef>
+          <a:fontRef idx="minor">
+            <a:schemeClr val="lt1"/>
+          </a:fontRef>
+        </p:style>
+        <p:txBody>
+          <a:bodyPr rtlCol="0" anchor="ctr"/>
+          <a:lstStyle/>
+          <a:p>
+            <a:pPr algn="ctr"/>
+          </a:p>
+        </p:txBody>
+      </p:sp>
+      <p:sp>
+        <p:nvSpPr>
+          <p:cNvPr id="10" name="TextBox 9"/>
+          <p:cNvSpPr txBox="1"/>
+          <p:nvPr/>
+        </p:nvSpPr>
+        <p:spPr>
+          <a:xfrm>
+            <a:off x="6400800" y="4160520"/>
+            <a:ext cx="4206240" cy="320040"/>
+          </a:xfrm>
+          <a:prstGeom prst="rect">
+            <a:avLst/>
+          </a:prstGeom>
+          <a:noFill/>
+        </p:spPr>
+        <p:txBody>
+          <a:bodyPr wrap="square">
+            <a:spAutoFit/>
+          </a:bodyPr>
+          <a:lstStyle/>
+          <a:p>
+            <a:pPr algn="ctr">
+              <a:defRPr sz="1300" b="1">
+                <a:solidFill>
+                  <a:srgbClr val="E53935"/>
+                </a:solidFill>
+                <a:latin typeface="Calibri"/>
+              </a:defRPr>
+            </a:pPr>
+            <a:r>
+              <a:t>Agent Conclusion (wrong)</a:t>
+            </a:r>
+          </a:p>
+        </p:txBody>
+      </p:sp>
+      <p:sp>
+        <p:nvSpPr>
+          <p:cNvPr id="11" name="TextBox 10"/>
+          <p:cNvSpPr txBox="1"/>
+          <p:nvPr/>
+        </p:nvSpPr>
+        <p:spPr>
+          <a:xfrm>
+            <a:off x="6400800" y="4572000"/>
+            <a:ext cx="4206240" cy="731520"/>
+          </a:xfrm>
+          <a:prstGeom prst="rect">
+            <a:avLst/>
+          </a:prstGeom>
+          <a:noFill/>
+        </p:spPr>
+        <p:txBody>
+          <a:bodyPr wrap="square">
+            <a:spAutoFit/>
+          </a:bodyPr>
+          <a:lstStyle/>
+          <a:p>
+            <a:pPr algn="ctr">
+              <a:defRPr sz="1600" b="0">
+                <a:solidFill>
+                  <a:srgbClr val="2D2D2D"/>
+                </a:solidFill>
+                <a:latin typeface="Calibri"/>
+              </a:defRPr>
+            </a:pPr>
+            <a:r>
+              <a:t>"no drug test results exist</a:t>
+            </a:r>
+            <a:br/>
+            <a:r>
+              <a:t>in the available data"</a:t>
+            </a:r>
+          </a:p>
+        </p:txBody>
+      </p:sp>
+      <p:sp>
+        <p:nvSpPr>
+          <p:cNvPr id="12" name="TextBox 11"/>
+          <p:cNvSpPr txBox="1"/>
+          <p:nvPr/>
+        </p:nvSpPr>
+        <p:spPr>
+          <a:xfrm>
+            <a:off x="1097280" y="5669280"/>
+            <a:ext cx="9966960" cy="365760"/>
+          </a:xfrm>
+          <a:prstGeom prst="rect">
+            <a:avLst/>
+          </a:prstGeom>
+          <a:noFill/>
+        </p:spPr>
+        <p:txBody>
+          <a:bodyPr wrap="square">
+            <a:spAutoFit/>
+          </a:bodyPr>
+          <a:lstStyle/>
+          <a:p>
+            <a:pPr algn="ctr">
+              <a:defRPr sz="1600" b="1">
+                <a:solidFill>
+                  <a:srgbClr val="C62828"/>
+                </a:solidFill>
+                <a:latin typeface="Calibri"/>
+              </a:defRPr>
+            </a:pPr>
+            <a:r>
+              <a:t>This is why you need ground truth testing. You cannot catch this in production.</a:t>
+            </a:r>
+          </a:p>
+        </p:txBody>
+      </p:sp>
+      <p:sp>
+        <p:nvSpPr>
+          <p:cNvPr id="13" name="Rounded Rectangle 12"/>
+          <p:cNvSpPr/>
+          <p:nvPr/>
+        </p:nvSpPr>
+        <p:spPr>
+          <a:xfrm>
+            <a:off x="792327" y="6035040"/>
+            <a:ext cx="2011680" cy="411480"/>
           </a:xfrm>
           <a:prstGeom prst="roundRect">
             <a:avLst/>
@@ -19162,37 +20357,11 @@
           </a:fontRef>
         </p:style>
         <p:txBody>
-          <a:bodyPr rtlCol="0" anchor="ctr"/>
-          <a:lstStyle/>
-          <a:p>
-            <a:pPr algn="ctr"/>
-          </a:p>
-        </p:txBody>
-      </p:sp>
-      <p:sp>
-        <p:nvSpPr>
-          <p:cNvPr id="6" name="TextBox 5"/>
-          <p:cNvSpPr txBox="1"/>
-          <p:nvPr/>
-        </p:nvSpPr>
-        <p:spPr>
-          <a:xfrm>
-            <a:off x="1188720" y="2286000"/>
-            <a:ext cx="3017520" cy="1097280"/>
-          </a:xfrm>
-          <a:prstGeom prst="rect">
-            <a:avLst/>
-          </a:prstGeom>
-          <a:noFill/>
-        </p:spPr>
-        <p:txBody>
-          <a:bodyPr wrap="square">
-            <a:spAutoFit/>
-          </a:bodyPr>
+          <a:bodyPr rtlCol="0" anchor="ctr" wrap="none"/>
           <a:lstStyle/>
           <a:p>
             <a:pPr algn="ctr">
-              <a:defRPr sz="4000" b="1">
+              <a:defRPr sz="1200" b="1">
                 <a:solidFill>
                   <a:srgbClr val="FFFFFF"/>
                 </a:solidFill>
@@ -19200,103 +20369,27 @@
               </a:defRPr>
             </a:pPr>
             <a:r>
-              <a:t>8/10</a:t>
-            </a:r>
-          </a:p>
-        </p:txBody>
-      </p:sp>
-      <p:sp>
-        <p:nvSpPr>
-          <p:cNvPr id="7" name="TextBox 6"/>
-          <p:cNvSpPr txBox="1"/>
-          <p:nvPr/>
-        </p:nvSpPr>
-        <p:spPr>
-          <a:xfrm>
-            <a:off x="1188720" y="3474720"/>
-            <a:ext cx="3017520" cy="914400"/>
-          </a:xfrm>
-          <a:prstGeom prst="rect">
-            <a:avLst/>
-          </a:prstGeom>
-          <a:noFill/>
-        </p:spPr>
-        <p:txBody>
-          <a:bodyPr wrap="square">
-            <a:spAutoFit/>
-          </a:bodyPr>
-          <a:lstStyle/>
-          <a:p>
-            <a:pPr algn="ctr">
-              <a:defRPr sz="1500" b="0">
-                <a:solidFill>
-                  <a:srgbClr val="FFFFFF"/>
-                </a:solidFill>
-                <a:latin typeface="Calibri"/>
-              </a:defRPr>
-            </a:pPr>
-            <a:r>
-              <a:t>What you get with</a:t>
-            </a:r>
-            <a:br/>
-            <a:r>
-              <a:t>zero engineering</a:t>
-            </a:r>
-          </a:p>
-        </p:txBody>
-      </p:sp>
-      <p:sp>
-        <p:nvSpPr>
-          <p:cNvPr id="8" name="TextBox 7"/>
-          <p:cNvSpPr txBox="1"/>
-          <p:nvPr/>
-        </p:nvSpPr>
-        <p:spPr>
-          <a:xfrm>
-            <a:off x="1188720" y="4572000"/>
-            <a:ext cx="3017520" cy="457200"/>
-          </a:xfrm>
-          <a:prstGeom prst="rect">
-            <a:avLst/>
-          </a:prstGeom>
-          <a:noFill/>
-        </p:spPr>
-        <p:txBody>
-          <a:bodyPr wrap="square">
-            <a:spAutoFit/>
-          </a:bodyPr>
-          <a:lstStyle/>
-          <a:p>
-            <a:pPr algn="ctr">
-              <a:defRPr sz="1300" b="0">
-                <a:solidFill>
-                  <a:srgbClr val="DDEEFF"/>
-                </a:solidFill>
-                <a:latin typeface="Calibri"/>
-              </a:defRPr>
-            </a:pPr>
-            <a:r>
-              <a:t>Levels 1-2</a:t>
-            </a:r>
-          </a:p>
-        </p:txBody>
-      </p:sp>
-      <p:sp>
-        <p:nvSpPr>
-          <p:cNvPr id="9" name="Rounded Rectangle 8"/>
+              <a:t>L1: Discovery</a:t>
+            </a:r>
+          </a:p>
+        </p:txBody>
+      </p:sp>
+      <p:sp>
+        <p:nvSpPr>
+          <p:cNvPr id="14" name="Rounded Rectangle 13"/>
           <p:cNvSpPr/>
           <p:nvPr/>
         </p:nvSpPr>
         <p:spPr>
           <a:xfrm>
-            <a:off x="4663440" y="2103120"/>
-            <a:ext cx="3200400" cy="3200400"/>
+            <a:off x="2941167" y="6035040"/>
+            <a:ext cx="2011680" cy="411480"/>
           </a:xfrm>
           <a:prstGeom prst="roundRect">
             <a:avLst/>
           </a:prstGeom>
           <a:solidFill>
-            <a:srgbClr val="357ABD"/>
+            <a:srgbClr val="8BC34A"/>
           </a:solidFill>
           <a:ln>
             <a:noFill/>
@@ -19317,37 +20410,11 @@
           </a:fontRef>
         </p:style>
         <p:txBody>
-          <a:bodyPr rtlCol="0" anchor="ctr"/>
-          <a:lstStyle/>
-          <a:p>
-            <a:pPr algn="ctr"/>
-          </a:p>
-        </p:txBody>
-      </p:sp>
-      <p:sp>
-        <p:nvSpPr>
-          <p:cNvPr id="10" name="TextBox 9"/>
-          <p:cNvSpPr txBox="1"/>
-          <p:nvPr/>
-        </p:nvSpPr>
-        <p:spPr>
-          <a:xfrm>
-            <a:off x="4754879" y="2286000"/>
-            <a:ext cx="3017520" cy="1097280"/>
-          </a:xfrm>
-          <a:prstGeom prst="rect">
-            <a:avLst/>
-          </a:prstGeom>
-          <a:noFill/>
-        </p:spPr>
-        <p:txBody>
-          <a:bodyPr wrap="square">
-            <a:spAutoFit/>
-          </a:bodyPr>
+          <a:bodyPr rtlCol="0" anchor="ctr" wrap="none"/>
           <a:lstStyle/>
           <a:p>
             <a:pPr algn="ctr">
-              <a:defRPr sz="4000" b="1">
+              <a:defRPr sz="1200" b="1">
                 <a:solidFill>
                   <a:srgbClr val="FFFFFF"/>
                 </a:solidFill>
@@ -19355,35 +20422,52 @@
               </a:defRPr>
             </a:pPr>
             <a:r>
-              <a:t>9.5/10</a:t>
-            </a:r>
-          </a:p>
-        </p:txBody>
-      </p:sp>
-      <p:sp>
-        <p:nvSpPr>
-          <p:cNvPr id="11" name="TextBox 10"/>
-          <p:cNvSpPr txBox="1"/>
-          <p:nvPr/>
-        </p:nvSpPr>
-        <p:spPr>
-          <a:xfrm>
-            <a:off x="4754879" y="3474720"/>
-            <a:ext cx="3017520" cy="914400"/>
-          </a:xfrm>
-          <a:prstGeom prst="rect">
-            <a:avLst/>
-          </a:prstGeom>
-          <a:noFill/>
-        </p:spPr>
-        <p:txBody>
-          <a:bodyPr wrap="square">
-            <a:spAutoFit/>
-          </a:bodyPr>
+              <a:t>L2: Summarization</a:t>
+            </a:r>
+          </a:p>
+        </p:txBody>
+      </p:sp>
+      <p:sp>
+        <p:nvSpPr>
+          <p:cNvPr id="15" name="Rounded Rectangle 14"/>
+          <p:cNvSpPr/>
+          <p:nvPr/>
+        </p:nvSpPr>
+        <p:spPr>
+          <a:xfrm>
+            <a:off x="5090007" y="6035040"/>
+            <a:ext cx="2011680" cy="411480"/>
+          </a:xfrm>
+          <a:prstGeom prst="roundRect">
+            <a:avLst/>
+          </a:prstGeom>
+          <a:solidFill>
+            <a:srgbClr val="FF9800"/>
+          </a:solidFill>
+          <a:ln>
+            <a:noFill/>
+          </a:ln>
+        </p:spPr>
+        <p:style>
+          <a:lnRef idx="1">
+            <a:schemeClr val="accent1"/>
+          </a:lnRef>
+          <a:fillRef idx="3">
+            <a:schemeClr val="accent1"/>
+          </a:fillRef>
+          <a:effectRef idx="2">
+            <a:schemeClr val="accent1"/>
+          </a:effectRef>
+          <a:fontRef idx="minor">
+            <a:schemeClr val="lt1"/>
+          </a:fontRef>
+        </p:style>
+        <p:txBody>
+          <a:bodyPr rtlCol="0" anchor="ctr" wrap="none"/>
           <a:lstStyle/>
           <a:p>
             <a:pPr algn="ctr">
-              <a:defRPr sz="1500" b="0">
+              <a:defRPr sz="1200" b="1">
                 <a:solidFill>
                   <a:srgbClr val="FFFFFF"/>
                 </a:solidFill>
@@ -19391,61 +20475,74 @@
               </a:defRPr>
             </a:pPr>
             <a:r>
-              <a:t>What you get with</a:t>
-            </a:r>
-            <a:br/>
-            <a:r>
-              <a:t>purpose-built tools + GPT-4.1</a:t>
-            </a:r>
-          </a:p>
-        </p:txBody>
-      </p:sp>
-      <p:sp>
-        <p:nvSpPr>
-          <p:cNvPr id="12" name="TextBox 11"/>
-          <p:cNvSpPr txBox="1"/>
-          <p:nvPr/>
-        </p:nvSpPr>
-        <p:spPr>
-          <a:xfrm>
-            <a:off x="4754879" y="4572000"/>
-            <a:ext cx="3017520" cy="457200"/>
-          </a:xfrm>
-          <a:prstGeom prst="rect">
-            <a:avLst/>
-          </a:prstGeom>
-          <a:noFill/>
-        </p:spPr>
-        <p:txBody>
-          <a:bodyPr wrap="square">
-            <a:spAutoFit/>
-          </a:bodyPr>
+              <a:t>L3: Operational</a:t>
+            </a:r>
+          </a:p>
+        </p:txBody>
+      </p:sp>
+      <p:sp>
+        <p:nvSpPr>
+          <p:cNvPr id="16" name="Rounded Rectangle 15"/>
+          <p:cNvSpPr/>
+          <p:nvPr/>
+        </p:nvSpPr>
+        <p:spPr>
+          <a:xfrm>
+            <a:off x="7238847" y="6035040"/>
+            <a:ext cx="2011680" cy="411480"/>
+          </a:xfrm>
+          <a:prstGeom prst="roundRect">
+            <a:avLst/>
+          </a:prstGeom>
+          <a:solidFill>
+            <a:srgbClr val="F4511E"/>
+          </a:solidFill>
+          <a:ln>
+            <a:noFill/>
+          </a:ln>
+        </p:spPr>
+        <p:style>
+          <a:lnRef idx="1">
+            <a:schemeClr val="accent1"/>
+          </a:lnRef>
+          <a:fillRef idx="3">
+            <a:schemeClr val="accent1"/>
+          </a:fillRef>
+          <a:effectRef idx="2">
+            <a:schemeClr val="accent1"/>
+          </a:effectRef>
+          <a:fontRef idx="minor">
+            <a:schemeClr val="lt1"/>
+          </a:fontRef>
+        </p:style>
+        <p:txBody>
+          <a:bodyPr rtlCol="0" anchor="ctr" wrap="none"/>
           <a:lstStyle/>
           <a:p>
             <a:pPr algn="ctr">
-              <a:defRPr sz="1300" b="0">
-                <a:solidFill>
-                  <a:srgbClr val="DDEEFF"/>
-                </a:solidFill>
-                <a:latin typeface="Calibri"/>
-              </a:defRPr>
-            </a:pPr>
-            <a:r>
-              <a:t>Levels 3-4</a:t>
-            </a:r>
-          </a:p>
-        </p:txBody>
-      </p:sp>
-      <p:sp>
-        <p:nvSpPr>
-          <p:cNvPr id="13" name="Rounded Rectangle 12"/>
+              <a:defRPr sz="1200" b="1">
+                <a:solidFill>
+                  <a:srgbClr val="FFFFFF"/>
+                </a:solidFill>
+                <a:latin typeface="Calibri"/>
+              </a:defRPr>
+            </a:pPr>
+            <a:r>
+              <a:t>L4: Investigative</a:t>
+            </a:r>
+          </a:p>
+        </p:txBody>
+      </p:sp>
+      <p:sp>
+        <p:nvSpPr>
+          <p:cNvPr id="17" name="Rounded Rectangle 16"/>
           <p:cNvSpPr/>
           <p:nvPr/>
         </p:nvSpPr>
         <p:spPr>
           <a:xfrm>
-            <a:off x="8229600" y="2103120"/>
-            <a:ext cx="3200400" cy="3200400"/>
+            <a:off x="9387687" y="6035040"/>
+            <a:ext cx="2011680" cy="411480"/>
           </a:xfrm>
           <a:prstGeom prst="roundRect">
             <a:avLst/>
@@ -19472,201 +20569,6 @@
           </a:fontRef>
         </p:style>
         <p:txBody>
-          <a:bodyPr rtlCol="0" anchor="ctr"/>
-          <a:lstStyle/>
-          <a:p>
-            <a:pPr algn="ctr"/>
-          </a:p>
-        </p:txBody>
-      </p:sp>
-      <p:sp>
-        <p:nvSpPr>
-          <p:cNvPr id="14" name="TextBox 13"/>
-          <p:cNvSpPr txBox="1"/>
-          <p:nvPr/>
-        </p:nvSpPr>
-        <p:spPr>
-          <a:xfrm>
-            <a:off x="8321040" y="2286000"/>
-            <a:ext cx="3017520" cy="1097280"/>
-          </a:xfrm>
-          <a:prstGeom prst="rect">
-            <a:avLst/>
-          </a:prstGeom>
-          <a:noFill/>
-        </p:spPr>
-        <p:txBody>
-          <a:bodyPr wrap="square">
-            <a:spAutoFit/>
-          </a:bodyPr>
-          <a:lstStyle/>
-          <a:p>
-            <a:pPr algn="ctr">
-              <a:defRPr sz="4000" b="1">
-                <a:solidFill>
-                  <a:srgbClr val="FFFFFF"/>
-                </a:solidFill>
-                <a:latin typeface="Calibri"/>
-              </a:defRPr>
-            </a:pPr>
-            <a:r>
-              <a:t>Trust</a:t>
-            </a:r>
-            <a:br/>
-            <a:r>
-              <a:t>But Verify</a:t>
-            </a:r>
-          </a:p>
-        </p:txBody>
-      </p:sp>
-      <p:sp>
-        <p:nvSpPr>
-          <p:cNvPr id="15" name="TextBox 14"/>
-          <p:cNvSpPr txBox="1"/>
-          <p:nvPr/>
-        </p:nvSpPr>
-        <p:spPr>
-          <a:xfrm>
-            <a:off x="8321040" y="3474720"/>
-            <a:ext cx="3017520" cy="914400"/>
-          </a:xfrm>
-          <a:prstGeom prst="rect">
-            <a:avLst/>
-          </a:prstGeom>
-          <a:noFill/>
-        </p:spPr>
-        <p:txBody>
-          <a:bodyPr wrap="square">
-            <a:spAutoFit/>
-          </a:bodyPr>
-          <a:lstStyle/>
-          <a:p>
-            <a:pPr algn="ctr">
-              <a:defRPr sz="1500" b="0">
-                <a:solidFill>
-                  <a:srgbClr val="FFFFFF"/>
-                </a:solidFill>
-                <a:latin typeface="Calibri"/>
-              </a:defRPr>
-            </a:pPr>
-            <a:r>
-              <a:t>No score is high enough</a:t>
-            </a:r>
-            <a:br/>
-            <a:r>
-              <a:t>to skip human review</a:t>
-            </a:r>
-          </a:p>
-        </p:txBody>
-      </p:sp>
-      <p:sp>
-        <p:nvSpPr>
-          <p:cNvPr id="16" name="TextBox 15"/>
-          <p:cNvSpPr txBox="1"/>
-          <p:nvPr/>
-        </p:nvSpPr>
-        <p:spPr>
-          <a:xfrm>
-            <a:off x="8321040" y="4572000"/>
-            <a:ext cx="3017520" cy="457200"/>
-          </a:xfrm>
-          <a:prstGeom prst="rect">
-            <a:avLst/>
-          </a:prstGeom>
-          <a:noFill/>
-        </p:spPr>
-        <p:txBody>
-          <a:bodyPr wrap="square">
-            <a:spAutoFit/>
-          </a:bodyPr>
-          <a:lstStyle/>
-          <a:p>
-            <a:pPr algn="ctr">
-              <a:defRPr sz="1300" b="0">
-                <a:solidFill>
-                  <a:srgbClr val="DDEEFF"/>
-                </a:solidFill>
-                <a:latin typeface="Calibri"/>
-              </a:defRPr>
-            </a:pPr>
-            <a:r>
-              <a:t>Level 5</a:t>
-            </a:r>
-          </a:p>
-        </p:txBody>
-      </p:sp>
-      <p:sp>
-        <p:nvSpPr>
-          <p:cNvPr id="17" name="TextBox 16"/>
-          <p:cNvSpPr txBox="1"/>
-          <p:nvPr/>
-        </p:nvSpPr>
-        <p:spPr>
-          <a:xfrm>
-            <a:off x="1097280" y="5486400"/>
-            <a:ext cx="9966960" cy="457200"/>
-          </a:xfrm>
-          <a:prstGeom prst="rect">
-            <a:avLst/>
-          </a:prstGeom>
-          <a:noFill/>
-        </p:spPr>
-        <p:txBody>
-          <a:bodyPr wrap="square">
-            <a:spAutoFit/>
-          </a:bodyPr>
-          <a:lstStyle/>
-          <a:p>
-            <a:pPr algn="ctr">
-              <a:defRPr sz="1500" b="1">
-                <a:solidFill>
-                  <a:srgbClr val="555555"/>
-                </a:solidFill>
-                <a:latin typeface="Calibri"/>
-              </a:defRPr>
-            </a:pPr>
-            <a:r>
-              <a:t>"The question is not 'should we deploy AI?' The question is 'which level are we operating at, and have we invested accordingly?'"</a:t>
-            </a:r>
-          </a:p>
-        </p:txBody>
-      </p:sp>
-      <p:sp>
-        <p:nvSpPr>
-          <p:cNvPr id="18" name="Rounded Rectangle 17"/>
-          <p:cNvSpPr/>
-          <p:nvPr/>
-        </p:nvSpPr>
-        <p:spPr>
-          <a:xfrm>
-            <a:off x="792327" y="6035040"/>
-            <a:ext cx="2011680" cy="411480"/>
-          </a:xfrm>
-          <a:prstGeom prst="roundRect">
-            <a:avLst/>
-          </a:prstGeom>
-          <a:solidFill>
-            <a:srgbClr val="4CAF50"/>
-          </a:solidFill>
-          <a:ln>
-            <a:noFill/>
-          </a:ln>
-        </p:spPr>
-        <p:style>
-          <a:lnRef idx="1">
-            <a:schemeClr val="accent1"/>
-          </a:lnRef>
-          <a:fillRef idx="3">
-            <a:schemeClr val="accent1"/>
-          </a:fillRef>
-          <a:effectRef idx="2">
-            <a:schemeClr val="accent1"/>
-          </a:effectRef>
-          <a:fontRef idx="minor">
-            <a:schemeClr val="lt1"/>
-          </a:fontRef>
-        </p:style>
-        <p:txBody>
           <a:bodyPr rtlCol="0" anchor="ctr" wrap="none"/>
           <a:lstStyle/>
           <a:p>
@@ -19679,218 +20581,6 @@
               </a:defRPr>
             </a:pPr>
             <a:r>
-              <a:t>L1: Discovery</a:t>
-            </a:r>
-          </a:p>
-        </p:txBody>
-      </p:sp>
-      <p:sp>
-        <p:nvSpPr>
-          <p:cNvPr id="19" name="Rounded Rectangle 18"/>
-          <p:cNvSpPr/>
-          <p:nvPr/>
-        </p:nvSpPr>
-        <p:spPr>
-          <a:xfrm>
-            <a:off x="2941167" y="6035040"/>
-            <a:ext cx="2011680" cy="411480"/>
-          </a:xfrm>
-          <a:prstGeom prst="roundRect">
-            <a:avLst/>
-          </a:prstGeom>
-          <a:solidFill>
-            <a:srgbClr val="8BC34A"/>
-          </a:solidFill>
-          <a:ln>
-            <a:noFill/>
-          </a:ln>
-        </p:spPr>
-        <p:style>
-          <a:lnRef idx="1">
-            <a:schemeClr val="accent1"/>
-          </a:lnRef>
-          <a:fillRef idx="3">
-            <a:schemeClr val="accent1"/>
-          </a:fillRef>
-          <a:effectRef idx="2">
-            <a:schemeClr val="accent1"/>
-          </a:effectRef>
-          <a:fontRef idx="minor">
-            <a:schemeClr val="lt1"/>
-          </a:fontRef>
-        </p:style>
-        <p:txBody>
-          <a:bodyPr rtlCol="0" anchor="ctr" wrap="none"/>
-          <a:lstStyle/>
-          <a:p>
-            <a:pPr algn="ctr">
-              <a:defRPr sz="1200" b="1">
-                <a:solidFill>
-                  <a:srgbClr val="FFFFFF"/>
-                </a:solidFill>
-                <a:latin typeface="Calibri"/>
-              </a:defRPr>
-            </a:pPr>
-            <a:r>
-              <a:t>L2: Summarization</a:t>
-            </a:r>
-          </a:p>
-        </p:txBody>
-      </p:sp>
-      <p:sp>
-        <p:nvSpPr>
-          <p:cNvPr id="20" name="Rounded Rectangle 19"/>
-          <p:cNvSpPr/>
-          <p:nvPr/>
-        </p:nvSpPr>
-        <p:spPr>
-          <a:xfrm>
-            <a:off x="5090007" y="6035040"/>
-            <a:ext cx="2011680" cy="411480"/>
-          </a:xfrm>
-          <a:prstGeom prst="roundRect">
-            <a:avLst/>
-          </a:prstGeom>
-          <a:solidFill>
-            <a:srgbClr val="FF9800"/>
-          </a:solidFill>
-          <a:ln>
-            <a:noFill/>
-          </a:ln>
-        </p:spPr>
-        <p:style>
-          <a:lnRef idx="1">
-            <a:schemeClr val="accent1"/>
-          </a:lnRef>
-          <a:fillRef idx="3">
-            <a:schemeClr val="accent1"/>
-          </a:fillRef>
-          <a:effectRef idx="2">
-            <a:schemeClr val="accent1"/>
-          </a:effectRef>
-          <a:fontRef idx="minor">
-            <a:schemeClr val="lt1"/>
-          </a:fontRef>
-        </p:style>
-        <p:txBody>
-          <a:bodyPr rtlCol="0" anchor="ctr" wrap="none"/>
-          <a:lstStyle/>
-          <a:p>
-            <a:pPr algn="ctr">
-              <a:defRPr sz="1200" b="1">
-                <a:solidFill>
-                  <a:srgbClr val="FFFFFF"/>
-                </a:solidFill>
-                <a:latin typeface="Calibri"/>
-              </a:defRPr>
-            </a:pPr>
-            <a:r>
-              <a:t>L3: Operational</a:t>
-            </a:r>
-          </a:p>
-        </p:txBody>
-      </p:sp>
-      <p:sp>
-        <p:nvSpPr>
-          <p:cNvPr id="21" name="Rounded Rectangle 20"/>
-          <p:cNvSpPr/>
-          <p:nvPr/>
-        </p:nvSpPr>
-        <p:spPr>
-          <a:xfrm>
-            <a:off x="7238847" y="6035040"/>
-            <a:ext cx="2011680" cy="411480"/>
-          </a:xfrm>
-          <a:prstGeom prst="roundRect">
-            <a:avLst/>
-          </a:prstGeom>
-          <a:solidFill>
-            <a:srgbClr val="F4511E"/>
-          </a:solidFill>
-          <a:ln>
-            <a:noFill/>
-          </a:ln>
-        </p:spPr>
-        <p:style>
-          <a:lnRef idx="1">
-            <a:schemeClr val="accent1"/>
-          </a:lnRef>
-          <a:fillRef idx="3">
-            <a:schemeClr val="accent1"/>
-          </a:fillRef>
-          <a:effectRef idx="2">
-            <a:schemeClr val="accent1"/>
-          </a:effectRef>
-          <a:fontRef idx="minor">
-            <a:schemeClr val="lt1"/>
-          </a:fontRef>
-        </p:style>
-        <p:txBody>
-          <a:bodyPr rtlCol="0" anchor="ctr" wrap="none"/>
-          <a:lstStyle/>
-          <a:p>
-            <a:pPr algn="ctr">
-              <a:defRPr sz="1200" b="1">
-                <a:solidFill>
-                  <a:srgbClr val="FFFFFF"/>
-                </a:solidFill>
-                <a:latin typeface="Calibri"/>
-              </a:defRPr>
-            </a:pPr>
-            <a:r>
-              <a:t>L4: Investigative</a:t>
-            </a:r>
-          </a:p>
-        </p:txBody>
-      </p:sp>
-      <p:sp>
-        <p:nvSpPr>
-          <p:cNvPr id="22" name="Rounded Rectangle 21"/>
-          <p:cNvSpPr/>
-          <p:nvPr/>
-        </p:nvSpPr>
-        <p:spPr>
-          <a:xfrm>
-            <a:off x="9387687" y="6035040"/>
-            <a:ext cx="2011680" cy="411480"/>
-          </a:xfrm>
-          <a:prstGeom prst="roundRect">
-            <a:avLst/>
-          </a:prstGeom>
-          <a:solidFill>
-            <a:srgbClr val="E53935"/>
-          </a:solidFill>
-          <a:ln>
-            <a:noFill/>
-          </a:ln>
-        </p:spPr>
-        <p:style>
-          <a:lnRef idx="1">
-            <a:schemeClr val="accent1"/>
-          </a:lnRef>
-          <a:fillRef idx="3">
-            <a:schemeClr val="accent1"/>
-          </a:fillRef>
-          <a:effectRef idx="2">
-            <a:schemeClr val="accent1"/>
-          </a:effectRef>
-          <a:fontRef idx="minor">
-            <a:schemeClr val="lt1"/>
-          </a:fontRef>
-        </p:style>
-        <p:txBody>
-          <a:bodyPr rtlCol="0" anchor="ctr" wrap="none"/>
-          <a:lstStyle/>
-          <a:p>
-            <a:pPr algn="ctr">
-              <a:defRPr sz="1200" b="1">
-                <a:solidFill>
-                  <a:srgbClr val="FFFFFF"/>
-                </a:solidFill>
-                <a:latin typeface="Calibri"/>
-              </a:defRPr>
-            </a:pPr>
-            <a:r>
               <a:t>L5: Adjudicative</a:t>
             </a:r>
           </a:p>
@@ -19898,7 +20588,7 @@
       </p:sp>
       <p:sp>
         <p:nvSpPr>
-          <p:cNvPr id="23" name="TextBox 22"/>
+          <p:cNvPr id="18" name="TextBox 17"/>
           <p:cNvSpPr txBox="1"/>
           <p:nvPr/>
         </p:nvSpPr>
@@ -19941,6 +20631,953 @@
 </file>
 
 <file path=ppt/slides/slide25.xml><?xml version="1.0" encoding="utf-8"?>
+<p:sld xmlns:a="http://schemas.openxmlformats.org/drawingml/2006/main" xmlns:p="http://schemas.openxmlformats.org/presentationml/2006/main" xmlns:r="http://schemas.openxmlformats.org/officeDocument/2006/relationships">
+  <p:cSld>
+    <p:bg>
+      <p:bgPr>
+        <a:solidFill>
+          <a:srgbClr val="FFFFFF"/>
+        </a:solidFill>
+        <a:effectLst/>
+      </p:bgPr>
+    </p:bg>
+    <p:spTree>
+      <p:nvGrpSpPr>
+        <p:cNvPr id="1" name=""/>
+        <p:cNvGrpSpPr/>
+        <p:nvPr/>
+      </p:nvGrpSpPr>
+      <p:grpSpPr/>
+      <p:sp>
+        <p:nvSpPr>
+          <p:cNvPr id="2" name="TextBox 1"/>
+          <p:cNvSpPr txBox="1"/>
+          <p:nvPr/>
+        </p:nvSpPr>
+        <p:spPr>
+          <a:xfrm>
+            <a:off x="731520" y="365760"/>
+            <a:ext cx="10698480" cy="640080"/>
+          </a:xfrm>
+          <a:prstGeom prst="rect">
+            <a:avLst/>
+          </a:prstGeom>
+          <a:noFill/>
+        </p:spPr>
+        <p:txBody>
+          <a:bodyPr wrap="square">
+            <a:spAutoFit/>
+          </a:bodyPr>
+          <a:lstStyle/>
+          <a:p>
+            <a:pPr algn="l">
+              <a:defRPr sz="3200" b="1">
+                <a:solidFill>
+                  <a:srgbClr val="1B2A4A"/>
+                </a:solidFill>
+                <a:latin typeface="Calibri"/>
+              </a:defRPr>
+            </a:pPr>
+            <a:r>
+              <a:t>The Bottom Line</a:t>
+            </a:r>
+          </a:p>
+        </p:txBody>
+      </p:sp>
+      <p:sp>
+        <p:nvSpPr>
+          <p:cNvPr id="3" name="Rectangle 2"/>
+          <p:cNvSpPr/>
+          <p:nvPr/>
+        </p:nvSpPr>
+        <p:spPr>
+          <a:xfrm>
+            <a:off x="731520" y="1005840"/>
+            <a:ext cx="1828800" cy="54864"/>
+          </a:xfrm>
+          <a:prstGeom prst="rect">
+            <a:avLst/>
+          </a:prstGeom>
+          <a:solidFill>
+            <a:srgbClr val="357ABD"/>
+          </a:solidFill>
+          <a:ln>
+            <a:noFill/>
+          </a:ln>
+        </p:spPr>
+        <p:style>
+          <a:lnRef idx="1">
+            <a:schemeClr val="accent1"/>
+          </a:lnRef>
+          <a:fillRef idx="3">
+            <a:schemeClr val="accent1"/>
+          </a:fillRef>
+          <a:effectRef idx="2">
+            <a:schemeClr val="accent1"/>
+          </a:effectRef>
+          <a:fontRef idx="minor">
+            <a:schemeClr val="lt1"/>
+          </a:fontRef>
+        </p:style>
+        <p:txBody>
+          <a:bodyPr rtlCol="0" anchor="ctr"/>
+          <a:lstStyle/>
+          <a:p>
+            <a:pPr algn="ctr"/>
+          </a:p>
+        </p:txBody>
+      </p:sp>
+      <p:sp>
+        <p:nvSpPr>
+          <p:cNvPr id="4" name="TextBox 3"/>
+          <p:cNvSpPr txBox="1"/>
+          <p:nvPr/>
+        </p:nvSpPr>
+        <p:spPr>
+          <a:xfrm>
+            <a:off x="1097280" y="1371600"/>
+            <a:ext cx="9966960" cy="457200"/>
+          </a:xfrm>
+          <a:prstGeom prst="rect">
+            <a:avLst/>
+          </a:prstGeom>
+          <a:noFill/>
+        </p:spPr>
+        <p:txBody>
+          <a:bodyPr wrap="square">
+            <a:spAutoFit/>
+          </a:bodyPr>
+          <a:lstStyle/>
+          <a:p>
+            <a:pPr algn="l">
+              <a:defRPr sz="2200" b="1">
+                <a:solidFill>
+                  <a:srgbClr val="2D2D2D"/>
+                </a:solidFill>
+                <a:latin typeface="Calibri"/>
+              </a:defRPr>
+            </a:pPr>
+            <a:r>
+              <a:t>Three numbers to remember</a:t>
+            </a:r>
+          </a:p>
+        </p:txBody>
+      </p:sp>
+      <p:sp>
+        <p:nvSpPr>
+          <p:cNvPr id="5" name="Rounded Rectangle 4"/>
+          <p:cNvSpPr/>
+          <p:nvPr/>
+        </p:nvSpPr>
+        <p:spPr>
+          <a:xfrm>
+            <a:off x="1097280" y="2103120"/>
+            <a:ext cx="3200400" cy="3200400"/>
+          </a:xfrm>
+          <a:prstGeom prst="roundRect">
+            <a:avLst/>
+          </a:prstGeom>
+          <a:solidFill>
+            <a:srgbClr val="4CAF50"/>
+          </a:solidFill>
+          <a:ln>
+            <a:noFill/>
+          </a:ln>
+        </p:spPr>
+        <p:style>
+          <a:lnRef idx="1">
+            <a:schemeClr val="accent1"/>
+          </a:lnRef>
+          <a:fillRef idx="3">
+            <a:schemeClr val="accent1"/>
+          </a:fillRef>
+          <a:effectRef idx="2">
+            <a:schemeClr val="accent1"/>
+          </a:effectRef>
+          <a:fontRef idx="minor">
+            <a:schemeClr val="lt1"/>
+          </a:fontRef>
+        </p:style>
+        <p:txBody>
+          <a:bodyPr rtlCol="0" anchor="ctr"/>
+          <a:lstStyle/>
+          <a:p>
+            <a:pPr algn="ctr"/>
+          </a:p>
+        </p:txBody>
+      </p:sp>
+      <p:sp>
+        <p:nvSpPr>
+          <p:cNvPr id="6" name="TextBox 5"/>
+          <p:cNvSpPr txBox="1"/>
+          <p:nvPr/>
+        </p:nvSpPr>
+        <p:spPr>
+          <a:xfrm>
+            <a:off x="1188720" y="2286000"/>
+            <a:ext cx="3017520" cy="1097280"/>
+          </a:xfrm>
+          <a:prstGeom prst="rect">
+            <a:avLst/>
+          </a:prstGeom>
+          <a:noFill/>
+        </p:spPr>
+        <p:txBody>
+          <a:bodyPr wrap="square">
+            <a:spAutoFit/>
+          </a:bodyPr>
+          <a:lstStyle/>
+          <a:p>
+            <a:pPr algn="ctr">
+              <a:defRPr sz="4000" b="1">
+                <a:solidFill>
+                  <a:srgbClr val="FFFFFF"/>
+                </a:solidFill>
+                <a:latin typeface="Calibri"/>
+              </a:defRPr>
+            </a:pPr>
+            <a:r>
+              <a:t>8/10</a:t>
+            </a:r>
+          </a:p>
+        </p:txBody>
+      </p:sp>
+      <p:sp>
+        <p:nvSpPr>
+          <p:cNvPr id="7" name="TextBox 6"/>
+          <p:cNvSpPr txBox="1"/>
+          <p:nvPr/>
+        </p:nvSpPr>
+        <p:spPr>
+          <a:xfrm>
+            <a:off x="1188720" y="3474720"/>
+            <a:ext cx="3017520" cy="914400"/>
+          </a:xfrm>
+          <a:prstGeom prst="rect">
+            <a:avLst/>
+          </a:prstGeom>
+          <a:noFill/>
+        </p:spPr>
+        <p:txBody>
+          <a:bodyPr wrap="square">
+            <a:spAutoFit/>
+          </a:bodyPr>
+          <a:lstStyle/>
+          <a:p>
+            <a:pPr algn="ctr">
+              <a:defRPr sz="1500" b="0">
+                <a:solidFill>
+                  <a:srgbClr val="FFFFFF"/>
+                </a:solidFill>
+                <a:latin typeface="Calibri"/>
+              </a:defRPr>
+            </a:pPr>
+            <a:r>
+              <a:t>What you get with</a:t>
+            </a:r>
+            <a:br/>
+            <a:r>
+              <a:t>zero engineering</a:t>
+            </a:r>
+          </a:p>
+        </p:txBody>
+      </p:sp>
+      <p:sp>
+        <p:nvSpPr>
+          <p:cNvPr id="8" name="TextBox 7"/>
+          <p:cNvSpPr txBox="1"/>
+          <p:nvPr/>
+        </p:nvSpPr>
+        <p:spPr>
+          <a:xfrm>
+            <a:off x="1188720" y="4572000"/>
+            <a:ext cx="3017520" cy="457200"/>
+          </a:xfrm>
+          <a:prstGeom prst="rect">
+            <a:avLst/>
+          </a:prstGeom>
+          <a:noFill/>
+        </p:spPr>
+        <p:txBody>
+          <a:bodyPr wrap="square">
+            <a:spAutoFit/>
+          </a:bodyPr>
+          <a:lstStyle/>
+          <a:p>
+            <a:pPr algn="ctr">
+              <a:defRPr sz="1300" b="0">
+                <a:solidFill>
+                  <a:srgbClr val="DDEEFF"/>
+                </a:solidFill>
+                <a:latin typeface="Calibri"/>
+              </a:defRPr>
+            </a:pPr>
+            <a:r>
+              <a:t>Levels 1-2</a:t>
+            </a:r>
+          </a:p>
+        </p:txBody>
+      </p:sp>
+      <p:sp>
+        <p:nvSpPr>
+          <p:cNvPr id="9" name="Rounded Rectangle 8"/>
+          <p:cNvSpPr/>
+          <p:nvPr/>
+        </p:nvSpPr>
+        <p:spPr>
+          <a:xfrm>
+            <a:off x="4663440" y="2103120"/>
+            <a:ext cx="3200400" cy="3200400"/>
+          </a:xfrm>
+          <a:prstGeom prst="roundRect">
+            <a:avLst/>
+          </a:prstGeom>
+          <a:solidFill>
+            <a:srgbClr val="357ABD"/>
+          </a:solidFill>
+          <a:ln>
+            <a:noFill/>
+          </a:ln>
+        </p:spPr>
+        <p:style>
+          <a:lnRef idx="1">
+            <a:schemeClr val="accent1"/>
+          </a:lnRef>
+          <a:fillRef idx="3">
+            <a:schemeClr val="accent1"/>
+          </a:fillRef>
+          <a:effectRef idx="2">
+            <a:schemeClr val="accent1"/>
+          </a:effectRef>
+          <a:fontRef idx="minor">
+            <a:schemeClr val="lt1"/>
+          </a:fontRef>
+        </p:style>
+        <p:txBody>
+          <a:bodyPr rtlCol="0" anchor="ctr"/>
+          <a:lstStyle/>
+          <a:p>
+            <a:pPr algn="ctr"/>
+          </a:p>
+        </p:txBody>
+      </p:sp>
+      <p:sp>
+        <p:nvSpPr>
+          <p:cNvPr id="10" name="TextBox 9"/>
+          <p:cNvSpPr txBox="1"/>
+          <p:nvPr/>
+        </p:nvSpPr>
+        <p:spPr>
+          <a:xfrm>
+            <a:off x="4754879" y="2286000"/>
+            <a:ext cx="3017520" cy="1097280"/>
+          </a:xfrm>
+          <a:prstGeom prst="rect">
+            <a:avLst/>
+          </a:prstGeom>
+          <a:noFill/>
+        </p:spPr>
+        <p:txBody>
+          <a:bodyPr wrap="square">
+            <a:spAutoFit/>
+          </a:bodyPr>
+          <a:lstStyle/>
+          <a:p>
+            <a:pPr algn="ctr">
+              <a:defRPr sz="4000" b="1">
+                <a:solidFill>
+                  <a:srgbClr val="FFFFFF"/>
+                </a:solidFill>
+                <a:latin typeface="Calibri"/>
+              </a:defRPr>
+            </a:pPr>
+            <a:r>
+              <a:t>9.5/10</a:t>
+            </a:r>
+          </a:p>
+        </p:txBody>
+      </p:sp>
+      <p:sp>
+        <p:nvSpPr>
+          <p:cNvPr id="11" name="TextBox 10"/>
+          <p:cNvSpPr txBox="1"/>
+          <p:nvPr/>
+        </p:nvSpPr>
+        <p:spPr>
+          <a:xfrm>
+            <a:off x="4754879" y="3474720"/>
+            <a:ext cx="3017520" cy="914400"/>
+          </a:xfrm>
+          <a:prstGeom prst="rect">
+            <a:avLst/>
+          </a:prstGeom>
+          <a:noFill/>
+        </p:spPr>
+        <p:txBody>
+          <a:bodyPr wrap="square">
+            <a:spAutoFit/>
+          </a:bodyPr>
+          <a:lstStyle/>
+          <a:p>
+            <a:pPr algn="ctr">
+              <a:defRPr sz="1500" b="0">
+                <a:solidFill>
+                  <a:srgbClr val="FFFFFF"/>
+                </a:solidFill>
+                <a:latin typeface="Calibri"/>
+              </a:defRPr>
+            </a:pPr>
+            <a:r>
+              <a:t>What you get with</a:t>
+            </a:r>
+            <a:br/>
+            <a:r>
+              <a:t>purpose-built tools + GPT-4.1</a:t>
+            </a:r>
+          </a:p>
+        </p:txBody>
+      </p:sp>
+      <p:sp>
+        <p:nvSpPr>
+          <p:cNvPr id="12" name="TextBox 11"/>
+          <p:cNvSpPr txBox="1"/>
+          <p:nvPr/>
+        </p:nvSpPr>
+        <p:spPr>
+          <a:xfrm>
+            <a:off x="4754879" y="4572000"/>
+            <a:ext cx="3017520" cy="457200"/>
+          </a:xfrm>
+          <a:prstGeom prst="rect">
+            <a:avLst/>
+          </a:prstGeom>
+          <a:noFill/>
+        </p:spPr>
+        <p:txBody>
+          <a:bodyPr wrap="square">
+            <a:spAutoFit/>
+          </a:bodyPr>
+          <a:lstStyle/>
+          <a:p>
+            <a:pPr algn="ctr">
+              <a:defRPr sz="1300" b="0">
+                <a:solidFill>
+                  <a:srgbClr val="DDEEFF"/>
+                </a:solidFill>
+                <a:latin typeface="Calibri"/>
+              </a:defRPr>
+            </a:pPr>
+            <a:r>
+              <a:t>Levels 3-4</a:t>
+            </a:r>
+          </a:p>
+        </p:txBody>
+      </p:sp>
+      <p:sp>
+        <p:nvSpPr>
+          <p:cNvPr id="13" name="Rounded Rectangle 12"/>
+          <p:cNvSpPr/>
+          <p:nvPr/>
+        </p:nvSpPr>
+        <p:spPr>
+          <a:xfrm>
+            <a:off x="8229600" y="2103120"/>
+            <a:ext cx="3200400" cy="3200400"/>
+          </a:xfrm>
+          <a:prstGeom prst="roundRect">
+            <a:avLst/>
+          </a:prstGeom>
+          <a:solidFill>
+            <a:srgbClr val="E53935"/>
+          </a:solidFill>
+          <a:ln>
+            <a:noFill/>
+          </a:ln>
+        </p:spPr>
+        <p:style>
+          <a:lnRef idx="1">
+            <a:schemeClr val="accent1"/>
+          </a:lnRef>
+          <a:fillRef idx="3">
+            <a:schemeClr val="accent1"/>
+          </a:fillRef>
+          <a:effectRef idx="2">
+            <a:schemeClr val="accent1"/>
+          </a:effectRef>
+          <a:fontRef idx="minor">
+            <a:schemeClr val="lt1"/>
+          </a:fontRef>
+        </p:style>
+        <p:txBody>
+          <a:bodyPr rtlCol="0" anchor="ctr"/>
+          <a:lstStyle/>
+          <a:p>
+            <a:pPr algn="ctr"/>
+          </a:p>
+        </p:txBody>
+      </p:sp>
+      <p:sp>
+        <p:nvSpPr>
+          <p:cNvPr id="14" name="TextBox 13"/>
+          <p:cNvSpPr txBox="1"/>
+          <p:nvPr/>
+        </p:nvSpPr>
+        <p:spPr>
+          <a:xfrm>
+            <a:off x="8321040" y="2286000"/>
+            <a:ext cx="3017520" cy="1097280"/>
+          </a:xfrm>
+          <a:prstGeom prst="rect">
+            <a:avLst/>
+          </a:prstGeom>
+          <a:noFill/>
+        </p:spPr>
+        <p:txBody>
+          <a:bodyPr wrap="square">
+            <a:spAutoFit/>
+          </a:bodyPr>
+          <a:lstStyle/>
+          <a:p>
+            <a:pPr algn="ctr">
+              <a:defRPr sz="4000" b="1">
+                <a:solidFill>
+                  <a:srgbClr val="FFFFFF"/>
+                </a:solidFill>
+                <a:latin typeface="Calibri"/>
+              </a:defRPr>
+            </a:pPr>
+            <a:r>
+              <a:t>Trust</a:t>
+            </a:r>
+            <a:br/>
+            <a:r>
+              <a:t>But Verify</a:t>
+            </a:r>
+          </a:p>
+        </p:txBody>
+      </p:sp>
+      <p:sp>
+        <p:nvSpPr>
+          <p:cNvPr id="15" name="TextBox 14"/>
+          <p:cNvSpPr txBox="1"/>
+          <p:nvPr/>
+        </p:nvSpPr>
+        <p:spPr>
+          <a:xfrm>
+            <a:off x="8321040" y="3474720"/>
+            <a:ext cx="3017520" cy="914400"/>
+          </a:xfrm>
+          <a:prstGeom prst="rect">
+            <a:avLst/>
+          </a:prstGeom>
+          <a:noFill/>
+        </p:spPr>
+        <p:txBody>
+          <a:bodyPr wrap="square">
+            <a:spAutoFit/>
+          </a:bodyPr>
+          <a:lstStyle/>
+          <a:p>
+            <a:pPr algn="ctr">
+              <a:defRPr sz="1500" b="0">
+                <a:solidFill>
+                  <a:srgbClr val="FFFFFF"/>
+                </a:solidFill>
+                <a:latin typeface="Calibri"/>
+              </a:defRPr>
+            </a:pPr>
+            <a:r>
+              <a:t>No score is high enough</a:t>
+            </a:r>
+            <a:br/>
+            <a:r>
+              <a:t>to skip human review</a:t>
+            </a:r>
+          </a:p>
+        </p:txBody>
+      </p:sp>
+      <p:sp>
+        <p:nvSpPr>
+          <p:cNvPr id="16" name="TextBox 15"/>
+          <p:cNvSpPr txBox="1"/>
+          <p:nvPr/>
+        </p:nvSpPr>
+        <p:spPr>
+          <a:xfrm>
+            <a:off x="8321040" y="4572000"/>
+            <a:ext cx="3017520" cy="457200"/>
+          </a:xfrm>
+          <a:prstGeom prst="rect">
+            <a:avLst/>
+          </a:prstGeom>
+          <a:noFill/>
+        </p:spPr>
+        <p:txBody>
+          <a:bodyPr wrap="square">
+            <a:spAutoFit/>
+          </a:bodyPr>
+          <a:lstStyle/>
+          <a:p>
+            <a:pPr algn="ctr">
+              <a:defRPr sz="1300" b="0">
+                <a:solidFill>
+                  <a:srgbClr val="DDEEFF"/>
+                </a:solidFill>
+                <a:latin typeface="Calibri"/>
+              </a:defRPr>
+            </a:pPr>
+            <a:r>
+              <a:t>Level 5</a:t>
+            </a:r>
+          </a:p>
+        </p:txBody>
+      </p:sp>
+      <p:sp>
+        <p:nvSpPr>
+          <p:cNvPr id="17" name="TextBox 16"/>
+          <p:cNvSpPr txBox="1"/>
+          <p:nvPr/>
+        </p:nvSpPr>
+        <p:spPr>
+          <a:xfrm>
+            <a:off x="1097280" y="5486400"/>
+            <a:ext cx="9966960" cy="457200"/>
+          </a:xfrm>
+          <a:prstGeom prst="rect">
+            <a:avLst/>
+          </a:prstGeom>
+          <a:noFill/>
+        </p:spPr>
+        <p:txBody>
+          <a:bodyPr wrap="square">
+            <a:spAutoFit/>
+          </a:bodyPr>
+          <a:lstStyle/>
+          <a:p>
+            <a:pPr algn="ctr">
+              <a:defRPr sz="1500" b="1">
+                <a:solidFill>
+                  <a:srgbClr val="555555"/>
+                </a:solidFill>
+                <a:latin typeface="Calibri"/>
+              </a:defRPr>
+            </a:pPr>
+            <a:r>
+              <a:t>"The question is not 'should we deploy AI?' The question is 'which level are we operating at, and have we invested accordingly?'"</a:t>
+            </a:r>
+          </a:p>
+        </p:txBody>
+      </p:sp>
+      <p:sp>
+        <p:nvSpPr>
+          <p:cNvPr id="18" name="Rounded Rectangle 17"/>
+          <p:cNvSpPr/>
+          <p:nvPr/>
+        </p:nvSpPr>
+        <p:spPr>
+          <a:xfrm>
+            <a:off x="792327" y="6035040"/>
+            <a:ext cx="2011680" cy="411480"/>
+          </a:xfrm>
+          <a:prstGeom prst="roundRect">
+            <a:avLst/>
+          </a:prstGeom>
+          <a:solidFill>
+            <a:srgbClr val="4CAF50"/>
+          </a:solidFill>
+          <a:ln>
+            <a:noFill/>
+          </a:ln>
+        </p:spPr>
+        <p:style>
+          <a:lnRef idx="1">
+            <a:schemeClr val="accent1"/>
+          </a:lnRef>
+          <a:fillRef idx="3">
+            <a:schemeClr val="accent1"/>
+          </a:fillRef>
+          <a:effectRef idx="2">
+            <a:schemeClr val="accent1"/>
+          </a:effectRef>
+          <a:fontRef idx="minor">
+            <a:schemeClr val="lt1"/>
+          </a:fontRef>
+        </p:style>
+        <p:txBody>
+          <a:bodyPr rtlCol="0" anchor="ctr" wrap="none"/>
+          <a:lstStyle/>
+          <a:p>
+            <a:pPr algn="ctr">
+              <a:defRPr sz="1200" b="1">
+                <a:solidFill>
+                  <a:srgbClr val="FFFFFF"/>
+                </a:solidFill>
+                <a:latin typeface="Calibri"/>
+              </a:defRPr>
+            </a:pPr>
+            <a:r>
+              <a:t>L1: Discovery</a:t>
+            </a:r>
+          </a:p>
+        </p:txBody>
+      </p:sp>
+      <p:sp>
+        <p:nvSpPr>
+          <p:cNvPr id="19" name="Rounded Rectangle 18"/>
+          <p:cNvSpPr/>
+          <p:nvPr/>
+        </p:nvSpPr>
+        <p:spPr>
+          <a:xfrm>
+            <a:off x="2941167" y="6035040"/>
+            <a:ext cx="2011680" cy="411480"/>
+          </a:xfrm>
+          <a:prstGeom prst="roundRect">
+            <a:avLst/>
+          </a:prstGeom>
+          <a:solidFill>
+            <a:srgbClr val="8BC34A"/>
+          </a:solidFill>
+          <a:ln>
+            <a:noFill/>
+          </a:ln>
+        </p:spPr>
+        <p:style>
+          <a:lnRef idx="1">
+            <a:schemeClr val="accent1"/>
+          </a:lnRef>
+          <a:fillRef idx="3">
+            <a:schemeClr val="accent1"/>
+          </a:fillRef>
+          <a:effectRef idx="2">
+            <a:schemeClr val="accent1"/>
+          </a:effectRef>
+          <a:fontRef idx="minor">
+            <a:schemeClr val="lt1"/>
+          </a:fontRef>
+        </p:style>
+        <p:txBody>
+          <a:bodyPr rtlCol="0" anchor="ctr" wrap="none"/>
+          <a:lstStyle/>
+          <a:p>
+            <a:pPr algn="ctr">
+              <a:defRPr sz="1200" b="1">
+                <a:solidFill>
+                  <a:srgbClr val="FFFFFF"/>
+                </a:solidFill>
+                <a:latin typeface="Calibri"/>
+              </a:defRPr>
+            </a:pPr>
+            <a:r>
+              <a:t>L2: Summarization</a:t>
+            </a:r>
+          </a:p>
+        </p:txBody>
+      </p:sp>
+      <p:sp>
+        <p:nvSpPr>
+          <p:cNvPr id="20" name="Rounded Rectangle 19"/>
+          <p:cNvSpPr/>
+          <p:nvPr/>
+        </p:nvSpPr>
+        <p:spPr>
+          <a:xfrm>
+            <a:off x="5090007" y="6035040"/>
+            <a:ext cx="2011680" cy="411480"/>
+          </a:xfrm>
+          <a:prstGeom prst="roundRect">
+            <a:avLst/>
+          </a:prstGeom>
+          <a:solidFill>
+            <a:srgbClr val="FF9800"/>
+          </a:solidFill>
+          <a:ln>
+            <a:noFill/>
+          </a:ln>
+        </p:spPr>
+        <p:style>
+          <a:lnRef idx="1">
+            <a:schemeClr val="accent1"/>
+          </a:lnRef>
+          <a:fillRef idx="3">
+            <a:schemeClr val="accent1"/>
+          </a:fillRef>
+          <a:effectRef idx="2">
+            <a:schemeClr val="accent1"/>
+          </a:effectRef>
+          <a:fontRef idx="minor">
+            <a:schemeClr val="lt1"/>
+          </a:fontRef>
+        </p:style>
+        <p:txBody>
+          <a:bodyPr rtlCol="0" anchor="ctr" wrap="none"/>
+          <a:lstStyle/>
+          <a:p>
+            <a:pPr algn="ctr">
+              <a:defRPr sz="1200" b="1">
+                <a:solidFill>
+                  <a:srgbClr val="FFFFFF"/>
+                </a:solidFill>
+                <a:latin typeface="Calibri"/>
+              </a:defRPr>
+            </a:pPr>
+            <a:r>
+              <a:t>L3: Operational</a:t>
+            </a:r>
+          </a:p>
+        </p:txBody>
+      </p:sp>
+      <p:sp>
+        <p:nvSpPr>
+          <p:cNvPr id="21" name="Rounded Rectangle 20"/>
+          <p:cNvSpPr/>
+          <p:nvPr/>
+        </p:nvSpPr>
+        <p:spPr>
+          <a:xfrm>
+            <a:off x="7238847" y="6035040"/>
+            <a:ext cx="2011680" cy="411480"/>
+          </a:xfrm>
+          <a:prstGeom prst="roundRect">
+            <a:avLst/>
+          </a:prstGeom>
+          <a:solidFill>
+            <a:srgbClr val="F4511E"/>
+          </a:solidFill>
+          <a:ln>
+            <a:noFill/>
+          </a:ln>
+        </p:spPr>
+        <p:style>
+          <a:lnRef idx="1">
+            <a:schemeClr val="accent1"/>
+          </a:lnRef>
+          <a:fillRef idx="3">
+            <a:schemeClr val="accent1"/>
+          </a:fillRef>
+          <a:effectRef idx="2">
+            <a:schemeClr val="accent1"/>
+          </a:effectRef>
+          <a:fontRef idx="minor">
+            <a:schemeClr val="lt1"/>
+          </a:fontRef>
+        </p:style>
+        <p:txBody>
+          <a:bodyPr rtlCol="0" anchor="ctr" wrap="none"/>
+          <a:lstStyle/>
+          <a:p>
+            <a:pPr algn="ctr">
+              <a:defRPr sz="1200" b="1">
+                <a:solidFill>
+                  <a:srgbClr val="FFFFFF"/>
+                </a:solidFill>
+                <a:latin typeface="Calibri"/>
+              </a:defRPr>
+            </a:pPr>
+            <a:r>
+              <a:t>L4: Investigative</a:t>
+            </a:r>
+          </a:p>
+        </p:txBody>
+      </p:sp>
+      <p:sp>
+        <p:nvSpPr>
+          <p:cNvPr id="22" name="Rounded Rectangle 21"/>
+          <p:cNvSpPr/>
+          <p:nvPr/>
+        </p:nvSpPr>
+        <p:spPr>
+          <a:xfrm>
+            <a:off x="9387687" y="6035040"/>
+            <a:ext cx="2011680" cy="411480"/>
+          </a:xfrm>
+          <a:prstGeom prst="roundRect">
+            <a:avLst/>
+          </a:prstGeom>
+          <a:solidFill>
+            <a:srgbClr val="E53935"/>
+          </a:solidFill>
+          <a:ln>
+            <a:noFill/>
+          </a:ln>
+        </p:spPr>
+        <p:style>
+          <a:lnRef idx="1">
+            <a:schemeClr val="accent1"/>
+          </a:lnRef>
+          <a:fillRef idx="3">
+            <a:schemeClr val="accent1"/>
+          </a:fillRef>
+          <a:effectRef idx="2">
+            <a:schemeClr val="accent1"/>
+          </a:effectRef>
+          <a:fontRef idx="minor">
+            <a:schemeClr val="lt1"/>
+          </a:fontRef>
+        </p:style>
+        <p:txBody>
+          <a:bodyPr rtlCol="0" anchor="ctr" wrap="none"/>
+          <a:lstStyle/>
+          <a:p>
+            <a:pPr algn="ctr">
+              <a:defRPr sz="1200" b="1">
+                <a:solidFill>
+                  <a:srgbClr val="FFFFFF"/>
+                </a:solidFill>
+                <a:latin typeface="Calibri"/>
+              </a:defRPr>
+            </a:pPr>
+            <a:r>
+              <a:t>L5: Adjudicative</a:t>
+            </a:r>
+          </a:p>
+        </p:txBody>
+      </p:sp>
+      <p:sp>
+        <p:nvSpPr>
+          <p:cNvPr id="23" name="TextBox 22"/>
+          <p:cNvSpPr txBox="1"/>
+          <p:nvPr/>
+        </p:nvSpPr>
+        <p:spPr>
+          <a:xfrm>
+            <a:off x="457200" y="6446520"/>
+            <a:ext cx="2743200" cy="320040"/>
+          </a:xfrm>
+          <a:prstGeom prst="rect">
+            <a:avLst/>
+          </a:prstGeom>
+          <a:noFill/>
+        </p:spPr>
+        <p:txBody>
+          <a:bodyPr wrap="square">
+            <a:spAutoFit/>
+          </a:bodyPr>
+          <a:lstStyle/>
+          <a:p>
+            <a:pPr algn="l">
+              <a:defRPr sz="1000" b="0">
+                <a:solidFill>
+                  <a:srgbClr val="555555"/>
+                </a:solidFill>
+                <a:latin typeface="Calibri"/>
+              </a:defRPr>
+            </a:pPr>
+            <a:r>
+              <a:t>Confidential  |  March 2026</a:t>
+            </a:r>
+          </a:p>
+        </p:txBody>
+      </p:sp>
+    </p:spTree>
+  </p:cSld>
+  <p:clrMapOvr>
+    <a:masterClrMapping/>
+  </p:clrMapOvr>
+</p:sld>
+</file>
+
+<file path=ppt/slides/slide26.xml><?xml version="1.0" encoding="utf-8"?>
 <p:sld xmlns:a="http://schemas.openxmlformats.org/drawingml/2006/main" xmlns:p="http://schemas.openxmlformats.org/presentationml/2006/main" xmlns:r="http://schemas.openxmlformats.org/officeDocument/2006/relationships">
   <p:cSld>
     <p:bg>
@@ -22129,7 +23766,7 @@
 </p:sld>
 </file>
 
-<file path=ppt/slides/slide26.xml><?xml version="1.0" encoding="utf-8"?>
+<file path=ppt/slides/slide27.xml><?xml version="1.0" encoding="utf-8"?>
 <p:sld xmlns:a="http://schemas.openxmlformats.org/drawingml/2006/main" xmlns:p="http://schemas.openxmlformats.org/presentationml/2006/main" xmlns:r="http://schemas.openxmlformats.org/officeDocument/2006/relationships">
   <p:cSld>
     <p:bg>

--- a/decks/agent-fidelity-spectrum.pptx
+++ b/decks/agent-fidelity-spectrum.pptx
@@ -4454,7 +4454,7 @@
               </a:defRPr>
             </a:pPr>
             <a:r>
-              <a:t>Findings from 462 Test Runs Across 21 Agent Configurations</a:t>
+              <a:t>Findings from 462 Test Runs Across 21 Agent Configurations and 6 Models</a:t>
             </a:r>
           </a:p>
         </p:txBody>
@@ -4791,7 +4791,7 @@
               </a:defRPr>
             </a:pPr>
             <a:r>
-              <a:t>462 test runs  |  21 agents  |  27 slides  |  2 use cases</a:t>
+              <a:t>462 test runs  |  21 agents  |  6 models  |  27 slides  |  2 use cases</a:t>
             </a:r>
           </a:p>
         </p:txBody>
@@ -6187,7 +6187,7 @@
                 </a:solidFill>
                 <a:latin typeface="Calibri"/>
               </a:rPr>
-              <a:t>Government Cloud Copilot Studio currently defaults to GPT-4o</a:t>
+              <a:t>Government Cloud currently defaults to GPT-4o; expanded model availability on the roadmap</a:t>
             </a:r>
           </a:p>
           <a:p>
@@ -14026,7 +14026,7 @@
               </a:defRPr>
             </a:pPr>
             <a:r>
-              <a:t>462 test runs across 21 agent configurations, 2 government use cases, and 7 testing rounds. Three gaps emerged at the higher levels: tools, data, and model. Every gap was fixable, and none required AI expertise.</a:t>
+              <a:t>462 test runs across 21 agent configurations and 6 models, 2 government use cases, and 7 testing rounds. Three gaps emerged at the higher levels: tools, data, and model. Every gap was fixable, and none required AI expertise.</a:t>
             </a:r>
           </a:p>
         </p:txBody>
@@ -21705,7 +21705,7 @@
               </a:defRPr>
             </a:pPr>
             <a:r>
-              <a:t>462 test runs, 21 agent configurations, 2 use cases</a:t>
+              <a:t>462 test runs, 21 agent configurations, 6 models, 2 use cases</a:t>
             </a:r>
           </a:p>
         </p:txBody>
@@ -21741,7 +21741,7 @@
               </a:defRPr>
             </a:pPr>
             <a:r>
-              <a:t>Use Case 1: Legal Case Analysis (15 agents)</a:t>
+              <a:t>Use Case 1: Legal Case Analysis (16 agents)</a:t>
             </a:r>
           </a:p>
         </p:txBody>
@@ -21756,7 +21756,7 @@
         </p:nvGraphicFramePr>
         <p:xfrm>
           <a:off x="731520" y="2057400"/>
-          <a:ext cx="4297680" cy="6583680"/>
+          <a:ext cx="4297680" cy="6995160"/>
         </p:xfrm>
         <a:graphic>
           <a:graphicData uri="http://schemas.openxmlformats.org/drawingml/2006/table">
@@ -22228,7 +22228,7 @@
                         </a:defRPr>
                       </a:pPr>
                       <a:r>
-                        <a:t>CS SP/DOCX/Com</a:t>
+                        <a:t>CS DV/Com</a:t>
                       </a:r>
                     </a:p>
                   </a:txBody>
@@ -22252,7 +22252,155 @@
                         </a:defRPr>
                       </a:pPr>
                       <a:r>
+                        <a:t>GPT-5 Reasoning</a:t>
+                      </a:r>
+                    </a:p>
+                  </a:txBody>
+                  <a:tcPr anchor="ctr">
+                    <a:solidFill>
+                      <a:srgbClr val="E8F0F8"/>
+                    </a:solidFill>
+                  </a:tcPr>
+                </a:tc>
+                <a:tc>
+                  <a:txBody>
+                    <a:bodyPr/>
+                    <a:lstStyle/>
+                    <a:p>
+                      <a:pPr algn="ctr">
+                        <a:defRPr sz="900">
+                          <a:solidFill>
+                            <a:srgbClr val="2D2D2D"/>
+                          </a:solidFill>
+                          <a:latin typeface="Calibri"/>
+                        </a:defRPr>
+                      </a:pPr>
+                      <a:r>
+                        <a:t>10/10</a:t>
+                      </a:r>
+                    </a:p>
+                  </a:txBody>
+                  <a:tcPr anchor="ctr">
+                    <a:solidFill>
+                      <a:srgbClr val="E8F0F8"/>
+                    </a:solidFill>
+                  </a:tcPr>
+                </a:tc>
+              </a:tr>
+              <a:tr h="411480">
+                <a:tc>
+                  <a:txBody>
+                    <a:bodyPr/>
+                    <a:lstStyle/>
+                    <a:p>
+                      <a:pPr algn="ctr">
+                        <a:defRPr sz="900">
+                          <a:solidFill>
+                            <a:srgbClr val="2D2D2D"/>
+                          </a:solidFill>
+                          <a:latin typeface="Calibri"/>
+                        </a:defRPr>
+                      </a:pPr>
+                      <a:r>
+                        <a:t>CS SP/DOCX/Com</a:t>
+                      </a:r>
+                    </a:p>
+                  </a:txBody>
+                  <a:tcPr anchor="ctr">
+                    <a:solidFill>
+                      <a:srgbClr val="FFFFFF"/>
+                    </a:solidFill>
+                  </a:tcPr>
+                </a:tc>
+                <a:tc>
+                  <a:txBody>
+                    <a:bodyPr/>
+                    <a:lstStyle/>
+                    <a:p>
+                      <a:pPr algn="ctr">
+                        <a:defRPr sz="900">
+                          <a:solidFill>
+                            <a:srgbClr val="2D2D2D"/>
+                          </a:solidFill>
+                          <a:latin typeface="Calibri"/>
+                        </a:defRPr>
+                      </a:pPr>
+                      <a:r>
                         <a:t>GPT-4.1</a:t>
+                      </a:r>
+                    </a:p>
+                  </a:txBody>
+                  <a:tcPr anchor="ctr">
+                    <a:solidFill>
+                      <a:srgbClr val="FFFFFF"/>
+                    </a:solidFill>
+                  </a:tcPr>
+                </a:tc>
+                <a:tc>
+                  <a:txBody>
+                    <a:bodyPr/>
+                    <a:lstStyle/>
+                    <a:p>
+                      <a:pPr algn="ctr">
+                        <a:defRPr sz="900">
+                          <a:solidFill>
+                            <a:srgbClr val="2D2D2D"/>
+                          </a:solidFill>
+                          <a:latin typeface="Calibri"/>
+                        </a:defRPr>
+                      </a:pPr>
+                      <a:r>
+                        <a:t>9/10</a:t>
+                      </a:r>
+                    </a:p>
+                  </a:txBody>
+                  <a:tcPr anchor="ctr">
+                    <a:solidFill>
+                      <a:srgbClr val="FFFFFF"/>
+                    </a:solidFill>
+                  </a:tcPr>
+                </a:tc>
+              </a:tr>
+              <a:tr h="411480">
+                <a:tc>
+                  <a:txBody>
+                    <a:bodyPr/>
+                    <a:lstStyle/>
+                    <a:p>
+                      <a:pPr algn="ctr">
+                        <a:defRPr sz="900">
+                          <a:solidFill>
+                            <a:srgbClr val="2D2D2D"/>
+                          </a:solidFill>
+                          <a:latin typeface="Calibri"/>
+                        </a:defRPr>
+                      </a:pPr>
+                      <a:r>
+                        <a:t>CS MCP/GCC</a:t>
+                      </a:r>
+                    </a:p>
+                  </a:txBody>
+                  <a:tcPr anchor="ctr">
+                    <a:solidFill>
+                      <a:srgbClr val="E8F0F8"/>
+                    </a:solidFill>
+                  </a:tcPr>
+                </a:tc>
+                <a:tc>
+                  <a:txBody>
+                    <a:bodyPr/>
+                    <a:lstStyle/>
+                    <a:p>
+                      <a:pPr algn="ctr">
+                        <a:defRPr sz="900">
+                          <a:solidFill>
+                            <a:srgbClr val="2D2D2D"/>
+                          </a:solidFill>
+                          <a:latin typeface="Calibri"/>
+                        </a:defRPr>
+                      </a:pPr>
+                      <a:r>
+                        <a:t>GPT-4o</a:t>
                       </a:r>
                     </a:p>
                   </a:txBody>
@@ -22302,7 +22450,7 @@
                         </a:defRPr>
                       </a:pPr>
                       <a:r>
-                        <a:t>CS MCP/GCC</a:t>
+                        <a:t>CS SP/PDF/GCC</a:t>
                       </a:r>
                     </a:p>
                   </a:txBody>
@@ -22376,7 +22524,7 @@
                         </a:defRPr>
                       </a:pPr>
                       <a:r>
-                        <a:t>CS SP/PDF/GCC</a:t>
+                        <a:t>CS KB/PDF/GCC</a:t>
                       </a:r>
                     </a:p>
                   </a:txBody>
@@ -22450,7 +22598,7 @@
                         </a:defRPr>
                       </a:pPr>
                       <a:r>
-                        <a:t>CS KB/PDF/GCC</a:t>
+                        <a:t>CS KB/PDF/Com</a:t>
                       </a:r>
                     </a:p>
                   </a:txBody>
@@ -22474,7 +22622,7 @@
                         </a:defRPr>
                       </a:pPr>
                       <a:r>
-                        <a:t>GPT-4o</a:t>
+                        <a:t>GPT-4.1</a:t>
                       </a:r>
                     </a:p>
                   </a:txBody>
@@ -22498,7 +22646,7 @@
                         </a:defRPr>
                       </a:pPr>
                       <a:r>
-                        <a:t>9/10</a:t>
+                        <a:t>8/10</a:t>
                       </a:r>
                     </a:p>
                   </a:txBody>
@@ -22524,7 +22672,7 @@
                         </a:defRPr>
                       </a:pPr>
                       <a:r>
-                        <a:t>CS KB/PDF/Com</a:t>
+                        <a:t>CS KB/DOCX/GCC</a:t>
                       </a:r>
                     </a:p>
                   </a:txBody>
@@ -22548,7 +22696,7 @@
                         </a:defRPr>
                       </a:pPr>
                       <a:r>
-                        <a:t>GPT-4.1</a:t>
+                        <a:t>GPT-4o</a:t>
                       </a:r>
                     </a:p>
                   </a:txBody>
@@ -22598,7 +22746,7 @@
                         </a:defRPr>
                       </a:pPr>
                       <a:r>
-                        <a:t>CS KB/DOCX/GCC</a:t>
+                        <a:t>CS SP/DOCX/GCC</a:t>
                       </a:r>
                     </a:p>
                   </a:txBody>
@@ -22646,7 +22794,7 @@
                         </a:defRPr>
                       </a:pPr>
                       <a:r>
-                        <a:t>8/10</a:t>
+                        <a:t>7/10</a:t>
                       </a:r>
                     </a:p>
                   </a:txBody>
@@ -22672,7 +22820,7 @@
                         </a:defRPr>
                       </a:pPr>
                       <a:r>
-                        <a:t>CS SP/DOCX/GCC</a:t>
+                        <a:t>CS DV/Com</a:t>
                       </a:r>
                     </a:p>
                   </a:txBody>
@@ -22696,7 +22844,7 @@
                         </a:defRPr>
                       </a:pPr>
                       <a:r>
-                        <a:t>GPT-4o</a:t>
+                        <a:t>GPT-4.1</a:t>
                       </a:r>
                     </a:p>
                   </a:txBody>
@@ -22720,7 +22868,7 @@
                         </a:defRPr>
                       </a:pPr>
                       <a:r>
-                        <a:t>7/10</a:t>
+                        <a:t>6/10</a:t>
                       </a:r>
                     </a:p>
                   </a:txBody>
@@ -22770,7 +22918,7 @@
                         </a:defRPr>
                       </a:pPr>
                       <a:r>
-                        <a:t>GPT-4.1</a:t>
+                        <a:t>GPT-5 Auto</a:t>
                       </a:r>
                     </a:p>
                   </a:txBody>
@@ -22794,7 +22942,7 @@
                         </a:defRPr>
                       </a:pPr>
                       <a:r>
-                        <a:t>6/10</a:t>
+                        <a:t>4/10</a:t>
                       </a:r>
                     </a:p>
                   </a:txBody>
@@ -22820,7 +22968,7 @@
                         </a:defRPr>
                       </a:pPr>
                       <a:r>
-                        <a:t>CS DV/Com</a:t>
+                        <a:t>CS DV/GCC</a:t>
                       </a:r>
                     </a:p>
                   </a:txBody>
@@ -22844,7 +22992,7 @@
                         </a:defRPr>
                       </a:pPr>
                       <a:r>
-                        <a:t>GPT-5 Auto</a:t>
+                        <a:t>GPT-4o</a:t>
                       </a:r>
                     </a:p>
                   </a:txBody>
@@ -22868,87 +23016,13 @@
                         </a:defRPr>
                       </a:pPr>
                       <a:r>
-                        <a:t>4/10</a:t>
+                        <a:t>2/10</a:t>
                       </a:r>
                     </a:p>
                   </a:txBody>
                   <a:tcPr anchor="ctr">
                     <a:solidFill>
                       <a:srgbClr val="E8F0F8"/>
-                    </a:solidFill>
-                  </a:tcPr>
-                </a:tc>
-              </a:tr>
-              <a:tr h="411480">
-                <a:tc>
-                  <a:txBody>
-                    <a:bodyPr/>
-                    <a:lstStyle/>
-                    <a:p>
-                      <a:pPr algn="ctr">
-                        <a:defRPr sz="900">
-                          <a:solidFill>
-                            <a:srgbClr val="2D2D2D"/>
-                          </a:solidFill>
-                          <a:latin typeface="Calibri"/>
-                        </a:defRPr>
-                      </a:pPr>
-                      <a:r>
-                        <a:t>CS DV/GCC</a:t>
-                      </a:r>
-                    </a:p>
-                  </a:txBody>
-                  <a:tcPr anchor="ctr">
-                    <a:solidFill>
-                      <a:srgbClr val="FFFFFF"/>
-                    </a:solidFill>
-                  </a:tcPr>
-                </a:tc>
-                <a:tc>
-                  <a:txBody>
-                    <a:bodyPr/>
-                    <a:lstStyle/>
-                    <a:p>
-                      <a:pPr algn="ctr">
-                        <a:defRPr sz="900">
-                          <a:solidFill>
-                            <a:srgbClr val="2D2D2D"/>
-                          </a:solidFill>
-                          <a:latin typeface="Calibri"/>
-                        </a:defRPr>
-                      </a:pPr>
-                      <a:r>
-                        <a:t>GPT-4o</a:t>
-                      </a:r>
-                    </a:p>
-                  </a:txBody>
-                  <a:tcPr anchor="ctr">
-                    <a:solidFill>
-                      <a:srgbClr val="FFFFFF"/>
-                    </a:solidFill>
-                  </a:tcPr>
-                </a:tc>
-                <a:tc>
-                  <a:txBody>
-                    <a:bodyPr/>
-                    <a:lstStyle/>
-                    <a:p>
-                      <a:pPr algn="ctr">
-                        <a:defRPr sz="900">
-                          <a:solidFill>
-                            <a:srgbClr val="2D2D2D"/>
-                          </a:solidFill>
-                          <a:latin typeface="Calibri"/>
-                        </a:defRPr>
-                      </a:pPr>
-                      <a:r>
-                        <a:t>2/10</a:t>
-                      </a:r>
-                    </a:p>
-                  </a:txBody>
-                  <a:tcPr anchor="ctr">
-                    <a:solidFill>
-                      <a:srgbClr val="FFFFFF"/>
                     </a:solidFill>
                   </a:tcPr>
                 </a:tc>
@@ -23717,7 +23791,7 @@
               </a:defRPr>
             </a:pPr>
             <a:r>
-              <a:t>Dataverse MCP: Sonnet 4.6 (10/10), GPT-4.1 (6/10), GPT-5 Auto (4/10), GPT-4o (2/10). Newer models are not always better.</a:t>
+              <a:t>Dataverse MCP (5 models): Sonnet 4.6 (10/10), GPT-5 Reasoning (10/10), GPT-4.1 (6/10), GPT-5 Auto (4/10), GPT-4o (2/10). Reasoning models close the gap.</a:t>
             </a:r>
           </a:p>
         </p:txBody>
@@ -25609,7 +25683,11 @@
             </a:r>
             <a:br/>
             <a:r>
-              <a:t>configurations, scored by hand.</a:t>
+              <a:t>configurations and 6 models,</a:t>
+            </a:r>
+            <a:br/>
+            <a:r>
+              <a:t>scored by hand.</a:t>
             </a:r>
             <a:br/>
             <a:r>

--- a/decks/agent-fidelity-spectrum.pptx
+++ b/decks/agent-fidelity-spectrum.pptx
@@ -17568,7 +17568,7 @@
               </a:defRPr>
             </a:pPr>
             <a:r>
-              <a:t>Full battery: 1/11 -&gt; 6/11 -&gt; 11/11</a:t>
+              <a:t>Full battery: 3.2/11 -&gt; 6/11 -&gt; 11/11</a:t>
             </a:r>
           </a:p>
         </p:txBody>
@@ -23016,7 +23016,7 @@
                         </a:defRPr>
                       </a:pPr>
                       <a:r>
-                        <a:t>2/10</a:t>
+                        <a:t>3.2/10</a:t>
                       </a:r>
                     </a:p>
                   </a:txBody>
@@ -23791,7 +23791,7 @@
               </a:defRPr>
             </a:pPr>
             <a:r>
-              <a:t>Dataverse MCP (5 models): Sonnet 4.6 (10/10), GPT-5 Reasoning (10/10), GPT-4.1 (6/10), GPT-5 Auto (4/10), GPT-4o (2/10). Reasoning models close the gap.</a:t>
+              <a:t>Dataverse MCP (5 models): Sonnet 4.6 (10/10), GPT-5 Reasoning (10/10), GPT-4.1 (6/10), GPT-5 Auto (4/10), GPT-4o (3.2/10). Reasoning models close the gap.</a:t>
             </a:r>
           </a:p>
         </p:txBody>

--- a/decks/agent-fidelity-spectrum.pptx
+++ b/decks/agent-fidelity-spectrum.pptx
@@ -32,6 +32,7 @@
     <p:sldId id="280" r:id="rId32"/>
     <p:sldId id="281" r:id="rId33"/>
     <p:sldId id="282" r:id="rId34"/>
+    <p:sldId id="283" r:id="rId35"/>
   </p:sldIdLst>
   <p:sldSz cx="12191695" cy="6858000" type="screen4x3"/>
   <p:notesSz cx="6858000" cy="9144000"/>
@@ -598,7 +599,7 @@
           <a:lstStyle/>
           <a:p>
             <a:r>
-              <a:t>This is the most relatable prompt in the deck. Everyone understands 'did the parent tell the same story to the nurse and the police?' Raw docs: agent only found the Sheriff Report. Cross-refs: found both sources but couldn't retrieve the nursing notes detail. Metadata: the keywords 'nursing interview' and 'parent statements' on Medical Records told the agent exactly where to look. $0, 45 minutes, no code.</a:t>
+              <a:t>All 50 cases are synthetic -- we control the ground truth for every prompt. During the live demo, I paste agent responses into Claude Code and it grades them against the ground truth in real time. This is not opinion-based scoring.</a:t>
             </a:r>
           </a:p>
         </p:txBody>
@@ -668,7 +669,7 @@
           <a:lstStyle/>
           <a:p>
             <a:r>
-              <a:t>So what do we do? Do we just give up on agents? No -- you continue to test them and make them better, and you always adhere to trust but verify. I have agents building apps for me right now. If I were building production enterprise apps, I'd have a team of human developers checking the work, helping test, reviewing agentic results. The AI accelerates the team. The team validates the AI.</a:t>
+              <a:t>This is the most relatable prompt in the deck. Everyone understands 'did the parent tell the same story to the nurse and the police?' Raw docs: agent only found the Sheriff Report. Cross-refs: found both sources but couldn't retrieve the nursing notes detail. Metadata: the keywords 'nursing interview' and 'parent statements' on Medical Records told the agent exactly where to look. $0, 45 minutes, no code.</a:t>
             </a:r>
           </a:p>
         </p:txBody>
@@ -694,6 +695,76 @@
 </file>
 
 <file path=ppt/notesSlides/notesSlide12.xml><?xml version="1.0" encoding="utf-8"?>
+<p:notes xmlns:a="http://schemas.openxmlformats.org/drawingml/2006/main" xmlns:p="http://schemas.openxmlformats.org/presentationml/2006/main" xmlns:r="http://schemas.openxmlformats.org/officeDocument/2006/relationships">
+  <p:cSld>
+    <p:spTree>
+      <p:nvGrpSpPr>
+        <p:cNvPr id="1" name=""/>
+        <p:cNvGrpSpPr/>
+        <p:nvPr/>
+      </p:nvGrpSpPr>
+      <p:grpSpPr>
+        <a:xfrm>
+          <a:off x="0" y="0"/>
+          <a:ext cx="0" cy="0"/>
+          <a:chOff x="0" y="0"/>
+          <a:chExt cx="0" cy="0"/>
+        </a:xfrm>
+      </p:grpSpPr>
+      <p:sp>
+        <p:nvSpPr>
+          <p:cNvPr id="2" name="Slide Image Placeholder 1"/>
+          <p:cNvSpPr>
+            <a:spLocks noGrp="1"/>
+          </p:cNvSpPr>
+          <p:nvPr>
+            <p:ph type="sldImg" idx="2"/>
+          </p:nvPr>
+        </p:nvSpPr>
+        <p:spPr/>
+      </p:sp>
+      <p:sp>
+        <p:nvSpPr>
+          <p:cNvPr id="3" name="Notes Placeholder 2"/>
+          <p:cNvSpPr>
+            <a:spLocks noGrp="1"/>
+          </p:cNvSpPr>
+          <p:nvPr>
+            <p:ph type="body" idx="3" sz="quarter"/>
+          </p:nvPr>
+        </p:nvSpPr>
+        <p:spPr/>
+        <p:txBody>
+          <a:bodyPr/>
+          <a:lstStyle/>
+          <a:p>
+            <a:r>
+              <a:t>So what do we do? Do we just give up on agents? No -- you continue to test them and make them better, and you always adhere to trust but verify. I have agents building apps for me right now. If I were building production enterprise apps, I'd have a team of human developers checking the work, helping test, reviewing agentic results. The AI accelerates the team. The team validates the AI.</a:t>
+            </a:r>
+          </a:p>
+        </p:txBody>
+      </p:sp>
+      <p:sp>
+        <p:nvSpPr>
+          <p:cNvPr id="4" name="Slide Number Placeholder 3"/>
+          <p:cNvSpPr>
+            <a:spLocks noGrp="1"/>
+          </p:cNvSpPr>
+          <p:nvPr>
+            <p:ph type="sldNum" idx="5" sz="quarter"/>
+          </p:nvPr>
+        </p:nvSpPr>
+        <p:spPr/>
+      </p:sp>
+    </p:spTree>
+  </p:cSld>
+  <p:clrMapOvr>
+    <a:masterClrMapping/>
+  </p:clrMapOvr>
+</p:notes>
+</file>
+
+<file path=ppt/notesSlides/notesSlide13.xml><?xml version="1.0" encoding="utf-8"?>
 <p:notes xmlns:a="http://schemas.openxmlformats.org/drawingml/2006/main" xmlns:p="http://schemas.openxmlformats.org/presentationml/2006/main" xmlns:r="http://schemas.openxmlformats.org/officeDocument/2006/relationships">
   <p:cSld>
     <p:spTree>
@@ -4490,7 +4561,7 @@
               </a:defRPr>
             </a:pPr>
             <a:r>
-              <a:t>27 Slides  |  March 2026</a:t>
+              <a:t>28 Slides  |  March 2026</a:t>
             </a:r>
           </a:p>
         </p:txBody>
@@ -4791,7 +4862,7 @@
               </a:defRPr>
             </a:pPr>
             <a:r>
-              <a:t>462 test runs  |  21 agents  |  6 models  |  27 slides  |  2 use cases</a:t>
+              <a:t>462 test runs  |  21 agents  |  6 models  |  28 slides  |  2 use cases</a:t>
             </a:r>
           </a:p>
         </p:txBody>
@@ -16899,7 +16970,7 @@
     <p:bg>
       <p:bgPr>
         <a:solidFill>
-          <a:srgbClr val="1B2A4A"/>
+          <a:srgbClr val="FFFFFF"/>
         </a:solidFill>
         <a:effectLst/>
       </p:bgPr>
@@ -16919,8 +16990,8 @@
         </p:nvSpPr>
         <p:spPr>
           <a:xfrm>
-            <a:off x="1371600" y="548640"/>
-            <a:ext cx="9418320" cy="914400"/>
+            <a:off x="731520" y="365760"/>
+            <a:ext cx="10698480" cy="640080"/>
           </a:xfrm>
           <a:prstGeom prst="rect">
             <a:avLst/>
@@ -16933,102 +17004,30 @@
           </a:bodyPr>
           <a:lstStyle/>
           <a:p>
-            <a:pPr algn="ctr">
-              <a:defRPr sz="4400" b="1">
-                <a:solidFill>
-                  <a:srgbClr val="FFFFFF"/>
-                </a:solidFill>
-                <a:latin typeface="Calibri"/>
-              </a:defRPr>
-            </a:pPr>
-            <a:r>
-              <a:t>Live Demo</a:t>
-            </a:r>
-          </a:p>
-        </p:txBody>
-      </p:sp>
-      <p:sp>
-        <p:nvSpPr>
-          <p:cNvPr id="3" name="TextBox 2"/>
-          <p:cNvSpPr txBox="1"/>
-          <p:nvPr/>
-        </p:nvSpPr>
-        <p:spPr>
-          <a:xfrm>
-            <a:off x="1371600" y="1463040"/>
-            <a:ext cx="9418320" cy="548640"/>
-          </a:xfrm>
-          <a:prstGeom prst="rect">
-            <a:avLst/>
-          </a:prstGeom>
-          <a:noFill/>
-        </p:spPr>
-        <p:txBody>
-          <a:bodyPr wrap="square">
-            <a:spAutoFit/>
-          </a:bodyPr>
-          <a:lstStyle/>
-          <a:p>
-            <a:pPr algn="ctr">
-              <a:defRPr sz="2200" b="0">
-                <a:solidFill>
-                  <a:srgbClr val="A0C4E8"/>
-                </a:solidFill>
-                <a:latin typeface="Calibri"/>
-              </a:defRPr>
-            </a:pPr>
-            <a:r>
-              <a:t>"Same agent. Change one variable. Watch the result change."</a:t>
-            </a:r>
-          </a:p>
-        </p:txBody>
-      </p:sp>
-      <p:sp>
-        <p:nvSpPr>
-          <p:cNvPr id="4" name="TextBox 3"/>
-          <p:cNvSpPr txBox="1"/>
-          <p:nvPr/>
-        </p:nvSpPr>
-        <p:spPr>
-          <a:xfrm>
-            <a:off x="914400" y="2286000"/>
-            <a:ext cx="5029200" cy="457200"/>
-          </a:xfrm>
-          <a:prstGeom prst="rect">
-            <a:avLst/>
-          </a:prstGeom>
-          <a:noFill/>
-        </p:spPr>
-        <p:txBody>
-          <a:bodyPr wrap="square">
-            <a:spAutoFit/>
-          </a:bodyPr>
-          <a:lstStyle/>
-          <a:p>
             <a:pPr algn="l">
-              <a:defRPr sz="1800" b="1">
-                <a:solidFill>
-                  <a:srgbClr val="FFFFFF"/>
-                </a:solidFill>
-                <a:latin typeface="Calibri"/>
-              </a:defRPr>
-            </a:pPr>
-            <a:r>
-              <a:t>Part 1: Document Quality  (~10 min)</a:t>
-            </a:r>
-          </a:p>
-        </p:txBody>
-      </p:sp>
-      <p:sp>
-        <p:nvSpPr>
-          <p:cNvPr id="5" name="Rectangle 4"/>
+              <a:defRPr sz="3200" b="1">
+                <a:solidFill>
+                  <a:srgbClr val="1B2A4A"/>
+                </a:solidFill>
+                <a:latin typeface="Calibri"/>
+              </a:defRPr>
+            </a:pPr>
+            <a:r>
+              <a:t>How We Score: Ground Truth Grading</a:t>
+            </a:r>
+          </a:p>
+        </p:txBody>
+      </p:sp>
+      <p:sp>
+        <p:nvSpPr>
+          <p:cNvPr id="3" name="Rectangle 2"/>
           <p:cNvSpPr/>
           <p:nvPr/>
         </p:nvSpPr>
         <p:spPr>
           <a:xfrm>
-            <a:off x="914400" y="2743200"/>
-            <a:ext cx="5029200" cy="36576"/>
+            <a:off x="731520" y="1005840"/>
+            <a:ext cx="1828800" cy="54864"/>
           </a:xfrm>
           <a:prstGeom prst="rect">
             <a:avLst/>
@@ -17064,14 +17063,14 @@
       </p:sp>
       <p:sp>
         <p:nvSpPr>
-          <p:cNvPr id="6" name="TextBox 5"/>
+          <p:cNvPr id="4" name="TextBox 3"/>
           <p:cNvSpPr txBox="1"/>
           <p:nvPr/>
         </p:nvSpPr>
         <p:spPr>
           <a:xfrm>
-            <a:off x="1188720" y="2926080"/>
-            <a:ext cx="4754880" cy="457200"/>
+            <a:off x="1097280" y="1234440"/>
+            <a:ext cx="9966960" cy="548640"/>
           </a:xfrm>
           <a:prstGeom prst="rect">
             <a:avLst/>
@@ -17085,29 +17084,255 @@
           <a:lstStyle/>
           <a:p>
             <a:pPr algn="l">
-              <a:defRPr sz="1400" b="0">
-                <a:solidFill>
-                  <a:srgbClr val="CCDDEE"/>
-                </a:solidFill>
-                <a:latin typeface="Calibri"/>
-              </a:defRPr>
-            </a:pPr>
-            <a:r>
-              <a:t>3 agents, same model, 3 SharePoint libraries</a:t>
-            </a:r>
-          </a:p>
-        </p:txBody>
-      </p:sp>
-      <p:sp>
-        <p:nvSpPr>
-          <p:cNvPr id="7" name="TextBox 6"/>
+              <a:defRPr sz="2200" b="1">
+                <a:solidFill>
+                  <a:srgbClr val="2D2D2D"/>
+                </a:solidFill>
+                <a:latin typeface="Calibri"/>
+              </a:defRPr>
+            </a:pPr>
+            <a:r>
+              <a:t>Every grade is verifiable -- we wrote the data</a:t>
+            </a:r>
+          </a:p>
+        </p:txBody>
+      </p:sp>
+      <p:graphicFrame>
+        <p:nvGraphicFramePr>
+          <p:cNvPr id="5" name="Table 4"/>
+          <p:cNvGraphicFramePr>
+            <a:graphicFrameLocks noGrp="1"/>
+          </p:cNvGraphicFramePr>
+          <p:nvPr/>
+        </p:nvGraphicFramePr>
+        <p:xfrm>
+          <a:off x="1097280" y="2011680"/>
+          <a:ext cx="5303520" cy="1645920"/>
+        </p:xfrm>
+        <a:graphic>
+          <a:graphicData uri="http://schemas.openxmlformats.org/drawingml/2006/table">
+            <a:tbl>
+              <a:tblPr firstRow="1" bandRow="1">
+                <a:tableStyleId>{5C22544A-7EE6-4342-B048-85BDC9FD1C3A}</a:tableStyleId>
+              </a:tblPr>
+              <a:tblGrid>
+                <a:gridCol w="1188720"/>
+                <a:gridCol w="4114800"/>
+              </a:tblGrid>
+              <a:tr h="411480">
+                <a:tc>
+                  <a:txBody>
+                    <a:bodyPr/>
+                    <a:lstStyle/>
+                    <a:p>
+                      <a:pPr algn="ctr">
+                        <a:defRPr sz="1300" b="1">
+                          <a:solidFill>
+                            <a:srgbClr val="FFFFFF"/>
+                          </a:solidFill>
+                          <a:latin typeface="Calibri"/>
+                        </a:defRPr>
+                      </a:pPr>
+                      <a:r>
+                        <a:t>Grade</a:t>
+                      </a:r>
+                    </a:p>
+                  </a:txBody>
+                  <a:tcPr anchor="ctr">
+                    <a:solidFill>
+                      <a:srgbClr val="2C5F8A"/>
+                    </a:solidFill>
+                  </a:tcPr>
+                </a:tc>
+                <a:tc>
+                  <a:txBody>
+                    <a:bodyPr/>
+                    <a:lstStyle/>
+                    <a:p>
+                      <a:pPr algn="ctr">
+                        <a:defRPr sz="1300" b="1">
+                          <a:solidFill>
+                            <a:srgbClr val="FFFFFF"/>
+                          </a:solidFill>
+                          <a:latin typeface="Calibri"/>
+                        </a:defRPr>
+                      </a:pPr>
+                      <a:r>
+                        <a:t>Criteria</a:t>
+                      </a:r>
+                    </a:p>
+                  </a:txBody>
+                  <a:tcPr anchor="ctr">
+                    <a:solidFill>
+                      <a:srgbClr val="2C5F8A"/>
+                    </a:solidFill>
+                  </a:tcPr>
+                </a:tc>
+              </a:tr>
+              <a:tr h="411480">
+                <a:tc>
+                  <a:txBody>
+                    <a:bodyPr/>
+                    <a:lstStyle/>
+                    <a:p>
+                      <a:pPr algn="ctr">
+                        <a:defRPr sz="1300">
+                          <a:solidFill>
+                            <a:srgbClr val="2D2D2D"/>
+                          </a:solidFill>
+                          <a:latin typeface="Calibri"/>
+                        </a:defRPr>
+                      </a:pPr>
+                      <a:r>
+                        <a:t>Pass (10)</a:t>
+                      </a:r>
+                    </a:p>
+                  </a:txBody>
+                  <a:tcPr anchor="ctr">
+                    <a:solidFill>
+                      <a:srgbClr val="FFFFFF"/>
+                    </a:solidFill>
+                  </a:tcPr>
+                </a:tc>
+                <a:tc>
+                  <a:txBody>
+                    <a:bodyPr/>
+                    <a:lstStyle/>
+                    <a:p>
+                      <a:pPr algn="ctr">
+                        <a:defRPr sz="1300">
+                          <a:solidFill>
+                            <a:srgbClr val="2D2D2D"/>
+                          </a:solidFill>
+                          <a:latin typeface="Calibri"/>
+                        </a:defRPr>
+                      </a:pPr>
+                      <a:r>
+                        <a:t>Correct, complete, properly sourced. No hallucinations.</a:t>
+                      </a:r>
+                    </a:p>
+                  </a:txBody>
+                  <a:tcPr anchor="ctr">
+                    <a:solidFill>
+                      <a:srgbClr val="FFFFFF"/>
+                    </a:solidFill>
+                  </a:tcPr>
+                </a:tc>
+              </a:tr>
+              <a:tr h="411480">
+                <a:tc>
+                  <a:txBody>
+                    <a:bodyPr/>
+                    <a:lstStyle/>
+                    <a:p>
+                      <a:pPr algn="ctr">
+                        <a:defRPr sz="1300">
+                          <a:solidFill>
+                            <a:srgbClr val="2D2D2D"/>
+                          </a:solidFill>
+                          <a:latin typeface="Calibri"/>
+                        </a:defRPr>
+                      </a:pPr>
+                      <a:r>
+                        <a:t>Partial (5)</a:t>
+                      </a:r>
+                    </a:p>
+                  </a:txBody>
+                  <a:tcPr anchor="ctr">
+                    <a:solidFill>
+                      <a:srgbClr val="E8F0F8"/>
+                    </a:solidFill>
+                  </a:tcPr>
+                </a:tc>
+                <a:tc>
+                  <a:txBody>
+                    <a:bodyPr/>
+                    <a:lstStyle/>
+                    <a:p>
+                      <a:pPr algn="ctr">
+                        <a:defRPr sz="1300">
+                          <a:solidFill>
+                            <a:srgbClr val="2D2D2D"/>
+                          </a:solidFill>
+                          <a:latin typeface="Calibri"/>
+                        </a:defRPr>
+                      </a:pPr>
+                      <a:r>
+                        <a:t>Key facts present but incomplete, or minor errors.</a:t>
+                      </a:r>
+                    </a:p>
+                  </a:txBody>
+                  <a:tcPr anchor="ctr">
+                    <a:solidFill>
+                      <a:srgbClr val="E8F0F8"/>
+                    </a:solidFill>
+                  </a:tcPr>
+                </a:tc>
+              </a:tr>
+              <a:tr h="411480">
+                <a:tc>
+                  <a:txBody>
+                    <a:bodyPr/>
+                    <a:lstStyle/>
+                    <a:p>
+                      <a:pPr algn="ctr">
+                        <a:defRPr sz="1300">
+                          <a:solidFill>
+                            <a:srgbClr val="2D2D2D"/>
+                          </a:solidFill>
+                          <a:latin typeface="Calibri"/>
+                        </a:defRPr>
+                      </a:pPr>
+                      <a:r>
+                        <a:t>Fail (0)</a:t>
+                      </a:r>
+                    </a:p>
+                  </a:txBody>
+                  <a:tcPr anchor="ctr">
+                    <a:solidFill>
+                      <a:srgbClr val="FFFFFF"/>
+                    </a:solidFill>
+                  </a:tcPr>
+                </a:tc>
+                <a:tc>
+                  <a:txBody>
+                    <a:bodyPr/>
+                    <a:lstStyle/>
+                    <a:p>
+                      <a:pPr algn="ctr">
+                        <a:defRPr sz="1300">
+                          <a:solidFill>
+                            <a:srgbClr val="2D2D2D"/>
+                          </a:solidFill>
+                          <a:latin typeface="Calibri"/>
+                        </a:defRPr>
+                      </a:pPr>
+                      <a:r>
+                        <a:t>Wrong answer, hallucination, or confident critical omission.</a:t>
+                      </a:r>
+                    </a:p>
+                  </a:txBody>
+                  <a:tcPr anchor="ctr">
+                    <a:solidFill>
+                      <a:srgbClr val="FFFFFF"/>
+                    </a:solidFill>
+                  </a:tcPr>
+                </a:tc>
+              </a:tr>
+            </a:tbl>
+          </a:graphicData>
+        </a:graphic>
+      </p:graphicFrame>
+      <p:sp>
+        <p:nvSpPr>
+          <p:cNvPr id="6" name="TextBox 5"/>
           <p:cNvSpPr txBox="1"/>
           <p:nvPr/>
         </p:nvSpPr>
         <p:spPr>
           <a:xfrm>
-            <a:off x="1188720" y="3429000"/>
-            <a:ext cx="4754880" cy="457200"/>
+            <a:off x="6858000" y="2011680"/>
+            <a:ext cx="4572000" cy="365760"/>
           </a:xfrm>
           <a:prstGeom prst="rect">
             <a:avLst/>
@@ -17121,209 +17346,29 @@
           <a:lstStyle/>
           <a:p>
             <a:pPr algn="l">
-              <a:defRPr sz="1400" b="0">
-                <a:solidFill>
-                  <a:srgbClr val="CCDDEE"/>
-                </a:solidFill>
-                <a:latin typeface="Calibri"/>
-              </a:defRPr>
-            </a:pPr>
-            <a:r>
-              <a:t>Raw  -&gt;  Cross-Referenced  -&gt;  Enriched</a:t>
-            </a:r>
-          </a:p>
-        </p:txBody>
-      </p:sp>
-      <p:sp>
-        <p:nvSpPr>
-          <p:cNvPr id="8" name="TextBox 7"/>
-          <p:cNvSpPr txBox="1"/>
-          <p:nvPr/>
-        </p:nvSpPr>
-        <p:spPr>
-          <a:xfrm>
-            <a:off x="1188720" y="3931920"/>
-            <a:ext cx="4754880" cy="457200"/>
-          </a:xfrm>
-          <a:prstGeom prst="rect">
-            <a:avLst/>
-          </a:prstGeom>
-          <a:noFill/>
-        </p:spPr>
-        <p:txBody>
-          <a:bodyPr wrap="square">
-            <a:spAutoFit/>
-          </a:bodyPr>
-          <a:lstStyle/>
-          <a:p>
-            <a:pPr algn="l">
-              <a:defRPr sz="1400" b="0">
-                <a:solidFill>
-                  <a:srgbClr val="CCDDEE"/>
-                </a:solidFill>
-                <a:latin typeface="Calibri"/>
-              </a:defRPr>
-            </a:pPr>
-            <a:r>
-              <a:t>Skeletal survey: FAIL -&gt; PASS -&gt; PASS</a:t>
-            </a:r>
-          </a:p>
-        </p:txBody>
-      </p:sp>
-      <p:sp>
-        <p:nvSpPr>
-          <p:cNvPr id="9" name="TextBox 8"/>
-          <p:cNvSpPr txBox="1"/>
-          <p:nvPr/>
-        </p:nvSpPr>
-        <p:spPr>
-          <a:xfrm>
-            <a:off x="1188720" y="4434840"/>
-            <a:ext cx="4754880" cy="457200"/>
-          </a:xfrm>
-          <a:prstGeom prst="rect">
-            <a:avLst/>
-          </a:prstGeom>
-          <a:noFill/>
-        </p:spPr>
-        <p:txBody>
-          <a:bodyPr wrap="square">
-            <a:spAutoFit/>
-          </a:bodyPr>
-          <a:lstStyle/>
-          <a:p>
-            <a:pPr algn="l">
-              <a:defRPr sz="1400" b="0">
-                <a:solidFill>
-                  <a:srgbClr val="CCDDEE"/>
-                </a:solidFill>
-                <a:latin typeface="Calibri"/>
-              </a:defRPr>
-            </a:pPr>
-            <a:r>
-              <a:t>Marcus Webb: FAIL -&gt; PARTIAL -&gt; PASS</a:t>
-            </a:r>
-          </a:p>
-        </p:txBody>
-      </p:sp>
-      <p:sp>
-        <p:nvSpPr>
-          <p:cNvPr id="10" name="TextBox 9"/>
-          <p:cNvSpPr txBox="1"/>
-          <p:nvPr/>
-        </p:nvSpPr>
-        <p:spPr>
-          <a:xfrm>
-            <a:off x="1188720" y="4937760"/>
-            <a:ext cx="4754880" cy="457200"/>
-          </a:xfrm>
-          <a:prstGeom prst="rect">
-            <a:avLst/>
-          </a:prstGeom>
-          <a:noFill/>
-        </p:spPr>
-        <p:txBody>
-          <a:bodyPr wrap="square">
-            <a:spAutoFit/>
-          </a:bodyPr>
-          <a:lstStyle/>
-          <a:p>
-            <a:pPr algn="l">
-              <a:defRPr sz="1400" b="0">
-                <a:solidFill>
-                  <a:srgbClr val="CCDDEE"/>
-                </a:solidFill>
-                <a:latin typeface="Calibri"/>
-              </a:defRPr>
-            </a:pPr>
-            <a:r>
-              <a:t>Score arc: 3/10 -&gt; 7/10 -&gt; 8/10</a:t>
-            </a:r>
-          </a:p>
-        </p:txBody>
-      </p:sp>
-      <p:sp>
-        <p:nvSpPr>
-          <p:cNvPr id="11" name="TextBox 10"/>
-          <p:cNvSpPr txBox="1"/>
-          <p:nvPr/>
-        </p:nvSpPr>
-        <p:spPr>
-          <a:xfrm>
-            <a:off x="1188720" y="5440680"/>
-            <a:ext cx="4754880" cy="457200"/>
-          </a:xfrm>
-          <a:prstGeom prst="rect">
-            <a:avLst/>
-          </a:prstGeom>
-          <a:noFill/>
-        </p:spPr>
-        <p:txBody>
-          <a:bodyPr wrap="square">
-            <a:spAutoFit/>
-          </a:bodyPr>
-          <a:lstStyle/>
-          <a:p>
-            <a:pPr algn="l">
-              <a:defRPr sz="1400" b="0">
-                <a:solidFill>
-                  <a:srgbClr val="CCDDEE"/>
-                </a:solidFill>
-                <a:latin typeface="Calibri"/>
-              </a:defRPr>
-            </a:pPr>
-            <a:r>
-              <a:t>Cost: $0, 45 minutes of document hygiene</a:t>
-            </a:r>
-          </a:p>
-        </p:txBody>
-      </p:sp>
-      <p:sp>
-        <p:nvSpPr>
-          <p:cNvPr id="12" name="TextBox 11"/>
-          <p:cNvSpPr txBox="1"/>
-          <p:nvPr/>
-        </p:nvSpPr>
-        <p:spPr>
-          <a:xfrm>
-            <a:off x="6400800" y="2286000"/>
-            <a:ext cx="5029200" cy="457200"/>
-          </a:xfrm>
-          <a:prstGeom prst="rect">
-            <a:avLst/>
-          </a:prstGeom>
-          <a:noFill/>
-        </p:spPr>
-        <p:txBody>
-          <a:bodyPr wrap="square">
-            <a:spAutoFit/>
-          </a:bodyPr>
-          <a:lstStyle/>
-          <a:p>
-            <a:pPr algn="l">
               <a:defRPr sz="1800" b="1">
                 <a:solidFill>
-                  <a:srgbClr val="FFFFFF"/>
-                </a:solidFill>
-                <a:latin typeface="Calibri"/>
-              </a:defRPr>
-            </a:pPr>
-            <a:r>
-              <a:t>Part 2: Model Selection  (~8 min)</a:t>
-            </a:r>
-          </a:p>
-        </p:txBody>
-      </p:sp>
-      <p:sp>
-        <p:nvSpPr>
-          <p:cNvPr id="13" name="Rectangle 12"/>
+                  <a:srgbClr val="1B2A4A"/>
+                </a:solidFill>
+                <a:latin typeface="Calibri"/>
+              </a:defRPr>
+            </a:pPr>
+            <a:r>
+              <a:t>The Process</a:t>
+            </a:r>
+          </a:p>
+        </p:txBody>
+      </p:sp>
+      <p:sp>
+        <p:nvSpPr>
+          <p:cNvPr id="7" name="Rectangle 6"/>
           <p:cNvSpPr/>
           <p:nvPr/>
         </p:nvSpPr>
         <p:spPr>
           <a:xfrm>
-            <a:off x="6400800" y="2743200"/>
-            <a:ext cx="5029200" cy="36576"/>
+            <a:off x="6858000" y="2377440"/>
+            <a:ext cx="4114800" cy="36576"/>
           </a:xfrm>
           <a:prstGeom prst="rect">
             <a:avLst/>
@@ -17359,14 +17404,14 @@
       </p:sp>
       <p:sp>
         <p:nvSpPr>
-          <p:cNvPr id="14" name="TextBox 13"/>
+          <p:cNvPr id="8" name="TextBox 7"/>
           <p:cNvSpPr txBox="1"/>
           <p:nvPr/>
         </p:nvSpPr>
         <p:spPr>
           <a:xfrm>
-            <a:off x="6675120" y="2926080"/>
-            <a:ext cx="4754880" cy="457200"/>
+            <a:off x="6858000" y="2560320"/>
+            <a:ext cx="4572000" cy="2286000"/>
           </a:xfrm>
           <a:prstGeom prst="rect">
             <a:avLst/>
@@ -17379,30 +17424,167 @@
           </a:bodyPr>
           <a:lstStyle/>
           <a:p>
-            <a:pPr algn="l">
-              <a:defRPr sz="1400" b="0">
-                <a:solidFill>
-                  <a:srgbClr val="CCDDEE"/>
-                </a:solidFill>
-                <a:latin typeface="Calibri"/>
-              </a:defRPr>
-            </a:pPr>
-            <a:r>
-              <a:t>1 Dataverse MCP agent, swap model live</a:t>
-            </a:r>
-          </a:p>
-        </p:txBody>
-      </p:sp>
-      <p:sp>
-        <p:nvSpPr>
-          <p:cNvPr id="15" name="TextBox 14"/>
+            <a:pPr>
+              <a:spcAft>
+                <a:spcPts val="1000"/>
+              </a:spcAft>
+            </a:pPr>
+            <a:r>
+              <a:rPr sz="1500">
+                <a:solidFill>
+                  <a:srgbClr val="2D2D2D"/>
+                </a:solidFill>
+                <a:latin typeface="Calibri"/>
+              </a:rPr>
+              <a:t>10 prompts with known ground truth answers</a:t>
+            </a:r>
+          </a:p>
+          <a:p>
+            <a:pPr>
+              <a:spcAft>
+                <a:spcPts val="1000"/>
+              </a:spcAft>
+            </a:pPr>
+            <a:r>
+              <a:rPr sz="1500">
+                <a:solidFill>
+                  <a:srgbClr val="2D2D2D"/>
+                </a:solidFill>
+                <a:latin typeface="Calibri"/>
+              </a:rPr>
+              <a:t>Same prompt to every agent -- side by side</a:t>
+            </a:r>
+          </a:p>
+          <a:p>
+            <a:pPr>
+              <a:spcAft>
+                <a:spcPts val="1000"/>
+              </a:spcAft>
+            </a:pPr>
+            <a:r>
+              <a:rPr sz="1500">
+                <a:solidFill>
+                  <a:srgbClr val="2D2D2D"/>
+                </a:solidFill>
+                <a:latin typeface="Calibri"/>
+              </a:rPr>
+              <a:t>Graded by Claude against ground truth (live)</a:t>
+            </a:r>
+          </a:p>
+          <a:p>
+            <a:pPr>
+              <a:spcAft>
+                <a:spcPts val="1000"/>
+              </a:spcAft>
+            </a:pPr>
+            <a:r>
+              <a:rPr sz="1500">
+                <a:solidFill>
+                  <a:srgbClr val="2D2D2D"/>
+                </a:solidFill>
+                <a:latin typeface="Calibri"/>
+              </a:rPr>
+              <a:t>462 test runs, 21 agents, 6 models</a:t>
+            </a:r>
+          </a:p>
+        </p:txBody>
+      </p:sp>
+      <p:sp>
+        <p:nvSpPr>
+          <p:cNvPr id="9" name="Rounded Rectangle 8"/>
+          <p:cNvSpPr/>
+          <p:nvPr/>
+        </p:nvSpPr>
+        <p:spPr>
+          <a:xfrm>
+            <a:off x="1097280" y="4572000"/>
+            <a:ext cx="9966960" cy="1097280"/>
+          </a:xfrm>
+          <a:prstGeom prst="roundRect">
+            <a:avLst/>
+          </a:prstGeom>
+          <a:solidFill>
+            <a:srgbClr val="E8F0F8"/>
+          </a:solidFill>
+          <a:ln>
+            <a:noFill/>
+          </a:ln>
+        </p:spPr>
+        <p:style>
+          <a:lnRef idx="1">
+            <a:schemeClr val="accent1"/>
+          </a:lnRef>
+          <a:fillRef idx="3">
+            <a:schemeClr val="accent1"/>
+          </a:fillRef>
+          <a:effectRef idx="2">
+            <a:schemeClr val="accent1"/>
+          </a:effectRef>
+          <a:fontRef idx="minor">
+            <a:schemeClr val="lt1"/>
+          </a:fontRef>
+        </p:style>
+        <p:txBody>
+          <a:bodyPr rtlCol="0" anchor="ctr"/>
+          <a:lstStyle/>
+          <a:p>
+            <a:pPr algn="ctr"/>
+          </a:p>
+        </p:txBody>
+      </p:sp>
+      <p:sp>
+        <p:nvSpPr>
+          <p:cNvPr id="10" name="Rectangle 9"/>
+          <p:cNvSpPr/>
+          <p:nvPr/>
+        </p:nvSpPr>
+        <p:spPr>
+          <a:xfrm>
+            <a:off x="1097280" y="4572000"/>
+            <a:ext cx="137160" cy="1097280"/>
+          </a:xfrm>
+          <a:prstGeom prst="rect">
+            <a:avLst/>
+          </a:prstGeom>
+          <a:solidFill>
+            <a:srgbClr val="357ABD"/>
+          </a:solidFill>
+          <a:ln>
+            <a:noFill/>
+          </a:ln>
+        </p:spPr>
+        <p:style>
+          <a:lnRef idx="1">
+            <a:schemeClr val="accent1"/>
+          </a:lnRef>
+          <a:fillRef idx="3">
+            <a:schemeClr val="accent1"/>
+          </a:fillRef>
+          <a:effectRef idx="2">
+            <a:schemeClr val="accent1"/>
+          </a:effectRef>
+          <a:fontRef idx="minor">
+            <a:schemeClr val="lt1"/>
+          </a:fontRef>
+        </p:style>
+        <p:txBody>
+          <a:bodyPr rtlCol="0" anchor="ctr"/>
+          <a:lstStyle/>
+          <a:p>
+            <a:pPr algn="ctr"/>
+          </a:p>
+        </p:txBody>
+      </p:sp>
+      <p:sp>
+        <p:nvSpPr>
+          <p:cNvPr id="11" name="TextBox 10"/>
           <p:cNvSpPr txBox="1"/>
           <p:nvPr/>
         </p:nvSpPr>
         <p:spPr>
           <a:xfrm>
-            <a:off x="6675120" y="3429000"/>
-            <a:ext cx="4754880" cy="457200"/>
+            <a:off x="1463040" y="4663440"/>
+            <a:ext cx="9326880" cy="914400"/>
           </a:xfrm>
           <a:prstGeom prst="rect">
             <a:avLst/>
@@ -17416,29 +17598,29 @@
           <a:lstStyle/>
           <a:p>
             <a:pPr algn="l">
-              <a:defRPr sz="1400" b="0">
-                <a:solidFill>
-                  <a:srgbClr val="CCDDEE"/>
-                </a:solidFill>
-                <a:latin typeface="Calibri"/>
-              </a:defRPr>
-            </a:pPr>
-            <a:r>
-              <a:t>GPT-4o  -&gt;  Sonnet 4.6</a:t>
-            </a:r>
-          </a:p>
-        </p:txBody>
-      </p:sp>
-      <p:sp>
-        <p:nvSpPr>
-          <p:cNvPr id="16" name="TextBox 15"/>
+              <a:defRPr sz="1600" b="0">
+                <a:solidFill>
+                  <a:srgbClr val="555555"/>
+                </a:solidFill>
+                <a:latin typeface="Calibri"/>
+              </a:defRPr>
+            </a:pPr>
+            <a:r>
+              <a:t>"We grade against data we wrote. Every correct answer is verifiable. Every wrong answer is provably wrong -- not a matter of interpretation."</a:t>
+            </a:r>
+          </a:p>
+        </p:txBody>
+      </p:sp>
+      <p:sp>
+        <p:nvSpPr>
+          <p:cNvPr id="12" name="TextBox 11"/>
           <p:cNvSpPr txBox="1"/>
           <p:nvPr/>
         </p:nvSpPr>
         <p:spPr>
           <a:xfrm>
-            <a:off x="6675120" y="3931920"/>
-            <a:ext cx="4754880" cy="457200"/>
+            <a:off x="457200" y="6446520"/>
+            <a:ext cx="2743200" cy="320040"/>
           </a:xfrm>
           <a:prstGeom prst="rect">
             <a:avLst/>
@@ -17452,159 +17634,15 @@
           <a:lstStyle/>
           <a:p>
             <a:pPr algn="l">
-              <a:defRPr sz="1400" b="0">
-                <a:solidFill>
-                  <a:srgbClr val="CCDDEE"/>
-                </a:solidFill>
-                <a:latin typeface="Calibri"/>
-              </a:defRPr>
-            </a:pPr>
-            <a:r>
-              <a:t>TPR case filter: 0 -&gt; 10</a:t>
-            </a:r>
-          </a:p>
-        </p:txBody>
-      </p:sp>
-      <p:sp>
-        <p:nvSpPr>
-          <p:cNvPr id="17" name="TextBox 16"/>
-          <p:cNvSpPr txBox="1"/>
-          <p:nvPr/>
-        </p:nvSpPr>
-        <p:spPr>
-          <a:xfrm>
-            <a:off x="6675120" y="4434840"/>
-            <a:ext cx="4754880" cy="457200"/>
-          </a:xfrm>
-          <a:prstGeom prst="rect">
-            <a:avLst/>
-          </a:prstGeom>
-          <a:noFill/>
-        </p:spPr>
-        <p:txBody>
-          <a:bodyPr wrap="square">
-            <a:spAutoFit/>
-          </a:bodyPr>
-          <a:lstStyle/>
-          <a:p>
-            <a:pPr algn="l">
-              <a:defRPr sz="1400" b="0">
-                <a:solidFill>
-                  <a:srgbClr val="CCDDEE"/>
-                </a:solidFill>
-                <a:latin typeface="Calibri"/>
-              </a:defRPr>
-            </a:pPr>
-            <a:r>
-              <a:t>Cross-doc reasoning: 0 -&gt; 10</a:t>
-            </a:r>
-          </a:p>
-        </p:txBody>
-      </p:sp>
-      <p:sp>
-        <p:nvSpPr>
-          <p:cNvPr id="18" name="TextBox 17"/>
-          <p:cNvSpPr txBox="1"/>
-          <p:nvPr/>
-        </p:nvSpPr>
-        <p:spPr>
-          <a:xfrm>
-            <a:off x="6675120" y="4937760"/>
-            <a:ext cx="4754880" cy="457200"/>
-          </a:xfrm>
-          <a:prstGeom prst="rect">
-            <a:avLst/>
-          </a:prstGeom>
-          <a:noFill/>
-        </p:spPr>
-        <p:txBody>
-          <a:bodyPr wrap="square">
-            <a:spAutoFit/>
-          </a:bodyPr>
-          <a:lstStyle/>
-          <a:p>
-            <a:pPr algn="l">
-              <a:defRPr sz="1400" b="0">
-                <a:solidFill>
-                  <a:srgbClr val="CCDDEE"/>
-                </a:solidFill>
-                <a:latin typeface="Calibri"/>
-              </a:defRPr>
-            </a:pPr>
-            <a:r>
-              <a:t>Time gap calculation: 0 -&gt; 10</a:t>
-            </a:r>
-          </a:p>
-        </p:txBody>
-      </p:sp>
-      <p:sp>
-        <p:nvSpPr>
-          <p:cNvPr id="19" name="TextBox 18"/>
-          <p:cNvSpPr txBox="1"/>
-          <p:nvPr/>
-        </p:nvSpPr>
-        <p:spPr>
-          <a:xfrm>
-            <a:off x="6675120" y="5440680"/>
-            <a:ext cx="4754880" cy="457200"/>
-          </a:xfrm>
-          <a:prstGeom prst="rect">
-            <a:avLst/>
-          </a:prstGeom>
-          <a:noFill/>
-        </p:spPr>
-        <p:txBody>
-          <a:bodyPr wrap="square">
-            <a:spAutoFit/>
-          </a:bodyPr>
-          <a:lstStyle/>
-          <a:p>
-            <a:pPr algn="l">
-              <a:defRPr sz="1400" b="0">
-                <a:solidFill>
-                  <a:srgbClr val="CCDDEE"/>
-                </a:solidFill>
-                <a:latin typeface="Calibri"/>
-              </a:defRPr>
-            </a:pPr>
-            <a:r>
-              <a:t>Full battery: 3.2/11 -&gt; 6/11 -&gt; 11/11</a:t>
-            </a:r>
-          </a:p>
-        </p:txBody>
-      </p:sp>
-      <p:sp>
-        <p:nvSpPr>
-          <p:cNvPr id="20" name="TextBox 19"/>
-          <p:cNvSpPr txBox="1"/>
-          <p:nvPr/>
-        </p:nvSpPr>
-        <p:spPr>
-          <a:xfrm>
-            <a:off x="1371600" y="5943600"/>
-            <a:ext cx="9418320" cy="457200"/>
-          </a:xfrm>
-          <a:prstGeom prst="rect">
-            <a:avLst/>
-          </a:prstGeom>
-          <a:noFill/>
-        </p:spPr>
-        <p:txBody>
-          <a:bodyPr wrap="square">
-            <a:spAutoFit/>
-          </a:bodyPr>
-          <a:lstStyle/>
-          <a:p>
-            <a:pPr algn="ctr">
-              <a:defRPr sz="1400" b="1">
-                <a:solidFill>
-                  <a:srgbClr val="88AACC"/>
-                </a:solidFill>
-                <a:latin typeface="Calibri"/>
-              </a:defRPr>
-            </a:pPr>
-            <a:r>
-              <a:t>All demos run in Copilot Studio -- no custom code UI</a:t>
+              <a:defRPr sz="1000" b="0">
+                <a:solidFill>
+                  <a:srgbClr val="555555"/>
+                </a:solidFill>
+                <a:latin typeface="Calibri"/>
+              </a:defRPr>
+            </a:pPr>
+            <a:r>
+              <a:t>Confidential  |  March 2026</a:t>
             </a:r>
           </a:p>
         </p:txBody>
@@ -17623,7 +17661,7 @@
     <p:bg>
       <p:bgPr>
         <a:solidFill>
-          <a:srgbClr val="FFFFFF"/>
+          <a:srgbClr val="1B2A4A"/>
         </a:solidFill>
         <a:effectLst/>
       </p:bgPr>
@@ -17643,8 +17681,8 @@
         </p:nvSpPr>
         <p:spPr>
           <a:xfrm>
-            <a:off x="731520" y="365760"/>
-            <a:ext cx="10698480" cy="640080"/>
+            <a:off x="1371600" y="548640"/>
+            <a:ext cx="9418320" cy="914400"/>
           </a:xfrm>
           <a:prstGeom prst="rect">
             <a:avLst/>
@@ -17657,30 +17695,102 @@
           </a:bodyPr>
           <a:lstStyle/>
           <a:p>
+            <a:pPr algn="ctr">
+              <a:defRPr sz="4400" b="1">
+                <a:solidFill>
+                  <a:srgbClr val="FFFFFF"/>
+                </a:solidFill>
+                <a:latin typeface="Calibri"/>
+              </a:defRPr>
+            </a:pPr>
+            <a:r>
+              <a:t>Live Demo</a:t>
+            </a:r>
+          </a:p>
+        </p:txBody>
+      </p:sp>
+      <p:sp>
+        <p:nvSpPr>
+          <p:cNvPr id="3" name="TextBox 2"/>
+          <p:cNvSpPr txBox="1"/>
+          <p:nvPr/>
+        </p:nvSpPr>
+        <p:spPr>
+          <a:xfrm>
+            <a:off x="1371600" y="1463040"/>
+            <a:ext cx="9418320" cy="548640"/>
+          </a:xfrm>
+          <a:prstGeom prst="rect">
+            <a:avLst/>
+          </a:prstGeom>
+          <a:noFill/>
+        </p:spPr>
+        <p:txBody>
+          <a:bodyPr wrap="square">
+            <a:spAutoFit/>
+          </a:bodyPr>
+          <a:lstStyle/>
+          <a:p>
+            <a:pPr algn="ctr">
+              <a:defRPr sz="2200" b="0">
+                <a:solidFill>
+                  <a:srgbClr val="A0C4E8"/>
+                </a:solidFill>
+                <a:latin typeface="Calibri"/>
+              </a:defRPr>
+            </a:pPr>
+            <a:r>
+              <a:t>"Same agent. Change one variable. Watch the result change."</a:t>
+            </a:r>
+          </a:p>
+        </p:txBody>
+      </p:sp>
+      <p:sp>
+        <p:nvSpPr>
+          <p:cNvPr id="4" name="TextBox 3"/>
+          <p:cNvSpPr txBox="1"/>
+          <p:nvPr/>
+        </p:nvSpPr>
+        <p:spPr>
+          <a:xfrm>
+            <a:off x="914400" y="2286000"/>
+            <a:ext cx="5029200" cy="457200"/>
+          </a:xfrm>
+          <a:prstGeom prst="rect">
+            <a:avLst/>
+          </a:prstGeom>
+          <a:noFill/>
+        </p:spPr>
+        <p:txBody>
+          <a:bodyPr wrap="square">
+            <a:spAutoFit/>
+          </a:bodyPr>
+          <a:lstStyle/>
+          <a:p>
             <a:pPr algn="l">
-              <a:defRPr sz="3200" b="1">
-                <a:solidFill>
-                  <a:srgbClr val="1B2A4A"/>
-                </a:solidFill>
-                <a:latin typeface="Calibri"/>
-              </a:defRPr>
-            </a:pPr>
-            <a:r>
-              <a:t>One Prompt, Three Interventions</a:t>
-            </a:r>
-          </a:p>
-        </p:txBody>
-      </p:sp>
-      <p:sp>
-        <p:nvSpPr>
-          <p:cNvPr id="3" name="Rectangle 2"/>
+              <a:defRPr sz="1800" b="1">
+                <a:solidFill>
+                  <a:srgbClr val="FFFFFF"/>
+                </a:solidFill>
+                <a:latin typeface="Calibri"/>
+              </a:defRPr>
+            </a:pPr>
+            <a:r>
+              <a:t>Part 1: Document Quality  (~10 min)</a:t>
+            </a:r>
+          </a:p>
+        </p:txBody>
+      </p:sp>
+      <p:sp>
+        <p:nvSpPr>
+          <p:cNvPr id="5" name="Rectangle 4"/>
           <p:cNvSpPr/>
           <p:nvPr/>
         </p:nvSpPr>
         <p:spPr>
           <a:xfrm>
-            <a:off x="731520" y="1005840"/>
-            <a:ext cx="1828800" cy="54864"/>
+            <a:off x="914400" y="2743200"/>
+            <a:ext cx="5029200" cy="36576"/>
           </a:xfrm>
           <a:prstGeom prst="rect">
             <a:avLst/>
@@ -17716,57 +17826,14 @@
       </p:sp>
       <p:sp>
         <p:nvSpPr>
-          <p:cNvPr id="4" name="Rounded Rectangle 3"/>
-          <p:cNvSpPr/>
-          <p:nvPr/>
-        </p:nvSpPr>
-        <p:spPr>
-          <a:xfrm>
-            <a:off x="1097280" y="1234440"/>
-            <a:ext cx="9966960" cy="640080"/>
-          </a:xfrm>
-          <a:prstGeom prst="roundRect">
-            <a:avLst/>
-          </a:prstGeom>
-          <a:solidFill>
-            <a:srgbClr val="F5F5F5"/>
-          </a:solidFill>
-          <a:ln>
-            <a:noFill/>
-          </a:ln>
-        </p:spPr>
-        <p:style>
-          <a:lnRef idx="1">
-            <a:schemeClr val="accent1"/>
-          </a:lnRef>
-          <a:fillRef idx="3">
-            <a:schemeClr val="accent1"/>
-          </a:fillRef>
-          <a:effectRef idx="2">
-            <a:schemeClr val="accent1"/>
-          </a:effectRef>
-          <a:fontRef idx="minor">
-            <a:schemeClr val="lt1"/>
-          </a:fontRef>
-        </p:style>
-        <p:txBody>
-          <a:bodyPr rtlCol="0" anchor="ctr"/>
-          <a:lstStyle/>
-          <a:p>
-            <a:pPr algn="ctr"/>
-          </a:p>
-        </p:txBody>
-      </p:sp>
-      <p:sp>
-        <p:nvSpPr>
-          <p:cNvPr id="5" name="TextBox 4"/>
+          <p:cNvPr id="6" name="TextBox 5"/>
           <p:cNvSpPr txBox="1"/>
           <p:nvPr/>
         </p:nvSpPr>
         <p:spPr>
           <a:xfrm>
-            <a:off x="1371600" y="1280160"/>
-            <a:ext cx="9418320" cy="548640"/>
+            <a:off x="1188720" y="2926080"/>
+            <a:ext cx="4754880" cy="457200"/>
           </a:xfrm>
           <a:prstGeom prst="rect">
             <a:avLst/>
@@ -17779,116 +17846,30 @@
           </a:bodyPr>
           <a:lstStyle/>
           <a:p>
-            <a:pPr algn="ctr">
-              <a:defRPr sz="1500" b="1">
-                <a:solidFill>
-                  <a:srgbClr val="555555"/>
-                </a:solidFill>
-                <a:latin typeface="Calibri"/>
-              </a:defRPr>
-            </a:pPr>
-            <a:r>
-              <a:t>"What did Marcus Webb tell hospital staff about when he put Jaylen to bed, and did he give the same answer to law enforcement?"</a:t>
-            </a:r>
-          </a:p>
-        </p:txBody>
-      </p:sp>
-      <p:sp>
-        <p:nvSpPr>
-          <p:cNvPr id="6" name="Rounded Rectangle 5"/>
-          <p:cNvSpPr/>
-          <p:nvPr/>
-        </p:nvSpPr>
-        <p:spPr>
-          <a:xfrm>
-            <a:off x="822960" y="2057400"/>
-            <a:ext cx="3383280" cy="3383280"/>
-          </a:xfrm>
-          <a:prstGeom prst="roundRect">
-            <a:avLst/>
-          </a:prstGeom>
-          <a:solidFill>
-            <a:srgbClr val="FFEBEE"/>
-          </a:solidFill>
-          <a:ln>
-            <a:noFill/>
-          </a:ln>
-        </p:spPr>
-        <p:style>
-          <a:lnRef idx="1">
-            <a:schemeClr val="accent1"/>
-          </a:lnRef>
-          <a:fillRef idx="3">
-            <a:schemeClr val="accent1"/>
-          </a:fillRef>
-          <a:effectRef idx="2">
-            <a:schemeClr val="accent1"/>
-          </a:effectRef>
-          <a:fontRef idx="minor">
-            <a:schemeClr val="lt1"/>
-          </a:fontRef>
-        </p:style>
-        <p:txBody>
-          <a:bodyPr rtlCol="0" anchor="ctr"/>
-          <a:lstStyle/>
-          <a:p>
-            <a:pPr algn="ctr"/>
-          </a:p>
-        </p:txBody>
-      </p:sp>
-      <p:sp>
-        <p:nvSpPr>
-          <p:cNvPr id="7" name="Rectangle 6"/>
-          <p:cNvSpPr/>
-          <p:nvPr/>
-        </p:nvSpPr>
-        <p:spPr>
-          <a:xfrm>
-            <a:off x="822960" y="2057400"/>
-            <a:ext cx="3383280" cy="109728"/>
-          </a:xfrm>
-          <a:prstGeom prst="rect">
-            <a:avLst/>
-          </a:prstGeom>
-          <a:solidFill>
-            <a:srgbClr val="C62828"/>
-          </a:solidFill>
-          <a:ln>
-            <a:noFill/>
-          </a:ln>
-        </p:spPr>
-        <p:style>
-          <a:lnRef idx="1">
-            <a:schemeClr val="accent1"/>
-          </a:lnRef>
-          <a:fillRef idx="3">
-            <a:schemeClr val="accent1"/>
-          </a:fillRef>
-          <a:effectRef idx="2">
-            <a:schemeClr val="accent1"/>
-          </a:effectRef>
-          <a:fontRef idx="minor">
-            <a:schemeClr val="lt1"/>
-          </a:fontRef>
-        </p:style>
-        <p:txBody>
-          <a:bodyPr rtlCol="0" anchor="ctr"/>
-          <a:lstStyle/>
-          <a:p>
-            <a:pPr algn="ctr"/>
-          </a:p>
-        </p:txBody>
-      </p:sp>
-      <p:sp>
-        <p:nvSpPr>
-          <p:cNvPr id="8" name="TextBox 7"/>
+            <a:pPr algn="l">
+              <a:defRPr sz="1400" b="0">
+                <a:solidFill>
+                  <a:srgbClr val="CCDDEE"/>
+                </a:solidFill>
+                <a:latin typeface="Calibri"/>
+              </a:defRPr>
+            </a:pPr>
+            <a:r>
+              <a:t>3 agents, same model, 3 SharePoint libraries</a:t>
+            </a:r>
+          </a:p>
+        </p:txBody>
+      </p:sp>
+      <p:sp>
+        <p:nvSpPr>
+          <p:cNvPr id="7" name="TextBox 6"/>
           <p:cNvSpPr txBox="1"/>
           <p:nvPr/>
         </p:nvSpPr>
         <p:spPr>
           <a:xfrm>
-            <a:off x="960120" y="2240280"/>
-            <a:ext cx="3108960" cy="320040"/>
+            <a:off x="1188720" y="3429000"/>
+            <a:ext cx="4754880" cy="457200"/>
           </a:xfrm>
           <a:prstGeom prst="rect">
             <a:avLst/>
@@ -17901,83 +17882,30 @@
           </a:bodyPr>
           <a:lstStyle/>
           <a:p>
-            <a:pPr algn="ctr">
-              <a:defRPr sz="1600" b="1">
-                <a:solidFill>
-                  <a:srgbClr val="2D2D2D"/>
-                </a:solidFill>
-                <a:latin typeface="Calibri"/>
-              </a:defRPr>
-            </a:pPr>
-            <a:r>
-              <a:t>Raw Documents</a:t>
-            </a:r>
-          </a:p>
-        </p:txBody>
-      </p:sp>
-      <p:sp>
-        <p:nvSpPr>
-          <p:cNvPr id="9" name="Rounded Rectangle 8"/>
-          <p:cNvSpPr/>
-          <p:nvPr/>
-        </p:nvSpPr>
-        <p:spPr>
-          <a:xfrm>
-            <a:off x="1874519" y="2606040"/>
-            <a:ext cx="1280160" cy="365760"/>
-          </a:xfrm>
-          <a:prstGeom prst="roundRect">
-            <a:avLst/>
-          </a:prstGeom>
-          <a:solidFill>
-            <a:srgbClr val="C62828"/>
-          </a:solidFill>
-          <a:ln>
-            <a:noFill/>
-          </a:ln>
-        </p:spPr>
-        <p:style>
-          <a:lnRef idx="1">
-            <a:schemeClr val="accent1"/>
-          </a:lnRef>
-          <a:fillRef idx="3">
-            <a:schemeClr val="accent1"/>
-          </a:fillRef>
-          <a:effectRef idx="2">
-            <a:schemeClr val="accent1"/>
-          </a:effectRef>
-          <a:fontRef idx="minor">
-            <a:schemeClr val="lt1"/>
-          </a:fontRef>
-        </p:style>
-        <p:txBody>
-          <a:bodyPr rtlCol="0" anchor="ctr"/>
-          <a:lstStyle/>
-          <a:p>
-            <a:pPr algn="ctr">
-              <a:defRPr sz="1400" b="1">
-                <a:solidFill>
-                  <a:srgbClr val="FFFFFF"/>
-                </a:solidFill>
-                <a:latin typeface="Calibri"/>
-              </a:defRPr>
-            </a:pPr>
-            <a:r>
-              <a:t>FAIL</a:t>
-            </a:r>
-          </a:p>
-        </p:txBody>
-      </p:sp>
-      <p:sp>
-        <p:nvSpPr>
-          <p:cNvPr id="10" name="TextBox 9"/>
+            <a:pPr algn="l">
+              <a:defRPr sz="1400" b="0">
+                <a:solidFill>
+                  <a:srgbClr val="CCDDEE"/>
+                </a:solidFill>
+                <a:latin typeface="Calibri"/>
+              </a:defRPr>
+            </a:pPr>
+            <a:r>
+              <a:t>Raw  -&gt;  Cross-Referenced  -&gt;  Enriched</a:t>
+            </a:r>
+          </a:p>
+        </p:txBody>
+      </p:sp>
+      <p:sp>
+        <p:nvSpPr>
+          <p:cNvPr id="8" name="TextBox 7"/>
           <p:cNvSpPr txBox="1"/>
           <p:nvPr/>
         </p:nvSpPr>
         <p:spPr>
           <a:xfrm>
-            <a:off x="1005840" y="3108960"/>
-            <a:ext cx="3017520" cy="411480"/>
+            <a:off x="1188720" y="3931920"/>
+            <a:ext cx="4754880" cy="457200"/>
           </a:xfrm>
           <a:prstGeom prst="rect">
             <a:avLst/>
@@ -17991,29 +17919,29 @@
           <a:lstStyle/>
           <a:p>
             <a:pPr algn="l">
-              <a:defRPr sz="1200" b="0">
-                <a:solidFill>
-                  <a:srgbClr val="2D2D2D"/>
-                </a:solidFill>
-                <a:latin typeface="Calibri"/>
-              </a:defRPr>
-            </a:pPr>
-            <a:r>
-              <a:t>Found: Sheriff Report interview</a:t>
-            </a:r>
-          </a:p>
-        </p:txBody>
-      </p:sp>
-      <p:sp>
-        <p:nvSpPr>
-          <p:cNvPr id="11" name="TextBox 10"/>
+              <a:defRPr sz="1400" b="0">
+                <a:solidFill>
+                  <a:srgbClr val="CCDDEE"/>
+                </a:solidFill>
+                <a:latin typeface="Calibri"/>
+              </a:defRPr>
+            </a:pPr>
+            <a:r>
+              <a:t>Skeletal survey: FAIL -&gt; PASS -&gt; PASS</a:t>
+            </a:r>
+          </a:p>
+        </p:txBody>
+      </p:sp>
+      <p:sp>
+        <p:nvSpPr>
+          <p:cNvPr id="9" name="TextBox 8"/>
           <p:cNvSpPr txBox="1"/>
           <p:nvPr/>
         </p:nvSpPr>
         <p:spPr>
           <a:xfrm>
-            <a:off x="1005840" y="3520440"/>
-            <a:ext cx="3017520" cy="411480"/>
+            <a:off x="1188720" y="4434840"/>
+            <a:ext cx="4754880" cy="457200"/>
           </a:xfrm>
           <a:prstGeom prst="rect">
             <a:avLst/>
@@ -18027,29 +17955,29 @@
           <a:lstStyle/>
           <a:p>
             <a:pPr algn="l">
-              <a:defRPr sz="1200" b="1">
-                <a:solidFill>
-                  <a:srgbClr val="C62828"/>
-                </a:solidFill>
-                <a:latin typeface="Calibri"/>
-              </a:defRPr>
-            </a:pPr>
-            <a:r>
-              <a:t>Missed: Nursing notes in Medical Records</a:t>
-            </a:r>
-          </a:p>
-        </p:txBody>
-      </p:sp>
-      <p:sp>
-        <p:nvSpPr>
-          <p:cNvPr id="12" name="TextBox 11"/>
+              <a:defRPr sz="1400" b="0">
+                <a:solidFill>
+                  <a:srgbClr val="CCDDEE"/>
+                </a:solidFill>
+                <a:latin typeface="Calibri"/>
+              </a:defRPr>
+            </a:pPr>
+            <a:r>
+              <a:t>Marcus Webb: FAIL -&gt; PARTIAL -&gt; PASS</a:t>
+            </a:r>
+          </a:p>
+        </p:txBody>
+      </p:sp>
+      <p:sp>
+        <p:nvSpPr>
+          <p:cNvPr id="10" name="TextBox 9"/>
           <p:cNvSpPr txBox="1"/>
           <p:nvPr/>
         </p:nvSpPr>
         <p:spPr>
           <a:xfrm>
-            <a:off x="1005840" y="4023360"/>
-            <a:ext cx="3017520" cy="1097280"/>
+            <a:off x="1188720" y="4937760"/>
+            <a:ext cx="4754880" cy="457200"/>
           </a:xfrm>
           <a:prstGeom prst="rect">
             <a:avLst/>
@@ -18063,123 +17991,29 @@
           <a:lstStyle/>
           <a:p>
             <a:pPr algn="l">
-              <a:defRPr sz="1100" b="0">
-                <a:solidFill>
-                  <a:srgbClr val="555555"/>
-                </a:solidFill>
-                <a:latin typeface="Calibri"/>
-              </a:defRPr>
-            </a:pPr>
-            <a:r>
-              <a:t>The agent has no reason to look</a:t>
-            </a:r>
-            <a:br/>
-            <a:r>
-              <a:t>in a medical record for</a:t>
-            </a:r>
-            <a:br/>
-            <a:r>
-              <a:t>parent statements.</a:t>
-            </a:r>
-          </a:p>
-        </p:txBody>
-      </p:sp>
-      <p:sp>
-        <p:nvSpPr>
-          <p:cNvPr id="13" name="Rounded Rectangle 12"/>
-          <p:cNvSpPr/>
-          <p:nvPr/>
-        </p:nvSpPr>
-        <p:spPr>
-          <a:xfrm>
-            <a:off x="4572000" y="2057400"/>
-            <a:ext cx="3383280" cy="3383280"/>
-          </a:xfrm>
-          <a:prstGeom prst="roundRect">
-            <a:avLst/>
-          </a:prstGeom>
-          <a:solidFill>
-            <a:srgbClr val="FFF8E1"/>
-          </a:solidFill>
-          <a:ln>
-            <a:noFill/>
-          </a:ln>
-        </p:spPr>
-        <p:style>
-          <a:lnRef idx="1">
-            <a:schemeClr val="accent1"/>
-          </a:lnRef>
-          <a:fillRef idx="3">
-            <a:schemeClr val="accent1"/>
-          </a:fillRef>
-          <a:effectRef idx="2">
-            <a:schemeClr val="accent1"/>
-          </a:effectRef>
-          <a:fontRef idx="minor">
-            <a:schemeClr val="lt1"/>
-          </a:fontRef>
-        </p:style>
-        <p:txBody>
-          <a:bodyPr rtlCol="0" anchor="ctr"/>
-          <a:lstStyle/>
-          <a:p>
-            <a:pPr algn="ctr"/>
-          </a:p>
-        </p:txBody>
-      </p:sp>
-      <p:sp>
-        <p:nvSpPr>
-          <p:cNvPr id="14" name="Rectangle 13"/>
-          <p:cNvSpPr/>
-          <p:nvPr/>
-        </p:nvSpPr>
-        <p:spPr>
-          <a:xfrm>
-            <a:off x="4572000" y="2057400"/>
-            <a:ext cx="3383280" cy="109728"/>
-          </a:xfrm>
-          <a:prstGeom prst="rect">
-            <a:avLst/>
-          </a:prstGeom>
-          <a:solidFill>
-            <a:srgbClr val="F9A825"/>
-          </a:solidFill>
-          <a:ln>
-            <a:noFill/>
-          </a:ln>
-        </p:spPr>
-        <p:style>
-          <a:lnRef idx="1">
-            <a:schemeClr val="accent1"/>
-          </a:lnRef>
-          <a:fillRef idx="3">
-            <a:schemeClr val="accent1"/>
-          </a:fillRef>
-          <a:effectRef idx="2">
-            <a:schemeClr val="accent1"/>
-          </a:effectRef>
-          <a:fontRef idx="minor">
-            <a:schemeClr val="lt1"/>
-          </a:fontRef>
-        </p:style>
-        <p:txBody>
-          <a:bodyPr rtlCol="0" anchor="ctr"/>
-          <a:lstStyle/>
-          <a:p>
-            <a:pPr algn="ctr"/>
-          </a:p>
-        </p:txBody>
-      </p:sp>
-      <p:sp>
-        <p:nvSpPr>
-          <p:cNvPr id="15" name="TextBox 14"/>
+              <a:defRPr sz="1400" b="0">
+                <a:solidFill>
+                  <a:srgbClr val="CCDDEE"/>
+                </a:solidFill>
+                <a:latin typeface="Calibri"/>
+              </a:defRPr>
+            </a:pPr>
+            <a:r>
+              <a:t>Score arc: 3/10 -&gt; 7/10 -&gt; 8/10</a:t>
+            </a:r>
+          </a:p>
+        </p:txBody>
+      </p:sp>
+      <p:sp>
+        <p:nvSpPr>
+          <p:cNvPr id="11" name="TextBox 10"/>
           <p:cNvSpPr txBox="1"/>
           <p:nvPr/>
         </p:nvSpPr>
         <p:spPr>
           <a:xfrm>
-            <a:off x="4709160" y="2240280"/>
-            <a:ext cx="3108960" cy="320040"/>
+            <a:off x="1188720" y="5440680"/>
+            <a:ext cx="4754880" cy="457200"/>
           </a:xfrm>
           <a:prstGeom prst="rect">
             <a:avLst/>
@@ -18192,83 +18026,30 @@
           </a:bodyPr>
           <a:lstStyle/>
           <a:p>
-            <a:pPr algn="ctr">
-              <a:defRPr sz="1600" b="1">
-                <a:solidFill>
-                  <a:srgbClr val="2D2D2D"/>
-                </a:solidFill>
-                <a:latin typeface="Calibri"/>
-              </a:defRPr>
-            </a:pPr>
-            <a:r>
-              <a:t>Cross-Referenced</a:t>
-            </a:r>
-          </a:p>
-        </p:txBody>
-      </p:sp>
-      <p:sp>
-        <p:nvSpPr>
-          <p:cNvPr id="16" name="Rounded Rectangle 15"/>
-          <p:cNvSpPr/>
-          <p:nvPr/>
-        </p:nvSpPr>
-        <p:spPr>
-          <a:xfrm>
-            <a:off x="5623560" y="2606040"/>
-            <a:ext cx="1280160" cy="365760"/>
-          </a:xfrm>
-          <a:prstGeom prst="roundRect">
-            <a:avLst/>
-          </a:prstGeom>
-          <a:solidFill>
-            <a:srgbClr val="F9A825"/>
-          </a:solidFill>
-          <a:ln>
-            <a:noFill/>
-          </a:ln>
-        </p:spPr>
-        <p:style>
-          <a:lnRef idx="1">
-            <a:schemeClr val="accent1"/>
-          </a:lnRef>
-          <a:fillRef idx="3">
-            <a:schemeClr val="accent1"/>
-          </a:fillRef>
-          <a:effectRef idx="2">
-            <a:schemeClr val="accent1"/>
-          </a:effectRef>
-          <a:fontRef idx="minor">
-            <a:schemeClr val="lt1"/>
-          </a:fontRef>
-        </p:style>
-        <p:txBody>
-          <a:bodyPr rtlCol="0" anchor="ctr"/>
-          <a:lstStyle/>
-          <a:p>
-            <a:pPr algn="ctr">
-              <a:defRPr sz="1400" b="1">
-                <a:solidFill>
-                  <a:srgbClr val="FFFFFF"/>
-                </a:solidFill>
-                <a:latin typeface="Calibri"/>
-              </a:defRPr>
-            </a:pPr>
-            <a:r>
-              <a:t>PARTIAL</a:t>
-            </a:r>
-          </a:p>
-        </p:txBody>
-      </p:sp>
-      <p:sp>
-        <p:nvSpPr>
-          <p:cNvPr id="17" name="TextBox 16"/>
+            <a:pPr algn="l">
+              <a:defRPr sz="1400" b="0">
+                <a:solidFill>
+                  <a:srgbClr val="CCDDEE"/>
+                </a:solidFill>
+                <a:latin typeface="Calibri"/>
+              </a:defRPr>
+            </a:pPr>
+            <a:r>
+              <a:t>Cost: $0, 45 minutes of document hygiene</a:t>
+            </a:r>
+          </a:p>
+        </p:txBody>
+      </p:sp>
+      <p:sp>
+        <p:nvSpPr>
+          <p:cNvPr id="12" name="TextBox 11"/>
           <p:cNvSpPr txBox="1"/>
           <p:nvPr/>
         </p:nvSpPr>
         <p:spPr>
           <a:xfrm>
-            <a:off x="4754880" y="3108960"/>
-            <a:ext cx="3017520" cy="411480"/>
+            <a:off x="6400800" y="2286000"/>
+            <a:ext cx="5029200" cy="457200"/>
           </a:xfrm>
           <a:prstGeom prst="rect">
             <a:avLst/>
@@ -18282,402 +18063,31 @@
           <a:lstStyle/>
           <a:p>
             <a:pPr algn="l">
-              <a:defRPr sz="1200" b="0">
-                <a:solidFill>
-                  <a:srgbClr val="2D2D2D"/>
-                </a:solidFill>
-                <a:latin typeface="Calibri"/>
-              </a:defRPr>
-            </a:pPr>
-            <a:r>
-              <a:t>Found: Both sources identified</a:t>
-            </a:r>
-          </a:p>
-        </p:txBody>
-      </p:sp>
-      <p:sp>
-        <p:nvSpPr>
-          <p:cNvPr id="18" name="TextBox 17"/>
-          <p:cNvSpPr txBox="1"/>
-          <p:nvPr/>
-        </p:nvSpPr>
-        <p:spPr>
-          <a:xfrm>
-            <a:off x="4754880" y="3520440"/>
-            <a:ext cx="3017520" cy="411480"/>
-          </a:xfrm>
-          <a:prstGeom prst="rect">
-            <a:avLst/>
-          </a:prstGeom>
-          <a:noFill/>
-        </p:spPr>
-        <p:txBody>
-          <a:bodyPr wrap="square">
-            <a:spAutoFit/>
-          </a:bodyPr>
-          <a:lstStyle/>
-          <a:p>
-            <a:pPr algn="l">
-              <a:defRPr sz="1200" b="1">
-                <a:solidFill>
-                  <a:srgbClr val="F9A825"/>
-                </a:solidFill>
-                <a:latin typeface="Calibri"/>
-              </a:defRPr>
-            </a:pPr>
-            <a:r>
-              <a:t>Missed: Specific nursing note detail</a:t>
-            </a:r>
-          </a:p>
-        </p:txBody>
-      </p:sp>
-      <p:sp>
-        <p:nvSpPr>
-          <p:cNvPr id="19" name="TextBox 18"/>
-          <p:cNvSpPr txBox="1"/>
-          <p:nvPr/>
-        </p:nvSpPr>
-        <p:spPr>
-          <a:xfrm>
-            <a:off x="4754880" y="4023360"/>
-            <a:ext cx="3017520" cy="1097280"/>
-          </a:xfrm>
-          <a:prstGeom prst="rect">
-            <a:avLst/>
-          </a:prstGeom>
-          <a:noFill/>
-        </p:spPr>
-        <p:txBody>
-          <a:bodyPr wrap="square">
-            <a:spAutoFit/>
-          </a:bodyPr>
-          <a:lstStyle/>
-          <a:p>
-            <a:pPr algn="l">
-              <a:defRPr sz="1100" b="0">
-                <a:solidFill>
-                  <a:srgbClr val="555555"/>
-                </a:solidFill>
-                <a:latin typeface="Calibri"/>
-              </a:defRPr>
-            </a:pPr>
-            <a:r>
-              <a:t>Cross-reference header points to</a:t>
-            </a:r>
-            <a:br/>
-            <a:r>
-              <a:t>Medical Records, but the agent</a:t>
-            </a:r>
-            <a:br/>
-            <a:r>
-              <a:t>still can't find nursing notes.</a:t>
-            </a:r>
-          </a:p>
-        </p:txBody>
-      </p:sp>
-      <p:sp>
-        <p:nvSpPr>
-          <p:cNvPr id="20" name="Rounded Rectangle 19"/>
+              <a:defRPr sz="1800" b="1">
+                <a:solidFill>
+                  <a:srgbClr val="FFFFFF"/>
+                </a:solidFill>
+                <a:latin typeface="Calibri"/>
+              </a:defRPr>
+            </a:pPr>
+            <a:r>
+              <a:t>Part 2: Model Selection  (~8 min)</a:t>
+            </a:r>
+          </a:p>
+        </p:txBody>
+      </p:sp>
+      <p:sp>
+        <p:nvSpPr>
+          <p:cNvPr id="13" name="Rectangle 12"/>
           <p:cNvSpPr/>
           <p:nvPr/>
         </p:nvSpPr>
         <p:spPr>
           <a:xfrm>
-            <a:off x="8321040" y="2057400"/>
-            <a:ext cx="3383280" cy="3383280"/>
-          </a:xfrm>
-          <a:prstGeom prst="roundRect">
-            <a:avLst/>
-          </a:prstGeom>
-          <a:solidFill>
-            <a:srgbClr val="E8F5E9"/>
-          </a:solidFill>
-          <a:ln>
-            <a:noFill/>
-          </a:ln>
-        </p:spPr>
-        <p:style>
-          <a:lnRef idx="1">
-            <a:schemeClr val="accent1"/>
-          </a:lnRef>
-          <a:fillRef idx="3">
-            <a:schemeClr val="accent1"/>
-          </a:fillRef>
-          <a:effectRef idx="2">
-            <a:schemeClr val="accent1"/>
-          </a:effectRef>
-          <a:fontRef idx="minor">
-            <a:schemeClr val="lt1"/>
-          </a:fontRef>
-        </p:style>
-        <p:txBody>
-          <a:bodyPr rtlCol="0" anchor="ctr"/>
-          <a:lstStyle/>
-          <a:p>
-            <a:pPr algn="ctr"/>
-          </a:p>
-        </p:txBody>
-      </p:sp>
-      <p:sp>
-        <p:nvSpPr>
-          <p:cNvPr id="21" name="Rectangle 20"/>
-          <p:cNvSpPr/>
-          <p:nvPr/>
-        </p:nvSpPr>
-        <p:spPr>
-          <a:xfrm>
-            <a:off x="8321040" y="2057400"/>
-            <a:ext cx="3383280" cy="109728"/>
-          </a:xfrm>
-          <a:prstGeom prst="rect">
-            <a:avLst/>
-          </a:prstGeom>
-          <a:solidFill>
-            <a:srgbClr val="4CAF50"/>
-          </a:solidFill>
-          <a:ln>
-            <a:noFill/>
-          </a:ln>
-        </p:spPr>
-        <p:style>
-          <a:lnRef idx="1">
-            <a:schemeClr val="accent1"/>
-          </a:lnRef>
-          <a:fillRef idx="3">
-            <a:schemeClr val="accent1"/>
-          </a:fillRef>
-          <a:effectRef idx="2">
-            <a:schemeClr val="accent1"/>
-          </a:effectRef>
-          <a:fontRef idx="minor">
-            <a:schemeClr val="lt1"/>
-          </a:fontRef>
-        </p:style>
-        <p:txBody>
-          <a:bodyPr rtlCol="0" anchor="ctr"/>
-          <a:lstStyle/>
-          <a:p>
-            <a:pPr algn="ctr"/>
-          </a:p>
-        </p:txBody>
-      </p:sp>
-      <p:sp>
-        <p:nvSpPr>
-          <p:cNvPr id="22" name="TextBox 21"/>
-          <p:cNvSpPr txBox="1"/>
-          <p:nvPr/>
-        </p:nvSpPr>
-        <p:spPr>
-          <a:xfrm>
-            <a:off x="8458200" y="2240280"/>
-            <a:ext cx="3108960" cy="320040"/>
-          </a:xfrm>
-          <a:prstGeom prst="rect">
-            <a:avLst/>
-          </a:prstGeom>
-          <a:noFill/>
-        </p:spPr>
-        <p:txBody>
-          <a:bodyPr wrap="square">
-            <a:spAutoFit/>
-          </a:bodyPr>
-          <a:lstStyle/>
-          <a:p>
-            <a:pPr algn="ctr">
-              <a:defRPr sz="1600" b="1">
-                <a:solidFill>
-                  <a:srgbClr val="2D2D2D"/>
-                </a:solidFill>
-                <a:latin typeface="Calibri"/>
-              </a:defRPr>
-            </a:pPr>
-            <a:r>
-              <a:t>Enriched + Metadata</a:t>
-            </a:r>
-          </a:p>
-        </p:txBody>
-      </p:sp>
-      <p:sp>
-        <p:nvSpPr>
-          <p:cNvPr id="23" name="Rounded Rectangle 22"/>
-          <p:cNvSpPr/>
-          <p:nvPr/>
-        </p:nvSpPr>
-        <p:spPr>
-          <a:xfrm>
-            <a:off x="9372600" y="2606040"/>
-            <a:ext cx="1280160" cy="365760"/>
-          </a:xfrm>
-          <a:prstGeom prst="roundRect">
-            <a:avLst/>
-          </a:prstGeom>
-          <a:solidFill>
-            <a:srgbClr val="4CAF50"/>
-          </a:solidFill>
-          <a:ln>
-            <a:noFill/>
-          </a:ln>
-        </p:spPr>
-        <p:style>
-          <a:lnRef idx="1">
-            <a:schemeClr val="accent1"/>
-          </a:lnRef>
-          <a:fillRef idx="3">
-            <a:schemeClr val="accent1"/>
-          </a:fillRef>
-          <a:effectRef idx="2">
-            <a:schemeClr val="accent1"/>
-          </a:effectRef>
-          <a:fontRef idx="minor">
-            <a:schemeClr val="lt1"/>
-          </a:fontRef>
-        </p:style>
-        <p:txBody>
-          <a:bodyPr rtlCol="0" anchor="ctr"/>
-          <a:lstStyle/>
-          <a:p>
-            <a:pPr algn="ctr">
-              <a:defRPr sz="1400" b="1">
-                <a:solidFill>
-                  <a:srgbClr val="FFFFFF"/>
-                </a:solidFill>
-                <a:latin typeface="Calibri"/>
-              </a:defRPr>
-            </a:pPr>
-            <a:r>
-              <a:t>PASS</a:t>
-            </a:r>
-          </a:p>
-        </p:txBody>
-      </p:sp>
-      <p:sp>
-        <p:nvSpPr>
-          <p:cNvPr id="24" name="TextBox 23"/>
-          <p:cNvSpPr txBox="1"/>
-          <p:nvPr/>
-        </p:nvSpPr>
-        <p:spPr>
-          <a:xfrm>
-            <a:off x="8503919" y="3108960"/>
-            <a:ext cx="3017520" cy="411480"/>
-          </a:xfrm>
-          <a:prstGeom prst="rect">
-            <a:avLst/>
-          </a:prstGeom>
-          <a:noFill/>
-        </p:spPr>
-        <p:txBody>
-          <a:bodyPr wrap="square">
-            <a:spAutoFit/>
-          </a:bodyPr>
-          <a:lstStyle/>
-          <a:p>
-            <a:pPr algn="l">
-              <a:defRPr sz="1200" b="0">
-                <a:solidFill>
-                  <a:srgbClr val="2D2D2D"/>
-                </a:solidFill>
-                <a:latin typeface="Calibri"/>
-              </a:defRPr>
-            </a:pPr>
-            <a:r>
-              <a:t>Found: Both statements, correct times</a:t>
-            </a:r>
-          </a:p>
-        </p:txBody>
-      </p:sp>
-      <p:sp>
-        <p:nvSpPr>
-          <p:cNvPr id="25" name="TextBox 24"/>
-          <p:cNvSpPr txBox="1"/>
-          <p:nvPr/>
-        </p:nvSpPr>
-        <p:spPr>
-          <a:xfrm>
-            <a:off x="8503919" y="3520440"/>
-            <a:ext cx="3017520" cy="411480"/>
-          </a:xfrm>
-          <a:prstGeom prst="rect">
-            <a:avLst/>
-          </a:prstGeom>
-          <a:noFill/>
-        </p:spPr>
-        <p:txBody>
-          <a:bodyPr wrap="square">
-            <a:spAutoFit/>
-          </a:bodyPr>
-          <a:lstStyle/>
-          <a:p>
-            <a:pPr algn="l">
-              <a:defRPr sz="1200" b="1">
-                <a:solidFill>
-                  <a:srgbClr val="4CAF50"/>
-                </a:solidFill>
-                <a:latin typeface="Calibri"/>
-              </a:defRPr>
-            </a:pPr>
-            <a:r>
-              <a:t>Missed: Nothing</a:t>
-            </a:r>
-          </a:p>
-        </p:txBody>
-      </p:sp>
-      <p:sp>
-        <p:nvSpPr>
-          <p:cNvPr id="26" name="TextBox 25"/>
-          <p:cNvSpPr txBox="1"/>
-          <p:nvPr/>
-        </p:nvSpPr>
-        <p:spPr>
-          <a:xfrm>
-            <a:off x="8503919" y="4023360"/>
-            <a:ext cx="3017520" cy="1097280"/>
-          </a:xfrm>
-          <a:prstGeom prst="rect">
-            <a:avLst/>
-          </a:prstGeom>
-          <a:noFill/>
-        </p:spPr>
-        <p:txBody>
-          <a:bodyPr wrap="square">
-            <a:spAutoFit/>
-          </a:bodyPr>
-          <a:lstStyle/>
-          <a:p>
-            <a:pPr algn="l">
-              <a:defRPr sz="1100" b="0">
-                <a:solidFill>
-                  <a:srgbClr val="555555"/>
-                </a:solidFill>
-                <a:latin typeface="Calibri"/>
-              </a:defRPr>
-            </a:pPr>
-            <a:r>
-              <a:t>SP metadata: "nursing interview,</a:t>
-            </a:r>
-            <a:br/>
-            <a:r>
-              <a:t>parent statements" on Medical</a:t>
-            </a:r>
-            <a:br/>
-            <a:r>
-              <a:t>Records enables retrieval.</a:t>
-            </a:r>
-          </a:p>
-        </p:txBody>
-      </p:sp>
-      <p:sp>
-        <p:nvSpPr>
-          <p:cNvPr id="27" name="Right Arrow 26"/>
-          <p:cNvSpPr/>
-          <p:nvPr/>
-        </p:nvSpPr>
-        <p:spPr>
-          <a:xfrm>
-            <a:off x="4160520" y="3383280"/>
-            <a:ext cx="457200" cy="320040"/>
-          </a:xfrm>
-          <a:prstGeom prst="rightArrow">
+            <a:off x="6400800" y="2743200"/>
+            <a:ext cx="5029200" cy="36576"/>
+          </a:xfrm>
+          <a:prstGeom prst="rect">
             <a:avLst/>
           </a:prstGeom>
           <a:solidFill>
@@ -18711,143 +18121,14 @@
       </p:sp>
       <p:sp>
         <p:nvSpPr>
-          <p:cNvPr id="28" name="Right Arrow 27"/>
-          <p:cNvSpPr/>
-          <p:nvPr/>
-        </p:nvSpPr>
-        <p:spPr>
-          <a:xfrm>
-            <a:off x="7909559" y="3383280"/>
-            <a:ext cx="457200" cy="320040"/>
-          </a:xfrm>
-          <a:prstGeom prst="rightArrow">
-            <a:avLst/>
-          </a:prstGeom>
-          <a:solidFill>
-            <a:srgbClr val="357ABD"/>
-          </a:solidFill>
-          <a:ln>
-            <a:noFill/>
-          </a:ln>
-        </p:spPr>
-        <p:style>
-          <a:lnRef idx="1">
-            <a:schemeClr val="accent1"/>
-          </a:lnRef>
-          <a:fillRef idx="3">
-            <a:schemeClr val="accent1"/>
-          </a:fillRef>
-          <a:effectRef idx="2">
-            <a:schemeClr val="accent1"/>
-          </a:effectRef>
-          <a:fontRef idx="minor">
-            <a:schemeClr val="lt1"/>
-          </a:fontRef>
-        </p:style>
-        <p:txBody>
-          <a:bodyPr rtlCol="0" anchor="ctr"/>
-          <a:lstStyle/>
-          <a:p>
-            <a:pPr algn="ctr"/>
-          </a:p>
-        </p:txBody>
-      </p:sp>
-      <p:sp>
-        <p:nvSpPr>
-          <p:cNvPr id="29" name="Rounded Rectangle 28"/>
-          <p:cNvSpPr/>
-          <p:nvPr/>
-        </p:nvSpPr>
-        <p:spPr>
-          <a:xfrm>
-            <a:off x="1371600" y="5623560"/>
-            <a:ext cx="9418320" cy="502920"/>
-          </a:xfrm>
-          <a:prstGeom prst="roundRect">
-            <a:avLst/>
-          </a:prstGeom>
-          <a:solidFill>
-            <a:srgbClr val="E3F2FD"/>
-          </a:solidFill>
-          <a:ln>
-            <a:noFill/>
-          </a:ln>
-        </p:spPr>
-        <p:style>
-          <a:lnRef idx="1">
-            <a:schemeClr val="accent1"/>
-          </a:lnRef>
-          <a:fillRef idx="3">
-            <a:schemeClr val="accent1"/>
-          </a:fillRef>
-          <a:effectRef idx="2">
-            <a:schemeClr val="accent1"/>
-          </a:effectRef>
-          <a:fontRef idx="minor">
-            <a:schemeClr val="lt1"/>
-          </a:fontRef>
-        </p:style>
-        <p:txBody>
-          <a:bodyPr rtlCol="0" anchor="ctr"/>
-          <a:lstStyle/>
-          <a:p>
-            <a:pPr algn="ctr"/>
-          </a:p>
-        </p:txBody>
-      </p:sp>
-      <p:sp>
-        <p:nvSpPr>
-          <p:cNvPr id="30" name="Rectangle 29"/>
-          <p:cNvSpPr/>
-          <p:nvPr/>
-        </p:nvSpPr>
-        <p:spPr>
-          <a:xfrm>
-            <a:off x="1371600" y="5623560"/>
-            <a:ext cx="109728" cy="502920"/>
-          </a:xfrm>
-          <a:prstGeom prst="rect">
-            <a:avLst/>
-          </a:prstGeom>
-          <a:solidFill>
-            <a:srgbClr val="357ABD"/>
-          </a:solidFill>
-          <a:ln>
-            <a:noFill/>
-          </a:ln>
-        </p:spPr>
-        <p:style>
-          <a:lnRef idx="1">
-            <a:schemeClr val="accent1"/>
-          </a:lnRef>
-          <a:fillRef idx="3">
-            <a:schemeClr val="accent1"/>
-          </a:fillRef>
-          <a:effectRef idx="2">
-            <a:schemeClr val="accent1"/>
-          </a:effectRef>
-          <a:fontRef idx="minor">
-            <a:schemeClr val="lt1"/>
-          </a:fontRef>
-        </p:style>
-        <p:txBody>
-          <a:bodyPr rtlCol="0" anchor="ctr"/>
-          <a:lstStyle/>
-          <a:p>
-            <a:pPr algn="ctr"/>
-          </a:p>
-        </p:txBody>
-      </p:sp>
-      <p:sp>
-        <p:nvSpPr>
-          <p:cNvPr id="31" name="TextBox 30"/>
+          <p:cNvPr id="14" name="TextBox 13"/>
           <p:cNvSpPr txBox="1"/>
           <p:nvPr/>
         </p:nvSpPr>
         <p:spPr>
           <a:xfrm>
-            <a:off x="1645920" y="5669280"/>
-            <a:ext cx="8961120" cy="411480"/>
+            <a:off x="6675120" y="2926080"/>
+            <a:ext cx="4754880" cy="457200"/>
           </a:xfrm>
           <a:prstGeom prst="rect">
             <a:avLst/>
@@ -18860,295 +18141,30 @@
           </a:bodyPr>
           <a:lstStyle/>
           <a:p>
-            <a:pPr algn="ctr">
-              <a:defRPr sz="1600" b="1">
-                <a:solidFill>
-                  <a:srgbClr val="1B2A4A"/>
-                </a:solidFill>
-                <a:latin typeface="Calibri"/>
-              </a:defRPr>
-            </a:pPr>
-            <a:r>
-              <a:t>Cross-references fix reasoning errors. Metadata fixes retrieval errors. You need both.</a:t>
-            </a:r>
-          </a:p>
-        </p:txBody>
-      </p:sp>
-      <p:sp>
-        <p:nvSpPr>
-          <p:cNvPr id="32" name="Rounded Rectangle 31"/>
-          <p:cNvSpPr/>
-          <p:nvPr/>
-        </p:nvSpPr>
-        <p:spPr>
-          <a:xfrm>
-            <a:off x="792327" y="6035040"/>
-            <a:ext cx="2011680" cy="411480"/>
-          </a:xfrm>
-          <a:prstGeom prst="roundRect">
-            <a:avLst/>
-          </a:prstGeom>
-          <a:solidFill>
-            <a:srgbClr val="4CAF50"/>
-          </a:solidFill>
-          <a:ln>
-            <a:noFill/>
-          </a:ln>
-        </p:spPr>
-        <p:style>
-          <a:lnRef idx="1">
-            <a:schemeClr val="accent1"/>
-          </a:lnRef>
-          <a:fillRef idx="3">
-            <a:schemeClr val="accent1"/>
-          </a:fillRef>
-          <a:effectRef idx="2">
-            <a:schemeClr val="accent1"/>
-          </a:effectRef>
-          <a:fontRef idx="minor">
-            <a:schemeClr val="lt1"/>
-          </a:fontRef>
-        </p:style>
-        <p:txBody>
-          <a:bodyPr rtlCol="0" anchor="ctr" wrap="none"/>
-          <a:lstStyle/>
-          <a:p>
-            <a:pPr algn="ctr">
-              <a:defRPr sz="1200" b="1">
-                <a:solidFill>
-                  <a:srgbClr val="FFFFFF"/>
-                </a:solidFill>
-                <a:latin typeface="Calibri"/>
-              </a:defRPr>
-            </a:pPr>
-            <a:r>
-              <a:t>L1: Discovery</a:t>
-            </a:r>
-          </a:p>
-        </p:txBody>
-      </p:sp>
-      <p:sp>
-        <p:nvSpPr>
-          <p:cNvPr id="33" name="Rounded Rectangle 32"/>
-          <p:cNvSpPr/>
-          <p:nvPr/>
-        </p:nvSpPr>
-        <p:spPr>
-          <a:xfrm>
-            <a:off x="2941167" y="6035040"/>
-            <a:ext cx="2011680" cy="411480"/>
-          </a:xfrm>
-          <a:prstGeom prst="roundRect">
-            <a:avLst/>
-          </a:prstGeom>
-          <a:solidFill>
-            <a:srgbClr val="8BC34A"/>
-          </a:solidFill>
-          <a:ln>
-            <a:noFill/>
-          </a:ln>
-        </p:spPr>
-        <p:style>
-          <a:lnRef idx="1">
-            <a:schemeClr val="accent1"/>
-          </a:lnRef>
-          <a:fillRef idx="3">
-            <a:schemeClr val="accent1"/>
-          </a:fillRef>
-          <a:effectRef idx="2">
-            <a:schemeClr val="accent1"/>
-          </a:effectRef>
-          <a:fontRef idx="minor">
-            <a:schemeClr val="lt1"/>
-          </a:fontRef>
-        </p:style>
-        <p:txBody>
-          <a:bodyPr rtlCol="0" anchor="ctr" wrap="none"/>
-          <a:lstStyle/>
-          <a:p>
-            <a:pPr algn="ctr">
-              <a:defRPr sz="1200" b="1">
-                <a:solidFill>
-                  <a:srgbClr val="FFFFFF"/>
-                </a:solidFill>
-                <a:latin typeface="Calibri"/>
-              </a:defRPr>
-            </a:pPr>
-            <a:r>
-              <a:t>L2: Summarization</a:t>
-            </a:r>
-          </a:p>
-        </p:txBody>
-      </p:sp>
-      <p:sp>
-        <p:nvSpPr>
-          <p:cNvPr id="34" name="Rounded Rectangle 33"/>
-          <p:cNvSpPr/>
-          <p:nvPr/>
-        </p:nvSpPr>
-        <p:spPr>
-          <a:xfrm>
-            <a:off x="5090007" y="6035040"/>
-            <a:ext cx="2011680" cy="411480"/>
-          </a:xfrm>
-          <a:prstGeom prst="roundRect">
-            <a:avLst/>
-          </a:prstGeom>
-          <a:solidFill>
-            <a:srgbClr val="FF9800"/>
-          </a:solidFill>
-          <a:ln>
-            <a:noFill/>
-          </a:ln>
-        </p:spPr>
-        <p:style>
-          <a:lnRef idx="1">
-            <a:schemeClr val="accent1"/>
-          </a:lnRef>
-          <a:fillRef idx="3">
-            <a:schemeClr val="accent1"/>
-          </a:fillRef>
-          <a:effectRef idx="2">
-            <a:schemeClr val="accent1"/>
-          </a:effectRef>
-          <a:fontRef idx="minor">
-            <a:schemeClr val="lt1"/>
-          </a:fontRef>
-        </p:style>
-        <p:txBody>
-          <a:bodyPr rtlCol="0" anchor="ctr" wrap="none"/>
-          <a:lstStyle/>
-          <a:p>
-            <a:pPr algn="ctr">
-              <a:defRPr sz="1200" b="1">
-                <a:solidFill>
-                  <a:srgbClr val="FFFFFF"/>
-                </a:solidFill>
-                <a:latin typeface="Calibri"/>
-              </a:defRPr>
-            </a:pPr>
-            <a:r>
-              <a:t>L3: Operational</a:t>
-            </a:r>
-          </a:p>
-        </p:txBody>
-      </p:sp>
-      <p:sp>
-        <p:nvSpPr>
-          <p:cNvPr id="35" name="Rounded Rectangle 34"/>
-          <p:cNvSpPr/>
-          <p:nvPr/>
-        </p:nvSpPr>
-        <p:spPr>
-          <a:xfrm>
-            <a:off x="7238847" y="6035040"/>
-            <a:ext cx="2011680" cy="411480"/>
-          </a:xfrm>
-          <a:prstGeom prst="roundRect">
-            <a:avLst/>
-          </a:prstGeom>
-          <a:solidFill>
-            <a:srgbClr val="F4511E"/>
-          </a:solidFill>
-          <a:ln>
-            <a:noFill/>
-          </a:ln>
-        </p:spPr>
-        <p:style>
-          <a:lnRef idx="1">
-            <a:schemeClr val="accent1"/>
-          </a:lnRef>
-          <a:fillRef idx="3">
-            <a:schemeClr val="accent1"/>
-          </a:fillRef>
-          <a:effectRef idx="2">
-            <a:schemeClr val="accent1"/>
-          </a:effectRef>
-          <a:fontRef idx="minor">
-            <a:schemeClr val="lt1"/>
-          </a:fontRef>
-        </p:style>
-        <p:txBody>
-          <a:bodyPr rtlCol="0" anchor="ctr" wrap="none"/>
-          <a:lstStyle/>
-          <a:p>
-            <a:pPr algn="ctr">
-              <a:defRPr sz="1200" b="1">
-                <a:solidFill>
-                  <a:srgbClr val="FFFFFF"/>
-                </a:solidFill>
-                <a:latin typeface="Calibri"/>
-              </a:defRPr>
-            </a:pPr>
-            <a:r>
-              <a:t>L4: Investigative</a:t>
-            </a:r>
-          </a:p>
-        </p:txBody>
-      </p:sp>
-      <p:sp>
-        <p:nvSpPr>
-          <p:cNvPr id="36" name="Rounded Rectangle 35"/>
-          <p:cNvSpPr/>
-          <p:nvPr/>
-        </p:nvSpPr>
-        <p:spPr>
-          <a:xfrm>
-            <a:off x="9387687" y="6035040"/>
-            <a:ext cx="2011680" cy="411480"/>
-          </a:xfrm>
-          <a:prstGeom prst="roundRect">
-            <a:avLst/>
-          </a:prstGeom>
-          <a:solidFill>
-            <a:srgbClr val="E53935"/>
-          </a:solidFill>
-          <a:ln>
-            <a:noFill/>
-          </a:ln>
-        </p:spPr>
-        <p:style>
-          <a:lnRef idx="1">
-            <a:schemeClr val="accent1"/>
-          </a:lnRef>
-          <a:fillRef idx="3">
-            <a:schemeClr val="accent1"/>
-          </a:fillRef>
-          <a:effectRef idx="2">
-            <a:schemeClr val="accent1"/>
-          </a:effectRef>
-          <a:fontRef idx="minor">
-            <a:schemeClr val="lt1"/>
-          </a:fontRef>
-        </p:style>
-        <p:txBody>
-          <a:bodyPr rtlCol="0" anchor="ctr" wrap="none"/>
-          <a:lstStyle/>
-          <a:p>
-            <a:pPr algn="ctr">
-              <a:defRPr sz="1200" b="1">
-                <a:solidFill>
-                  <a:srgbClr val="FFFFFF"/>
-                </a:solidFill>
-                <a:latin typeface="Calibri"/>
-              </a:defRPr>
-            </a:pPr>
-            <a:r>
-              <a:t>L5: Adjudicative</a:t>
-            </a:r>
-          </a:p>
-        </p:txBody>
-      </p:sp>
-      <p:sp>
-        <p:nvSpPr>
-          <p:cNvPr id="37" name="TextBox 36"/>
+            <a:pPr algn="l">
+              <a:defRPr sz="1400" b="0">
+                <a:solidFill>
+                  <a:srgbClr val="CCDDEE"/>
+                </a:solidFill>
+                <a:latin typeface="Calibri"/>
+              </a:defRPr>
+            </a:pPr>
+            <a:r>
+              <a:t>1 Dataverse MCP agent, swap model live</a:t>
+            </a:r>
+          </a:p>
+        </p:txBody>
+      </p:sp>
+      <p:sp>
+        <p:nvSpPr>
+          <p:cNvPr id="15" name="TextBox 14"/>
           <p:cNvSpPr txBox="1"/>
           <p:nvPr/>
         </p:nvSpPr>
         <p:spPr>
           <a:xfrm>
-            <a:off x="457200" y="6446520"/>
-            <a:ext cx="2743200" cy="320040"/>
+            <a:off x="6675120" y="3429000"/>
+            <a:ext cx="4754880" cy="457200"/>
           </a:xfrm>
           <a:prstGeom prst="rect">
             <a:avLst/>
@@ -19162,15 +18178,195 @@
           <a:lstStyle/>
           <a:p>
             <a:pPr algn="l">
-              <a:defRPr sz="1000" b="0">
-                <a:solidFill>
-                  <a:srgbClr val="555555"/>
-                </a:solidFill>
-                <a:latin typeface="Calibri"/>
-              </a:defRPr>
-            </a:pPr>
-            <a:r>
-              <a:t>Confidential  |  March 2026</a:t>
+              <a:defRPr sz="1400" b="0">
+                <a:solidFill>
+                  <a:srgbClr val="CCDDEE"/>
+                </a:solidFill>
+                <a:latin typeface="Calibri"/>
+              </a:defRPr>
+            </a:pPr>
+            <a:r>
+              <a:t>GPT-4o  -&gt;  Sonnet 4.6</a:t>
+            </a:r>
+          </a:p>
+        </p:txBody>
+      </p:sp>
+      <p:sp>
+        <p:nvSpPr>
+          <p:cNvPr id="16" name="TextBox 15"/>
+          <p:cNvSpPr txBox="1"/>
+          <p:nvPr/>
+        </p:nvSpPr>
+        <p:spPr>
+          <a:xfrm>
+            <a:off x="6675120" y="3931920"/>
+            <a:ext cx="4754880" cy="457200"/>
+          </a:xfrm>
+          <a:prstGeom prst="rect">
+            <a:avLst/>
+          </a:prstGeom>
+          <a:noFill/>
+        </p:spPr>
+        <p:txBody>
+          <a:bodyPr wrap="square">
+            <a:spAutoFit/>
+          </a:bodyPr>
+          <a:lstStyle/>
+          <a:p>
+            <a:pPr algn="l">
+              <a:defRPr sz="1400" b="0">
+                <a:solidFill>
+                  <a:srgbClr val="CCDDEE"/>
+                </a:solidFill>
+                <a:latin typeface="Calibri"/>
+              </a:defRPr>
+            </a:pPr>
+            <a:r>
+              <a:t>TPR case filter: 0 -&gt; 10</a:t>
+            </a:r>
+          </a:p>
+        </p:txBody>
+      </p:sp>
+      <p:sp>
+        <p:nvSpPr>
+          <p:cNvPr id="17" name="TextBox 16"/>
+          <p:cNvSpPr txBox="1"/>
+          <p:nvPr/>
+        </p:nvSpPr>
+        <p:spPr>
+          <a:xfrm>
+            <a:off x="6675120" y="4434840"/>
+            <a:ext cx="4754880" cy="457200"/>
+          </a:xfrm>
+          <a:prstGeom prst="rect">
+            <a:avLst/>
+          </a:prstGeom>
+          <a:noFill/>
+        </p:spPr>
+        <p:txBody>
+          <a:bodyPr wrap="square">
+            <a:spAutoFit/>
+          </a:bodyPr>
+          <a:lstStyle/>
+          <a:p>
+            <a:pPr algn="l">
+              <a:defRPr sz="1400" b="0">
+                <a:solidFill>
+                  <a:srgbClr val="CCDDEE"/>
+                </a:solidFill>
+                <a:latin typeface="Calibri"/>
+              </a:defRPr>
+            </a:pPr>
+            <a:r>
+              <a:t>Cross-doc reasoning: 0 -&gt; 10</a:t>
+            </a:r>
+          </a:p>
+        </p:txBody>
+      </p:sp>
+      <p:sp>
+        <p:nvSpPr>
+          <p:cNvPr id="18" name="TextBox 17"/>
+          <p:cNvSpPr txBox="1"/>
+          <p:nvPr/>
+        </p:nvSpPr>
+        <p:spPr>
+          <a:xfrm>
+            <a:off x="6675120" y="4937760"/>
+            <a:ext cx="4754880" cy="457200"/>
+          </a:xfrm>
+          <a:prstGeom prst="rect">
+            <a:avLst/>
+          </a:prstGeom>
+          <a:noFill/>
+        </p:spPr>
+        <p:txBody>
+          <a:bodyPr wrap="square">
+            <a:spAutoFit/>
+          </a:bodyPr>
+          <a:lstStyle/>
+          <a:p>
+            <a:pPr algn="l">
+              <a:defRPr sz="1400" b="0">
+                <a:solidFill>
+                  <a:srgbClr val="CCDDEE"/>
+                </a:solidFill>
+                <a:latin typeface="Calibri"/>
+              </a:defRPr>
+            </a:pPr>
+            <a:r>
+              <a:t>Time gap calculation: 0 -&gt; 10</a:t>
+            </a:r>
+          </a:p>
+        </p:txBody>
+      </p:sp>
+      <p:sp>
+        <p:nvSpPr>
+          <p:cNvPr id="19" name="TextBox 18"/>
+          <p:cNvSpPr txBox="1"/>
+          <p:nvPr/>
+        </p:nvSpPr>
+        <p:spPr>
+          <a:xfrm>
+            <a:off x="6675120" y="5440680"/>
+            <a:ext cx="4754880" cy="457200"/>
+          </a:xfrm>
+          <a:prstGeom prst="rect">
+            <a:avLst/>
+          </a:prstGeom>
+          <a:noFill/>
+        </p:spPr>
+        <p:txBody>
+          <a:bodyPr wrap="square">
+            <a:spAutoFit/>
+          </a:bodyPr>
+          <a:lstStyle/>
+          <a:p>
+            <a:pPr algn="l">
+              <a:defRPr sz="1400" b="0">
+                <a:solidFill>
+                  <a:srgbClr val="CCDDEE"/>
+                </a:solidFill>
+                <a:latin typeface="Calibri"/>
+              </a:defRPr>
+            </a:pPr>
+            <a:r>
+              <a:t>Full battery: 3.2/11 -&gt; 6/11 -&gt; 11/11</a:t>
+            </a:r>
+          </a:p>
+        </p:txBody>
+      </p:sp>
+      <p:sp>
+        <p:nvSpPr>
+          <p:cNvPr id="20" name="TextBox 19"/>
+          <p:cNvSpPr txBox="1"/>
+          <p:nvPr/>
+        </p:nvSpPr>
+        <p:spPr>
+          <a:xfrm>
+            <a:off x="1371600" y="5943600"/>
+            <a:ext cx="9418320" cy="457200"/>
+          </a:xfrm>
+          <a:prstGeom prst="rect">
+            <a:avLst/>
+          </a:prstGeom>
+          <a:noFill/>
+        </p:spPr>
+        <p:txBody>
+          <a:bodyPr wrap="square">
+            <a:spAutoFit/>
+          </a:bodyPr>
+          <a:lstStyle/>
+          <a:p>
+            <a:pPr algn="ctr">
+              <a:defRPr sz="1400" b="1">
+                <a:solidFill>
+                  <a:srgbClr val="88AACC"/>
+                </a:solidFill>
+                <a:latin typeface="Calibri"/>
+              </a:defRPr>
+            </a:pPr>
+            <a:r>
+              <a:t>All demos run in Copilot Studio -- no custom code UI</a:t>
             </a:r>
           </a:p>
         </p:txBody>
@@ -19224,7 +18420,7 @@
           <a:lstStyle/>
           <a:p>
             <a:pPr algn="l">
-              <a:defRPr sz="2800" b="1">
+              <a:defRPr sz="3200" b="1">
                 <a:solidFill>
                   <a:srgbClr val="1B2A4A"/>
                 </a:solidFill>
@@ -19232,7 +18428,7 @@
               </a:defRPr>
             </a:pPr>
             <a:r>
-              <a:t>Surprising Finding: Agent Challenged Its Own Premise</a:t>
+              <a:t>One Prompt, Three Interventions</a:t>
             </a:r>
           </a:p>
         </p:txBody>
@@ -19282,14 +18478,57 @@
       </p:sp>
       <p:sp>
         <p:nvSpPr>
-          <p:cNvPr id="4" name="TextBox 3"/>
+          <p:cNvPr id="4" name="Rounded Rectangle 3"/>
+          <p:cNvSpPr/>
+          <p:nvPr/>
+        </p:nvSpPr>
+        <p:spPr>
+          <a:xfrm>
+            <a:off x="1097280" y="1234440"/>
+            <a:ext cx="9966960" cy="640080"/>
+          </a:xfrm>
+          <a:prstGeom prst="roundRect">
+            <a:avLst/>
+          </a:prstGeom>
+          <a:solidFill>
+            <a:srgbClr val="F5F5F5"/>
+          </a:solidFill>
+          <a:ln>
+            <a:noFill/>
+          </a:ln>
+        </p:spPr>
+        <p:style>
+          <a:lnRef idx="1">
+            <a:schemeClr val="accent1"/>
+          </a:lnRef>
+          <a:fillRef idx="3">
+            <a:schemeClr val="accent1"/>
+          </a:fillRef>
+          <a:effectRef idx="2">
+            <a:schemeClr val="accent1"/>
+          </a:effectRef>
+          <a:fontRef idx="minor">
+            <a:schemeClr val="lt1"/>
+          </a:fontRef>
+        </p:style>
+        <p:txBody>
+          <a:bodyPr rtlCol="0" anchor="ctr"/>
+          <a:lstStyle/>
+          <a:p>
+            <a:pPr algn="ctr"/>
+          </a:p>
+        </p:txBody>
+      </p:sp>
+      <p:sp>
+        <p:nvSpPr>
+          <p:cNvPr id="5" name="TextBox 4"/>
           <p:cNvSpPr txBox="1"/>
           <p:nvPr/>
         </p:nvSpPr>
         <p:spPr>
           <a:xfrm>
-            <a:off x="1097280" y="1371600"/>
-            <a:ext cx="9966960" cy="457200"/>
+            <a:off x="1371600" y="1280160"/>
+            <a:ext cx="9418320" cy="548640"/>
           </a:xfrm>
           <a:prstGeom prst="rect">
             <a:avLst/>
@@ -19302,30 +18541,116 @@
           </a:bodyPr>
           <a:lstStyle/>
           <a:p>
-            <a:pPr algn="l">
-              <a:defRPr sz="2000" b="1">
-                <a:solidFill>
-                  <a:srgbClr val="2D2D2D"/>
-                </a:solidFill>
-                <a:latin typeface="Calibri"/>
-              </a:defRPr>
-            </a:pPr>
-            <a:r>
-              <a:t>A pro-code agent questioned the question -- and was right</a:t>
-            </a:r>
-          </a:p>
-        </p:txBody>
-      </p:sp>
-      <p:sp>
-        <p:nvSpPr>
-          <p:cNvPr id="5" name="TextBox 4"/>
+            <a:pPr algn="ctr">
+              <a:defRPr sz="1500" b="1">
+                <a:solidFill>
+                  <a:srgbClr val="555555"/>
+                </a:solidFill>
+                <a:latin typeface="Calibri"/>
+              </a:defRPr>
+            </a:pPr>
+            <a:r>
+              <a:t>"What did Marcus Webb tell hospital staff about when he put Jaylen to bed, and did he give the same answer to law enforcement?"</a:t>
+            </a:r>
+          </a:p>
+        </p:txBody>
+      </p:sp>
+      <p:sp>
+        <p:nvSpPr>
+          <p:cNvPr id="6" name="Rounded Rectangle 5"/>
+          <p:cNvSpPr/>
+          <p:nvPr/>
+        </p:nvSpPr>
+        <p:spPr>
+          <a:xfrm>
+            <a:off x="822960" y="2057400"/>
+            <a:ext cx="3383280" cy="3383280"/>
+          </a:xfrm>
+          <a:prstGeom prst="roundRect">
+            <a:avLst/>
+          </a:prstGeom>
+          <a:solidFill>
+            <a:srgbClr val="FFEBEE"/>
+          </a:solidFill>
+          <a:ln>
+            <a:noFill/>
+          </a:ln>
+        </p:spPr>
+        <p:style>
+          <a:lnRef idx="1">
+            <a:schemeClr val="accent1"/>
+          </a:lnRef>
+          <a:fillRef idx="3">
+            <a:schemeClr val="accent1"/>
+          </a:fillRef>
+          <a:effectRef idx="2">
+            <a:schemeClr val="accent1"/>
+          </a:effectRef>
+          <a:fontRef idx="minor">
+            <a:schemeClr val="lt1"/>
+          </a:fontRef>
+        </p:style>
+        <p:txBody>
+          <a:bodyPr rtlCol="0" anchor="ctr"/>
+          <a:lstStyle/>
+          <a:p>
+            <a:pPr algn="ctr"/>
+          </a:p>
+        </p:txBody>
+      </p:sp>
+      <p:sp>
+        <p:nvSpPr>
+          <p:cNvPr id="7" name="Rectangle 6"/>
+          <p:cNvSpPr/>
+          <p:nvPr/>
+        </p:nvSpPr>
+        <p:spPr>
+          <a:xfrm>
+            <a:off x="822960" y="2057400"/>
+            <a:ext cx="3383280" cy="109728"/>
+          </a:xfrm>
+          <a:prstGeom prst="rect">
+            <a:avLst/>
+          </a:prstGeom>
+          <a:solidFill>
+            <a:srgbClr val="C62828"/>
+          </a:solidFill>
+          <a:ln>
+            <a:noFill/>
+          </a:ln>
+        </p:spPr>
+        <p:style>
+          <a:lnRef idx="1">
+            <a:schemeClr val="accent1"/>
+          </a:lnRef>
+          <a:fillRef idx="3">
+            <a:schemeClr val="accent1"/>
+          </a:fillRef>
+          <a:effectRef idx="2">
+            <a:schemeClr val="accent1"/>
+          </a:effectRef>
+          <a:fontRef idx="minor">
+            <a:schemeClr val="lt1"/>
+          </a:fontRef>
+        </p:style>
+        <p:txBody>
+          <a:bodyPr rtlCol="0" anchor="ctr"/>
+          <a:lstStyle/>
+          <a:p>
+            <a:pPr algn="ctr"/>
+          </a:p>
+        </p:txBody>
+      </p:sp>
+      <p:sp>
+        <p:nvSpPr>
+          <p:cNvPr id="8" name="TextBox 7"/>
           <p:cNvSpPr txBox="1"/>
           <p:nvPr/>
         </p:nvSpPr>
         <p:spPr>
           <a:xfrm>
-            <a:off x="1097280" y="2103120"/>
-            <a:ext cx="9966960" cy="2286000"/>
+            <a:off x="960120" y="2240280"/>
+            <a:ext cx="3108960" cy="320040"/>
           </a:xfrm>
           <a:prstGeom prst="rect">
             <a:avLst/>
@@ -19338,81 +18663,867 @@
           </a:bodyPr>
           <a:lstStyle/>
           <a:p>
-            <a:pPr>
-              <a:spcAft>
-                <a:spcPts val="600"/>
-              </a:spcAft>
-            </a:pPr>
-            <a:r>
-              <a:rPr sz="1800">
+            <a:pPr algn="ctr">
+              <a:defRPr sz="1600" b="1">
                 <a:solidFill>
                   <a:srgbClr val="2D2D2D"/>
                 </a:solidFill>
                 <a:latin typeface="Calibri"/>
-              </a:rPr>
-              <a:t>Asked about a $146,000 purchase vs a $357,100 assessment</a:t>
-            </a:r>
-          </a:p>
-          <a:p>
-            <a:pPr>
-              <a:spcAft>
-                <a:spcPts val="600"/>
-              </a:spcAft>
-            </a:pPr>
-            <a:r>
-              <a:rPr sz="1800">
+              </a:defRPr>
+            </a:pPr>
+            <a:r>
+              <a:t>Raw Documents</a:t>
+            </a:r>
+          </a:p>
+        </p:txBody>
+      </p:sp>
+      <p:sp>
+        <p:nvSpPr>
+          <p:cNvPr id="9" name="Rounded Rectangle 8"/>
+          <p:cNvSpPr/>
+          <p:nvPr/>
+        </p:nvSpPr>
+        <p:spPr>
+          <a:xfrm>
+            <a:off x="1874519" y="2606040"/>
+            <a:ext cx="1280160" cy="365760"/>
+          </a:xfrm>
+          <a:prstGeom prst="roundRect">
+            <a:avLst/>
+          </a:prstGeom>
+          <a:solidFill>
+            <a:srgbClr val="C62828"/>
+          </a:solidFill>
+          <a:ln>
+            <a:noFill/>
+          </a:ln>
+        </p:spPr>
+        <p:style>
+          <a:lnRef idx="1">
+            <a:schemeClr val="accent1"/>
+          </a:lnRef>
+          <a:fillRef idx="3">
+            <a:schemeClr val="accent1"/>
+          </a:fillRef>
+          <a:effectRef idx="2">
+            <a:schemeClr val="accent1"/>
+          </a:effectRef>
+          <a:fontRef idx="minor">
+            <a:schemeClr val="lt1"/>
+          </a:fontRef>
+        </p:style>
+        <p:txBody>
+          <a:bodyPr rtlCol="0" anchor="ctr"/>
+          <a:lstStyle/>
+          <a:p>
+            <a:pPr algn="ctr">
+              <a:defRPr sz="1400" b="1">
+                <a:solidFill>
+                  <a:srgbClr val="FFFFFF"/>
+                </a:solidFill>
+                <a:latin typeface="Calibri"/>
+              </a:defRPr>
+            </a:pPr>
+            <a:r>
+              <a:t>FAIL</a:t>
+            </a:r>
+          </a:p>
+        </p:txBody>
+      </p:sp>
+      <p:sp>
+        <p:nvSpPr>
+          <p:cNvPr id="10" name="TextBox 9"/>
+          <p:cNvSpPr txBox="1"/>
+          <p:nvPr/>
+        </p:nvSpPr>
+        <p:spPr>
+          <a:xfrm>
+            <a:off x="1005840" y="3108960"/>
+            <a:ext cx="3017520" cy="411480"/>
+          </a:xfrm>
+          <a:prstGeom prst="rect">
+            <a:avLst/>
+          </a:prstGeom>
+          <a:noFill/>
+        </p:spPr>
+        <p:txBody>
+          <a:bodyPr wrap="square">
+            <a:spAutoFit/>
+          </a:bodyPr>
+          <a:lstStyle/>
+          <a:p>
+            <a:pPr algn="l">
+              <a:defRPr sz="1200" b="0">
                 <a:solidFill>
                   <a:srgbClr val="2D2D2D"/>
                 </a:solidFill>
                 <a:latin typeface="Calibri"/>
-              </a:rPr>
-              <a:t>Agent checked the source data: actual assessment was $53,155</a:t>
-            </a:r>
-          </a:p>
-          <a:p>
-            <a:pPr>
-              <a:spcAft>
-                <a:spcPts val="600"/>
-              </a:spcAft>
-            </a:pPr>
-            <a:r>
-              <a:rPr sz="1800">
+              </a:defRPr>
+            </a:pPr>
+            <a:r>
+              <a:t>Found: Sheriff Report interview</a:t>
+            </a:r>
+          </a:p>
+        </p:txBody>
+      </p:sp>
+      <p:sp>
+        <p:nvSpPr>
+          <p:cNvPr id="11" name="TextBox 10"/>
+          <p:cNvSpPr txBox="1"/>
+          <p:nvPr/>
+        </p:nvSpPr>
+        <p:spPr>
+          <a:xfrm>
+            <a:off x="1005840" y="3520440"/>
+            <a:ext cx="3017520" cy="411480"/>
+          </a:xfrm>
+          <a:prstGeom prst="rect">
+            <a:avLst/>
+          </a:prstGeom>
+          <a:noFill/>
+        </p:spPr>
+        <p:txBody>
+          <a:bodyPr wrap="square">
+            <a:spAutoFit/>
+          </a:bodyPr>
+          <a:lstStyle/>
+          <a:p>
+            <a:pPr algn="l">
+              <a:defRPr sz="1200" b="1">
+                <a:solidFill>
+                  <a:srgbClr val="C62828"/>
+                </a:solidFill>
+                <a:latin typeface="Calibri"/>
+              </a:defRPr>
+            </a:pPr>
+            <a:r>
+              <a:t>Missed: Nursing notes in Medical Records</a:t>
+            </a:r>
+          </a:p>
+        </p:txBody>
+      </p:sp>
+      <p:sp>
+        <p:nvSpPr>
+          <p:cNvPr id="12" name="TextBox 11"/>
+          <p:cNvSpPr txBox="1"/>
+          <p:nvPr/>
+        </p:nvSpPr>
+        <p:spPr>
+          <a:xfrm>
+            <a:off x="1005840" y="4023360"/>
+            <a:ext cx="3017520" cy="1097280"/>
+          </a:xfrm>
+          <a:prstGeom prst="rect">
+            <a:avLst/>
+          </a:prstGeom>
+          <a:noFill/>
+        </p:spPr>
+        <p:txBody>
+          <a:bodyPr wrap="square">
+            <a:spAutoFit/>
+          </a:bodyPr>
+          <a:lstStyle/>
+          <a:p>
+            <a:pPr algn="l">
+              <a:defRPr sz="1100" b="0">
+                <a:solidFill>
+                  <a:srgbClr val="555555"/>
+                </a:solidFill>
+                <a:latin typeface="Calibri"/>
+              </a:defRPr>
+            </a:pPr>
+            <a:r>
+              <a:t>The agent has no reason to look</a:t>
+            </a:r>
+            <a:br/>
+            <a:r>
+              <a:t>in a medical record for</a:t>
+            </a:r>
+            <a:br/>
+            <a:r>
+              <a:t>parent statements.</a:t>
+            </a:r>
+          </a:p>
+        </p:txBody>
+      </p:sp>
+      <p:sp>
+        <p:nvSpPr>
+          <p:cNvPr id="13" name="Rounded Rectangle 12"/>
+          <p:cNvSpPr/>
+          <p:nvPr/>
+        </p:nvSpPr>
+        <p:spPr>
+          <a:xfrm>
+            <a:off x="4572000" y="2057400"/>
+            <a:ext cx="3383280" cy="3383280"/>
+          </a:xfrm>
+          <a:prstGeom prst="roundRect">
+            <a:avLst/>
+          </a:prstGeom>
+          <a:solidFill>
+            <a:srgbClr val="FFF8E1"/>
+          </a:solidFill>
+          <a:ln>
+            <a:noFill/>
+          </a:ln>
+        </p:spPr>
+        <p:style>
+          <a:lnRef idx="1">
+            <a:schemeClr val="accent1"/>
+          </a:lnRef>
+          <a:fillRef idx="3">
+            <a:schemeClr val="accent1"/>
+          </a:fillRef>
+          <a:effectRef idx="2">
+            <a:schemeClr val="accent1"/>
+          </a:effectRef>
+          <a:fontRef idx="minor">
+            <a:schemeClr val="lt1"/>
+          </a:fontRef>
+        </p:style>
+        <p:txBody>
+          <a:bodyPr rtlCol="0" anchor="ctr"/>
+          <a:lstStyle/>
+          <a:p>
+            <a:pPr algn="ctr"/>
+          </a:p>
+        </p:txBody>
+      </p:sp>
+      <p:sp>
+        <p:nvSpPr>
+          <p:cNvPr id="14" name="Rectangle 13"/>
+          <p:cNvSpPr/>
+          <p:nvPr/>
+        </p:nvSpPr>
+        <p:spPr>
+          <a:xfrm>
+            <a:off x="4572000" y="2057400"/>
+            <a:ext cx="3383280" cy="109728"/>
+          </a:xfrm>
+          <a:prstGeom prst="rect">
+            <a:avLst/>
+          </a:prstGeom>
+          <a:solidFill>
+            <a:srgbClr val="F9A825"/>
+          </a:solidFill>
+          <a:ln>
+            <a:noFill/>
+          </a:ln>
+        </p:spPr>
+        <p:style>
+          <a:lnRef idx="1">
+            <a:schemeClr val="accent1"/>
+          </a:lnRef>
+          <a:fillRef idx="3">
+            <a:schemeClr val="accent1"/>
+          </a:fillRef>
+          <a:effectRef idx="2">
+            <a:schemeClr val="accent1"/>
+          </a:effectRef>
+          <a:fontRef idx="minor">
+            <a:schemeClr val="lt1"/>
+          </a:fontRef>
+        </p:style>
+        <p:txBody>
+          <a:bodyPr rtlCol="0" anchor="ctr"/>
+          <a:lstStyle/>
+          <a:p>
+            <a:pPr algn="ctr"/>
+          </a:p>
+        </p:txBody>
+      </p:sp>
+      <p:sp>
+        <p:nvSpPr>
+          <p:cNvPr id="15" name="TextBox 14"/>
+          <p:cNvSpPr txBox="1"/>
+          <p:nvPr/>
+        </p:nvSpPr>
+        <p:spPr>
+          <a:xfrm>
+            <a:off x="4709160" y="2240280"/>
+            <a:ext cx="3108960" cy="320040"/>
+          </a:xfrm>
+          <a:prstGeom prst="rect">
+            <a:avLst/>
+          </a:prstGeom>
+          <a:noFill/>
+        </p:spPr>
+        <p:txBody>
+          <a:bodyPr wrap="square">
+            <a:spAutoFit/>
+          </a:bodyPr>
+          <a:lstStyle/>
+          <a:p>
+            <a:pPr algn="ctr">
+              <a:defRPr sz="1600" b="1">
                 <a:solidFill>
                   <a:srgbClr val="2D2D2D"/>
                 </a:solidFill>
                 <a:latin typeface="Calibri"/>
-              </a:rPr>
-              <a:t>Recalculated using verified numbers instead of the prompt's numbers</a:t>
-            </a:r>
-          </a:p>
-          <a:p>
-            <a:pPr>
-              <a:spcAft>
-                <a:spcPts val="600"/>
-              </a:spcAft>
-            </a:pPr>
-            <a:r>
-              <a:rPr sz="1800">
+              </a:defRPr>
+            </a:pPr>
+            <a:r>
+              <a:t>Cross-Referenced</a:t>
+            </a:r>
+          </a:p>
+        </p:txBody>
+      </p:sp>
+      <p:sp>
+        <p:nvSpPr>
+          <p:cNvPr id="16" name="Rounded Rectangle 15"/>
+          <p:cNvSpPr/>
+          <p:nvPr/>
+        </p:nvSpPr>
+        <p:spPr>
+          <a:xfrm>
+            <a:off x="5623560" y="2606040"/>
+            <a:ext cx="1280160" cy="365760"/>
+          </a:xfrm>
+          <a:prstGeom prst="roundRect">
+            <a:avLst/>
+          </a:prstGeom>
+          <a:solidFill>
+            <a:srgbClr val="F9A825"/>
+          </a:solidFill>
+          <a:ln>
+            <a:noFill/>
+          </a:ln>
+        </p:spPr>
+        <p:style>
+          <a:lnRef idx="1">
+            <a:schemeClr val="accent1"/>
+          </a:lnRef>
+          <a:fillRef idx="3">
+            <a:schemeClr val="accent1"/>
+          </a:fillRef>
+          <a:effectRef idx="2">
+            <a:schemeClr val="accent1"/>
+          </a:effectRef>
+          <a:fontRef idx="minor">
+            <a:schemeClr val="lt1"/>
+          </a:fontRef>
+        </p:style>
+        <p:txBody>
+          <a:bodyPr rtlCol="0" anchor="ctr"/>
+          <a:lstStyle/>
+          <a:p>
+            <a:pPr algn="ctr">
+              <a:defRPr sz="1400" b="1">
+                <a:solidFill>
+                  <a:srgbClr val="FFFFFF"/>
+                </a:solidFill>
+                <a:latin typeface="Calibri"/>
+              </a:defRPr>
+            </a:pPr>
+            <a:r>
+              <a:t>PARTIAL</a:t>
+            </a:r>
+          </a:p>
+        </p:txBody>
+      </p:sp>
+      <p:sp>
+        <p:nvSpPr>
+          <p:cNvPr id="17" name="TextBox 16"/>
+          <p:cNvSpPr txBox="1"/>
+          <p:nvPr/>
+        </p:nvSpPr>
+        <p:spPr>
+          <a:xfrm>
+            <a:off x="4754880" y="3108960"/>
+            <a:ext cx="3017520" cy="411480"/>
+          </a:xfrm>
+          <a:prstGeom prst="rect">
+            <a:avLst/>
+          </a:prstGeom>
+          <a:noFill/>
+        </p:spPr>
+        <p:txBody>
+          <a:bodyPr wrap="square">
+            <a:spAutoFit/>
+          </a:bodyPr>
+          <a:lstStyle/>
+          <a:p>
+            <a:pPr algn="l">
+              <a:defRPr sz="1200" b="0">
                 <a:solidFill>
                   <a:srgbClr val="2D2D2D"/>
                 </a:solidFill>
                 <a:latin typeface="Calibri"/>
-              </a:rPr>
-              <a:t>No other agent questioned the input</a:t>
-            </a:r>
-          </a:p>
-        </p:txBody>
-      </p:sp>
-      <p:sp>
-        <p:nvSpPr>
-          <p:cNvPr id="6" name="Rounded Rectangle 5"/>
+              </a:defRPr>
+            </a:pPr>
+            <a:r>
+              <a:t>Found: Both sources identified</a:t>
+            </a:r>
+          </a:p>
+        </p:txBody>
+      </p:sp>
+      <p:sp>
+        <p:nvSpPr>
+          <p:cNvPr id="18" name="TextBox 17"/>
+          <p:cNvSpPr txBox="1"/>
+          <p:nvPr/>
+        </p:nvSpPr>
+        <p:spPr>
+          <a:xfrm>
+            <a:off x="4754880" y="3520440"/>
+            <a:ext cx="3017520" cy="411480"/>
+          </a:xfrm>
+          <a:prstGeom prst="rect">
+            <a:avLst/>
+          </a:prstGeom>
+          <a:noFill/>
+        </p:spPr>
+        <p:txBody>
+          <a:bodyPr wrap="square">
+            <a:spAutoFit/>
+          </a:bodyPr>
+          <a:lstStyle/>
+          <a:p>
+            <a:pPr algn="l">
+              <a:defRPr sz="1200" b="1">
+                <a:solidFill>
+                  <a:srgbClr val="F9A825"/>
+                </a:solidFill>
+                <a:latin typeface="Calibri"/>
+              </a:defRPr>
+            </a:pPr>
+            <a:r>
+              <a:t>Missed: Specific nursing note detail</a:t>
+            </a:r>
+          </a:p>
+        </p:txBody>
+      </p:sp>
+      <p:sp>
+        <p:nvSpPr>
+          <p:cNvPr id="19" name="TextBox 18"/>
+          <p:cNvSpPr txBox="1"/>
+          <p:nvPr/>
+        </p:nvSpPr>
+        <p:spPr>
+          <a:xfrm>
+            <a:off x="4754880" y="4023360"/>
+            <a:ext cx="3017520" cy="1097280"/>
+          </a:xfrm>
+          <a:prstGeom prst="rect">
+            <a:avLst/>
+          </a:prstGeom>
+          <a:noFill/>
+        </p:spPr>
+        <p:txBody>
+          <a:bodyPr wrap="square">
+            <a:spAutoFit/>
+          </a:bodyPr>
+          <a:lstStyle/>
+          <a:p>
+            <a:pPr algn="l">
+              <a:defRPr sz="1100" b="0">
+                <a:solidFill>
+                  <a:srgbClr val="555555"/>
+                </a:solidFill>
+                <a:latin typeface="Calibri"/>
+              </a:defRPr>
+            </a:pPr>
+            <a:r>
+              <a:t>Cross-reference header points to</a:t>
+            </a:r>
+            <a:br/>
+            <a:r>
+              <a:t>Medical Records, but the agent</a:t>
+            </a:r>
+            <a:br/>
+            <a:r>
+              <a:t>still can't find nursing notes.</a:t>
+            </a:r>
+          </a:p>
+        </p:txBody>
+      </p:sp>
+      <p:sp>
+        <p:nvSpPr>
+          <p:cNvPr id="20" name="Rounded Rectangle 19"/>
           <p:cNvSpPr/>
           <p:nvPr/>
         </p:nvSpPr>
         <p:spPr>
           <a:xfrm>
-            <a:off x="1828800" y="4206240"/>
-            <a:ext cx="8503920" cy="1097280"/>
+            <a:off x="8321040" y="2057400"/>
+            <a:ext cx="3383280" cy="3383280"/>
+          </a:xfrm>
+          <a:prstGeom prst="roundRect">
+            <a:avLst/>
+          </a:prstGeom>
+          <a:solidFill>
+            <a:srgbClr val="E8F5E9"/>
+          </a:solidFill>
+          <a:ln>
+            <a:noFill/>
+          </a:ln>
+        </p:spPr>
+        <p:style>
+          <a:lnRef idx="1">
+            <a:schemeClr val="accent1"/>
+          </a:lnRef>
+          <a:fillRef idx="3">
+            <a:schemeClr val="accent1"/>
+          </a:fillRef>
+          <a:effectRef idx="2">
+            <a:schemeClr val="accent1"/>
+          </a:effectRef>
+          <a:fontRef idx="minor">
+            <a:schemeClr val="lt1"/>
+          </a:fontRef>
+        </p:style>
+        <p:txBody>
+          <a:bodyPr rtlCol="0" anchor="ctr"/>
+          <a:lstStyle/>
+          <a:p>
+            <a:pPr algn="ctr"/>
+          </a:p>
+        </p:txBody>
+      </p:sp>
+      <p:sp>
+        <p:nvSpPr>
+          <p:cNvPr id="21" name="Rectangle 20"/>
+          <p:cNvSpPr/>
+          <p:nvPr/>
+        </p:nvSpPr>
+        <p:spPr>
+          <a:xfrm>
+            <a:off x="8321040" y="2057400"/>
+            <a:ext cx="3383280" cy="109728"/>
+          </a:xfrm>
+          <a:prstGeom prst="rect">
+            <a:avLst/>
+          </a:prstGeom>
+          <a:solidFill>
+            <a:srgbClr val="4CAF50"/>
+          </a:solidFill>
+          <a:ln>
+            <a:noFill/>
+          </a:ln>
+        </p:spPr>
+        <p:style>
+          <a:lnRef idx="1">
+            <a:schemeClr val="accent1"/>
+          </a:lnRef>
+          <a:fillRef idx="3">
+            <a:schemeClr val="accent1"/>
+          </a:fillRef>
+          <a:effectRef idx="2">
+            <a:schemeClr val="accent1"/>
+          </a:effectRef>
+          <a:fontRef idx="minor">
+            <a:schemeClr val="lt1"/>
+          </a:fontRef>
+        </p:style>
+        <p:txBody>
+          <a:bodyPr rtlCol="0" anchor="ctr"/>
+          <a:lstStyle/>
+          <a:p>
+            <a:pPr algn="ctr"/>
+          </a:p>
+        </p:txBody>
+      </p:sp>
+      <p:sp>
+        <p:nvSpPr>
+          <p:cNvPr id="22" name="TextBox 21"/>
+          <p:cNvSpPr txBox="1"/>
+          <p:nvPr/>
+        </p:nvSpPr>
+        <p:spPr>
+          <a:xfrm>
+            <a:off x="8458200" y="2240280"/>
+            <a:ext cx="3108960" cy="320040"/>
+          </a:xfrm>
+          <a:prstGeom prst="rect">
+            <a:avLst/>
+          </a:prstGeom>
+          <a:noFill/>
+        </p:spPr>
+        <p:txBody>
+          <a:bodyPr wrap="square">
+            <a:spAutoFit/>
+          </a:bodyPr>
+          <a:lstStyle/>
+          <a:p>
+            <a:pPr algn="ctr">
+              <a:defRPr sz="1600" b="1">
+                <a:solidFill>
+                  <a:srgbClr val="2D2D2D"/>
+                </a:solidFill>
+                <a:latin typeface="Calibri"/>
+              </a:defRPr>
+            </a:pPr>
+            <a:r>
+              <a:t>Enriched + Metadata</a:t>
+            </a:r>
+          </a:p>
+        </p:txBody>
+      </p:sp>
+      <p:sp>
+        <p:nvSpPr>
+          <p:cNvPr id="23" name="Rounded Rectangle 22"/>
+          <p:cNvSpPr/>
+          <p:nvPr/>
+        </p:nvSpPr>
+        <p:spPr>
+          <a:xfrm>
+            <a:off x="9372600" y="2606040"/>
+            <a:ext cx="1280160" cy="365760"/>
+          </a:xfrm>
+          <a:prstGeom prst="roundRect">
+            <a:avLst/>
+          </a:prstGeom>
+          <a:solidFill>
+            <a:srgbClr val="4CAF50"/>
+          </a:solidFill>
+          <a:ln>
+            <a:noFill/>
+          </a:ln>
+        </p:spPr>
+        <p:style>
+          <a:lnRef idx="1">
+            <a:schemeClr val="accent1"/>
+          </a:lnRef>
+          <a:fillRef idx="3">
+            <a:schemeClr val="accent1"/>
+          </a:fillRef>
+          <a:effectRef idx="2">
+            <a:schemeClr val="accent1"/>
+          </a:effectRef>
+          <a:fontRef idx="minor">
+            <a:schemeClr val="lt1"/>
+          </a:fontRef>
+        </p:style>
+        <p:txBody>
+          <a:bodyPr rtlCol="0" anchor="ctr"/>
+          <a:lstStyle/>
+          <a:p>
+            <a:pPr algn="ctr">
+              <a:defRPr sz="1400" b="1">
+                <a:solidFill>
+                  <a:srgbClr val="FFFFFF"/>
+                </a:solidFill>
+                <a:latin typeface="Calibri"/>
+              </a:defRPr>
+            </a:pPr>
+            <a:r>
+              <a:t>PASS</a:t>
+            </a:r>
+          </a:p>
+        </p:txBody>
+      </p:sp>
+      <p:sp>
+        <p:nvSpPr>
+          <p:cNvPr id="24" name="TextBox 23"/>
+          <p:cNvSpPr txBox="1"/>
+          <p:nvPr/>
+        </p:nvSpPr>
+        <p:spPr>
+          <a:xfrm>
+            <a:off x="8503919" y="3108960"/>
+            <a:ext cx="3017520" cy="411480"/>
+          </a:xfrm>
+          <a:prstGeom prst="rect">
+            <a:avLst/>
+          </a:prstGeom>
+          <a:noFill/>
+        </p:spPr>
+        <p:txBody>
+          <a:bodyPr wrap="square">
+            <a:spAutoFit/>
+          </a:bodyPr>
+          <a:lstStyle/>
+          <a:p>
+            <a:pPr algn="l">
+              <a:defRPr sz="1200" b="0">
+                <a:solidFill>
+                  <a:srgbClr val="2D2D2D"/>
+                </a:solidFill>
+                <a:latin typeface="Calibri"/>
+              </a:defRPr>
+            </a:pPr>
+            <a:r>
+              <a:t>Found: Both statements, correct times</a:t>
+            </a:r>
+          </a:p>
+        </p:txBody>
+      </p:sp>
+      <p:sp>
+        <p:nvSpPr>
+          <p:cNvPr id="25" name="TextBox 24"/>
+          <p:cNvSpPr txBox="1"/>
+          <p:nvPr/>
+        </p:nvSpPr>
+        <p:spPr>
+          <a:xfrm>
+            <a:off x="8503919" y="3520440"/>
+            <a:ext cx="3017520" cy="411480"/>
+          </a:xfrm>
+          <a:prstGeom prst="rect">
+            <a:avLst/>
+          </a:prstGeom>
+          <a:noFill/>
+        </p:spPr>
+        <p:txBody>
+          <a:bodyPr wrap="square">
+            <a:spAutoFit/>
+          </a:bodyPr>
+          <a:lstStyle/>
+          <a:p>
+            <a:pPr algn="l">
+              <a:defRPr sz="1200" b="1">
+                <a:solidFill>
+                  <a:srgbClr val="4CAF50"/>
+                </a:solidFill>
+                <a:latin typeface="Calibri"/>
+              </a:defRPr>
+            </a:pPr>
+            <a:r>
+              <a:t>Missed: Nothing</a:t>
+            </a:r>
+          </a:p>
+        </p:txBody>
+      </p:sp>
+      <p:sp>
+        <p:nvSpPr>
+          <p:cNvPr id="26" name="TextBox 25"/>
+          <p:cNvSpPr txBox="1"/>
+          <p:nvPr/>
+        </p:nvSpPr>
+        <p:spPr>
+          <a:xfrm>
+            <a:off x="8503919" y="4023360"/>
+            <a:ext cx="3017520" cy="1097280"/>
+          </a:xfrm>
+          <a:prstGeom prst="rect">
+            <a:avLst/>
+          </a:prstGeom>
+          <a:noFill/>
+        </p:spPr>
+        <p:txBody>
+          <a:bodyPr wrap="square">
+            <a:spAutoFit/>
+          </a:bodyPr>
+          <a:lstStyle/>
+          <a:p>
+            <a:pPr algn="l">
+              <a:defRPr sz="1100" b="0">
+                <a:solidFill>
+                  <a:srgbClr val="555555"/>
+                </a:solidFill>
+                <a:latin typeface="Calibri"/>
+              </a:defRPr>
+            </a:pPr>
+            <a:r>
+              <a:t>SP metadata: "nursing interview,</a:t>
+            </a:r>
+            <a:br/>
+            <a:r>
+              <a:t>parent statements" on Medical</a:t>
+            </a:r>
+            <a:br/>
+            <a:r>
+              <a:t>Records enables retrieval.</a:t>
+            </a:r>
+          </a:p>
+        </p:txBody>
+      </p:sp>
+      <p:sp>
+        <p:nvSpPr>
+          <p:cNvPr id="27" name="Right Arrow 26"/>
+          <p:cNvSpPr/>
+          <p:nvPr/>
+        </p:nvSpPr>
+        <p:spPr>
+          <a:xfrm>
+            <a:off x="4160520" y="3383280"/>
+            <a:ext cx="457200" cy="320040"/>
+          </a:xfrm>
+          <a:prstGeom prst="rightArrow">
+            <a:avLst/>
+          </a:prstGeom>
+          <a:solidFill>
+            <a:srgbClr val="357ABD"/>
+          </a:solidFill>
+          <a:ln>
+            <a:noFill/>
+          </a:ln>
+        </p:spPr>
+        <p:style>
+          <a:lnRef idx="1">
+            <a:schemeClr val="accent1"/>
+          </a:lnRef>
+          <a:fillRef idx="3">
+            <a:schemeClr val="accent1"/>
+          </a:fillRef>
+          <a:effectRef idx="2">
+            <a:schemeClr val="accent1"/>
+          </a:effectRef>
+          <a:fontRef idx="minor">
+            <a:schemeClr val="lt1"/>
+          </a:fontRef>
+        </p:style>
+        <p:txBody>
+          <a:bodyPr rtlCol="0" anchor="ctr"/>
+          <a:lstStyle/>
+          <a:p>
+            <a:pPr algn="ctr"/>
+          </a:p>
+        </p:txBody>
+      </p:sp>
+      <p:sp>
+        <p:nvSpPr>
+          <p:cNvPr id="28" name="Right Arrow 27"/>
+          <p:cNvSpPr/>
+          <p:nvPr/>
+        </p:nvSpPr>
+        <p:spPr>
+          <a:xfrm>
+            <a:off x="7909559" y="3383280"/>
+            <a:ext cx="457200" cy="320040"/>
+          </a:xfrm>
+          <a:prstGeom prst="rightArrow">
+            <a:avLst/>
+          </a:prstGeom>
+          <a:solidFill>
+            <a:srgbClr val="357ABD"/>
+          </a:solidFill>
+          <a:ln>
+            <a:noFill/>
+          </a:ln>
+        </p:spPr>
+        <p:style>
+          <a:lnRef idx="1">
+            <a:schemeClr val="accent1"/>
+          </a:lnRef>
+          <a:fillRef idx="3">
+            <a:schemeClr val="accent1"/>
+          </a:fillRef>
+          <a:effectRef idx="2">
+            <a:schemeClr val="accent1"/>
+          </a:effectRef>
+          <a:fontRef idx="minor">
+            <a:schemeClr val="lt1"/>
+          </a:fontRef>
+        </p:style>
+        <p:txBody>
+          <a:bodyPr rtlCol="0" anchor="ctr"/>
+          <a:lstStyle/>
+          <a:p>
+            <a:pPr algn="ctr"/>
+          </a:p>
+        </p:txBody>
+      </p:sp>
+      <p:sp>
+        <p:nvSpPr>
+          <p:cNvPr id="29" name="Rounded Rectangle 28"/>
+          <p:cNvSpPr/>
+          <p:nvPr/>
+        </p:nvSpPr>
+        <p:spPr>
+          <a:xfrm>
+            <a:off x="1371600" y="5623560"/>
+            <a:ext cx="9418320" cy="502920"/>
           </a:xfrm>
           <a:prstGeom prst="roundRect">
             <a:avLst/>
@@ -19448,14 +19559,57 @@
       </p:sp>
       <p:sp>
         <p:nvSpPr>
-          <p:cNvPr id="7" name="TextBox 6"/>
+          <p:cNvPr id="30" name="Rectangle 29"/>
+          <p:cNvSpPr/>
+          <p:nvPr/>
+        </p:nvSpPr>
+        <p:spPr>
+          <a:xfrm>
+            <a:off x="1371600" y="5623560"/>
+            <a:ext cx="109728" cy="502920"/>
+          </a:xfrm>
+          <a:prstGeom prst="rect">
+            <a:avLst/>
+          </a:prstGeom>
+          <a:solidFill>
+            <a:srgbClr val="357ABD"/>
+          </a:solidFill>
+          <a:ln>
+            <a:noFill/>
+          </a:ln>
+        </p:spPr>
+        <p:style>
+          <a:lnRef idx="1">
+            <a:schemeClr val="accent1"/>
+          </a:lnRef>
+          <a:fillRef idx="3">
+            <a:schemeClr val="accent1"/>
+          </a:fillRef>
+          <a:effectRef idx="2">
+            <a:schemeClr val="accent1"/>
+          </a:effectRef>
+          <a:fontRef idx="minor">
+            <a:schemeClr val="lt1"/>
+          </a:fontRef>
+        </p:style>
+        <p:txBody>
+          <a:bodyPr rtlCol="0" anchor="ctr"/>
+          <a:lstStyle/>
+          <a:p>
+            <a:pPr algn="ctr"/>
+          </a:p>
+        </p:txBody>
+      </p:sp>
+      <p:sp>
+        <p:nvSpPr>
+          <p:cNvPr id="31" name="TextBox 30"/>
           <p:cNvSpPr txBox="1"/>
           <p:nvPr/>
         </p:nvSpPr>
         <p:spPr>
           <a:xfrm>
-            <a:off x="2011680" y="4251960"/>
-            <a:ext cx="8138160" cy="1005840"/>
+            <a:off x="1645920" y="5669280"/>
+            <a:ext cx="8961120" cy="411480"/>
           </a:xfrm>
           <a:prstGeom prst="rect">
             <a:avLst/>
@@ -19469,58 +19623,22 @@
           <a:lstStyle/>
           <a:p>
             <a:pPr algn="ctr">
-              <a:defRPr sz="1500" b="0">
-                <a:solidFill>
-                  <a:srgbClr val="2C5F8A"/>
-                </a:solidFill>
-                <a:latin typeface="Calibri"/>
-              </a:defRPr>
-            </a:pPr>
-            <a:r>
-              <a:t>"The assessment value in our records is $53,155, not $357,100 as stated in the question. Using the verified assessment value..."</a:t>
-            </a:r>
-          </a:p>
-        </p:txBody>
-      </p:sp>
-      <p:sp>
-        <p:nvSpPr>
-          <p:cNvPr id="8" name="TextBox 7"/>
-          <p:cNvSpPr txBox="1"/>
-          <p:nvPr/>
-        </p:nvSpPr>
-        <p:spPr>
-          <a:xfrm>
-            <a:off x="1097280" y="5486400"/>
-            <a:ext cx="9966960" cy="365760"/>
-          </a:xfrm>
-          <a:prstGeom prst="rect">
-            <a:avLst/>
-          </a:prstGeom>
-          <a:noFill/>
-        </p:spPr>
-        <p:txBody>
-          <a:bodyPr wrap="square">
-            <a:spAutoFit/>
-          </a:bodyPr>
-          <a:lstStyle/>
-          <a:p>
-            <a:pPr algn="ctr">
               <a:defRPr sz="1600" b="1">
                 <a:solidFill>
-                  <a:srgbClr val="555555"/>
-                </a:solidFill>
-                <a:latin typeface="Calibri"/>
-              </a:defRPr>
-            </a:pPr>
-            <a:r>
-              <a:t>This is what custom orchestration enables -- but only with iterative testing.</a:t>
-            </a:r>
-          </a:p>
-        </p:txBody>
-      </p:sp>
-      <p:sp>
-        <p:nvSpPr>
-          <p:cNvPr id="9" name="Rounded Rectangle 8"/>
+                  <a:srgbClr val="1B2A4A"/>
+                </a:solidFill>
+                <a:latin typeface="Calibri"/>
+              </a:defRPr>
+            </a:pPr>
+            <a:r>
+              <a:t>Cross-references fix reasoning errors. Metadata fixes retrieval errors. You need both.</a:t>
+            </a:r>
+          </a:p>
+        </p:txBody>
+      </p:sp>
+      <p:sp>
+        <p:nvSpPr>
+          <p:cNvPr id="32" name="Rounded Rectangle 31"/>
           <p:cNvSpPr/>
           <p:nvPr/>
         </p:nvSpPr>
@@ -19573,7 +19691,7 @@
       </p:sp>
       <p:sp>
         <p:nvSpPr>
-          <p:cNvPr id="10" name="Rounded Rectangle 9"/>
+          <p:cNvPr id="33" name="Rounded Rectangle 32"/>
           <p:cNvSpPr/>
           <p:nvPr/>
         </p:nvSpPr>
@@ -19626,7 +19744,7 @@
       </p:sp>
       <p:sp>
         <p:nvSpPr>
-          <p:cNvPr id="11" name="Rounded Rectangle 10"/>
+          <p:cNvPr id="34" name="Rounded Rectangle 33"/>
           <p:cNvSpPr/>
           <p:nvPr/>
         </p:nvSpPr>
@@ -19679,7 +19797,7 @@
       </p:sp>
       <p:sp>
         <p:nvSpPr>
-          <p:cNvPr id="12" name="Rounded Rectangle 11"/>
+          <p:cNvPr id="35" name="Rounded Rectangle 34"/>
           <p:cNvSpPr/>
           <p:nvPr/>
         </p:nvSpPr>
@@ -19732,7 +19850,7 @@
       </p:sp>
       <p:sp>
         <p:nvSpPr>
-          <p:cNvPr id="13" name="Rounded Rectangle 12"/>
+          <p:cNvPr id="36" name="Rounded Rectangle 35"/>
           <p:cNvSpPr/>
           <p:nvPr/>
         </p:nvSpPr>
@@ -19785,7 +19903,7 @@
       </p:sp>
       <p:sp>
         <p:nvSpPr>
-          <p:cNvPr id="14" name="TextBox 13"/>
+          <p:cNvPr id="37" name="TextBox 36"/>
           <p:cNvSpPr txBox="1"/>
           <p:nvPr/>
         </p:nvSpPr>
@@ -19876,7 +19994,7 @@
               </a:defRPr>
             </a:pPr>
             <a:r>
-              <a:t>Surprising Finding: False Negative</a:t>
+              <a:t>Surprising Finding: Agent Challenged Its Own Premise</a:t>
             </a:r>
           </a:p>
         </p:txBody>
@@ -19955,7 +20073,7 @@
               </a:defRPr>
             </a:pPr>
             <a:r>
-              <a:t>The model retrieved the answer and didn't recognize it</a:t>
+              <a:t>A pro-code agent questioned the question -- and was right</a:t>
             </a:r>
           </a:p>
         </p:txBody>
@@ -19969,7 +20087,7 @@
         <p:spPr>
           <a:xfrm>
             <a:off x="1097280" y="2103120"/>
-            <a:ext cx="9966960" cy="1828800"/>
+            <a:ext cx="9966960" cy="2286000"/>
           </a:xfrm>
           <a:prstGeom prst="rect">
             <a:avLst/>
@@ -19994,7 +20112,7 @@
                 </a:solidFill>
                 <a:latin typeface="Calibri"/>
               </a:rPr>
-              <a:t>Agent called the right tools</a:t>
+              <a:t>Asked about a $146,000 purchase vs a $357,100 assessment</a:t>
             </a:r>
           </a:p>
           <a:p>
@@ -20010,7 +20128,7 @@
                 </a:solidFill>
                 <a:latin typeface="Calibri"/>
               </a:rPr>
-              <a:t>Received data containing "two positive drug screens (fentanyl)"</a:t>
+              <a:t>Agent checked the source data: actual assessment was $53,155</a:t>
             </a:r>
           </a:p>
           <a:p>
@@ -20026,7 +20144,7 @@
                 </a:solidFill>
                 <a:latin typeface="Calibri"/>
               </a:rPr>
-              <a:t>Concluded: "no drug test results exist in the available data"</a:t>
+              <a:t>Recalculated using verified numbers instead of the prompt's numbers</a:t>
             </a:r>
           </a:p>
           <a:p>
@@ -20042,7 +20160,7 @@
                 </a:solidFill>
                 <a:latin typeface="Calibri"/>
               </a:rPr>
-              <a:t>Invisible to users: tool calls look correct, answer sounds confident</a:t>
+              <a:t>No other agent questioned the input</a:t>
             </a:r>
           </a:p>
         </p:txBody>
@@ -20055,14 +20173,14 @@
         </p:nvSpPr>
         <p:spPr>
           <a:xfrm>
-            <a:off x="1371600" y="4114800"/>
-            <a:ext cx="4572000" cy="1371600"/>
+            <a:off x="1828800" y="4206240"/>
+            <a:ext cx="8503920" cy="1097280"/>
           </a:xfrm>
           <a:prstGeom prst="roundRect">
             <a:avLst/>
           </a:prstGeom>
           <a:solidFill>
-            <a:srgbClr val="E8F5E9"/>
+            <a:srgbClr val="E3F2FD"/>
           </a:solidFill>
           <a:ln>
             <a:noFill/>
@@ -20098,8 +20216,8 @@
         </p:nvSpPr>
         <p:spPr>
           <a:xfrm>
-            <a:off x="1554480" y="4160520"/>
-            <a:ext cx="4206240" cy="320040"/>
+            <a:off x="2011680" y="4251960"/>
+            <a:ext cx="8138160" cy="1005840"/>
           </a:xfrm>
           <a:prstGeom prst="rect">
             <a:avLst/>
@@ -20113,15 +20231,15 @@
           <a:lstStyle/>
           <a:p>
             <a:pPr algn="ctr">
-              <a:defRPr sz="1300" b="1">
-                <a:solidFill>
-                  <a:srgbClr val="4CAF50"/>
-                </a:solidFill>
-                <a:latin typeface="Calibri"/>
-              </a:defRPr>
-            </a:pPr>
-            <a:r>
-              <a:t>Tool Output (correct)</a:t>
+              <a:defRPr sz="1500" b="0">
+                <a:solidFill>
+                  <a:srgbClr val="2C5F8A"/>
+                </a:solidFill>
+                <a:latin typeface="Calibri"/>
+              </a:defRPr>
+            </a:pPr>
+            <a:r>
+              <a:t>"The assessment value in our records is $53,155, not $357,100 as stated in the question. Using the verified assessment value..."</a:t>
             </a:r>
           </a:p>
         </p:txBody>
@@ -20134,8 +20252,8 @@
         </p:nvSpPr>
         <p:spPr>
           <a:xfrm>
-            <a:off x="1554480" y="4572000"/>
-            <a:ext cx="4206240" cy="731520"/>
+            <a:off x="1097280" y="5486400"/>
+            <a:ext cx="9966960" cy="365760"/>
           </a:xfrm>
           <a:prstGeom prst="rect">
             <a:avLst/>
@@ -20149,19 +20267,15 @@
           <a:lstStyle/>
           <a:p>
             <a:pPr algn="ctr">
-              <a:defRPr sz="1600" b="0">
-                <a:solidFill>
-                  <a:srgbClr val="2D2D2D"/>
-                </a:solidFill>
-                <a:latin typeface="Calibri"/>
-              </a:defRPr>
-            </a:pPr>
-            <a:r>
-              <a:t>"two positive drug screens</a:t>
-            </a:r>
-            <a:br/>
-            <a:r>
-              <a:t>(fentanyl)"</a:t>
+              <a:defRPr sz="1600" b="1">
+                <a:solidFill>
+                  <a:srgbClr val="555555"/>
+                </a:solidFill>
+                <a:latin typeface="Calibri"/>
+              </a:defRPr>
+            </a:pPr>
+            <a:r>
+              <a:t>This is what custom orchestration enables -- but only with iterative testing.</a:t>
             </a:r>
           </a:p>
         </p:txBody>
@@ -20169,161 +20283,6 @@
       <p:sp>
         <p:nvSpPr>
           <p:cNvPr id="9" name="Rounded Rectangle 8"/>
-          <p:cNvSpPr/>
-          <p:nvPr/>
-        </p:nvSpPr>
-        <p:spPr>
-          <a:xfrm>
-            <a:off x="6217920" y="4114800"/>
-            <a:ext cx="4572000" cy="1371600"/>
-          </a:xfrm>
-          <a:prstGeom prst="roundRect">
-            <a:avLst/>
-          </a:prstGeom>
-          <a:solidFill>
-            <a:srgbClr val="FFEBEE"/>
-          </a:solidFill>
-          <a:ln>
-            <a:noFill/>
-          </a:ln>
-        </p:spPr>
-        <p:style>
-          <a:lnRef idx="1">
-            <a:schemeClr val="accent1"/>
-          </a:lnRef>
-          <a:fillRef idx="3">
-            <a:schemeClr val="accent1"/>
-          </a:fillRef>
-          <a:effectRef idx="2">
-            <a:schemeClr val="accent1"/>
-          </a:effectRef>
-          <a:fontRef idx="minor">
-            <a:schemeClr val="lt1"/>
-          </a:fontRef>
-        </p:style>
-        <p:txBody>
-          <a:bodyPr rtlCol="0" anchor="ctr"/>
-          <a:lstStyle/>
-          <a:p>
-            <a:pPr algn="ctr"/>
-          </a:p>
-        </p:txBody>
-      </p:sp>
-      <p:sp>
-        <p:nvSpPr>
-          <p:cNvPr id="10" name="TextBox 9"/>
-          <p:cNvSpPr txBox="1"/>
-          <p:nvPr/>
-        </p:nvSpPr>
-        <p:spPr>
-          <a:xfrm>
-            <a:off x="6400800" y="4160520"/>
-            <a:ext cx="4206240" cy="320040"/>
-          </a:xfrm>
-          <a:prstGeom prst="rect">
-            <a:avLst/>
-          </a:prstGeom>
-          <a:noFill/>
-        </p:spPr>
-        <p:txBody>
-          <a:bodyPr wrap="square">
-            <a:spAutoFit/>
-          </a:bodyPr>
-          <a:lstStyle/>
-          <a:p>
-            <a:pPr algn="ctr">
-              <a:defRPr sz="1300" b="1">
-                <a:solidFill>
-                  <a:srgbClr val="E53935"/>
-                </a:solidFill>
-                <a:latin typeface="Calibri"/>
-              </a:defRPr>
-            </a:pPr>
-            <a:r>
-              <a:t>Agent Conclusion (wrong)</a:t>
-            </a:r>
-          </a:p>
-        </p:txBody>
-      </p:sp>
-      <p:sp>
-        <p:nvSpPr>
-          <p:cNvPr id="11" name="TextBox 10"/>
-          <p:cNvSpPr txBox="1"/>
-          <p:nvPr/>
-        </p:nvSpPr>
-        <p:spPr>
-          <a:xfrm>
-            <a:off x="6400800" y="4572000"/>
-            <a:ext cx="4206240" cy="731520"/>
-          </a:xfrm>
-          <a:prstGeom prst="rect">
-            <a:avLst/>
-          </a:prstGeom>
-          <a:noFill/>
-        </p:spPr>
-        <p:txBody>
-          <a:bodyPr wrap="square">
-            <a:spAutoFit/>
-          </a:bodyPr>
-          <a:lstStyle/>
-          <a:p>
-            <a:pPr algn="ctr">
-              <a:defRPr sz="1600" b="0">
-                <a:solidFill>
-                  <a:srgbClr val="2D2D2D"/>
-                </a:solidFill>
-                <a:latin typeface="Calibri"/>
-              </a:defRPr>
-            </a:pPr>
-            <a:r>
-              <a:t>"no drug test results exist</a:t>
-            </a:r>
-            <a:br/>
-            <a:r>
-              <a:t>in the available data"</a:t>
-            </a:r>
-          </a:p>
-        </p:txBody>
-      </p:sp>
-      <p:sp>
-        <p:nvSpPr>
-          <p:cNvPr id="12" name="TextBox 11"/>
-          <p:cNvSpPr txBox="1"/>
-          <p:nvPr/>
-        </p:nvSpPr>
-        <p:spPr>
-          <a:xfrm>
-            <a:off x="1097280" y="5669280"/>
-            <a:ext cx="9966960" cy="365760"/>
-          </a:xfrm>
-          <a:prstGeom prst="rect">
-            <a:avLst/>
-          </a:prstGeom>
-          <a:noFill/>
-        </p:spPr>
-        <p:txBody>
-          <a:bodyPr wrap="square">
-            <a:spAutoFit/>
-          </a:bodyPr>
-          <a:lstStyle/>
-          <a:p>
-            <a:pPr algn="ctr">
-              <a:defRPr sz="1600" b="1">
-                <a:solidFill>
-                  <a:srgbClr val="C62828"/>
-                </a:solidFill>
-                <a:latin typeface="Calibri"/>
-              </a:defRPr>
-            </a:pPr>
-            <a:r>
-              <a:t>This is why you need ground truth testing. You cannot catch this in production.</a:t>
-            </a:r>
-          </a:p>
-        </p:txBody>
-      </p:sp>
-      <p:sp>
-        <p:nvSpPr>
-          <p:cNvPr id="13" name="Rounded Rectangle 12"/>
           <p:cNvSpPr/>
           <p:nvPr/>
         </p:nvSpPr>
@@ -20376,7 +20335,7 @@
       </p:sp>
       <p:sp>
         <p:nvSpPr>
-          <p:cNvPr id="14" name="Rounded Rectangle 13"/>
+          <p:cNvPr id="10" name="Rounded Rectangle 9"/>
           <p:cNvSpPr/>
           <p:nvPr/>
         </p:nvSpPr>
@@ -20429,7 +20388,7 @@
       </p:sp>
       <p:sp>
         <p:nvSpPr>
-          <p:cNvPr id="15" name="Rounded Rectangle 14"/>
+          <p:cNvPr id="11" name="Rounded Rectangle 10"/>
           <p:cNvSpPr/>
           <p:nvPr/>
         </p:nvSpPr>
@@ -20482,7 +20441,7 @@
       </p:sp>
       <p:sp>
         <p:nvSpPr>
-          <p:cNvPr id="16" name="Rounded Rectangle 15"/>
+          <p:cNvPr id="12" name="Rounded Rectangle 11"/>
           <p:cNvSpPr/>
           <p:nvPr/>
         </p:nvSpPr>
@@ -20535,7 +20494,7 @@
       </p:sp>
       <p:sp>
         <p:nvSpPr>
-          <p:cNvPr id="17" name="Rounded Rectangle 16"/>
+          <p:cNvPr id="13" name="Rounded Rectangle 12"/>
           <p:cNvSpPr/>
           <p:nvPr/>
         </p:nvSpPr>
@@ -20588,7 +20547,7 @@
       </p:sp>
       <p:sp>
         <p:nvSpPr>
-          <p:cNvPr id="18" name="TextBox 17"/>
+          <p:cNvPr id="14" name="TextBox 13"/>
           <p:cNvSpPr txBox="1"/>
           <p:nvPr/>
         </p:nvSpPr>
@@ -20671,7 +20630,7 @@
           <a:lstStyle/>
           <a:p>
             <a:pPr algn="l">
-              <a:defRPr sz="3200" b="1">
+              <a:defRPr sz="2800" b="1">
                 <a:solidFill>
                   <a:srgbClr val="1B2A4A"/>
                 </a:solidFill>
@@ -20679,7 +20638,7 @@
               </a:defRPr>
             </a:pPr>
             <a:r>
-              <a:t>The Bottom Line</a:t>
+              <a:t>Surprising Finding: False Negative</a:t>
             </a:r>
           </a:p>
         </p:txBody>
@@ -20750,7 +20709,7 @@
           <a:lstStyle/>
           <a:p>
             <a:pPr algn="l">
-              <a:defRPr sz="2200" b="1">
+              <a:defRPr sz="2000" b="1">
                 <a:solidFill>
                   <a:srgbClr val="2D2D2D"/>
                 </a:solidFill>
@@ -20758,21 +20717,382 @@
               </a:defRPr>
             </a:pPr>
             <a:r>
-              <a:t>Three numbers to remember</a:t>
-            </a:r>
-          </a:p>
-        </p:txBody>
-      </p:sp>
-      <p:sp>
-        <p:nvSpPr>
-          <p:cNvPr id="5" name="Rounded Rectangle 4"/>
+              <a:t>The model retrieved the answer and didn't recognize it</a:t>
+            </a:r>
+          </a:p>
+        </p:txBody>
+      </p:sp>
+      <p:sp>
+        <p:nvSpPr>
+          <p:cNvPr id="5" name="TextBox 4"/>
+          <p:cNvSpPr txBox="1"/>
+          <p:nvPr/>
+        </p:nvSpPr>
+        <p:spPr>
+          <a:xfrm>
+            <a:off x="1097280" y="2103120"/>
+            <a:ext cx="9966960" cy="1828800"/>
+          </a:xfrm>
+          <a:prstGeom prst="rect">
+            <a:avLst/>
+          </a:prstGeom>
+          <a:noFill/>
+        </p:spPr>
+        <p:txBody>
+          <a:bodyPr wrap="square">
+            <a:spAutoFit/>
+          </a:bodyPr>
+          <a:lstStyle/>
+          <a:p>
+            <a:pPr>
+              <a:spcAft>
+                <a:spcPts val="600"/>
+              </a:spcAft>
+            </a:pPr>
+            <a:r>
+              <a:rPr sz="1800">
+                <a:solidFill>
+                  <a:srgbClr val="2D2D2D"/>
+                </a:solidFill>
+                <a:latin typeface="Calibri"/>
+              </a:rPr>
+              <a:t>Agent called the right tools</a:t>
+            </a:r>
+          </a:p>
+          <a:p>
+            <a:pPr>
+              <a:spcAft>
+                <a:spcPts val="600"/>
+              </a:spcAft>
+            </a:pPr>
+            <a:r>
+              <a:rPr sz="1800">
+                <a:solidFill>
+                  <a:srgbClr val="2D2D2D"/>
+                </a:solidFill>
+                <a:latin typeface="Calibri"/>
+              </a:rPr>
+              <a:t>Received data containing "two positive drug screens (fentanyl)"</a:t>
+            </a:r>
+          </a:p>
+          <a:p>
+            <a:pPr>
+              <a:spcAft>
+                <a:spcPts val="600"/>
+              </a:spcAft>
+            </a:pPr>
+            <a:r>
+              <a:rPr sz="1800">
+                <a:solidFill>
+                  <a:srgbClr val="2D2D2D"/>
+                </a:solidFill>
+                <a:latin typeface="Calibri"/>
+              </a:rPr>
+              <a:t>Concluded: "no drug test results exist in the available data"</a:t>
+            </a:r>
+          </a:p>
+          <a:p>
+            <a:pPr>
+              <a:spcAft>
+                <a:spcPts val="600"/>
+              </a:spcAft>
+            </a:pPr>
+            <a:r>
+              <a:rPr sz="1800">
+                <a:solidFill>
+                  <a:srgbClr val="2D2D2D"/>
+                </a:solidFill>
+                <a:latin typeface="Calibri"/>
+              </a:rPr>
+              <a:t>Invisible to users: tool calls look correct, answer sounds confident</a:t>
+            </a:r>
+          </a:p>
+        </p:txBody>
+      </p:sp>
+      <p:sp>
+        <p:nvSpPr>
+          <p:cNvPr id="6" name="Rounded Rectangle 5"/>
           <p:cNvSpPr/>
           <p:nvPr/>
         </p:nvSpPr>
         <p:spPr>
           <a:xfrm>
-            <a:off x="1097280" y="2103120"/>
-            <a:ext cx="3200400" cy="3200400"/>
+            <a:off x="1371600" y="4114800"/>
+            <a:ext cx="4572000" cy="1371600"/>
+          </a:xfrm>
+          <a:prstGeom prst="roundRect">
+            <a:avLst/>
+          </a:prstGeom>
+          <a:solidFill>
+            <a:srgbClr val="E8F5E9"/>
+          </a:solidFill>
+          <a:ln>
+            <a:noFill/>
+          </a:ln>
+        </p:spPr>
+        <p:style>
+          <a:lnRef idx="1">
+            <a:schemeClr val="accent1"/>
+          </a:lnRef>
+          <a:fillRef idx="3">
+            <a:schemeClr val="accent1"/>
+          </a:fillRef>
+          <a:effectRef idx="2">
+            <a:schemeClr val="accent1"/>
+          </a:effectRef>
+          <a:fontRef idx="minor">
+            <a:schemeClr val="lt1"/>
+          </a:fontRef>
+        </p:style>
+        <p:txBody>
+          <a:bodyPr rtlCol="0" anchor="ctr"/>
+          <a:lstStyle/>
+          <a:p>
+            <a:pPr algn="ctr"/>
+          </a:p>
+        </p:txBody>
+      </p:sp>
+      <p:sp>
+        <p:nvSpPr>
+          <p:cNvPr id="7" name="TextBox 6"/>
+          <p:cNvSpPr txBox="1"/>
+          <p:nvPr/>
+        </p:nvSpPr>
+        <p:spPr>
+          <a:xfrm>
+            <a:off x="1554480" y="4160520"/>
+            <a:ext cx="4206240" cy="320040"/>
+          </a:xfrm>
+          <a:prstGeom prst="rect">
+            <a:avLst/>
+          </a:prstGeom>
+          <a:noFill/>
+        </p:spPr>
+        <p:txBody>
+          <a:bodyPr wrap="square">
+            <a:spAutoFit/>
+          </a:bodyPr>
+          <a:lstStyle/>
+          <a:p>
+            <a:pPr algn="ctr">
+              <a:defRPr sz="1300" b="1">
+                <a:solidFill>
+                  <a:srgbClr val="4CAF50"/>
+                </a:solidFill>
+                <a:latin typeface="Calibri"/>
+              </a:defRPr>
+            </a:pPr>
+            <a:r>
+              <a:t>Tool Output (correct)</a:t>
+            </a:r>
+          </a:p>
+        </p:txBody>
+      </p:sp>
+      <p:sp>
+        <p:nvSpPr>
+          <p:cNvPr id="8" name="TextBox 7"/>
+          <p:cNvSpPr txBox="1"/>
+          <p:nvPr/>
+        </p:nvSpPr>
+        <p:spPr>
+          <a:xfrm>
+            <a:off x="1554480" y="4572000"/>
+            <a:ext cx="4206240" cy="731520"/>
+          </a:xfrm>
+          <a:prstGeom prst="rect">
+            <a:avLst/>
+          </a:prstGeom>
+          <a:noFill/>
+        </p:spPr>
+        <p:txBody>
+          <a:bodyPr wrap="square">
+            <a:spAutoFit/>
+          </a:bodyPr>
+          <a:lstStyle/>
+          <a:p>
+            <a:pPr algn="ctr">
+              <a:defRPr sz="1600" b="0">
+                <a:solidFill>
+                  <a:srgbClr val="2D2D2D"/>
+                </a:solidFill>
+                <a:latin typeface="Calibri"/>
+              </a:defRPr>
+            </a:pPr>
+            <a:r>
+              <a:t>"two positive drug screens</a:t>
+            </a:r>
+            <a:br/>
+            <a:r>
+              <a:t>(fentanyl)"</a:t>
+            </a:r>
+          </a:p>
+        </p:txBody>
+      </p:sp>
+      <p:sp>
+        <p:nvSpPr>
+          <p:cNvPr id="9" name="Rounded Rectangle 8"/>
+          <p:cNvSpPr/>
+          <p:nvPr/>
+        </p:nvSpPr>
+        <p:spPr>
+          <a:xfrm>
+            <a:off x="6217920" y="4114800"/>
+            <a:ext cx="4572000" cy="1371600"/>
+          </a:xfrm>
+          <a:prstGeom prst="roundRect">
+            <a:avLst/>
+          </a:prstGeom>
+          <a:solidFill>
+            <a:srgbClr val="FFEBEE"/>
+          </a:solidFill>
+          <a:ln>
+            <a:noFill/>
+          </a:ln>
+        </p:spPr>
+        <p:style>
+          <a:lnRef idx="1">
+            <a:schemeClr val="accent1"/>
+          </a:lnRef>
+          <a:fillRef idx="3">
+            <a:schemeClr val="accent1"/>
+          </a:fillRef>
+          <a:effectRef idx="2">
+            <a:schemeClr val="accent1"/>
+          </a:effectRef>
+          <a:fontRef idx="minor">
+            <a:schemeClr val="lt1"/>
+          </a:fontRef>
+        </p:style>
+        <p:txBody>
+          <a:bodyPr rtlCol="0" anchor="ctr"/>
+          <a:lstStyle/>
+          <a:p>
+            <a:pPr algn="ctr"/>
+          </a:p>
+        </p:txBody>
+      </p:sp>
+      <p:sp>
+        <p:nvSpPr>
+          <p:cNvPr id="10" name="TextBox 9"/>
+          <p:cNvSpPr txBox="1"/>
+          <p:nvPr/>
+        </p:nvSpPr>
+        <p:spPr>
+          <a:xfrm>
+            <a:off x="6400800" y="4160520"/>
+            <a:ext cx="4206240" cy="320040"/>
+          </a:xfrm>
+          <a:prstGeom prst="rect">
+            <a:avLst/>
+          </a:prstGeom>
+          <a:noFill/>
+        </p:spPr>
+        <p:txBody>
+          <a:bodyPr wrap="square">
+            <a:spAutoFit/>
+          </a:bodyPr>
+          <a:lstStyle/>
+          <a:p>
+            <a:pPr algn="ctr">
+              <a:defRPr sz="1300" b="1">
+                <a:solidFill>
+                  <a:srgbClr val="E53935"/>
+                </a:solidFill>
+                <a:latin typeface="Calibri"/>
+              </a:defRPr>
+            </a:pPr>
+            <a:r>
+              <a:t>Agent Conclusion (wrong)</a:t>
+            </a:r>
+          </a:p>
+        </p:txBody>
+      </p:sp>
+      <p:sp>
+        <p:nvSpPr>
+          <p:cNvPr id="11" name="TextBox 10"/>
+          <p:cNvSpPr txBox="1"/>
+          <p:nvPr/>
+        </p:nvSpPr>
+        <p:spPr>
+          <a:xfrm>
+            <a:off x="6400800" y="4572000"/>
+            <a:ext cx="4206240" cy="731520"/>
+          </a:xfrm>
+          <a:prstGeom prst="rect">
+            <a:avLst/>
+          </a:prstGeom>
+          <a:noFill/>
+        </p:spPr>
+        <p:txBody>
+          <a:bodyPr wrap="square">
+            <a:spAutoFit/>
+          </a:bodyPr>
+          <a:lstStyle/>
+          <a:p>
+            <a:pPr algn="ctr">
+              <a:defRPr sz="1600" b="0">
+                <a:solidFill>
+                  <a:srgbClr val="2D2D2D"/>
+                </a:solidFill>
+                <a:latin typeface="Calibri"/>
+              </a:defRPr>
+            </a:pPr>
+            <a:r>
+              <a:t>"no drug test results exist</a:t>
+            </a:r>
+            <a:br/>
+            <a:r>
+              <a:t>in the available data"</a:t>
+            </a:r>
+          </a:p>
+        </p:txBody>
+      </p:sp>
+      <p:sp>
+        <p:nvSpPr>
+          <p:cNvPr id="12" name="TextBox 11"/>
+          <p:cNvSpPr txBox="1"/>
+          <p:nvPr/>
+        </p:nvSpPr>
+        <p:spPr>
+          <a:xfrm>
+            <a:off x="1097280" y="5669280"/>
+            <a:ext cx="9966960" cy="365760"/>
+          </a:xfrm>
+          <a:prstGeom prst="rect">
+            <a:avLst/>
+          </a:prstGeom>
+          <a:noFill/>
+        </p:spPr>
+        <p:txBody>
+          <a:bodyPr wrap="square">
+            <a:spAutoFit/>
+          </a:bodyPr>
+          <a:lstStyle/>
+          <a:p>
+            <a:pPr algn="ctr">
+              <a:defRPr sz="1600" b="1">
+                <a:solidFill>
+                  <a:srgbClr val="C62828"/>
+                </a:solidFill>
+                <a:latin typeface="Calibri"/>
+              </a:defRPr>
+            </a:pPr>
+            <a:r>
+              <a:t>This is why you need ground truth testing. You cannot catch this in production.</a:t>
+            </a:r>
+          </a:p>
+        </p:txBody>
+      </p:sp>
+      <p:sp>
+        <p:nvSpPr>
+          <p:cNvPr id="13" name="Rounded Rectangle 12"/>
+          <p:cNvSpPr/>
+          <p:nvPr/>
+        </p:nvSpPr>
+        <p:spPr>
+          <a:xfrm>
+            <a:off x="792327" y="6035040"/>
+            <a:ext cx="2011680" cy="411480"/>
           </a:xfrm>
           <a:prstGeom prst="roundRect">
             <a:avLst/>
@@ -20799,37 +21119,11 @@
           </a:fontRef>
         </p:style>
         <p:txBody>
-          <a:bodyPr rtlCol="0" anchor="ctr"/>
-          <a:lstStyle/>
-          <a:p>
-            <a:pPr algn="ctr"/>
-          </a:p>
-        </p:txBody>
-      </p:sp>
-      <p:sp>
-        <p:nvSpPr>
-          <p:cNvPr id="6" name="TextBox 5"/>
-          <p:cNvSpPr txBox="1"/>
-          <p:nvPr/>
-        </p:nvSpPr>
-        <p:spPr>
-          <a:xfrm>
-            <a:off x="1188720" y="2286000"/>
-            <a:ext cx="3017520" cy="1097280"/>
-          </a:xfrm>
-          <a:prstGeom prst="rect">
-            <a:avLst/>
-          </a:prstGeom>
-          <a:noFill/>
-        </p:spPr>
-        <p:txBody>
-          <a:bodyPr wrap="square">
-            <a:spAutoFit/>
-          </a:bodyPr>
+          <a:bodyPr rtlCol="0" anchor="ctr" wrap="none"/>
           <a:lstStyle/>
           <a:p>
             <a:pPr algn="ctr">
-              <a:defRPr sz="4000" b="1">
+              <a:defRPr sz="1200" b="1">
                 <a:solidFill>
                   <a:srgbClr val="FFFFFF"/>
                 </a:solidFill>
@@ -20837,103 +21131,27 @@
               </a:defRPr>
             </a:pPr>
             <a:r>
-              <a:t>8/10</a:t>
-            </a:r>
-          </a:p>
-        </p:txBody>
-      </p:sp>
-      <p:sp>
-        <p:nvSpPr>
-          <p:cNvPr id="7" name="TextBox 6"/>
-          <p:cNvSpPr txBox="1"/>
-          <p:nvPr/>
-        </p:nvSpPr>
-        <p:spPr>
-          <a:xfrm>
-            <a:off x="1188720" y="3474720"/>
-            <a:ext cx="3017520" cy="914400"/>
-          </a:xfrm>
-          <a:prstGeom prst="rect">
-            <a:avLst/>
-          </a:prstGeom>
-          <a:noFill/>
-        </p:spPr>
-        <p:txBody>
-          <a:bodyPr wrap="square">
-            <a:spAutoFit/>
-          </a:bodyPr>
-          <a:lstStyle/>
-          <a:p>
-            <a:pPr algn="ctr">
-              <a:defRPr sz="1500" b="0">
-                <a:solidFill>
-                  <a:srgbClr val="FFFFFF"/>
-                </a:solidFill>
-                <a:latin typeface="Calibri"/>
-              </a:defRPr>
-            </a:pPr>
-            <a:r>
-              <a:t>What you get with</a:t>
-            </a:r>
-            <a:br/>
-            <a:r>
-              <a:t>zero engineering</a:t>
-            </a:r>
-          </a:p>
-        </p:txBody>
-      </p:sp>
-      <p:sp>
-        <p:nvSpPr>
-          <p:cNvPr id="8" name="TextBox 7"/>
-          <p:cNvSpPr txBox="1"/>
-          <p:nvPr/>
-        </p:nvSpPr>
-        <p:spPr>
-          <a:xfrm>
-            <a:off x="1188720" y="4572000"/>
-            <a:ext cx="3017520" cy="457200"/>
-          </a:xfrm>
-          <a:prstGeom prst="rect">
-            <a:avLst/>
-          </a:prstGeom>
-          <a:noFill/>
-        </p:spPr>
-        <p:txBody>
-          <a:bodyPr wrap="square">
-            <a:spAutoFit/>
-          </a:bodyPr>
-          <a:lstStyle/>
-          <a:p>
-            <a:pPr algn="ctr">
-              <a:defRPr sz="1300" b="0">
-                <a:solidFill>
-                  <a:srgbClr val="DDEEFF"/>
-                </a:solidFill>
-                <a:latin typeface="Calibri"/>
-              </a:defRPr>
-            </a:pPr>
-            <a:r>
-              <a:t>Levels 1-2</a:t>
-            </a:r>
-          </a:p>
-        </p:txBody>
-      </p:sp>
-      <p:sp>
-        <p:nvSpPr>
-          <p:cNvPr id="9" name="Rounded Rectangle 8"/>
+              <a:t>L1: Discovery</a:t>
+            </a:r>
+          </a:p>
+        </p:txBody>
+      </p:sp>
+      <p:sp>
+        <p:nvSpPr>
+          <p:cNvPr id="14" name="Rounded Rectangle 13"/>
           <p:cNvSpPr/>
           <p:nvPr/>
         </p:nvSpPr>
         <p:spPr>
           <a:xfrm>
-            <a:off x="4663440" y="2103120"/>
-            <a:ext cx="3200400" cy="3200400"/>
+            <a:off x="2941167" y="6035040"/>
+            <a:ext cx="2011680" cy="411480"/>
           </a:xfrm>
           <a:prstGeom prst="roundRect">
             <a:avLst/>
           </a:prstGeom>
           <a:solidFill>
-            <a:srgbClr val="357ABD"/>
+            <a:srgbClr val="8BC34A"/>
           </a:solidFill>
           <a:ln>
             <a:noFill/>
@@ -20954,37 +21172,11 @@
           </a:fontRef>
         </p:style>
         <p:txBody>
-          <a:bodyPr rtlCol="0" anchor="ctr"/>
-          <a:lstStyle/>
-          <a:p>
-            <a:pPr algn="ctr"/>
-          </a:p>
-        </p:txBody>
-      </p:sp>
-      <p:sp>
-        <p:nvSpPr>
-          <p:cNvPr id="10" name="TextBox 9"/>
-          <p:cNvSpPr txBox="1"/>
-          <p:nvPr/>
-        </p:nvSpPr>
-        <p:spPr>
-          <a:xfrm>
-            <a:off x="4754879" y="2286000"/>
-            <a:ext cx="3017520" cy="1097280"/>
-          </a:xfrm>
-          <a:prstGeom prst="rect">
-            <a:avLst/>
-          </a:prstGeom>
-          <a:noFill/>
-        </p:spPr>
-        <p:txBody>
-          <a:bodyPr wrap="square">
-            <a:spAutoFit/>
-          </a:bodyPr>
+          <a:bodyPr rtlCol="0" anchor="ctr" wrap="none"/>
           <a:lstStyle/>
           <a:p>
             <a:pPr algn="ctr">
-              <a:defRPr sz="4000" b="1">
+              <a:defRPr sz="1200" b="1">
                 <a:solidFill>
                   <a:srgbClr val="FFFFFF"/>
                 </a:solidFill>
@@ -20992,35 +21184,52 @@
               </a:defRPr>
             </a:pPr>
             <a:r>
-              <a:t>9.5/10</a:t>
-            </a:r>
-          </a:p>
-        </p:txBody>
-      </p:sp>
-      <p:sp>
-        <p:nvSpPr>
-          <p:cNvPr id="11" name="TextBox 10"/>
-          <p:cNvSpPr txBox="1"/>
-          <p:nvPr/>
-        </p:nvSpPr>
-        <p:spPr>
-          <a:xfrm>
-            <a:off x="4754879" y="3474720"/>
-            <a:ext cx="3017520" cy="914400"/>
-          </a:xfrm>
-          <a:prstGeom prst="rect">
-            <a:avLst/>
-          </a:prstGeom>
-          <a:noFill/>
-        </p:spPr>
-        <p:txBody>
-          <a:bodyPr wrap="square">
-            <a:spAutoFit/>
-          </a:bodyPr>
+              <a:t>L2: Summarization</a:t>
+            </a:r>
+          </a:p>
+        </p:txBody>
+      </p:sp>
+      <p:sp>
+        <p:nvSpPr>
+          <p:cNvPr id="15" name="Rounded Rectangle 14"/>
+          <p:cNvSpPr/>
+          <p:nvPr/>
+        </p:nvSpPr>
+        <p:spPr>
+          <a:xfrm>
+            <a:off x="5090007" y="6035040"/>
+            <a:ext cx="2011680" cy="411480"/>
+          </a:xfrm>
+          <a:prstGeom prst="roundRect">
+            <a:avLst/>
+          </a:prstGeom>
+          <a:solidFill>
+            <a:srgbClr val="FF9800"/>
+          </a:solidFill>
+          <a:ln>
+            <a:noFill/>
+          </a:ln>
+        </p:spPr>
+        <p:style>
+          <a:lnRef idx="1">
+            <a:schemeClr val="accent1"/>
+          </a:lnRef>
+          <a:fillRef idx="3">
+            <a:schemeClr val="accent1"/>
+          </a:fillRef>
+          <a:effectRef idx="2">
+            <a:schemeClr val="accent1"/>
+          </a:effectRef>
+          <a:fontRef idx="minor">
+            <a:schemeClr val="lt1"/>
+          </a:fontRef>
+        </p:style>
+        <p:txBody>
+          <a:bodyPr rtlCol="0" anchor="ctr" wrap="none"/>
           <a:lstStyle/>
           <a:p>
             <a:pPr algn="ctr">
-              <a:defRPr sz="1500" b="0">
+              <a:defRPr sz="1200" b="1">
                 <a:solidFill>
                   <a:srgbClr val="FFFFFF"/>
                 </a:solidFill>
@@ -21028,61 +21237,74 @@
               </a:defRPr>
             </a:pPr>
             <a:r>
-              <a:t>What you get with</a:t>
-            </a:r>
-            <a:br/>
-            <a:r>
-              <a:t>purpose-built tools + GPT-4.1</a:t>
-            </a:r>
-          </a:p>
-        </p:txBody>
-      </p:sp>
-      <p:sp>
-        <p:nvSpPr>
-          <p:cNvPr id="12" name="TextBox 11"/>
-          <p:cNvSpPr txBox="1"/>
-          <p:nvPr/>
-        </p:nvSpPr>
-        <p:spPr>
-          <a:xfrm>
-            <a:off x="4754879" y="4572000"/>
-            <a:ext cx="3017520" cy="457200"/>
-          </a:xfrm>
-          <a:prstGeom prst="rect">
-            <a:avLst/>
-          </a:prstGeom>
-          <a:noFill/>
-        </p:spPr>
-        <p:txBody>
-          <a:bodyPr wrap="square">
-            <a:spAutoFit/>
-          </a:bodyPr>
+              <a:t>L3: Operational</a:t>
+            </a:r>
+          </a:p>
+        </p:txBody>
+      </p:sp>
+      <p:sp>
+        <p:nvSpPr>
+          <p:cNvPr id="16" name="Rounded Rectangle 15"/>
+          <p:cNvSpPr/>
+          <p:nvPr/>
+        </p:nvSpPr>
+        <p:spPr>
+          <a:xfrm>
+            <a:off x="7238847" y="6035040"/>
+            <a:ext cx="2011680" cy="411480"/>
+          </a:xfrm>
+          <a:prstGeom prst="roundRect">
+            <a:avLst/>
+          </a:prstGeom>
+          <a:solidFill>
+            <a:srgbClr val="F4511E"/>
+          </a:solidFill>
+          <a:ln>
+            <a:noFill/>
+          </a:ln>
+        </p:spPr>
+        <p:style>
+          <a:lnRef idx="1">
+            <a:schemeClr val="accent1"/>
+          </a:lnRef>
+          <a:fillRef idx="3">
+            <a:schemeClr val="accent1"/>
+          </a:fillRef>
+          <a:effectRef idx="2">
+            <a:schemeClr val="accent1"/>
+          </a:effectRef>
+          <a:fontRef idx="minor">
+            <a:schemeClr val="lt1"/>
+          </a:fontRef>
+        </p:style>
+        <p:txBody>
+          <a:bodyPr rtlCol="0" anchor="ctr" wrap="none"/>
           <a:lstStyle/>
           <a:p>
             <a:pPr algn="ctr">
-              <a:defRPr sz="1300" b="0">
-                <a:solidFill>
-                  <a:srgbClr val="DDEEFF"/>
-                </a:solidFill>
-                <a:latin typeface="Calibri"/>
-              </a:defRPr>
-            </a:pPr>
-            <a:r>
-              <a:t>Levels 3-4</a:t>
-            </a:r>
-          </a:p>
-        </p:txBody>
-      </p:sp>
-      <p:sp>
-        <p:nvSpPr>
-          <p:cNvPr id="13" name="Rounded Rectangle 12"/>
+              <a:defRPr sz="1200" b="1">
+                <a:solidFill>
+                  <a:srgbClr val="FFFFFF"/>
+                </a:solidFill>
+                <a:latin typeface="Calibri"/>
+              </a:defRPr>
+            </a:pPr>
+            <a:r>
+              <a:t>L4: Investigative</a:t>
+            </a:r>
+          </a:p>
+        </p:txBody>
+      </p:sp>
+      <p:sp>
+        <p:nvSpPr>
+          <p:cNvPr id="17" name="Rounded Rectangle 16"/>
           <p:cNvSpPr/>
           <p:nvPr/>
         </p:nvSpPr>
         <p:spPr>
           <a:xfrm>
-            <a:off x="8229600" y="2103120"/>
-            <a:ext cx="3200400" cy="3200400"/>
+            <a:off x="9387687" y="6035040"/>
+            <a:ext cx="2011680" cy="411480"/>
           </a:xfrm>
           <a:prstGeom prst="roundRect">
             <a:avLst/>
@@ -21109,201 +21331,6 @@
           </a:fontRef>
         </p:style>
         <p:txBody>
-          <a:bodyPr rtlCol="0" anchor="ctr"/>
-          <a:lstStyle/>
-          <a:p>
-            <a:pPr algn="ctr"/>
-          </a:p>
-        </p:txBody>
-      </p:sp>
-      <p:sp>
-        <p:nvSpPr>
-          <p:cNvPr id="14" name="TextBox 13"/>
-          <p:cNvSpPr txBox="1"/>
-          <p:nvPr/>
-        </p:nvSpPr>
-        <p:spPr>
-          <a:xfrm>
-            <a:off x="8321040" y="2286000"/>
-            <a:ext cx="3017520" cy="1097280"/>
-          </a:xfrm>
-          <a:prstGeom prst="rect">
-            <a:avLst/>
-          </a:prstGeom>
-          <a:noFill/>
-        </p:spPr>
-        <p:txBody>
-          <a:bodyPr wrap="square">
-            <a:spAutoFit/>
-          </a:bodyPr>
-          <a:lstStyle/>
-          <a:p>
-            <a:pPr algn="ctr">
-              <a:defRPr sz="4000" b="1">
-                <a:solidFill>
-                  <a:srgbClr val="FFFFFF"/>
-                </a:solidFill>
-                <a:latin typeface="Calibri"/>
-              </a:defRPr>
-            </a:pPr>
-            <a:r>
-              <a:t>Trust</a:t>
-            </a:r>
-            <a:br/>
-            <a:r>
-              <a:t>But Verify</a:t>
-            </a:r>
-          </a:p>
-        </p:txBody>
-      </p:sp>
-      <p:sp>
-        <p:nvSpPr>
-          <p:cNvPr id="15" name="TextBox 14"/>
-          <p:cNvSpPr txBox="1"/>
-          <p:nvPr/>
-        </p:nvSpPr>
-        <p:spPr>
-          <a:xfrm>
-            <a:off x="8321040" y="3474720"/>
-            <a:ext cx="3017520" cy="914400"/>
-          </a:xfrm>
-          <a:prstGeom prst="rect">
-            <a:avLst/>
-          </a:prstGeom>
-          <a:noFill/>
-        </p:spPr>
-        <p:txBody>
-          <a:bodyPr wrap="square">
-            <a:spAutoFit/>
-          </a:bodyPr>
-          <a:lstStyle/>
-          <a:p>
-            <a:pPr algn="ctr">
-              <a:defRPr sz="1500" b="0">
-                <a:solidFill>
-                  <a:srgbClr val="FFFFFF"/>
-                </a:solidFill>
-                <a:latin typeface="Calibri"/>
-              </a:defRPr>
-            </a:pPr>
-            <a:r>
-              <a:t>No score is high enough</a:t>
-            </a:r>
-            <a:br/>
-            <a:r>
-              <a:t>to skip human review</a:t>
-            </a:r>
-          </a:p>
-        </p:txBody>
-      </p:sp>
-      <p:sp>
-        <p:nvSpPr>
-          <p:cNvPr id="16" name="TextBox 15"/>
-          <p:cNvSpPr txBox="1"/>
-          <p:nvPr/>
-        </p:nvSpPr>
-        <p:spPr>
-          <a:xfrm>
-            <a:off x="8321040" y="4572000"/>
-            <a:ext cx="3017520" cy="457200"/>
-          </a:xfrm>
-          <a:prstGeom prst="rect">
-            <a:avLst/>
-          </a:prstGeom>
-          <a:noFill/>
-        </p:spPr>
-        <p:txBody>
-          <a:bodyPr wrap="square">
-            <a:spAutoFit/>
-          </a:bodyPr>
-          <a:lstStyle/>
-          <a:p>
-            <a:pPr algn="ctr">
-              <a:defRPr sz="1300" b="0">
-                <a:solidFill>
-                  <a:srgbClr val="DDEEFF"/>
-                </a:solidFill>
-                <a:latin typeface="Calibri"/>
-              </a:defRPr>
-            </a:pPr>
-            <a:r>
-              <a:t>Level 5</a:t>
-            </a:r>
-          </a:p>
-        </p:txBody>
-      </p:sp>
-      <p:sp>
-        <p:nvSpPr>
-          <p:cNvPr id="17" name="TextBox 16"/>
-          <p:cNvSpPr txBox="1"/>
-          <p:nvPr/>
-        </p:nvSpPr>
-        <p:spPr>
-          <a:xfrm>
-            <a:off x="1097280" y="5486400"/>
-            <a:ext cx="9966960" cy="457200"/>
-          </a:xfrm>
-          <a:prstGeom prst="rect">
-            <a:avLst/>
-          </a:prstGeom>
-          <a:noFill/>
-        </p:spPr>
-        <p:txBody>
-          <a:bodyPr wrap="square">
-            <a:spAutoFit/>
-          </a:bodyPr>
-          <a:lstStyle/>
-          <a:p>
-            <a:pPr algn="ctr">
-              <a:defRPr sz="1500" b="1">
-                <a:solidFill>
-                  <a:srgbClr val="555555"/>
-                </a:solidFill>
-                <a:latin typeface="Calibri"/>
-              </a:defRPr>
-            </a:pPr>
-            <a:r>
-              <a:t>"The question is not 'should we deploy AI?' The question is 'which level are we operating at, and have we invested accordingly?'"</a:t>
-            </a:r>
-          </a:p>
-        </p:txBody>
-      </p:sp>
-      <p:sp>
-        <p:nvSpPr>
-          <p:cNvPr id="18" name="Rounded Rectangle 17"/>
-          <p:cNvSpPr/>
-          <p:nvPr/>
-        </p:nvSpPr>
-        <p:spPr>
-          <a:xfrm>
-            <a:off x="792327" y="6035040"/>
-            <a:ext cx="2011680" cy="411480"/>
-          </a:xfrm>
-          <a:prstGeom prst="roundRect">
-            <a:avLst/>
-          </a:prstGeom>
-          <a:solidFill>
-            <a:srgbClr val="4CAF50"/>
-          </a:solidFill>
-          <a:ln>
-            <a:noFill/>
-          </a:ln>
-        </p:spPr>
-        <p:style>
-          <a:lnRef idx="1">
-            <a:schemeClr val="accent1"/>
-          </a:lnRef>
-          <a:fillRef idx="3">
-            <a:schemeClr val="accent1"/>
-          </a:fillRef>
-          <a:effectRef idx="2">
-            <a:schemeClr val="accent1"/>
-          </a:effectRef>
-          <a:fontRef idx="minor">
-            <a:schemeClr val="lt1"/>
-          </a:fontRef>
-        </p:style>
-        <p:txBody>
           <a:bodyPr rtlCol="0" anchor="ctr" wrap="none"/>
           <a:lstStyle/>
           <a:p>
@@ -21316,218 +21343,6 @@
               </a:defRPr>
             </a:pPr>
             <a:r>
-              <a:t>L1: Discovery</a:t>
-            </a:r>
-          </a:p>
-        </p:txBody>
-      </p:sp>
-      <p:sp>
-        <p:nvSpPr>
-          <p:cNvPr id="19" name="Rounded Rectangle 18"/>
-          <p:cNvSpPr/>
-          <p:nvPr/>
-        </p:nvSpPr>
-        <p:spPr>
-          <a:xfrm>
-            <a:off x="2941167" y="6035040"/>
-            <a:ext cx="2011680" cy="411480"/>
-          </a:xfrm>
-          <a:prstGeom prst="roundRect">
-            <a:avLst/>
-          </a:prstGeom>
-          <a:solidFill>
-            <a:srgbClr val="8BC34A"/>
-          </a:solidFill>
-          <a:ln>
-            <a:noFill/>
-          </a:ln>
-        </p:spPr>
-        <p:style>
-          <a:lnRef idx="1">
-            <a:schemeClr val="accent1"/>
-          </a:lnRef>
-          <a:fillRef idx="3">
-            <a:schemeClr val="accent1"/>
-          </a:fillRef>
-          <a:effectRef idx="2">
-            <a:schemeClr val="accent1"/>
-          </a:effectRef>
-          <a:fontRef idx="minor">
-            <a:schemeClr val="lt1"/>
-          </a:fontRef>
-        </p:style>
-        <p:txBody>
-          <a:bodyPr rtlCol="0" anchor="ctr" wrap="none"/>
-          <a:lstStyle/>
-          <a:p>
-            <a:pPr algn="ctr">
-              <a:defRPr sz="1200" b="1">
-                <a:solidFill>
-                  <a:srgbClr val="FFFFFF"/>
-                </a:solidFill>
-                <a:latin typeface="Calibri"/>
-              </a:defRPr>
-            </a:pPr>
-            <a:r>
-              <a:t>L2: Summarization</a:t>
-            </a:r>
-          </a:p>
-        </p:txBody>
-      </p:sp>
-      <p:sp>
-        <p:nvSpPr>
-          <p:cNvPr id="20" name="Rounded Rectangle 19"/>
-          <p:cNvSpPr/>
-          <p:nvPr/>
-        </p:nvSpPr>
-        <p:spPr>
-          <a:xfrm>
-            <a:off x="5090007" y="6035040"/>
-            <a:ext cx="2011680" cy="411480"/>
-          </a:xfrm>
-          <a:prstGeom prst="roundRect">
-            <a:avLst/>
-          </a:prstGeom>
-          <a:solidFill>
-            <a:srgbClr val="FF9800"/>
-          </a:solidFill>
-          <a:ln>
-            <a:noFill/>
-          </a:ln>
-        </p:spPr>
-        <p:style>
-          <a:lnRef idx="1">
-            <a:schemeClr val="accent1"/>
-          </a:lnRef>
-          <a:fillRef idx="3">
-            <a:schemeClr val="accent1"/>
-          </a:fillRef>
-          <a:effectRef idx="2">
-            <a:schemeClr val="accent1"/>
-          </a:effectRef>
-          <a:fontRef idx="minor">
-            <a:schemeClr val="lt1"/>
-          </a:fontRef>
-        </p:style>
-        <p:txBody>
-          <a:bodyPr rtlCol="0" anchor="ctr" wrap="none"/>
-          <a:lstStyle/>
-          <a:p>
-            <a:pPr algn="ctr">
-              <a:defRPr sz="1200" b="1">
-                <a:solidFill>
-                  <a:srgbClr val="FFFFFF"/>
-                </a:solidFill>
-                <a:latin typeface="Calibri"/>
-              </a:defRPr>
-            </a:pPr>
-            <a:r>
-              <a:t>L3: Operational</a:t>
-            </a:r>
-          </a:p>
-        </p:txBody>
-      </p:sp>
-      <p:sp>
-        <p:nvSpPr>
-          <p:cNvPr id="21" name="Rounded Rectangle 20"/>
-          <p:cNvSpPr/>
-          <p:nvPr/>
-        </p:nvSpPr>
-        <p:spPr>
-          <a:xfrm>
-            <a:off x="7238847" y="6035040"/>
-            <a:ext cx="2011680" cy="411480"/>
-          </a:xfrm>
-          <a:prstGeom prst="roundRect">
-            <a:avLst/>
-          </a:prstGeom>
-          <a:solidFill>
-            <a:srgbClr val="F4511E"/>
-          </a:solidFill>
-          <a:ln>
-            <a:noFill/>
-          </a:ln>
-        </p:spPr>
-        <p:style>
-          <a:lnRef idx="1">
-            <a:schemeClr val="accent1"/>
-          </a:lnRef>
-          <a:fillRef idx="3">
-            <a:schemeClr val="accent1"/>
-          </a:fillRef>
-          <a:effectRef idx="2">
-            <a:schemeClr val="accent1"/>
-          </a:effectRef>
-          <a:fontRef idx="minor">
-            <a:schemeClr val="lt1"/>
-          </a:fontRef>
-        </p:style>
-        <p:txBody>
-          <a:bodyPr rtlCol="0" anchor="ctr" wrap="none"/>
-          <a:lstStyle/>
-          <a:p>
-            <a:pPr algn="ctr">
-              <a:defRPr sz="1200" b="1">
-                <a:solidFill>
-                  <a:srgbClr val="FFFFFF"/>
-                </a:solidFill>
-                <a:latin typeface="Calibri"/>
-              </a:defRPr>
-            </a:pPr>
-            <a:r>
-              <a:t>L4: Investigative</a:t>
-            </a:r>
-          </a:p>
-        </p:txBody>
-      </p:sp>
-      <p:sp>
-        <p:nvSpPr>
-          <p:cNvPr id="22" name="Rounded Rectangle 21"/>
-          <p:cNvSpPr/>
-          <p:nvPr/>
-        </p:nvSpPr>
-        <p:spPr>
-          <a:xfrm>
-            <a:off x="9387687" y="6035040"/>
-            <a:ext cx="2011680" cy="411480"/>
-          </a:xfrm>
-          <a:prstGeom prst="roundRect">
-            <a:avLst/>
-          </a:prstGeom>
-          <a:solidFill>
-            <a:srgbClr val="E53935"/>
-          </a:solidFill>
-          <a:ln>
-            <a:noFill/>
-          </a:ln>
-        </p:spPr>
-        <p:style>
-          <a:lnRef idx="1">
-            <a:schemeClr val="accent1"/>
-          </a:lnRef>
-          <a:fillRef idx="3">
-            <a:schemeClr val="accent1"/>
-          </a:fillRef>
-          <a:effectRef idx="2">
-            <a:schemeClr val="accent1"/>
-          </a:effectRef>
-          <a:fontRef idx="minor">
-            <a:schemeClr val="lt1"/>
-          </a:fontRef>
-        </p:style>
-        <p:txBody>
-          <a:bodyPr rtlCol="0" anchor="ctr" wrap="none"/>
-          <a:lstStyle/>
-          <a:p>
-            <a:pPr algn="ctr">
-              <a:defRPr sz="1200" b="1">
-                <a:solidFill>
-                  <a:srgbClr val="FFFFFF"/>
-                </a:solidFill>
-                <a:latin typeface="Calibri"/>
-              </a:defRPr>
-            </a:pPr>
-            <a:r>
               <a:t>L5: Adjudicative</a:t>
             </a:r>
           </a:p>
@@ -21535,7 +21350,7 @@
       </p:sp>
       <p:sp>
         <p:nvSpPr>
-          <p:cNvPr id="23" name="TextBox 22"/>
+          <p:cNvPr id="18" name="TextBox 17"/>
           <p:cNvSpPr txBox="1"/>
           <p:nvPr/>
         </p:nvSpPr>
@@ -21578,6 +21393,953 @@
 </file>
 
 <file path=ppt/slides/slide26.xml><?xml version="1.0" encoding="utf-8"?>
+<p:sld xmlns:a="http://schemas.openxmlformats.org/drawingml/2006/main" xmlns:p="http://schemas.openxmlformats.org/presentationml/2006/main" xmlns:r="http://schemas.openxmlformats.org/officeDocument/2006/relationships">
+  <p:cSld>
+    <p:bg>
+      <p:bgPr>
+        <a:solidFill>
+          <a:srgbClr val="FFFFFF"/>
+        </a:solidFill>
+        <a:effectLst/>
+      </p:bgPr>
+    </p:bg>
+    <p:spTree>
+      <p:nvGrpSpPr>
+        <p:cNvPr id="1" name=""/>
+        <p:cNvGrpSpPr/>
+        <p:nvPr/>
+      </p:nvGrpSpPr>
+      <p:grpSpPr/>
+      <p:sp>
+        <p:nvSpPr>
+          <p:cNvPr id="2" name="TextBox 1"/>
+          <p:cNvSpPr txBox="1"/>
+          <p:nvPr/>
+        </p:nvSpPr>
+        <p:spPr>
+          <a:xfrm>
+            <a:off x="731520" y="365760"/>
+            <a:ext cx="10698480" cy="640080"/>
+          </a:xfrm>
+          <a:prstGeom prst="rect">
+            <a:avLst/>
+          </a:prstGeom>
+          <a:noFill/>
+        </p:spPr>
+        <p:txBody>
+          <a:bodyPr wrap="square">
+            <a:spAutoFit/>
+          </a:bodyPr>
+          <a:lstStyle/>
+          <a:p>
+            <a:pPr algn="l">
+              <a:defRPr sz="3200" b="1">
+                <a:solidFill>
+                  <a:srgbClr val="1B2A4A"/>
+                </a:solidFill>
+                <a:latin typeface="Calibri"/>
+              </a:defRPr>
+            </a:pPr>
+            <a:r>
+              <a:t>The Bottom Line</a:t>
+            </a:r>
+          </a:p>
+        </p:txBody>
+      </p:sp>
+      <p:sp>
+        <p:nvSpPr>
+          <p:cNvPr id="3" name="Rectangle 2"/>
+          <p:cNvSpPr/>
+          <p:nvPr/>
+        </p:nvSpPr>
+        <p:spPr>
+          <a:xfrm>
+            <a:off x="731520" y="1005840"/>
+            <a:ext cx="1828800" cy="54864"/>
+          </a:xfrm>
+          <a:prstGeom prst="rect">
+            <a:avLst/>
+          </a:prstGeom>
+          <a:solidFill>
+            <a:srgbClr val="357ABD"/>
+          </a:solidFill>
+          <a:ln>
+            <a:noFill/>
+          </a:ln>
+        </p:spPr>
+        <p:style>
+          <a:lnRef idx="1">
+            <a:schemeClr val="accent1"/>
+          </a:lnRef>
+          <a:fillRef idx="3">
+            <a:schemeClr val="accent1"/>
+          </a:fillRef>
+          <a:effectRef idx="2">
+            <a:schemeClr val="accent1"/>
+          </a:effectRef>
+          <a:fontRef idx="minor">
+            <a:schemeClr val="lt1"/>
+          </a:fontRef>
+        </p:style>
+        <p:txBody>
+          <a:bodyPr rtlCol="0" anchor="ctr"/>
+          <a:lstStyle/>
+          <a:p>
+            <a:pPr algn="ctr"/>
+          </a:p>
+        </p:txBody>
+      </p:sp>
+      <p:sp>
+        <p:nvSpPr>
+          <p:cNvPr id="4" name="TextBox 3"/>
+          <p:cNvSpPr txBox="1"/>
+          <p:nvPr/>
+        </p:nvSpPr>
+        <p:spPr>
+          <a:xfrm>
+            <a:off x="1097280" y="1371600"/>
+            <a:ext cx="9966960" cy="457200"/>
+          </a:xfrm>
+          <a:prstGeom prst="rect">
+            <a:avLst/>
+          </a:prstGeom>
+          <a:noFill/>
+        </p:spPr>
+        <p:txBody>
+          <a:bodyPr wrap="square">
+            <a:spAutoFit/>
+          </a:bodyPr>
+          <a:lstStyle/>
+          <a:p>
+            <a:pPr algn="l">
+              <a:defRPr sz="2200" b="1">
+                <a:solidFill>
+                  <a:srgbClr val="2D2D2D"/>
+                </a:solidFill>
+                <a:latin typeface="Calibri"/>
+              </a:defRPr>
+            </a:pPr>
+            <a:r>
+              <a:t>Three numbers to remember</a:t>
+            </a:r>
+          </a:p>
+        </p:txBody>
+      </p:sp>
+      <p:sp>
+        <p:nvSpPr>
+          <p:cNvPr id="5" name="Rounded Rectangle 4"/>
+          <p:cNvSpPr/>
+          <p:nvPr/>
+        </p:nvSpPr>
+        <p:spPr>
+          <a:xfrm>
+            <a:off x="1097280" y="2103120"/>
+            <a:ext cx="3200400" cy="3200400"/>
+          </a:xfrm>
+          <a:prstGeom prst="roundRect">
+            <a:avLst/>
+          </a:prstGeom>
+          <a:solidFill>
+            <a:srgbClr val="4CAF50"/>
+          </a:solidFill>
+          <a:ln>
+            <a:noFill/>
+          </a:ln>
+        </p:spPr>
+        <p:style>
+          <a:lnRef idx="1">
+            <a:schemeClr val="accent1"/>
+          </a:lnRef>
+          <a:fillRef idx="3">
+            <a:schemeClr val="accent1"/>
+          </a:fillRef>
+          <a:effectRef idx="2">
+            <a:schemeClr val="accent1"/>
+          </a:effectRef>
+          <a:fontRef idx="minor">
+            <a:schemeClr val="lt1"/>
+          </a:fontRef>
+        </p:style>
+        <p:txBody>
+          <a:bodyPr rtlCol="0" anchor="ctr"/>
+          <a:lstStyle/>
+          <a:p>
+            <a:pPr algn="ctr"/>
+          </a:p>
+        </p:txBody>
+      </p:sp>
+      <p:sp>
+        <p:nvSpPr>
+          <p:cNvPr id="6" name="TextBox 5"/>
+          <p:cNvSpPr txBox="1"/>
+          <p:nvPr/>
+        </p:nvSpPr>
+        <p:spPr>
+          <a:xfrm>
+            <a:off x="1188720" y="2286000"/>
+            <a:ext cx="3017520" cy="1097280"/>
+          </a:xfrm>
+          <a:prstGeom prst="rect">
+            <a:avLst/>
+          </a:prstGeom>
+          <a:noFill/>
+        </p:spPr>
+        <p:txBody>
+          <a:bodyPr wrap="square">
+            <a:spAutoFit/>
+          </a:bodyPr>
+          <a:lstStyle/>
+          <a:p>
+            <a:pPr algn="ctr">
+              <a:defRPr sz="4000" b="1">
+                <a:solidFill>
+                  <a:srgbClr val="FFFFFF"/>
+                </a:solidFill>
+                <a:latin typeface="Calibri"/>
+              </a:defRPr>
+            </a:pPr>
+            <a:r>
+              <a:t>8/10</a:t>
+            </a:r>
+          </a:p>
+        </p:txBody>
+      </p:sp>
+      <p:sp>
+        <p:nvSpPr>
+          <p:cNvPr id="7" name="TextBox 6"/>
+          <p:cNvSpPr txBox="1"/>
+          <p:nvPr/>
+        </p:nvSpPr>
+        <p:spPr>
+          <a:xfrm>
+            <a:off x="1188720" y="3474720"/>
+            <a:ext cx="3017520" cy="914400"/>
+          </a:xfrm>
+          <a:prstGeom prst="rect">
+            <a:avLst/>
+          </a:prstGeom>
+          <a:noFill/>
+        </p:spPr>
+        <p:txBody>
+          <a:bodyPr wrap="square">
+            <a:spAutoFit/>
+          </a:bodyPr>
+          <a:lstStyle/>
+          <a:p>
+            <a:pPr algn="ctr">
+              <a:defRPr sz="1500" b="0">
+                <a:solidFill>
+                  <a:srgbClr val="FFFFFF"/>
+                </a:solidFill>
+                <a:latin typeface="Calibri"/>
+              </a:defRPr>
+            </a:pPr>
+            <a:r>
+              <a:t>What you get with</a:t>
+            </a:r>
+            <a:br/>
+            <a:r>
+              <a:t>zero engineering</a:t>
+            </a:r>
+          </a:p>
+        </p:txBody>
+      </p:sp>
+      <p:sp>
+        <p:nvSpPr>
+          <p:cNvPr id="8" name="TextBox 7"/>
+          <p:cNvSpPr txBox="1"/>
+          <p:nvPr/>
+        </p:nvSpPr>
+        <p:spPr>
+          <a:xfrm>
+            <a:off x="1188720" y="4572000"/>
+            <a:ext cx="3017520" cy="457200"/>
+          </a:xfrm>
+          <a:prstGeom prst="rect">
+            <a:avLst/>
+          </a:prstGeom>
+          <a:noFill/>
+        </p:spPr>
+        <p:txBody>
+          <a:bodyPr wrap="square">
+            <a:spAutoFit/>
+          </a:bodyPr>
+          <a:lstStyle/>
+          <a:p>
+            <a:pPr algn="ctr">
+              <a:defRPr sz="1300" b="0">
+                <a:solidFill>
+                  <a:srgbClr val="DDEEFF"/>
+                </a:solidFill>
+                <a:latin typeface="Calibri"/>
+              </a:defRPr>
+            </a:pPr>
+            <a:r>
+              <a:t>Levels 1-2</a:t>
+            </a:r>
+          </a:p>
+        </p:txBody>
+      </p:sp>
+      <p:sp>
+        <p:nvSpPr>
+          <p:cNvPr id="9" name="Rounded Rectangle 8"/>
+          <p:cNvSpPr/>
+          <p:nvPr/>
+        </p:nvSpPr>
+        <p:spPr>
+          <a:xfrm>
+            <a:off x="4663440" y="2103120"/>
+            <a:ext cx="3200400" cy="3200400"/>
+          </a:xfrm>
+          <a:prstGeom prst="roundRect">
+            <a:avLst/>
+          </a:prstGeom>
+          <a:solidFill>
+            <a:srgbClr val="357ABD"/>
+          </a:solidFill>
+          <a:ln>
+            <a:noFill/>
+          </a:ln>
+        </p:spPr>
+        <p:style>
+          <a:lnRef idx="1">
+            <a:schemeClr val="accent1"/>
+          </a:lnRef>
+          <a:fillRef idx="3">
+            <a:schemeClr val="accent1"/>
+          </a:fillRef>
+          <a:effectRef idx="2">
+            <a:schemeClr val="accent1"/>
+          </a:effectRef>
+          <a:fontRef idx="minor">
+            <a:schemeClr val="lt1"/>
+          </a:fontRef>
+        </p:style>
+        <p:txBody>
+          <a:bodyPr rtlCol="0" anchor="ctr"/>
+          <a:lstStyle/>
+          <a:p>
+            <a:pPr algn="ctr"/>
+          </a:p>
+        </p:txBody>
+      </p:sp>
+      <p:sp>
+        <p:nvSpPr>
+          <p:cNvPr id="10" name="TextBox 9"/>
+          <p:cNvSpPr txBox="1"/>
+          <p:nvPr/>
+        </p:nvSpPr>
+        <p:spPr>
+          <a:xfrm>
+            <a:off x="4754879" y="2286000"/>
+            <a:ext cx="3017520" cy="1097280"/>
+          </a:xfrm>
+          <a:prstGeom prst="rect">
+            <a:avLst/>
+          </a:prstGeom>
+          <a:noFill/>
+        </p:spPr>
+        <p:txBody>
+          <a:bodyPr wrap="square">
+            <a:spAutoFit/>
+          </a:bodyPr>
+          <a:lstStyle/>
+          <a:p>
+            <a:pPr algn="ctr">
+              <a:defRPr sz="4000" b="1">
+                <a:solidFill>
+                  <a:srgbClr val="FFFFFF"/>
+                </a:solidFill>
+                <a:latin typeface="Calibri"/>
+              </a:defRPr>
+            </a:pPr>
+            <a:r>
+              <a:t>9.5/10</a:t>
+            </a:r>
+          </a:p>
+        </p:txBody>
+      </p:sp>
+      <p:sp>
+        <p:nvSpPr>
+          <p:cNvPr id="11" name="TextBox 10"/>
+          <p:cNvSpPr txBox="1"/>
+          <p:nvPr/>
+        </p:nvSpPr>
+        <p:spPr>
+          <a:xfrm>
+            <a:off x="4754879" y="3474720"/>
+            <a:ext cx="3017520" cy="914400"/>
+          </a:xfrm>
+          <a:prstGeom prst="rect">
+            <a:avLst/>
+          </a:prstGeom>
+          <a:noFill/>
+        </p:spPr>
+        <p:txBody>
+          <a:bodyPr wrap="square">
+            <a:spAutoFit/>
+          </a:bodyPr>
+          <a:lstStyle/>
+          <a:p>
+            <a:pPr algn="ctr">
+              <a:defRPr sz="1500" b="0">
+                <a:solidFill>
+                  <a:srgbClr val="FFFFFF"/>
+                </a:solidFill>
+                <a:latin typeface="Calibri"/>
+              </a:defRPr>
+            </a:pPr>
+            <a:r>
+              <a:t>What you get with</a:t>
+            </a:r>
+            <a:br/>
+            <a:r>
+              <a:t>purpose-built tools + GPT-4.1</a:t>
+            </a:r>
+          </a:p>
+        </p:txBody>
+      </p:sp>
+      <p:sp>
+        <p:nvSpPr>
+          <p:cNvPr id="12" name="TextBox 11"/>
+          <p:cNvSpPr txBox="1"/>
+          <p:nvPr/>
+        </p:nvSpPr>
+        <p:spPr>
+          <a:xfrm>
+            <a:off x="4754879" y="4572000"/>
+            <a:ext cx="3017520" cy="457200"/>
+          </a:xfrm>
+          <a:prstGeom prst="rect">
+            <a:avLst/>
+          </a:prstGeom>
+          <a:noFill/>
+        </p:spPr>
+        <p:txBody>
+          <a:bodyPr wrap="square">
+            <a:spAutoFit/>
+          </a:bodyPr>
+          <a:lstStyle/>
+          <a:p>
+            <a:pPr algn="ctr">
+              <a:defRPr sz="1300" b="0">
+                <a:solidFill>
+                  <a:srgbClr val="DDEEFF"/>
+                </a:solidFill>
+                <a:latin typeface="Calibri"/>
+              </a:defRPr>
+            </a:pPr>
+            <a:r>
+              <a:t>Levels 3-4</a:t>
+            </a:r>
+          </a:p>
+        </p:txBody>
+      </p:sp>
+      <p:sp>
+        <p:nvSpPr>
+          <p:cNvPr id="13" name="Rounded Rectangle 12"/>
+          <p:cNvSpPr/>
+          <p:nvPr/>
+        </p:nvSpPr>
+        <p:spPr>
+          <a:xfrm>
+            <a:off x="8229600" y="2103120"/>
+            <a:ext cx="3200400" cy="3200400"/>
+          </a:xfrm>
+          <a:prstGeom prst="roundRect">
+            <a:avLst/>
+          </a:prstGeom>
+          <a:solidFill>
+            <a:srgbClr val="E53935"/>
+          </a:solidFill>
+          <a:ln>
+            <a:noFill/>
+          </a:ln>
+        </p:spPr>
+        <p:style>
+          <a:lnRef idx="1">
+            <a:schemeClr val="accent1"/>
+          </a:lnRef>
+          <a:fillRef idx="3">
+            <a:schemeClr val="accent1"/>
+          </a:fillRef>
+          <a:effectRef idx="2">
+            <a:schemeClr val="accent1"/>
+          </a:effectRef>
+          <a:fontRef idx="minor">
+            <a:schemeClr val="lt1"/>
+          </a:fontRef>
+        </p:style>
+        <p:txBody>
+          <a:bodyPr rtlCol="0" anchor="ctr"/>
+          <a:lstStyle/>
+          <a:p>
+            <a:pPr algn="ctr"/>
+          </a:p>
+        </p:txBody>
+      </p:sp>
+      <p:sp>
+        <p:nvSpPr>
+          <p:cNvPr id="14" name="TextBox 13"/>
+          <p:cNvSpPr txBox="1"/>
+          <p:nvPr/>
+        </p:nvSpPr>
+        <p:spPr>
+          <a:xfrm>
+            <a:off x="8321040" y="2286000"/>
+            <a:ext cx="3017520" cy="1097280"/>
+          </a:xfrm>
+          <a:prstGeom prst="rect">
+            <a:avLst/>
+          </a:prstGeom>
+          <a:noFill/>
+        </p:spPr>
+        <p:txBody>
+          <a:bodyPr wrap="square">
+            <a:spAutoFit/>
+          </a:bodyPr>
+          <a:lstStyle/>
+          <a:p>
+            <a:pPr algn="ctr">
+              <a:defRPr sz="4000" b="1">
+                <a:solidFill>
+                  <a:srgbClr val="FFFFFF"/>
+                </a:solidFill>
+                <a:latin typeface="Calibri"/>
+              </a:defRPr>
+            </a:pPr>
+            <a:r>
+              <a:t>Trust</a:t>
+            </a:r>
+            <a:br/>
+            <a:r>
+              <a:t>But Verify</a:t>
+            </a:r>
+          </a:p>
+        </p:txBody>
+      </p:sp>
+      <p:sp>
+        <p:nvSpPr>
+          <p:cNvPr id="15" name="TextBox 14"/>
+          <p:cNvSpPr txBox="1"/>
+          <p:nvPr/>
+        </p:nvSpPr>
+        <p:spPr>
+          <a:xfrm>
+            <a:off x="8321040" y="3474720"/>
+            <a:ext cx="3017520" cy="914400"/>
+          </a:xfrm>
+          <a:prstGeom prst="rect">
+            <a:avLst/>
+          </a:prstGeom>
+          <a:noFill/>
+        </p:spPr>
+        <p:txBody>
+          <a:bodyPr wrap="square">
+            <a:spAutoFit/>
+          </a:bodyPr>
+          <a:lstStyle/>
+          <a:p>
+            <a:pPr algn="ctr">
+              <a:defRPr sz="1500" b="0">
+                <a:solidFill>
+                  <a:srgbClr val="FFFFFF"/>
+                </a:solidFill>
+                <a:latin typeface="Calibri"/>
+              </a:defRPr>
+            </a:pPr>
+            <a:r>
+              <a:t>No score is high enough</a:t>
+            </a:r>
+            <a:br/>
+            <a:r>
+              <a:t>to skip human review</a:t>
+            </a:r>
+          </a:p>
+        </p:txBody>
+      </p:sp>
+      <p:sp>
+        <p:nvSpPr>
+          <p:cNvPr id="16" name="TextBox 15"/>
+          <p:cNvSpPr txBox="1"/>
+          <p:nvPr/>
+        </p:nvSpPr>
+        <p:spPr>
+          <a:xfrm>
+            <a:off x="8321040" y="4572000"/>
+            <a:ext cx="3017520" cy="457200"/>
+          </a:xfrm>
+          <a:prstGeom prst="rect">
+            <a:avLst/>
+          </a:prstGeom>
+          <a:noFill/>
+        </p:spPr>
+        <p:txBody>
+          <a:bodyPr wrap="square">
+            <a:spAutoFit/>
+          </a:bodyPr>
+          <a:lstStyle/>
+          <a:p>
+            <a:pPr algn="ctr">
+              <a:defRPr sz="1300" b="0">
+                <a:solidFill>
+                  <a:srgbClr val="DDEEFF"/>
+                </a:solidFill>
+                <a:latin typeface="Calibri"/>
+              </a:defRPr>
+            </a:pPr>
+            <a:r>
+              <a:t>Level 5</a:t>
+            </a:r>
+          </a:p>
+        </p:txBody>
+      </p:sp>
+      <p:sp>
+        <p:nvSpPr>
+          <p:cNvPr id="17" name="TextBox 16"/>
+          <p:cNvSpPr txBox="1"/>
+          <p:nvPr/>
+        </p:nvSpPr>
+        <p:spPr>
+          <a:xfrm>
+            <a:off x="1097280" y="5486400"/>
+            <a:ext cx="9966960" cy="457200"/>
+          </a:xfrm>
+          <a:prstGeom prst="rect">
+            <a:avLst/>
+          </a:prstGeom>
+          <a:noFill/>
+        </p:spPr>
+        <p:txBody>
+          <a:bodyPr wrap="square">
+            <a:spAutoFit/>
+          </a:bodyPr>
+          <a:lstStyle/>
+          <a:p>
+            <a:pPr algn="ctr">
+              <a:defRPr sz="1500" b="1">
+                <a:solidFill>
+                  <a:srgbClr val="555555"/>
+                </a:solidFill>
+                <a:latin typeface="Calibri"/>
+              </a:defRPr>
+            </a:pPr>
+            <a:r>
+              <a:t>"The question is not 'should we deploy AI?' The question is 'which level are we operating at, and have we invested accordingly?'"</a:t>
+            </a:r>
+          </a:p>
+        </p:txBody>
+      </p:sp>
+      <p:sp>
+        <p:nvSpPr>
+          <p:cNvPr id="18" name="Rounded Rectangle 17"/>
+          <p:cNvSpPr/>
+          <p:nvPr/>
+        </p:nvSpPr>
+        <p:spPr>
+          <a:xfrm>
+            <a:off x="792327" y="6035040"/>
+            <a:ext cx="2011680" cy="411480"/>
+          </a:xfrm>
+          <a:prstGeom prst="roundRect">
+            <a:avLst/>
+          </a:prstGeom>
+          <a:solidFill>
+            <a:srgbClr val="4CAF50"/>
+          </a:solidFill>
+          <a:ln>
+            <a:noFill/>
+          </a:ln>
+        </p:spPr>
+        <p:style>
+          <a:lnRef idx="1">
+            <a:schemeClr val="accent1"/>
+          </a:lnRef>
+          <a:fillRef idx="3">
+            <a:schemeClr val="accent1"/>
+          </a:fillRef>
+          <a:effectRef idx="2">
+            <a:schemeClr val="accent1"/>
+          </a:effectRef>
+          <a:fontRef idx="minor">
+            <a:schemeClr val="lt1"/>
+          </a:fontRef>
+        </p:style>
+        <p:txBody>
+          <a:bodyPr rtlCol="0" anchor="ctr" wrap="none"/>
+          <a:lstStyle/>
+          <a:p>
+            <a:pPr algn="ctr">
+              <a:defRPr sz="1200" b="1">
+                <a:solidFill>
+                  <a:srgbClr val="FFFFFF"/>
+                </a:solidFill>
+                <a:latin typeface="Calibri"/>
+              </a:defRPr>
+            </a:pPr>
+            <a:r>
+              <a:t>L1: Discovery</a:t>
+            </a:r>
+          </a:p>
+        </p:txBody>
+      </p:sp>
+      <p:sp>
+        <p:nvSpPr>
+          <p:cNvPr id="19" name="Rounded Rectangle 18"/>
+          <p:cNvSpPr/>
+          <p:nvPr/>
+        </p:nvSpPr>
+        <p:spPr>
+          <a:xfrm>
+            <a:off x="2941167" y="6035040"/>
+            <a:ext cx="2011680" cy="411480"/>
+          </a:xfrm>
+          <a:prstGeom prst="roundRect">
+            <a:avLst/>
+          </a:prstGeom>
+          <a:solidFill>
+            <a:srgbClr val="8BC34A"/>
+          </a:solidFill>
+          <a:ln>
+            <a:noFill/>
+          </a:ln>
+        </p:spPr>
+        <p:style>
+          <a:lnRef idx="1">
+            <a:schemeClr val="accent1"/>
+          </a:lnRef>
+          <a:fillRef idx="3">
+            <a:schemeClr val="accent1"/>
+          </a:fillRef>
+          <a:effectRef idx="2">
+            <a:schemeClr val="accent1"/>
+          </a:effectRef>
+          <a:fontRef idx="minor">
+            <a:schemeClr val="lt1"/>
+          </a:fontRef>
+        </p:style>
+        <p:txBody>
+          <a:bodyPr rtlCol="0" anchor="ctr" wrap="none"/>
+          <a:lstStyle/>
+          <a:p>
+            <a:pPr algn="ctr">
+              <a:defRPr sz="1200" b="1">
+                <a:solidFill>
+                  <a:srgbClr val="FFFFFF"/>
+                </a:solidFill>
+                <a:latin typeface="Calibri"/>
+              </a:defRPr>
+            </a:pPr>
+            <a:r>
+              <a:t>L2: Summarization</a:t>
+            </a:r>
+          </a:p>
+        </p:txBody>
+      </p:sp>
+      <p:sp>
+        <p:nvSpPr>
+          <p:cNvPr id="20" name="Rounded Rectangle 19"/>
+          <p:cNvSpPr/>
+          <p:nvPr/>
+        </p:nvSpPr>
+        <p:spPr>
+          <a:xfrm>
+            <a:off x="5090007" y="6035040"/>
+            <a:ext cx="2011680" cy="411480"/>
+          </a:xfrm>
+          <a:prstGeom prst="roundRect">
+            <a:avLst/>
+          </a:prstGeom>
+          <a:solidFill>
+            <a:srgbClr val="FF9800"/>
+          </a:solidFill>
+          <a:ln>
+            <a:noFill/>
+          </a:ln>
+        </p:spPr>
+        <p:style>
+          <a:lnRef idx="1">
+            <a:schemeClr val="accent1"/>
+          </a:lnRef>
+          <a:fillRef idx="3">
+            <a:schemeClr val="accent1"/>
+          </a:fillRef>
+          <a:effectRef idx="2">
+            <a:schemeClr val="accent1"/>
+          </a:effectRef>
+          <a:fontRef idx="minor">
+            <a:schemeClr val="lt1"/>
+          </a:fontRef>
+        </p:style>
+        <p:txBody>
+          <a:bodyPr rtlCol="0" anchor="ctr" wrap="none"/>
+          <a:lstStyle/>
+          <a:p>
+            <a:pPr algn="ctr">
+              <a:defRPr sz="1200" b="1">
+                <a:solidFill>
+                  <a:srgbClr val="FFFFFF"/>
+                </a:solidFill>
+                <a:latin typeface="Calibri"/>
+              </a:defRPr>
+            </a:pPr>
+            <a:r>
+              <a:t>L3: Operational</a:t>
+            </a:r>
+          </a:p>
+        </p:txBody>
+      </p:sp>
+      <p:sp>
+        <p:nvSpPr>
+          <p:cNvPr id="21" name="Rounded Rectangle 20"/>
+          <p:cNvSpPr/>
+          <p:nvPr/>
+        </p:nvSpPr>
+        <p:spPr>
+          <a:xfrm>
+            <a:off x="7238847" y="6035040"/>
+            <a:ext cx="2011680" cy="411480"/>
+          </a:xfrm>
+          <a:prstGeom prst="roundRect">
+            <a:avLst/>
+          </a:prstGeom>
+          <a:solidFill>
+            <a:srgbClr val="F4511E"/>
+          </a:solidFill>
+          <a:ln>
+            <a:noFill/>
+          </a:ln>
+        </p:spPr>
+        <p:style>
+          <a:lnRef idx="1">
+            <a:schemeClr val="accent1"/>
+          </a:lnRef>
+          <a:fillRef idx="3">
+            <a:schemeClr val="accent1"/>
+          </a:fillRef>
+          <a:effectRef idx="2">
+            <a:schemeClr val="accent1"/>
+          </a:effectRef>
+          <a:fontRef idx="minor">
+            <a:schemeClr val="lt1"/>
+          </a:fontRef>
+        </p:style>
+        <p:txBody>
+          <a:bodyPr rtlCol="0" anchor="ctr" wrap="none"/>
+          <a:lstStyle/>
+          <a:p>
+            <a:pPr algn="ctr">
+              <a:defRPr sz="1200" b="1">
+                <a:solidFill>
+                  <a:srgbClr val="FFFFFF"/>
+                </a:solidFill>
+                <a:latin typeface="Calibri"/>
+              </a:defRPr>
+            </a:pPr>
+            <a:r>
+              <a:t>L4: Investigative</a:t>
+            </a:r>
+          </a:p>
+        </p:txBody>
+      </p:sp>
+      <p:sp>
+        <p:nvSpPr>
+          <p:cNvPr id="22" name="Rounded Rectangle 21"/>
+          <p:cNvSpPr/>
+          <p:nvPr/>
+        </p:nvSpPr>
+        <p:spPr>
+          <a:xfrm>
+            <a:off x="9387687" y="6035040"/>
+            <a:ext cx="2011680" cy="411480"/>
+          </a:xfrm>
+          <a:prstGeom prst="roundRect">
+            <a:avLst/>
+          </a:prstGeom>
+          <a:solidFill>
+            <a:srgbClr val="E53935"/>
+          </a:solidFill>
+          <a:ln>
+            <a:noFill/>
+          </a:ln>
+        </p:spPr>
+        <p:style>
+          <a:lnRef idx="1">
+            <a:schemeClr val="accent1"/>
+          </a:lnRef>
+          <a:fillRef idx="3">
+            <a:schemeClr val="accent1"/>
+          </a:fillRef>
+          <a:effectRef idx="2">
+            <a:schemeClr val="accent1"/>
+          </a:effectRef>
+          <a:fontRef idx="minor">
+            <a:schemeClr val="lt1"/>
+          </a:fontRef>
+        </p:style>
+        <p:txBody>
+          <a:bodyPr rtlCol="0" anchor="ctr" wrap="none"/>
+          <a:lstStyle/>
+          <a:p>
+            <a:pPr algn="ctr">
+              <a:defRPr sz="1200" b="1">
+                <a:solidFill>
+                  <a:srgbClr val="FFFFFF"/>
+                </a:solidFill>
+                <a:latin typeface="Calibri"/>
+              </a:defRPr>
+            </a:pPr>
+            <a:r>
+              <a:t>L5: Adjudicative</a:t>
+            </a:r>
+          </a:p>
+        </p:txBody>
+      </p:sp>
+      <p:sp>
+        <p:nvSpPr>
+          <p:cNvPr id="23" name="TextBox 22"/>
+          <p:cNvSpPr txBox="1"/>
+          <p:nvPr/>
+        </p:nvSpPr>
+        <p:spPr>
+          <a:xfrm>
+            <a:off x="457200" y="6446520"/>
+            <a:ext cx="2743200" cy="320040"/>
+          </a:xfrm>
+          <a:prstGeom prst="rect">
+            <a:avLst/>
+          </a:prstGeom>
+          <a:noFill/>
+        </p:spPr>
+        <p:txBody>
+          <a:bodyPr wrap="square">
+            <a:spAutoFit/>
+          </a:bodyPr>
+          <a:lstStyle/>
+          <a:p>
+            <a:pPr algn="l">
+              <a:defRPr sz="1000" b="0">
+                <a:solidFill>
+                  <a:srgbClr val="555555"/>
+                </a:solidFill>
+                <a:latin typeface="Calibri"/>
+              </a:defRPr>
+            </a:pPr>
+            <a:r>
+              <a:t>Confidential  |  March 2026</a:t>
+            </a:r>
+          </a:p>
+        </p:txBody>
+      </p:sp>
+    </p:spTree>
+  </p:cSld>
+  <p:clrMapOvr>
+    <a:masterClrMapping/>
+  </p:clrMapOvr>
+</p:sld>
+</file>
+
+<file path=ppt/slides/slide27.xml><?xml version="1.0" encoding="utf-8"?>
 <p:sld xmlns:a="http://schemas.openxmlformats.org/drawingml/2006/main" xmlns:p="http://schemas.openxmlformats.org/presentationml/2006/main" xmlns:r="http://schemas.openxmlformats.org/officeDocument/2006/relationships">
   <p:cSld>
     <p:bg>
@@ -23840,7 +24602,7 @@
 </p:sld>
 </file>
 
-<file path=ppt/slides/slide27.xml><?xml version="1.0" encoding="utf-8"?>
+<file path=ppt/slides/slide28.xml><?xml version="1.0" encoding="utf-8"?>
 <p:sld xmlns:a="http://schemas.openxmlformats.org/drawingml/2006/main" xmlns:p="http://schemas.openxmlformats.org/presentationml/2006/main" xmlns:r="http://schemas.openxmlformats.org/officeDocument/2006/relationships">
   <p:cSld>
     <p:bg>

--- a/decks/agent-fidelity-spectrum.pptx
+++ b/decks/agent-fidelity-spectrum.pptx
@@ -599,7 +599,7 @@
           <a:lstStyle/>
           <a:p>
             <a:r>
-              <a:t>All 50 cases are synthetic -- we control the ground truth for every prompt. During the live demo, I paste agent responses into Claude Code and it grades them against the ground truth in real time. This is not opinion-based scoring.</a:t>
+              <a:t>All 50 cases are synthetic -- we control the ground truth for every prompt. The 0-10 scale distinguishes between an agent that found the right case but missed one detail (8-9) versus one that got half the answer (5) versus one that confidently gave the wrong answer (0). During the live demo, I paste agent responses into Claude Code and it grades them in real time.</a:t>
             </a:r>
           </a:p>
         </p:txBody>
@@ -17107,7 +17107,7 @@
         </p:nvGraphicFramePr>
         <p:xfrm>
           <a:off x="1097280" y="2011680"/>
-          <a:ext cx="5303520" cy="1645920"/>
+          <a:ext cx="5303520" cy="2468880"/>
         </p:xfrm>
         <a:graphic>
           <a:graphicData uri="http://schemas.openxmlformats.org/drawingml/2006/table">
@@ -17116,8 +17116,9 @@
                 <a:tableStyleId>{5C22544A-7EE6-4342-B048-85BDC9FD1C3A}</a:tableStyleId>
               </a:tblPr>
               <a:tblGrid>
-                <a:gridCol w="1188720"/>
-                <a:gridCol w="4114800"/>
+                <a:gridCol w="640080"/>
+                <a:gridCol w="2286000"/>
+                <a:gridCol w="2377440"/>
               </a:tblGrid>
               <a:tr h="411480">
                 <a:tc>
@@ -17126,7 +17127,7 @@
                     <a:lstStyle/>
                     <a:p>
                       <a:pPr algn="ctr">
-                        <a:defRPr sz="1300" b="1">
+                        <a:defRPr sz="1200" b="1">
                           <a:solidFill>
                             <a:srgbClr val="FFFFFF"/>
                           </a:solidFill>
@@ -17134,7 +17135,7 @@
                         </a:defRPr>
                       </a:pPr>
                       <a:r>
-                        <a:t>Grade</a:t>
+                        <a:t>Score</a:t>
                       </a:r>
                     </a:p>
                   </a:txBody>
@@ -17150,7 +17151,7 @@
                     <a:lstStyle/>
                     <a:p>
                       <a:pPr algn="ctr">
-                        <a:defRPr sz="1300" b="1">
+                        <a:defRPr sz="1200" b="1">
                           <a:solidFill>
                             <a:srgbClr val="FFFFFF"/>
                           </a:solidFill>
@@ -17158,7 +17159,31 @@
                         </a:defRPr>
                       </a:pPr>
                       <a:r>
-                        <a:t>Criteria</a:t>
+                        <a:t>Meaning</a:t>
+                      </a:r>
+                    </a:p>
+                  </a:txBody>
+                  <a:tcPr anchor="ctr">
+                    <a:solidFill>
+                      <a:srgbClr val="2C5F8A"/>
+                    </a:solidFill>
+                  </a:tcPr>
+                </a:tc>
+                <a:tc>
+                  <a:txBody>
+                    <a:bodyPr/>
+                    <a:lstStyle/>
+                    <a:p>
+                      <a:pPr algn="ctr">
+                        <a:defRPr sz="1200" b="1">
+                          <a:solidFill>
+                            <a:srgbClr val="FFFFFF"/>
+                          </a:solidFill>
+                          <a:latin typeface="Calibri"/>
+                        </a:defRPr>
+                      </a:pPr>
+                      <a:r>
+                        <a:t>Example</a:t>
                       </a:r>
                     </a:p>
                   </a:txBody>
@@ -17176,7 +17201,7 @@
                     <a:lstStyle/>
                     <a:p>
                       <a:pPr algn="ctr">
-                        <a:defRPr sz="1300">
+                        <a:defRPr sz="1200">
                           <a:solidFill>
                             <a:srgbClr val="2D2D2D"/>
                           </a:solidFill>
@@ -17184,7 +17209,7 @@
                         </a:defRPr>
                       </a:pPr>
                       <a:r>
-                        <a:t>Pass (10)</a:t>
+                        <a:t>10</a:t>
                       </a:r>
                     </a:p>
                   </a:txBody>
@@ -17200,7 +17225,7 @@
                     <a:lstStyle/>
                     <a:p>
                       <a:pPr algn="ctr">
-                        <a:defRPr sz="1300">
+                        <a:defRPr sz="1200">
                           <a:solidFill>
                             <a:srgbClr val="2D2D2D"/>
                           </a:solidFill>
@@ -17208,7 +17233,31 @@
                         </a:defRPr>
                       </a:pPr>
                       <a:r>
-                        <a:t>Correct, complete, properly sourced. No hallucinations.</a:t>
+                        <a:t>Fully correct, complete, sourced</a:t>
+                      </a:r>
+                    </a:p>
+                  </a:txBody>
+                  <a:tcPr anchor="ctr">
+                    <a:solidFill>
+                      <a:srgbClr val="FFFFFF"/>
+                    </a:solidFill>
+                  </a:tcPr>
+                </a:tc>
+                <a:tc>
+                  <a:txBody>
+                    <a:bodyPr/>
+                    <a:lstStyle/>
+                    <a:p>
+                      <a:pPr algn="ctr">
+                        <a:defRPr sz="1200">
+                          <a:solidFill>
+                            <a:srgbClr val="2D2D2D"/>
+                          </a:solidFill>
+                          <a:latin typeface="Calibri"/>
+                        </a:defRPr>
+                      </a:pPr>
+                      <a:r>
+                        <a:t>All facts match, sources cited</a:t>
                       </a:r>
                     </a:p>
                   </a:txBody>
@@ -17226,7 +17275,7 @@
                     <a:lstStyle/>
                     <a:p>
                       <a:pPr algn="ctr">
-                        <a:defRPr sz="1300">
+                        <a:defRPr sz="1200">
                           <a:solidFill>
                             <a:srgbClr val="2D2D2D"/>
                           </a:solidFill>
@@ -17234,7 +17283,7 @@
                         </a:defRPr>
                       </a:pPr>
                       <a:r>
-                        <a:t>Partial (5)</a:t>
+                        <a:t>8-9</a:t>
                       </a:r>
                     </a:p>
                   </a:txBody>
@@ -17250,7 +17299,7 @@
                     <a:lstStyle/>
                     <a:p>
                       <a:pPr algn="ctr">
-                        <a:defRPr sz="1300">
+                        <a:defRPr sz="1200">
                           <a:solidFill>
                             <a:srgbClr val="2D2D2D"/>
                           </a:solidFill>
@@ -17258,7 +17307,31 @@
                         </a:defRPr>
                       </a:pPr>
                       <a:r>
-                        <a:t>Key facts present but incomplete, or minor errors.</a:t>
+                        <a:t>Correct, one minor detail missing</a:t>
+                      </a:r>
+                    </a:p>
+                  </a:txBody>
+                  <a:tcPr anchor="ctr">
+                    <a:solidFill>
+                      <a:srgbClr val="E8F0F8"/>
+                    </a:solidFill>
+                  </a:tcPr>
+                </a:tc>
+                <a:tc>
+                  <a:txBody>
+                    <a:bodyPr/>
+                    <a:lstStyle/>
+                    <a:p>
+                      <a:pPr algn="ctr">
+                        <a:defRPr sz="1200">
+                          <a:solidFill>
+                            <a:srgbClr val="2D2D2D"/>
+                          </a:solidFill>
+                          <a:latin typeface="Calibri"/>
+                        </a:defRPr>
+                      </a:pPr>
+                      <a:r>
+                        <a:t>All statements found, missed one page ref</a:t>
                       </a:r>
                     </a:p>
                   </a:txBody>
@@ -17276,7 +17349,7 @@
                     <a:lstStyle/>
                     <a:p>
                       <a:pPr algn="ctr">
-                        <a:defRPr sz="1300">
+                        <a:defRPr sz="1200">
                           <a:solidFill>
                             <a:srgbClr val="2D2D2D"/>
                           </a:solidFill>
@@ -17284,7 +17357,7 @@
                         </a:defRPr>
                       </a:pPr>
                       <a:r>
-                        <a:t>Fail (0)</a:t>
+                        <a:t>5</a:t>
                       </a:r>
                     </a:p>
                   </a:txBody>
@@ -17300,7 +17373,7 @@
                     <a:lstStyle/>
                     <a:p>
                       <a:pPr algn="ctr">
-                        <a:defRPr sz="1300">
+                        <a:defRPr sz="1200">
                           <a:solidFill>
                             <a:srgbClr val="2D2D2D"/>
                           </a:solidFill>
@@ -17308,7 +17381,179 @@
                         </a:defRPr>
                       </a:pPr>
                       <a:r>
-                        <a:t>Wrong answer, hallucination, or confident critical omission.</a:t>
+                        <a:t>Partially correct or incomplete</a:t>
+                      </a:r>
+                    </a:p>
+                  </a:txBody>
+                  <a:tcPr anchor="ctr">
+                    <a:solidFill>
+                      <a:srgbClr val="FFFFFF"/>
+                    </a:solidFill>
+                  </a:tcPr>
+                </a:tc>
+                <a:tc>
+                  <a:txBody>
+                    <a:bodyPr/>
+                    <a:lstStyle/>
+                    <a:p>
+                      <a:pPr algn="ctr">
+                        <a:defRPr sz="1200">
+                          <a:solidFill>
+                            <a:srgbClr val="2D2D2D"/>
+                          </a:solidFill>
+                          <a:latin typeface="Calibri"/>
+                        </a:defRPr>
+                      </a:pPr>
+                      <a:r>
+                        <a:t>Found one of two sources, or wrong time</a:t>
+                      </a:r>
+                    </a:p>
+                  </a:txBody>
+                  <a:tcPr anchor="ctr">
+                    <a:solidFill>
+                      <a:srgbClr val="FFFFFF"/>
+                    </a:solidFill>
+                  </a:tcPr>
+                </a:tc>
+              </a:tr>
+              <a:tr h="411480">
+                <a:tc>
+                  <a:txBody>
+                    <a:bodyPr/>
+                    <a:lstStyle/>
+                    <a:p>
+                      <a:pPr algn="ctr">
+                        <a:defRPr sz="1200">
+                          <a:solidFill>
+                            <a:srgbClr val="2D2D2D"/>
+                          </a:solidFill>
+                          <a:latin typeface="Calibri"/>
+                        </a:defRPr>
+                      </a:pPr>
+                      <a:r>
+                        <a:t>1-4</a:t>
+                      </a:r>
+                    </a:p>
+                  </a:txBody>
+                  <a:tcPr anchor="ctr">
+                    <a:solidFill>
+                      <a:srgbClr val="E8F0F8"/>
+                    </a:solidFill>
+                  </a:tcPr>
+                </a:tc>
+                <a:tc>
+                  <a:txBody>
+                    <a:bodyPr/>
+                    <a:lstStyle/>
+                    <a:p>
+                      <a:pPr algn="ctr">
+                        <a:defRPr sz="1200">
+                          <a:solidFill>
+                            <a:srgbClr val="2D2D2D"/>
+                          </a:solidFill>
+                          <a:latin typeface="Calibri"/>
+                        </a:defRPr>
+                      </a:pPr>
+                      <a:r>
+                        <a:t>Significant gaps</a:t>
+                      </a:r>
+                    </a:p>
+                  </a:txBody>
+                  <a:tcPr anchor="ctr">
+                    <a:solidFill>
+                      <a:srgbClr val="E8F0F8"/>
+                    </a:solidFill>
+                  </a:tcPr>
+                </a:tc>
+                <a:tc>
+                  <a:txBody>
+                    <a:bodyPr/>
+                    <a:lstStyle/>
+                    <a:p>
+                      <a:pPr algn="ctr">
+                        <a:defRPr sz="1200">
+                          <a:solidFill>
+                            <a:srgbClr val="2D2D2D"/>
+                          </a:solidFill>
+                          <a:latin typeface="Calibri"/>
+                        </a:defRPr>
+                      </a:pPr>
+                      <a:r>
+                        <a:t>Right case, missed key facts</a:t>
+                      </a:r>
+                    </a:p>
+                  </a:txBody>
+                  <a:tcPr anchor="ctr">
+                    <a:solidFill>
+                      <a:srgbClr val="E8F0F8"/>
+                    </a:solidFill>
+                  </a:tcPr>
+                </a:tc>
+              </a:tr>
+              <a:tr h="411480">
+                <a:tc>
+                  <a:txBody>
+                    <a:bodyPr/>
+                    <a:lstStyle/>
+                    <a:p>
+                      <a:pPr algn="ctr">
+                        <a:defRPr sz="1200">
+                          <a:solidFill>
+                            <a:srgbClr val="2D2D2D"/>
+                          </a:solidFill>
+                          <a:latin typeface="Calibri"/>
+                        </a:defRPr>
+                      </a:pPr>
+                      <a:r>
+                        <a:t>0</a:t>
+                      </a:r>
+                    </a:p>
+                  </a:txBody>
+                  <a:tcPr anchor="ctr">
+                    <a:solidFill>
+                      <a:srgbClr val="FFFFFF"/>
+                    </a:solidFill>
+                  </a:tcPr>
+                </a:tc>
+                <a:tc>
+                  <a:txBody>
+                    <a:bodyPr/>
+                    <a:lstStyle/>
+                    <a:p>
+                      <a:pPr algn="ctr">
+                        <a:defRPr sz="1200">
+                          <a:solidFill>
+                            <a:srgbClr val="2D2D2D"/>
+                          </a:solidFill>
+                          <a:latin typeface="Calibri"/>
+                        </a:defRPr>
+                      </a:pPr>
+                      <a:r>
+                        <a:t>Wrong or dangerously confident</a:t>
+                      </a:r>
+                    </a:p>
+                  </a:txBody>
+                  <a:tcPr anchor="ctr">
+                    <a:solidFill>
+                      <a:srgbClr val="FFFFFF"/>
+                    </a:solidFill>
+                  </a:tcPr>
+                </a:tc>
+                <a:tc>
+                  <a:txBody>
+                    <a:bodyPr/>
+                    <a:lstStyle/>
+                    <a:p>
+                      <a:pPr algn="ctr">
+                        <a:defRPr sz="1200">
+                          <a:solidFill>
+                            <a:srgbClr val="2D2D2D"/>
+                          </a:solidFill>
+                          <a:latin typeface="Calibri"/>
+                        </a:defRPr>
+                      </a:pPr>
+                      <a:r>
+                        <a:t>Real citation, wrong conclusion</a:t>
                       </a:r>
                     </a:p>
                   </a:txBody>
@@ -17411,7 +17656,7 @@
         <p:spPr>
           <a:xfrm>
             <a:off x="6858000" y="2560320"/>
-            <a:ext cx="4572000" cy="2286000"/>
+            <a:ext cx="4572000" cy="2560320"/>
           </a:xfrm>
           <a:prstGeom prst="rect">
             <a:avLst/>
@@ -17426,27 +17671,43 @@
           <a:p>
             <a:pPr>
               <a:spcAft>
-                <a:spcPts val="1000"/>
+                <a:spcPts val="800"/>
               </a:spcAft>
             </a:pPr>
             <a:r>
-              <a:rPr sz="1500">
+              <a:rPr sz="1400">
                 <a:solidFill>
                   <a:srgbClr val="2D2D2D"/>
                 </a:solidFill>
                 <a:latin typeface="Calibri"/>
               </a:rPr>
-              <a:t>10 prompts with known ground truth answers</a:t>
+              <a:t>Each prompt scored 0-10 against ground truth</a:t>
             </a:r>
           </a:p>
           <a:p>
             <a:pPr>
               <a:spcAft>
-                <a:spcPts val="1000"/>
+                <a:spcPts val="800"/>
               </a:spcAft>
             </a:pPr>
             <a:r>
-              <a:rPr sz="1500">
+              <a:rPr sz="1400">
+                <a:solidFill>
+                  <a:srgbClr val="2D2D2D"/>
+                </a:solidFill>
+                <a:latin typeface="Calibri"/>
+              </a:rPr>
+              <a:t>One run per agent, per-prompt scores averaged</a:t>
+            </a:r>
+          </a:p>
+          <a:p>
+            <a:pPr>
+              <a:spcAft>
+                <a:spcPts val="800"/>
+              </a:spcAft>
+            </a:pPr>
+            <a:r>
+              <a:rPr sz="1400">
                 <a:solidFill>
                   <a:srgbClr val="2D2D2D"/>
                 </a:solidFill>
@@ -17458,11 +17719,11 @@
           <a:p>
             <a:pPr>
               <a:spcAft>
-                <a:spcPts val="1000"/>
+                <a:spcPts val="800"/>
               </a:spcAft>
             </a:pPr>
             <a:r>
-              <a:rPr sz="1500">
+              <a:rPr sz="1400">
                 <a:solidFill>
                   <a:srgbClr val="2D2D2D"/>
                 </a:solidFill>
@@ -17474,11 +17735,11 @@
           <a:p>
             <a:pPr>
               <a:spcAft>
-                <a:spcPts val="1000"/>
+                <a:spcPts val="800"/>
               </a:spcAft>
             </a:pPr>
             <a:r>
-              <a:rPr sz="1500">
+              <a:rPr sz="1400">
                 <a:solidFill>
                   <a:srgbClr val="2D2D2D"/>
                 </a:solidFill>
@@ -17497,8 +17758,8 @@
         </p:nvSpPr>
         <p:spPr>
           <a:xfrm>
-            <a:off x="1097280" y="4572000"/>
-            <a:ext cx="9966960" cy="1097280"/>
+            <a:off x="1097280" y="4937760"/>
+            <a:ext cx="9966960" cy="914400"/>
           </a:xfrm>
           <a:prstGeom prst="roundRect">
             <a:avLst/>
@@ -17540,8 +17801,8 @@
         </p:nvSpPr>
         <p:spPr>
           <a:xfrm>
-            <a:off x="1097280" y="4572000"/>
-            <a:ext cx="137160" cy="1097280"/>
+            <a:off x="1097280" y="4937760"/>
+            <a:ext cx="137160" cy="914400"/>
           </a:xfrm>
           <a:prstGeom prst="rect">
             <a:avLst/>
@@ -17583,8 +17844,8 @@
         </p:nvSpPr>
         <p:spPr>
           <a:xfrm>
-            <a:off x="1463040" y="4663440"/>
-            <a:ext cx="9326880" cy="914400"/>
+            <a:off x="1463040" y="5029200"/>
+            <a:ext cx="9326880" cy="731520"/>
           </a:xfrm>
           <a:prstGeom prst="rect">
             <a:avLst/>

--- a/decks/agent-fidelity-spectrum.pptx
+++ b/decks/agent-fidelity-spectrum.pptx
@@ -1369,7 +1369,7 @@
           <a:lstStyle/>
           <a:p>
             <a:r>
-              <a:t>Know what works today. Plan for what's coming.</a:t>
+              <a:t>Copilot Studio is not just for Levels 1-3. We proved 9/10 at Level 4 with document agents in GCC using GPT-4o -- no code, just better documents. The gap is only for structured data queries where model selection matters. Know what works today. Plan for what's coming.</a:t>
             </a:r>
           </a:p>
         </p:txBody>
@@ -16093,98 +16093,27 @@
               </a:defRPr>
             </a:pPr>
             <a:r>
-              <a:t>The GCC reality today</a:t>
-            </a:r>
-          </a:p>
-        </p:txBody>
-      </p:sp>
-      <p:sp>
-        <p:nvSpPr>
-          <p:cNvPr id="5" name="TextBox 4"/>
-          <p:cNvSpPr txBox="1"/>
-          <p:nvPr/>
-        </p:nvSpPr>
-        <p:spPr>
-          <a:xfrm>
-            <a:off x="1097280" y="2011680"/>
-            <a:ext cx="9966960" cy="1371600"/>
-          </a:xfrm>
-          <a:prstGeom prst="rect">
-            <a:avLst/>
-          </a:prstGeom>
-          <a:noFill/>
-        </p:spPr>
-        <p:txBody>
-          <a:bodyPr wrap="square">
-            <a:spAutoFit/>
-          </a:bodyPr>
-          <a:lstStyle/>
-          <a:p>
-            <a:pPr>
-              <a:spcAft>
-                <a:spcPts val="600"/>
-              </a:spcAft>
-            </a:pPr>
-            <a:r>
-              <a:rPr sz="1700">
-                <a:solidFill>
-                  <a:srgbClr val="2D2D2D"/>
-                </a:solidFill>
-                <a:latin typeface="Calibri"/>
-              </a:rPr>
-              <a:t>Copilot Studio defaults to GPT-4o (adequate for Levels 1-3)</a:t>
-            </a:r>
-          </a:p>
-          <a:p>
-            <a:pPr>
-              <a:spcAft>
-                <a:spcPts val="600"/>
-              </a:spcAft>
-            </a:pPr>
-            <a:r>
-              <a:rPr sz="1700">
-                <a:solidFill>
-                  <a:srgbClr val="2D2D2D"/>
-                </a:solidFill>
-                <a:latin typeface="Calibri"/>
-              </a:rPr>
-              <a:t>Pro-code agents can use GPT-4.1 via Azure OpenAI (Levels 4-5)</a:t>
-            </a:r>
-          </a:p>
-          <a:p>
-            <a:pPr>
-              <a:spcAft>
-                <a:spcPts val="600"/>
-              </a:spcAft>
-            </a:pPr>
-            <a:r>
-              <a:rPr sz="1700">
-                <a:solidFill>
-                  <a:srgbClr val="2D2D2D"/>
-                </a:solidFill>
-                <a:latin typeface="Calibri"/>
-              </a:rPr>
-              <a:t>Monitor model updates -- GCC parity will improve over time</a:t>
-            </a:r>
-          </a:p>
-        </p:txBody>
-      </p:sp>
-      <p:sp>
-        <p:nvSpPr>
-          <p:cNvPr id="6" name="Rounded Rectangle 5"/>
+              <a:t>Copilot Studio works at every level -- the levers differ</a:t>
+            </a:r>
+          </a:p>
+        </p:txBody>
+      </p:sp>
+      <p:sp>
+        <p:nvSpPr>
+          <p:cNvPr id="5" name="Rounded Rectangle 4"/>
           <p:cNvSpPr/>
           <p:nvPr/>
         </p:nvSpPr>
         <p:spPr>
           <a:xfrm>
-            <a:off x="1097280" y="3657600"/>
-            <a:ext cx="3200400" cy="914400"/>
+            <a:off x="1097280" y="2103120"/>
+            <a:ext cx="3200400" cy="2011680"/>
           </a:xfrm>
           <a:prstGeom prst="roundRect">
             <a:avLst/>
           </a:prstGeom>
           <a:solidFill>
-            <a:srgbClr val="F2F2F2"/>
+            <a:srgbClr val="F1F8E9"/>
           </a:solidFill>
           <a:ln>
             <a:noFill/>
@@ -16214,14 +16143,57 @@
       </p:sp>
       <p:sp>
         <p:nvSpPr>
+          <p:cNvPr id="6" name="Rectangle 5"/>
+          <p:cNvSpPr/>
+          <p:nvPr/>
+        </p:nvSpPr>
+        <p:spPr>
+          <a:xfrm>
+            <a:off x="1097280" y="2103120"/>
+            <a:ext cx="137160" cy="2011680"/>
+          </a:xfrm>
+          <a:prstGeom prst="rect">
+            <a:avLst/>
+          </a:prstGeom>
+          <a:solidFill>
+            <a:srgbClr val="8BC34A"/>
+          </a:solidFill>
+          <a:ln>
+            <a:noFill/>
+          </a:ln>
+        </p:spPr>
+        <p:style>
+          <a:lnRef idx="1">
+            <a:schemeClr val="accent1"/>
+          </a:lnRef>
+          <a:fillRef idx="3">
+            <a:schemeClr val="accent1"/>
+          </a:fillRef>
+          <a:effectRef idx="2">
+            <a:schemeClr val="accent1"/>
+          </a:effectRef>
+          <a:fontRef idx="minor">
+            <a:schemeClr val="lt1"/>
+          </a:fontRef>
+        </p:style>
+        <p:txBody>
+          <a:bodyPr rtlCol="0" anchor="ctr"/>
+          <a:lstStyle/>
+          <a:p>
+            <a:pPr algn="ctr"/>
+          </a:p>
+        </p:txBody>
+      </p:sp>
+      <p:sp>
+        <p:nvSpPr>
           <p:cNvPr id="7" name="TextBox 6"/>
           <p:cNvSpPr txBox="1"/>
           <p:nvPr/>
         </p:nvSpPr>
         <p:spPr>
           <a:xfrm>
-            <a:off x="1234439" y="3657600"/>
-            <a:ext cx="2926080" cy="914400"/>
+            <a:off x="1371600" y="2194560"/>
+            <a:ext cx="2743200" cy="365760"/>
           </a:xfrm>
           <a:prstGeom prst="rect">
             <a:avLst/>
@@ -16234,30 +16206,595 @@
           </a:bodyPr>
           <a:lstStyle/>
           <a:p>
-            <a:pPr algn="ctr">
+            <a:pPr algn="l">
               <a:defRPr sz="1400" b="1">
                 <a:solidFill>
+                  <a:srgbClr val="8BC34A"/>
+                </a:solidFill>
+                <a:latin typeface="Calibri"/>
+              </a:defRPr>
+            </a:pPr>
+            <a:r>
+              <a:t>Levels 1-3</a:t>
+            </a:r>
+          </a:p>
+        </p:txBody>
+      </p:sp>
+      <p:sp>
+        <p:nvSpPr>
+          <p:cNvPr id="8" name="TextBox 7"/>
+          <p:cNvSpPr txBox="1"/>
+          <p:nvPr/>
+        </p:nvSpPr>
+        <p:spPr>
+          <a:xfrm>
+            <a:off x="1371600" y="2606040"/>
+            <a:ext cx="2743200" cy="1371600"/>
+          </a:xfrm>
+          <a:prstGeom prst="rect">
+            <a:avLst/>
+          </a:prstGeom>
+          <a:noFill/>
+        </p:spPr>
+        <p:txBody>
+          <a:bodyPr wrap="square">
+            <a:spAutoFit/>
+          </a:bodyPr>
+          <a:lstStyle/>
+          <a:p>
+            <a:pPr algn="l">
+              <a:defRPr sz="1400" b="0">
+                <a:solidFill>
                   <a:srgbClr val="2D2D2D"/>
                 </a:solidFill>
                 <a:latin typeface="Calibri"/>
               </a:defRPr>
             </a:pPr>
             <a:r>
-              <a:t>Is your use case Level 1-3?</a:t>
-            </a:r>
-          </a:p>
-        </p:txBody>
-      </p:sp>
-      <p:sp>
-        <p:nvSpPr>
-          <p:cNvPr id="8" name="Rounded Rectangle 7"/>
+              <a:t>Copilot Studio,</a:t>
+            </a:r>
+            <a:br/>
+            <a:r>
+              <a:t>any configuration</a:t>
+            </a:r>
+          </a:p>
+        </p:txBody>
+      </p:sp>
+      <p:sp>
+        <p:nvSpPr>
+          <p:cNvPr id="9" name="Rounded Rectangle 8"/>
           <p:cNvSpPr/>
           <p:nvPr/>
         </p:nvSpPr>
         <p:spPr>
           <a:xfrm>
-            <a:off x="1097280" y="4754880"/>
-            <a:ext cx="3200400" cy="914400"/>
+            <a:off x="4663440" y="2103120"/>
+            <a:ext cx="3200400" cy="2011680"/>
+          </a:xfrm>
+          <a:prstGeom prst="roundRect">
+            <a:avLst/>
+          </a:prstGeom>
+          <a:solidFill>
+            <a:srgbClr val="FBE9E7"/>
+          </a:solidFill>
+          <a:ln>
+            <a:noFill/>
+          </a:ln>
+        </p:spPr>
+        <p:style>
+          <a:lnRef idx="1">
+            <a:schemeClr val="accent1"/>
+          </a:lnRef>
+          <a:fillRef idx="3">
+            <a:schemeClr val="accent1"/>
+          </a:fillRef>
+          <a:effectRef idx="2">
+            <a:schemeClr val="accent1"/>
+          </a:effectRef>
+          <a:fontRef idx="minor">
+            <a:schemeClr val="lt1"/>
+          </a:fontRef>
+        </p:style>
+        <p:txBody>
+          <a:bodyPr rtlCol="0" anchor="ctr"/>
+          <a:lstStyle/>
+          <a:p>
+            <a:pPr algn="ctr"/>
+          </a:p>
+        </p:txBody>
+      </p:sp>
+      <p:sp>
+        <p:nvSpPr>
+          <p:cNvPr id="10" name="Rectangle 9"/>
+          <p:cNvSpPr/>
+          <p:nvPr/>
+        </p:nvSpPr>
+        <p:spPr>
+          <a:xfrm>
+            <a:off x="4663440" y="2103120"/>
+            <a:ext cx="137160" cy="2011680"/>
+          </a:xfrm>
+          <a:prstGeom prst="rect">
+            <a:avLst/>
+          </a:prstGeom>
+          <a:solidFill>
+            <a:srgbClr val="F4511E"/>
+          </a:solidFill>
+          <a:ln>
+            <a:noFill/>
+          </a:ln>
+        </p:spPr>
+        <p:style>
+          <a:lnRef idx="1">
+            <a:schemeClr val="accent1"/>
+          </a:lnRef>
+          <a:fillRef idx="3">
+            <a:schemeClr val="accent1"/>
+          </a:fillRef>
+          <a:effectRef idx="2">
+            <a:schemeClr val="accent1"/>
+          </a:effectRef>
+          <a:fontRef idx="minor">
+            <a:schemeClr val="lt1"/>
+          </a:fontRef>
+        </p:style>
+        <p:txBody>
+          <a:bodyPr rtlCol="0" anchor="ctr"/>
+          <a:lstStyle/>
+          <a:p>
+            <a:pPr algn="ctr"/>
+          </a:p>
+        </p:txBody>
+      </p:sp>
+      <p:sp>
+        <p:nvSpPr>
+          <p:cNvPr id="11" name="TextBox 10"/>
+          <p:cNvSpPr txBox="1"/>
+          <p:nvPr/>
+        </p:nvSpPr>
+        <p:spPr>
+          <a:xfrm>
+            <a:off x="4937759" y="2194560"/>
+            <a:ext cx="2743200" cy="365760"/>
+          </a:xfrm>
+          <a:prstGeom prst="rect">
+            <a:avLst/>
+          </a:prstGeom>
+          <a:noFill/>
+        </p:spPr>
+        <p:txBody>
+          <a:bodyPr wrap="square">
+            <a:spAutoFit/>
+          </a:bodyPr>
+          <a:lstStyle/>
+          <a:p>
+            <a:pPr algn="l">
+              <a:defRPr sz="1400" b="1">
+                <a:solidFill>
+                  <a:srgbClr val="F4511E"/>
+                </a:solidFill>
+                <a:latin typeface="Calibri"/>
+              </a:defRPr>
+            </a:pPr>
+            <a:r>
+              <a:t>Level 4 (Documents)</a:t>
+            </a:r>
+          </a:p>
+        </p:txBody>
+      </p:sp>
+      <p:sp>
+        <p:nvSpPr>
+          <p:cNvPr id="12" name="TextBox 11"/>
+          <p:cNvSpPr txBox="1"/>
+          <p:nvPr/>
+        </p:nvSpPr>
+        <p:spPr>
+          <a:xfrm>
+            <a:off x="4937759" y="2606040"/>
+            <a:ext cx="2743200" cy="1371600"/>
+          </a:xfrm>
+          <a:prstGeom prst="rect">
+            <a:avLst/>
+          </a:prstGeom>
+          <a:noFill/>
+        </p:spPr>
+        <p:txBody>
+          <a:bodyPr wrap="square">
+            <a:spAutoFit/>
+          </a:bodyPr>
+          <a:lstStyle/>
+          <a:p>
+            <a:pPr algn="l">
+              <a:defRPr sz="1400" b="0">
+                <a:solidFill>
+                  <a:srgbClr val="2D2D2D"/>
+                </a:solidFill>
+                <a:latin typeface="Calibri"/>
+              </a:defRPr>
+            </a:pPr>
+            <a:r>
+              <a:t>Copilot Studio +</a:t>
+            </a:r>
+            <a:br/>
+            <a:r>
+              <a:t>good document hygiene</a:t>
+            </a:r>
+            <a:br/>
+            <a:r>
+              <a:t>(9/10 proven, GPT-4o, GCC)</a:t>
+            </a:r>
+          </a:p>
+        </p:txBody>
+      </p:sp>
+      <p:sp>
+        <p:nvSpPr>
+          <p:cNvPr id="13" name="Rounded Rectangle 12"/>
+          <p:cNvSpPr/>
+          <p:nvPr/>
+        </p:nvSpPr>
+        <p:spPr>
+          <a:xfrm>
+            <a:off x="8229600" y="2103120"/>
+            <a:ext cx="3200400" cy="2011680"/>
+          </a:xfrm>
+          <a:prstGeom prst="roundRect">
+            <a:avLst/>
+          </a:prstGeom>
+          <a:solidFill>
+            <a:srgbClr val="E8F0F8"/>
+          </a:solidFill>
+          <a:ln>
+            <a:noFill/>
+          </a:ln>
+        </p:spPr>
+        <p:style>
+          <a:lnRef idx="1">
+            <a:schemeClr val="accent1"/>
+          </a:lnRef>
+          <a:fillRef idx="3">
+            <a:schemeClr val="accent1"/>
+          </a:fillRef>
+          <a:effectRef idx="2">
+            <a:schemeClr val="accent1"/>
+          </a:effectRef>
+          <a:fontRef idx="minor">
+            <a:schemeClr val="lt1"/>
+          </a:fontRef>
+        </p:style>
+        <p:txBody>
+          <a:bodyPr rtlCol="0" anchor="ctr"/>
+          <a:lstStyle/>
+          <a:p>
+            <a:pPr algn="ctr"/>
+          </a:p>
+        </p:txBody>
+      </p:sp>
+      <p:sp>
+        <p:nvSpPr>
+          <p:cNvPr id="14" name="Rectangle 13"/>
+          <p:cNvSpPr/>
+          <p:nvPr/>
+        </p:nvSpPr>
+        <p:spPr>
+          <a:xfrm>
+            <a:off x="8229600" y="2103120"/>
+            <a:ext cx="137160" cy="2011680"/>
+          </a:xfrm>
+          <a:prstGeom prst="rect">
+            <a:avLst/>
+          </a:prstGeom>
+          <a:solidFill>
+            <a:srgbClr val="2C5F8A"/>
+          </a:solidFill>
+          <a:ln>
+            <a:noFill/>
+          </a:ln>
+        </p:spPr>
+        <p:style>
+          <a:lnRef idx="1">
+            <a:schemeClr val="accent1"/>
+          </a:lnRef>
+          <a:fillRef idx="3">
+            <a:schemeClr val="accent1"/>
+          </a:fillRef>
+          <a:effectRef idx="2">
+            <a:schemeClr val="accent1"/>
+          </a:effectRef>
+          <a:fontRef idx="minor">
+            <a:schemeClr val="lt1"/>
+          </a:fontRef>
+        </p:style>
+        <p:txBody>
+          <a:bodyPr rtlCol="0" anchor="ctr"/>
+          <a:lstStyle/>
+          <a:p>
+            <a:pPr algn="ctr"/>
+          </a:p>
+        </p:txBody>
+      </p:sp>
+      <p:sp>
+        <p:nvSpPr>
+          <p:cNvPr id="15" name="TextBox 14"/>
+          <p:cNvSpPr txBox="1"/>
+          <p:nvPr/>
+        </p:nvSpPr>
+        <p:spPr>
+          <a:xfrm>
+            <a:off x="8503920" y="2194560"/>
+            <a:ext cx="2743200" cy="365760"/>
+          </a:xfrm>
+          <a:prstGeom prst="rect">
+            <a:avLst/>
+          </a:prstGeom>
+          <a:noFill/>
+        </p:spPr>
+        <p:txBody>
+          <a:bodyPr wrap="square">
+            <a:spAutoFit/>
+          </a:bodyPr>
+          <a:lstStyle/>
+          <a:p>
+            <a:pPr algn="l">
+              <a:defRPr sz="1400" b="1">
+                <a:solidFill>
+                  <a:srgbClr val="2C5F8A"/>
+                </a:solidFill>
+                <a:latin typeface="Calibri"/>
+              </a:defRPr>
+            </a:pPr>
+            <a:r>
+              <a:t>Level 4-5 (Structured Data)</a:t>
+            </a:r>
+          </a:p>
+        </p:txBody>
+      </p:sp>
+      <p:sp>
+        <p:nvSpPr>
+          <p:cNvPr id="16" name="TextBox 15"/>
+          <p:cNvSpPr txBox="1"/>
+          <p:nvPr/>
+        </p:nvSpPr>
+        <p:spPr>
+          <a:xfrm>
+            <a:off x="8503920" y="2606040"/>
+            <a:ext cx="2743200" cy="1371600"/>
+          </a:xfrm>
+          <a:prstGeom prst="rect">
+            <a:avLst/>
+          </a:prstGeom>
+          <a:noFill/>
+        </p:spPr>
+        <p:txBody>
+          <a:bodyPr wrap="square">
+            <a:spAutoFit/>
+          </a:bodyPr>
+          <a:lstStyle/>
+          <a:p>
+            <a:pPr algn="l">
+              <a:defRPr sz="1400" b="0">
+                <a:solidFill>
+                  <a:srgbClr val="2D2D2D"/>
+                </a:solidFill>
+                <a:latin typeface="Calibri"/>
+              </a:defRPr>
+            </a:pPr>
+            <a:r>
+              <a:t>Model selection matters</a:t>
+            </a:r>
+            <a:br/>
+            <a:r>
+              <a:t>Sonnet 4.6 = 11/11 (Commercial)</a:t>
+            </a:r>
+            <a:br/>
+            <a:r>
+              <a:t>GPT-4.1 via Azure OpenAI (GCC)</a:t>
+            </a:r>
+          </a:p>
+        </p:txBody>
+      </p:sp>
+      <p:sp>
+        <p:nvSpPr>
+          <p:cNvPr id="17" name="Rounded Rectangle 16"/>
+          <p:cNvSpPr/>
+          <p:nvPr/>
+        </p:nvSpPr>
+        <p:spPr>
+          <a:xfrm>
+            <a:off x="1097280" y="4389120"/>
+            <a:ext cx="9966960" cy="1371600"/>
+          </a:xfrm>
+          <a:prstGeom prst="roundRect">
+            <a:avLst/>
+          </a:prstGeom>
+          <a:solidFill>
+            <a:srgbClr val="F5F5F5"/>
+          </a:solidFill>
+          <a:ln>
+            <a:noFill/>
+          </a:ln>
+        </p:spPr>
+        <p:style>
+          <a:lnRef idx="1">
+            <a:schemeClr val="accent1"/>
+          </a:lnRef>
+          <a:fillRef idx="3">
+            <a:schemeClr val="accent1"/>
+          </a:fillRef>
+          <a:effectRef idx="2">
+            <a:schemeClr val="accent1"/>
+          </a:effectRef>
+          <a:fontRef idx="minor">
+            <a:schemeClr val="lt1"/>
+          </a:fontRef>
+        </p:style>
+        <p:txBody>
+          <a:bodyPr rtlCol="0" anchor="ctr"/>
+          <a:lstStyle/>
+          <a:p>
+            <a:pPr algn="ctr"/>
+          </a:p>
+        </p:txBody>
+      </p:sp>
+      <p:sp>
+        <p:nvSpPr>
+          <p:cNvPr id="18" name="Rectangle 17"/>
+          <p:cNvSpPr/>
+          <p:nvPr/>
+        </p:nvSpPr>
+        <p:spPr>
+          <a:xfrm>
+            <a:off x="1097280" y="4389120"/>
+            <a:ext cx="137160" cy="1371600"/>
+          </a:xfrm>
+          <a:prstGeom prst="rect">
+            <a:avLst/>
+          </a:prstGeom>
+          <a:solidFill>
+            <a:srgbClr val="357ABD"/>
+          </a:solidFill>
+          <a:ln>
+            <a:noFill/>
+          </a:ln>
+        </p:spPr>
+        <p:style>
+          <a:lnRef idx="1">
+            <a:schemeClr val="accent1"/>
+          </a:lnRef>
+          <a:fillRef idx="3">
+            <a:schemeClr val="accent1"/>
+          </a:fillRef>
+          <a:effectRef idx="2">
+            <a:schemeClr val="accent1"/>
+          </a:effectRef>
+          <a:fontRef idx="minor">
+            <a:schemeClr val="lt1"/>
+          </a:fontRef>
+        </p:style>
+        <p:txBody>
+          <a:bodyPr rtlCol="0" anchor="ctr"/>
+          <a:lstStyle/>
+          <a:p>
+            <a:pPr algn="ctr"/>
+          </a:p>
+        </p:txBody>
+      </p:sp>
+      <p:sp>
+        <p:nvSpPr>
+          <p:cNvPr id="19" name="TextBox 18"/>
+          <p:cNvSpPr txBox="1"/>
+          <p:nvPr/>
+        </p:nvSpPr>
+        <p:spPr>
+          <a:xfrm>
+            <a:off x="1463040" y="4434840"/>
+            <a:ext cx="2743200" cy="320040"/>
+          </a:xfrm>
+          <a:prstGeom prst="rect">
+            <a:avLst/>
+          </a:prstGeom>
+          <a:noFill/>
+        </p:spPr>
+        <p:txBody>
+          <a:bodyPr wrap="square">
+            <a:spAutoFit/>
+          </a:bodyPr>
+          <a:lstStyle/>
+          <a:p>
+            <a:pPr algn="l">
+              <a:defRPr sz="1600" b="1">
+                <a:solidFill>
+                  <a:srgbClr val="1B2A4A"/>
+                </a:solidFill>
+                <a:latin typeface="Calibri"/>
+              </a:defRPr>
+            </a:pPr>
+            <a:r>
+              <a:t>The GCC Gap</a:t>
+            </a:r>
+          </a:p>
+        </p:txBody>
+      </p:sp>
+      <p:sp>
+        <p:nvSpPr>
+          <p:cNvPr id="20" name="TextBox 19"/>
+          <p:cNvSpPr txBox="1"/>
+          <p:nvPr/>
+        </p:nvSpPr>
+        <p:spPr>
+          <a:xfrm>
+            <a:off x="1463040" y="4754880"/>
+            <a:ext cx="8961120" cy="914400"/>
+          </a:xfrm>
+          <a:prstGeom prst="rect">
+            <a:avLst/>
+          </a:prstGeom>
+          <a:noFill/>
+        </p:spPr>
+        <p:txBody>
+          <a:bodyPr wrap="square">
+            <a:spAutoFit/>
+          </a:bodyPr>
+          <a:lstStyle/>
+          <a:p>
+            <a:pPr>
+              <a:spcAft>
+                <a:spcPts val="400"/>
+              </a:spcAft>
+            </a:pPr>
+            <a:r>
+              <a:rPr sz="1300">
+                <a:solidFill>
+                  <a:srgbClr val="2D2D2D"/>
+                </a:solidFill>
+                <a:latin typeface="Calibri"/>
+              </a:rPr>
+              <a:t>Model selection not yet available in GCC Copilot Studio -- document quality is your lever today</a:t>
+            </a:r>
+          </a:p>
+          <a:p>
+            <a:pPr>
+              <a:spcAft>
+                <a:spcPts val="400"/>
+              </a:spcAft>
+            </a:pPr>
+            <a:r>
+              <a:rPr sz="1300">
+                <a:solidFill>
+                  <a:srgbClr val="2D2D2D"/>
+                </a:solidFill>
+                <a:latin typeface="Calibri"/>
+              </a:rPr>
+              <a:t>When expanded model availability arrives, every agent improves overnight with zero changes</a:t>
+            </a:r>
+          </a:p>
+          <a:p>
+            <a:pPr>
+              <a:spcAft>
+                <a:spcPts val="400"/>
+              </a:spcAft>
+            </a:pPr>
+            <a:r>
+              <a:rPr sz="1300">
+                <a:solidFill>
+                  <a:srgbClr val="2D2D2D"/>
+                </a:solidFill>
+                <a:latin typeface="Calibri"/>
+              </a:rPr>
+              <a:t>Start building ground truth test suites now so you are ready to measure the improvement</a:t>
+            </a:r>
+          </a:p>
+        </p:txBody>
+      </p:sp>
+      <p:sp>
+        <p:nvSpPr>
+          <p:cNvPr id="21" name="Rounded Rectangle 20"/>
+          <p:cNvSpPr/>
+          <p:nvPr/>
+        </p:nvSpPr>
+        <p:spPr>
+          <a:xfrm>
+            <a:off x="792327" y="6035040"/>
+            <a:ext cx="2011680" cy="411480"/>
           </a:xfrm>
           <a:prstGeom prst="roundRect">
             <a:avLst/>
@@ -16284,37 +16821,11 @@
           </a:fontRef>
         </p:style>
         <p:txBody>
-          <a:bodyPr rtlCol="0" anchor="ctr"/>
-          <a:lstStyle/>
-          <a:p>
-            <a:pPr algn="ctr"/>
-          </a:p>
-        </p:txBody>
-      </p:sp>
-      <p:sp>
-        <p:nvSpPr>
-          <p:cNvPr id="9" name="TextBox 8"/>
-          <p:cNvSpPr txBox="1"/>
-          <p:nvPr/>
-        </p:nvSpPr>
-        <p:spPr>
-          <a:xfrm>
-            <a:off x="1234439" y="4754880"/>
-            <a:ext cx="2926080" cy="914400"/>
-          </a:xfrm>
-          <a:prstGeom prst="rect">
-            <a:avLst/>
-          </a:prstGeom>
-          <a:noFill/>
-        </p:spPr>
-        <p:txBody>
-          <a:bodyPr wrap="square">
-            <a:spAutoFit/>
-          </a:bodyPr>
+          <a:bodyPr rtlCol="0" anchor="ctr" wrap="none"/>
           <a:lstStyle/>
           <a:p>
             <a:pPr algn="ctr">
-              <a:defRPr sz="1400" b="1">
+              <a:defRPr sz="1200" b="1">
                 <a:solidFill>
                   <a:srgbClr val="FFFFFF"/>
                 </a:solidFill>
@@ -16322,27 +16833,27 @@
               </a:defRPr>
             </a:pPr>
             <a:r>
-              <a:t>Use Copilot Studio today.</a:t>
-            </a:r>
-          </a:p>
-        </p:txBody>
-      </p:sp>
-      <p:sp>
-        <p:nvSpPr>
-          <p:cNvPr id="10" name="Rounded Rectangle 9"/>
+              <a:t>L1: Discovery</a:t>
+            </a:r>
+          </a:p>
+        </p:txBody>
+      </p:sp>
+      <p:sp>
+        <p:nvSpPr>
+          <p:cNvPr id="22" name="Rounded Rectangle 21"/>
           <p:cNvSpPr/>
           <p:nvPr/>
         </p:nvSpPr>
         <p:spPr>
           <a:xfrm>
-            <a:off x="4663440" y="3657600"/>
-            <a:ext cx="3200400" cy="914400"/>
+            <a:off x="2941167" y="6035040"/>
+            <a:ext cx="2011680" cy="411480"/>
           </a:xfrm>
           <a:prstGeom prst="roundRect">
             <a:avLst/>
           </a:prstGeom>
           <a:solidFill>
-            <a:srgbClr val="F2F2F2"/>
+            <a:srgbClr val="8BC34A"/>
           </a:solidFill>
           <a:ln>
             <a:noFill/>
@@ -16363,59 +16874,86 @@
           </a:fontRef>
         </p:style>
         <p:txBody>
-          <a:bodyPr rtlCol="0" anchor="ctr"/>
-          <a:lstStyle/>
-          <a:p>
-            <a:pPr algn="ctr"/>
-          </a:p>
-        </p:txBody>
-      </p:sp>
-      <p:sp>
-        <p:nvSpPr>
-          <p:cNvPr id="11" name="TextBox 10"/>
-          <p:cNvSpPr txBox="1"/>
-          <p:nvPr/>
-        </p:nvSpPr>
-        <p:spPr>
-          <a:xfrm>
-            <a:off x="4800600" y="3657600"/>
-            <a:ext cx="2926080" cy="914400"/>
-          </a:xfrm>
-          <a:prstGeom prst="rect">
-            <a:avLst/>
-          </a:prstGeom>
-          <a:noFill/>
-        </p:spPr>
-        <p:txBody>
-          <a:bodyPr wrap="square">
-            <a:spAutoFit/>
-          </a:bodyPr>
+          <a:bodyPr rtlCol="0" anchor="ctr" wrap="none"/>
           <a:lstStyle/>
           <a:p>
             <a:pPr algn="ctr">
-              <a:defRPr sz="1400" b="1">
-                <a:solidFill>
-                  <a:srgbClr val="2D2D2D"/>
-                </a:solidFill>
-                <a:latin typeface="Calibri"/>
-              </a:defRPr>
-            </a:pPr>
-            <a:r>
-              <a:t>Is your use case Level 4-5?</a:t>
-            </a:r>
-          </a:p>
-        </p:txBody>
-      </p:sp>
-      <p:sp>
-        <p:nvSpPr>
-          <p:cNvPr id="12" name="Rounded Rectangle 11"/>
+              <a:defRPr sz="1200" b="1">
+                <a:solidFill>
+                  <a:srgbClr val="FFFFFF"/>
+                </a:solidFill>
+                <a:latin typeface="Calibri"/>
+              </a:defRPr>
+            </a:pPr>
+            <a:r>
+              <a:t>L2: Summarization</a:t>
+            </a:r>
+          </a:p>
+        </p:txBody>
+      </p:sp>
+      <p:sp>
+        <p:nvSpPr>
+          <p:cNvPr id="23" name="Rounded Rectangle 22"/>
           <p:cNvSpPr/>
           <p:nvPr/>
         </p:nvSpPr>
         <p:spPr>
           <a:xfrm>
-            <a:off x="4663440" y="4754880"/>
-            <a:ext cx="3200400" cy="914400"/>
+            <a:off x="5090007" y="6035040"/>
+            <a:ext cx="2011680" cy="411480"/>
+          </a:xfrm>
+          <a:prstGeom prst="roundRect">
+            <a:avLst/>
+          </a:prstGeom>
+          <a:solidFill>
+            <a:srgbClr val="FF9800"/>
+          </a:solidFill>
+          <a:ln>
+            <a:noFill/>
+          </a:ln>
+        </p:spPr>
+        <p:style>
+          <a:lnRef idx="1">
+            <a:schemeClr val="accent1"/>
+          </a:lnRef>
+          <a:fillRef idx="3">
+            <a:schemeClr val="accent1"/>
+          </a:fillRef>
+          <a:effectRef idx="2">
+            <a:schemeClr val="accent1"/>
+          </a:effectRef>
+          <a:fontRef idx="minor">
+            <a:schemeClr val="lt1"/>
+          </a:fontRef>
+        </p:style>
+        <p:txBody>
+          <a:bodyPr rtlCol="0" anchor="ctr" wrap="none"/>
+          <a:lstStyle/>
+          <a:p>
+            <a:pPr algn="ctr">
+              <a:defRPr sz="1200" b="1">
+                <a:solidFill>
+                  <a:srgbClr val="FFFFFF"/>
+                </a:solidFill>
+                <a:latin typeface="Calibri"/>
+              </a:defRPr>
+            </a:pPr>
+            <a:r>
+              <a:t>L3: Operational</a:t>
+            </a:r>
+          </a:p>
+        </p:txBody>
+      </p:sp>
+      <p:sp>
+        <p:nvSpPr>
+          <p:cNvPr id="24" name="Rounded Rectangle 23"/>
+          <p:cNvSpPr/>
+          <p:nvPr/>
+        </p:nvSpPr>
+        <p:spPr>
+          <a:xfrm>
+            <a:off x="7238847" y="6035040"/>
+            <a:ext cx="2011680" cy="411480"/>
           </a:xfrm>
           <a:prstGeom prst="roundRect">
             <a:avLst/>
@@ -16442,255 +16980,6 @@
           </a:fontRef>
         </p:style>
         <p:txBody>
-          <a:bodyPr rtlCol="0" anchor="ctr"/>
-          <a:lstStyle/>
-          <a:p>
-            <a:pPr algn="ctr"/>
-          </a:p>
-        </p:txBody>
-      </p:sp>
-      <p:sp>
-        <p:nvSpPr>
-          <p:cNvPr id="13" name="TextBox 12"/>
-          <p:cNvSpPr txBox="1"/>
-          <p:nvPr/>
-        </p:nvSpPr>
-        <p:spPr>
-          <a:xfrm>
-            <a:off x="4800600" y="4754880"/>
-            <a:ext cx="2926080" cy="914400"/>
-          </a:xfrm>
-          <a:prstGeom prst="rect">
-            <a:avLst/>
-          </a:prstGeom>
-          <a:noFill/>
-        </p:spPr>
-        <p:txBody>
-          <a:bodyPr wrap="square">
-            <a:spAutoFit/>
-          </a:bodyPr>
-          <a:lstStyle/>
-          <a:p>
-            <a:pPr algn="ctr">
-              <a:defRPr sz="1400" b="1">
-                <a:solidFill>
-                  <a:srgbClr val="FFFFFF"/>
-                </a:solidFill>
-                <a:latin typeface="Calibri"/>
-              </a:defRPr>
-            </a:pPr>
-            <a:r>
-              <a:t>Deploy a pro-code agent</a:t>
-            </a:r>
-            <a:br/>
-            <a:r>
-              <a:t>with GPT-4.1.</a:t>
-            </a:r>
-          </a:p>
-        </p:txBody>
-      </p:sp>
-      <p:sp>
-        <p:nvSpPr>
-          <p:cNvPr id="14" name="Rounded Rectangle 13"/>
-          <p:cNvSpPr/>
-          <p:nvPr/>
-        </p:nvSpPr>
-        <p:spPr>
-          <a:xfrm>
-            <a:off x="8229600" y="3657600"/>
-            <a:ext cx="3200400" cy="914400"/>
-          </a:xfrm>
-          <a:prstGeom prst="roundRect">
-            <a:avLst/>
-          </a:prstGeom>
-          <a:solidFill>
-            <a:srgbClr val="F2F2F2"/>
-          </a:solidFill>
-          <a:ln>
-            <a:noFill/>
-          </a:ln>
-        </p:spPr>
-        <p:style>
-          <a:lnRef idx="1">
-            <a:schemeClr val="accent1"/>
-          </a:lnRef>
-          <a:fillRef idx="3">
-            <a:schemeClr val="accent1"/>
-          </a:fillRef>
-          <a:effectRef idx="2">
-            <a:schemeClr val="accent1"/>
-          </a:effectRef>
-          <a:fontRef idx="minor">
-            <a:schemeClr val="lt1"/>
-          </a:fontRef>
-        </p:style>
-        <p:txBody>
-          <a:bodyPr rtlCol="0" anchor="ctr"/>
-          <a:lstStyle/>
-          <a:p>
-            <a:pPr algn="ctr"/>
-          </a:p>
-        </p:txBody>
-      </p:sp>
-      <p:sp>
-        <p:nvSpPr>
-          <p:cNvPr id="15" name="TextBox 14"/>
-          <p:cNvSpPr txBox="1"/>
-          <p:nvPr/>
-        </p:nvSpPr>
-        <p:spPr>
-          <a:xfrm>
-            <a:off x="8366760" y="3657600"/>
-            <a:ext cx="2926080" cy="914400"/>
-          </a:xfrm>
-          <a:prstGeom prst="rect">
-            <a:avLst/>
-          </a:prstGeom>
-          <a:noFill/>
-        </p:spPr>
-        <p:txBody>
-          <a:bodyPr wrap="square">
-            <a:spAutoFit/>
-          </a:bodyPr>
-          <a:lstStyle/>
-          <a:p>
-            <a:pPr algn="ctr">
-              <a:defRPr sz="1400" b="1">
-                <a:solidFill>
-                  <a:srgbClr val="2D2D2D"/>
-                </a:solidFill>
-                <a:latin typeface="Calibri"/>
-              </a:defRPr>
-            </a:pPr>
-            <a:r>
-              <a:t>Planning for Level 4-5</a:t>
-            </a:r>
-            <a:br/>
-            <a:r>
-              <a:t>in the future?</a:t>
-            </a:r>
-          </a:p>
-        </p:txBody>
-      </p:sp>
-      <p:sp>
-        <p:nvSpPr>
-          <p:cNvPr id="16" name="Rounded Rectangle 15"/>
-          <p:cNvSpPr/>
-          <p:nvPr/>
-        </p:nvSpPr>
-        <p:spPr>
-          <a:xfrm>
-            <a:off x="8229600" y="4754880"/>
-            <a:ext cx="3200400" cy="914400"/>
-          </a:xfrm>
-          <a:prstGeom prst="roundRect">
-            <a:avLst/>
-          </a:prstGeom>
-          <a:solidFill>
-            <a:srgbClr val="2C5F8A"/>
-          </a:solidFill>
-          <a:ln>
-            <a:noFill/>
-          </a:ln>
-        </p:spPr>
-        <p:style>
-          <a:lnRef idx="1">
-            <a:schemeClr val="accent1"/>
-          </a:lnRef>
-          <a:fillRef idx="3">
-            <a:schemeClr val="accent1"/>
-          </a:fillRef>
-          <a:effectRef idx="2">
-            <a:schemeClr val="accent1"/>
-          </a:effectRef>
-          <a:fontRef idx="minor">
-            <a:schemeClr val="lt1"/>
-          </a:fontRef>
-        </p:style>
-        <p:txBody>
-          <a:bodyPr rtlCol="0" anchor="ctr"/>
-          <a:lstStyle/>
-          <a:p>
-            <a:pPr algn="ctr"/>
-          </a:p>
-        </p:txBody>
-      </p:sp>
-      <p:sp>
-        <p:nvSpPr>
-          <p:cNvPr id="17" name="TextBox 16"/>
-          <p:cNvSpPr txBox="1"/>
-          <p:nvPr/>
-        </p:nvSpPr>
-        <p:spPr>
-          <a:xfrm>
-            <a:off x="8366760" y="4754880"/>
-            <a:ext cx="2926080" cy="914400"/>
-          </a:xfrm>
-          <a:prstGeom prst="rect">
-            <a:avLst/>
-          </a:prstGeom>
-          <a:noFill/>
-        </p:spPr>
-        <p:txBody>
-          <a:bodyPr wrap="square">
-            <a:spAutoFit/>
-          </a:bodyPr>
-          <a:lstStyle/>
-          <a:p>
-            <a:pPr algn="ctr">
-              <a:defRPr sz="1400" b="1">
-                <a:solidFill>
-                  <a:srgbClr val="FFFFFF"/>
-                </a:solidFill>
-                <a:latin typeface="Calibri"/>
-              </a:defRPr>
-            </a:pPr>
-            <a:r>
-              <a:t>Start building ground truth</a:t>
-            </a:r>
-            <a:br/>
-            <a:r>
-              <a:t>test suites now.</a:t>
-            </a:r>
-          </a:p>
-        </p:txBody>
-      </p:sp>
-      <p:sp>
-        <p:nvSpPr>
-          <p:cNvPr id="18" name="Rounded Rectangle 17"/>
-          <p:cNvSpPr/>
-          <p:nvPr/>
-        </p:nvSpPr>
-        <p:spPr>
-          <a:xfrm>
-            <a:off x="792327" y="6035040"/>
-            <a:ext cx="2011680" cy="411480"/>
-          </a:xfrm>
-          <a:prstGeom prst="roundRect">
-            <a:avLst/>
-          </a:prstGeom>
-          <a:solidFill>
-            <a:srgbClr val="4CAF50"/>
-          </a:solidFill>
-          <a:ln>
-            <a:noFill/>
-          </a:ln>
-        </p:spPr>
-        <p:style>
-          <a:lnRef idx="1">
-            <a:schemeClr val="accent1"/>
-          </a:lnRef>
-          <a:fillRef idx="3">
-            <a:schemeClr val="accent1"/>
-          </a:fillRef>
-          <a:effectRef idx="2">
-            <a:schemeClr val="accent1"/>
-          </a:effectRef>
-          <a:fontRef idx="minor">
-            <a:schemeClr val="lt1"/>
-          </a:fontRef>
-        </p:style>
-        <p:txBody>
           <a:bodyPr rtlCol="0" anchor="ctr" wrap="none"/>
           <a:lstStyle/>
           <a:p>
@@ -16703,165 +16992,6 @@
               </a:defRPr>
             </a:pPr>
             <a:r>
-              <a:t>L1: Discovery</a:t>
-            </a:r>
-          </a:p>
-        </p:txBody>
-      </p:sp>
-      <p:sp>
-        <p:nvSpPr>
-          <p:cNvPr id="19" name="Rounded Rectangle 18"/>
-          <p:cNvSpPr/>
-          <p:nvPr/>
-        </p:nvSpPr>
-        <p:spPr>
-          <a:xfrm>
-            <a:off x="2941167" y="6035040"/>
-            <a:ext cx="2011680" cy="411480"/>
-          </a:xfrm>
-          <a:prstGeom prst="roundRect">
-            <a:avLst/>
-          </a:prstGeom>
-          <a:solidFill>
-            <a:srgbClr val="8BC34A"/>
-          </a:solidFill>
-          <a:ln>
-            <a:noFill/>
-          </a:ln>
-        </p:spPr>
-        <p:style>
-          <a:lnRef idx="1">
-            <a:schemeClr val="accent1"/>
-          </a:lnRef>
-          <a:fillRef idx="3">
-            <a:schemeClr val="accent1"/>
-          </a:fillRef>
-          <a:effectRef idx="2">
-            <a:schemeClr val="accent1"/>
-          </a:effectRef>
-          <a:fontRef idx="minor">
-            <a:schemeClr val="lt1"/>
-          </a:fontRef>
-        </p:style>
-        <p:txBody>
-          <a:bodyPr rtlCol="0" anchor="ctr" wrap="none"/>
-          <a:lstStyle/>
-          <a:p>
-            <a:pPr algn="ctr">
-              <a:defRPr sz="1200" b="1">
-                <a:solidFill>
-                  <a:srgbClr val="FFFFFF"/>
-                </a:solidFill>
-                <a:latin typeface="Calibri"/>
-              </a:defRPr>
-            </a:pPr>
-            <a:r>
-              <a:t>L2: Summarization</a:t>
-            </a:r>
-          </a:p>
-        </p:txBody>
-      </p:sp>
-      <p:sp>
-        <p:nvSpPr>
-          <p:cNvPr id="20" name="Rounded Rectangle 19"/>
-          <p:cNvSpPr/>
-          <p:nvPr/>
-        </p:nvSpPr>
-        <p:spPr>
-          <a:xfrm>
-            <a:off x="5090007" y="6035040"/>
-            <a:ext cx="2011680" cy="411480"/>
-          </a:xfrm>
-          <a:prstGeom prst="roundRect">
-            <a:avLst/>
-          </a:prstGeom>
-          <a:solidFill>
-            <a:srgbClr val="FF9800"/>
-          </a:solidFill>
-          <a:ln>
-            <a:noFill/>
-          </a:ln>
-        </p:spPr>
-        <p:style>
-          <a:lnRef idx="1">
-            <a:schemeClr val="accent1"/>
-          </a:lnRef>
-          <a:fillRef idx="3">
-            <a:schemeClr val="accent1"/>
-          </a:fillRef>
-          <a:effectRef idx="2">
-            <a:schemeClr val="accent1"/>
-          </a:effectRef>
-          <a:fontRef idx="minor">
-            <a:schemeClr val="lt1"/>
-          </a:fontRef>
-        </p:style>
-        <p:txBody>
-          <a:bodyPr rtlCol="0" anchor="ctr" wrap="none"/>
-          <a:lstStyle/>
-          <a:p>
-            <a:pPr algn="ctr">
-              <a:defRPr sz="1200" b="1">
-                <a:solidFill>
-                  <a:srgbClr val="FFFFFF"/>
-                </a:solidFill>
-                <a:latin typeface="Calibri"/>
-              </a:defRPr>
-            </a:pPr>
-            <a:r>
-              <a:t>L3: Operational</a:t>
-            </a:r>
-          </a:p>
-        </p:txBody>
-      </p:sp>
-      <p:sp>
-        <p:nvSpPr>
-          <p:cNvPr id="21" name="Rounded Rectangle 20"/>
-          <p:cNvSpPr/>
-          <p:nvPr/>
-        </p:nvSpPr>
-        <p:spPr>
-          <a:xfrm>
-            <a:off x="7238847" y="6035040"/>
-            <a:ext cx="2011680" cy="411480"/>
-          </a:xfrm>
-          <a:prstGeom prst="roundRect">
-            <a:avLst/>
-          </a:prstGeom>
-          <a:solidFill>
-            <a:srgbClr val="F4511E"/>
-          </a:solidFill>
-          <a:ln>
-            <a:noFill/>
-          </a:ln>
-        </p:spPr>
-        <p:style>
-          <a:lnRef idx="1">
-            <a:schemeClr val="accent1"/>
-          </a:lnRef>
-          <a:fillRef idx="3">
-            <a:schemeClr val="accent1"/>
-          </a:fillRef>
-          <a:effectRef idx="2">
-            <a:schemeClr val="accent1"/>
-          </a:effectRef>
-          <a:fontRef idx="minor">
-            <a:schemeClr val="lt1"/>
-          </a:fontRef>
-        </p:style>
-        <p:txBody>
-          <a:bodyPr rtlCol="0" anchor="ctr" wrap="none"/>
-          <a:lstStyle/>
-          <a:p>
-            <a:pPr algn="ctr">
-              <a:defRPr sz="1200" b="1">
-                <a:solidFill>
-                  <a:srgbClr val="FFFFFF"/>
-                </a:solidFill>
-                <a:latin typeface="Calibri"/>
-              </a:defRPr>
-            </a:pPr>
-            <a:r>
               <a:t>L4: Investigative</a:t>
             </a:r>
           </a:p>
@@ -16869,7 +16999,7 @@
       </p:sp>
       <p:sp>
         <p:nvSpPr>
-          <p:cNvPr id="22" name="Rounded Rectangle 21"/>
+          <p:cNvPr id="25" name="Rounded Rectangle 24"/>
           <p:cNvSpPr/>
           <p:nvPr/>
         </p:nvSpPr>
@@ -16922,7 +17052,7 @@
       </p:sp>
       <p:sp>
         <p:nvSpPr>
-          <p:cNvPr id="23" name="TextBox 22"/>
+          <p:cNvPr id="26" name="TextBox 25"/>
           <p:cNvSpPr txBox="1"/>
           <p:nvPr/>
         </p:nvSpPr>

--- a/decks/agent-fidelity-spectrum.pptx
+++ b/decks/agent-fidelity-spectrum.pptx
@@ -16377,7 +16377,7 @@
               </a:defRPr>
             </a:pPr>
             <a:r>
-              <a:t>Level 4 (Documents)</a:t>
+              <a:t>Levels 4-5 (Documents)</a:t>
             </a:r>
           </a:p>
         </p:txBody>
@@ -16543,7 +16543,7 @@
               </a:defRPr>
             </a:pPr>
             <a:r>
-              <a:t>Level 4-5 (Structured Data)</a:t>
+              <a:t>Structured Data Gap</a:t>
             </a:r>
           </a:p>
         </p:txBody>
@@ -16584,6 +16584,10 @@
             <a:br/>
             <a:r>
               <a:t>Sonnet 4.6 = 11/11 (Commercial)</a:t>
+            </a:r>
+            <a:br/>
+            <a:r>
+              <a:t>GPT-5 Reasoning = 10/11 (Commercial)</a:t>
             </a:r>
             <a:br/>
             <a:r>

--- a/decks/agent-fidelity-spectrum.pptx
+++ b/decks/agent-fidelity-spectrum.pptx
@@ -4568,7 +4568,43 @@
       </p:sp>
       <p:sp>
         <p:nvSpPr>
-          <p:cNvPr id="7" name="Rounded Rectangle 6"/>
+          <p:cNvPr id="7" name="TextBox 6"/>
+          <p:cNvSpPr txBox="1"/>
+          <p:nvPr/>
+        </p:nvSpPr>
+        <p:spPr>
+          <a:xfrm>
+            <a:off x="3657600" y="4754880"/>
+            <a:ext cx="4846320" cy="365760"/>
+          </a:xfrm>
+          <a:prstGeom prst="rect">
+            <a:avLst/>
+          </a:prstGeom>
+          <a:noFill/>
+        </p:spPr>
+        <p:txBody>
+          <a:bodyPr wrap="square">
+            <a:spAutoFit/>
+          </a:bodyPr>
+          <a:lstStyle/>
+          <a:p>
+            <a:pPr algn="ctr">
+              <a:defRPr sz="1400" b="0">
+                <a:solidFill>
+                  <a:srgbClr val="555555"/>
+                </a:solidFill>
+                <a:latin typeface="Calibri"/>
+              </a:defRPr>
+            </a:pPr>
+            <a:r>
+              <a:t>Patrick O'Gorman  |  Microsoft</a:t>
+            </a:r>
+          </a:p>
+        </p:txBody>
+      </p:sp>
+      <p:sp>
+        <p:nvSpPr>
+          <p:cNvPr id="8" name="Rounded Rectangle 7"/>
           <p:cNvSpPr/>
           <p:nvPr/>
         </p:nvSpPr>
@@ -4621,7 +4657,7 @@
       </p:sp>
       <p:sp>
         <p:nvSpPr>
-          <p:cNvPr id="8" name="Rounded Rectangle 7"/>
+          <p:cNvPr id="9" name="Rounded Rectangle 8"/>
           <p:cNvSpPr/>
           <p:nvPr/>
         </p:nvSpPr>
@@ -4674,7 +4710,7 @@
       </p:sp>
       <p:sp>
         <p:nvSpPr>
-          <p:cNvPr id="9" name="Rounded Rectangle 8"/>
+          <p:cNvPr id="10" name="Rounded Rectangle 9"/>
           <p:cNvSpPr/>
           <p:nvPr/>
         </p:nvSpPr>
@@ -4727,7 +4763,7 @@
       </p:sp>
       <p:sp>
         <p:nvSpPr>
-          <p:cNvPr id="10" name="Rounded Rectangle 9"/>
+          <p:cNvPr id="11" name="Rounded Rectangle 10"/>
           <p:cNvSpPr/>
           <p:nvPr/>
         </p:nvSpPr>
@@ -4780,7 +4816,7 @@
       </p:sp>
       <p:sp>
         <p:nvSpPr>
-          <p:cNvPr id="11" name="Rounded Rectangle 10"/>
+          <p:cNvPr id="12" name="Rounded Rectangle 11"/>
           <p:cNvSpPr/>
           <p:nvPr/>
         </p:nvSpPr>
@@ -4833,7 +4869,7 @@
       </p:sp>
       <p:sp>
         <p:nvSpPr>
-          <p:cNvPr id="12" name="TextBox 11"/>
+          <p:cNvPr id="13" name="TextBox 12"/>
           <p:cNvSpPr txBox="1"/>
           <p:nvPr/>
         </p:nvSpPr>
